--- a/presentations/m2-session-3-model-selection-and-evaluation.pptx
+++ b/presentations/m2-session-3-model-selection-and-evaluation.pptx
@@ -3491,7 +3491,7 @@
                 </a:solidFill>
                 <a:latin typeface="Arial"/>
               </a:rPr>
-              <a:t>TWO KINDS OF MISTAKES</a:t>
+              <a:t>THE 99% TRAP</a:t>
             </a:r>
           </a:p>
         </p:txBody>
@@ -3531,7 +3531,7 @@
                 </a:solidFill>
                 <a:latin typeface="Arial"/>
               </a:rPr>
-              <a:t>Precision and recall answer different questions - pick the one your problem asks</a:t>
+              <a:t>Accuracy can hide the mistakes that matter - the confusion matrix shows all four</a:t>
             </a:r>
           </a:p>
         </p:txBody>
@@ -3582,58 +3582,14 @@
       </p:sp>
       <p:sp>
         <p:nvSpPr>
-          <p:cNvPr id="7" name="Rectangle 6"/>
-          <p:cNvSpPr/>
+          <p:cNvPr id="7" name="TextBox 6"/>
+          <p:cNvSpPr txBox="1"/>
           <p:nvPr/>
         </p:nvSpPr>
         <p:spPr>
           <a:xfrm>
             <a:off x="548640" y="1874519"/>
-            <a:ext cx="5394960" cy="3977639"/>
-          </a:xfrm>
-          <a:prstGeom prst="rect">
-            <a:avLst/>
-          </a:prstGeom>
-          <a:solidFill>
-            <a:srgbClr val="EEF3FD"/>
-          </a:solidFill>
-          <a:ln>
-            <a:noFill/>
-          </a:ln>
-          <a:effectLst/>
-        </p:spPr>
-        <p:style>
-          <a:lnRef idx="1">
-            <a:schemeClr val="accent1"/>
-          </a:lnRef>
-          <a:fillRef idx="3">
-            <a:schemeClr val="accent1"/>
-          </a:fillRef>
-          <a:effectRef idx="2">
-            <a:schemeClr val="accent1"/>
-          </a:effectRef>
-          <a:fontRef idx="minor">
-            <a:schemeClr val="lt1"/>
-          </a:fontRef>
-        </p:style>
-        <p:txBody>
-          <a:bodyPr rtlCol="0" anchor="ctr"/>
-          <a:lstStyle/>
-          <a:p>
-            <a:pPr algn="ctr"/>
-          </a:p>
-        </p:txBody>
-      </p:sp>
-      <p:sp>
-        <p:nvSpPr>
-          <p:cNvPr id="8" name="TextBox 7"/>
-          <p:cNvSpPr txBox="1"/>
-          <p:nvPr/>
-        </p:nvSpPr>
-        <p:spPr>
-          <a:xfrm>
-            <a:off x="777240" y="2039111"/>
-            <a:ext cx="4937760" cy="365760"/>
+            <a:ext cx="4297680" cy="4206240"/>
           </a:xfrm>
           <a:prstGeom prst="rect">
             <a:avLst/>
@@ -3646,49 +3602,9 @@
           </a:bodyPr>
           <a:lstStyle/>
           <a:p>
-            <a:pPr algn="l">
-              <a:spcAft>
-                <a:spcPts val="600"/>
-              </a:spcAft>
-              <a:buNone/>
-            </a:pPr>
-            <a:r>
-              <a:rPr sz="1500" b="1">
-                <a:solidFill>
-                  <a:srgbClr val="0A2540"/>
-                </a:solidFill>
-                <a:latin typeface="Arial"/>
-              </a:rPr>
-              <a:t>Precision 0.823 - trust our alarms</a:t>
-            </a:r>
-          </a:p>
-        </p:txBody>
-      </p:sp>
-      <p:sp>
-        <p:nvSpPr>
-          <p:cNvPr id="9" name="TextBox 8"/>
-          <p:cNvSpPr txBox="1"/>
-          <p:nvPr/>
-        </p:nvSpPr>
-        <p:spPr>
-          <a:xfrm>
-            <a:off x="777240" y="2441447"/>
-            <a:ext cx="4937760" cy="3246119"/>
-          </a:xfrm>
-          <a:prstGeom prst="rect">
-            <a:avLst/>
-          </a:prstGeom>
-          <a:noFill/>
-        </p:spPr>
-        <p:txBody>
-          <a:bodyPr wrap="square">
-            <a:spAutoFit/>
-          </a:bodyPr>
-          <a:lstStyle/>
-          <a:p>
             <a:pPr algn="l" indent="-228600" marL="228600">
               <a:spcAft>
-                <a:spcPts val="600"/>
+                <a:spcPts val="800"/>
               </a:spcAft>
               <a:buClr>
                 <a:srgbClr val="1E5EF3"/>
@@ -3696,19 +3612,19 @@
               <a:buChar char="—"/>
             </a:pPr>
             <a:r>
-              <a:rPr sz="1300" b="0">
+              <a:rPr sz="1450" b="0">
                 <a:solidFill>
                   <a:srgbClr val="202B38"/>
                 </a:solidFill>
                 <a:latin typeface="Arial"/>
               </a:rPr>
-              <a:t>"Of everyone we said survives, how many actually did?"</a:t>
+              <a:t>A disease hits 1 in 100 people. A model that always says "no disease" is 99% accurate - and worthless.</a:t>
             </a:r>
           </a:p>
           <a:p>
             <a:pPr algn="l" indent="-228600" marL="228600">
               <a:spcAft>
-                <a:spcPts val="600"/>
+                <a:spcPts val="800"/>
               </a:spcAft>
               <a:buClr>
                 <a:srgbClr val="1E5EF3"/>
@@ -3716,19 +3632,19 @@
               <a:buChar char="—"/>
             </a:pPr>
             <a:r>
-              <a:rPr sz="1300" b="0">
+              <a:rPr sz="1450" b="0">
                 <a:solidFill>
                   <a:srgbClr val="202B38"/>
                 </a:solidFill>
                 <a:latin typeface="Arial"/>
               </a:rPr>
-              <a:t>TP / (TP + FP) = 51 / (51 + 11) = 0.823</a:t>
+              <a:t>Confusion matrix = a count of the four ways a prediction can go right or wrong - and every metric you will ever meet is just arithmetic on these four counts.</a:t>
             </a:r>
           </a:p>
           <a:p>
             <a:pPr algn="l" indent="-228600" marL="228600">
               <a:spcAft>
-                <a:spcPts val="600"/>
+                <a:spcPts val="800"/>
               </a:spcAft>
               <a:buClr>
                 <a:srgbClr val="1E5EF3"/>
@@ -3736,19 +3652,19 @@
               <a:buChar char="—"/>
             </a:pPr>
             <a:r>
-              <a:rPr sz="1300" b="0">
+              <a:rPr sz="1450" b="0">
                 <a:solidFill>
                   <a:srgbClr val="202B38"/>
                 </a:solidFill>
                 <a:latin typeface="Arial"/>
               </a:rPr>
-              <a:t>High precision = few false alarms.</a:t>
+              <a:t>Our champion on the 179 test passengers: 99 correct "died" (TN), 51 correct "survived" (TP).</a:t>
             </a:r>
           </a:p>
           <a:p>
             <a:pPr algn="l" indent="-228600" marL="228600">
               <a:spcAft>
-                <a:spcPts val="600"/>
+                <a:spcPts val="800"/>
               </a:spcAft>
               <a:buClr>
                 <a:srgbClr val="1E5EF3"/>
@@ -3756,126 +3672,19 @@
               <a:buChar char="—"/>
             </a:pPr>
             <a:r>
-              <a:rPr sz="1300" b="0">
+              <a:rPr sz="1450" b="0">
                 <a:solidFill>
                   <a:srgbClr val="202B38"/>
                 </a:solidFill>
                 <a:latin typeface="Arial"/>
               </a:rPr>
-              <a:t>Spam filter: a false alarm buries real mail. Precision first.</a:t>
-            </a:r>
-          </a:p>
-        </p:txBody>
-      </p:sp>
-      <p:sp>
-        <p:nvSpPr>
-          <p:cNvPr id="10" name="Rectangle 9"/>
-          <p:cNvSpPr/>
-          <p:nvPr/>
-        </p:nvSpPr>
-        <p:spPr>
-          <a:xfrm>
-            <a:off x="6245352" y="1874519"/>
-            <a:ext cx="5394960" cy="3977639"/>
-          </a:xfrm>
-          <a:prstGeom prst="rect">
-            <a:avLst/>
-          </a:prstGeom>
-          <a:solidFill>
-            <a:srgbClr val="EEF3FD"/>
-          </a:solidFill>
-          <a:ln>
-            <a:noFill/>
-          </a:ln>
-          <a:effectLst/>
-        </p:spPr>
-        <p:style>
-          <a:lnRef idx="1">
-            <a:schemeClr val="accent1"/>
-          </a:lnRef>
-          <a:fillRef idx="3">
-            <a:schemeClr val="accent1"/>
-          </a:fillRef>
-          <a:effectRef idx="2">
-            <a:schemeClr val="accent1"/>
-          </a:effectRef>
-          <a:fontRef idx="minor">
-            <a:schemeClr val="lt1"/>
-          </a:fontRef>
-        </p:style>
-        <p:txBody>
-          <a:bodyPr rtlCol="0" anchor="ctr"/>
-          <a:lstStyle/>
-          <a:p>
-            <a:pPr algn="ctr"/>
-          </a:p>
-        </p:txBody>
-      </p:sp>
-      <p:sp>
-        <p:nvSpPr>
-          <p:cNvPr id="11" name="TextBox 10"/>
-          <p:cNvSpPr txBox="1"/>
-          <p:nvPr/>
-        </p:nvSpPr>
-        <p:spPr>
-          <a:xfrm>
-            <a:off x="6473952" y="2039111"/>
-            <a:ext cx="4937760" cy="365760"/>
-          </a:xfrm>
-          <a:prstGeom prst="rect">
-            <a:avLst/>
-          </a:prstGeom>
-          <a:noFill/>
-        </p:spPr>
-        <p:txBody>
-          <a:bodyPr wrap="square">
-            <a:spAutoFit/>
-          </a:bodyPr>
-          <a:lstStyle/>
-          <a:p>
-            <a:pPr algn="l">
-              <a:spcAft>
-                <a:spcPts val="600"/>
-              </a:spcAft>
-              <a:buNone/>
-            </a:pPr>
-            <a:r>
-              <a:rPr sz="1500" b="1">
-                <a:solidFill>
-                  <a:srgbClr val="0A2540"/>
-                </a:solidFill>
-                <a:latin typeface="Arial"/>
-              </a:rPr>
-              <a:t>Recall 0.739 - catch them all</a:t>
-            </a:r>
-          </a:p>
-        </p:txBody>
-      </p:sp>
-      <p:sp>
-        <p:nvSpPr>
-          <p:cNvPr id="12" name="TextBox 11"/>
-          <p:cNvSpPr txBox="1"/>
-          <p:nvPr/>
-        </p:nvSpPr>
-        <p:spPr>
-          <a:xfrm>
-            <a:off x="6473952" y="2441447"/>
-            <a:ext cx="4937760" cy="3246119"/>
-          </a:xfrm>
-          <a:prstGeom prst="rect">
-            <a:avLst/>
-          </a:prstGeom>
-          <a:noFill/>
-        </p:spPr>
-        <p:txBody>
-          <a:bodyPr wrap="square">
-            <a:spAutoFit/>
-          </a:bodyPr>
-          <a:lstStyle/>
+              <a:t>11 false alarms (predicted survived, did not) and 18 missed survivors.</a:t>
+            </a:r>
+          </a:p>
           <a:p>
             <a:pPr algn="l" indent="-228600" marL="228600">
               <a:spcAft>
-                <a:spcPts val="600"/>
+                <a:spcPts val="800"/>
               </a:spcAft>
               <a:buClr>
                 <a:srgbClr val="1E5EF3"/>
@@ -3883,87 +3692,51 @@
               <a:buChar char="—"/>
             </a:pPr>
             <a:r>
-              <a:rPr sz="1300" b="0">
+              <a:rPr sz="1450" b="0">
                 <a:solidFill>
                   <a:srgbClr val="202B38"/>
                 </a:solidFill>
                 <a:latin typeface="Arial"/>
               </a:rPr>
-              <a:t>"Of everyone who actually survived, how many did we catch?"</a:t>
-            </a:r>
-          </a:p>
-          <a:p>
-            <a:pPr algn="l" indent="-228600" marL="228600">
-              <a:spcAft>
-                <a:spcPts val="600"/>
-              </a:spcAft>
-              <a:buClr>
-                <a:srgbClr val="1E5EF3"/>
-              </a:buClr>
-              <a:buChar char="—"/>
-            </a:pPr>
-            <a:r>
-              <a:rPr sz="1300" b="0">
-                <a:solidFill>
-                  <a:srgbClr val="202B38"/>
-                </a:solidFill>
-                <a:latin typeface="Arial"/>
-              </a:rPr>
-              <a:t>TP / (TP + FN) = 51 / (51 + 18) = 0.739</a:t>
-            </a:r>
-          </a:p>
-          <a:p>
-            <a:pPr algn="l" indent="-228600" marL="228600">
-              <a:spcAft>
-                <a:spcPts val="600"/>
-              </a:spcAft>
-              <a:buClr>
-                <a:srgbClr val="1E5EF3"/>
-              </a:buClr>
-              <a:buChar char="—"/>
-            </a:pPr>
-            <a:r>
-              <a:rPr sz="1300" b="0">
-                <a:solidFill>
-                  <a:srgbClr val="202B38"/>
-                </a:solidFill>
-                <a:latin typeface="Arial"/>
-              </a:rPr>
-              <a:t>High recall = few missed cases.</a:t>
-            </a:r>
-          </a:p>
-          <a:p>
-            <a:pPr algn="l" indent="-228600" marL="228600">
-              <a:spcAft>
-                <a:spcPts val="600"/>
-              </a:spcAft>
-              <a:buClr>
-                <a:srgbClr val="1E5EF3"/>
-              </a:buClr>
-              <a:buChar char="—"/>
-            </a:pPr>
-            <a:r>
-              <a:rPr sz="1300" b="0">
-                <a:solidFill>
-                  <a:srgbClr val="202B38"/>
-                </a:solidFill>
-                <a:latin typeface="Arial"/>
-              </a:rPr>
-              <a:t>Cancer screening: a missed case is the disaster. Recall first.</a:t>
-            </a:r>
-          </a:p>
-        </p:txBody>
-      </p:sp>
-      <p:sp>
-        <p:nvSpPr>
-          <p:cNvPr id="13" name="TextBox 12"/>
+              <a:t>One number became four. Now we can ask sharper questions.</a:t>
+            </a:r>
+          </a:p>
+        </p:txBody>
+      </p:sp>
+      <p:pic>
+        <p:nvPicPr>
+          <p:cNvPr id="8" name="Picture 7" descr="confusion.png"/>
+          <p:cNvPicPr>
+            <a:picLocks noChangeAspect="1"/>
+          </p:cNvPicPr>
+          <p:nvPr/>
+        </p:nvPicPr>
+        <p:blipFill>
+          <a:blip r:embed="rId2"/>
+          <a:stretch>
+            <a:fillRect/>
+          </a:stretch>
+        </p:blipFill>
+        <p:spPr>
+          <a:xfrm>
+            <a:off x="5587654" y="1874519"/>
+            <a:ext cx="5558211" cy="4114800"/>
+          </a:xfrm>
+          <a:prstGeom prst="rect">
+            <a:avLst/>
+          </a:prstGeom>
+        </p:spPr>
+      </p:pic>
+      <p:sp>
+        <p:nvSpPr>
+          <p:cNvPr id="9" name="TextBox 8"/>
           <p:cNvSpPr txBox="1"/>
           <p:nvPr/>
         </p:nvSpPr>
         <p:spPr>
           <a:xfrm>
-            <a:off x="548640" y="6053328"/>
-            <a:ext cx="11091672" cy="502920"/>
+            <a:off x="5120640" y="6062471"/>
+            <a:ext cx="6492240" cy="365760"/>
           </a:xfrm>
           <a:prstGeom prst="rect">
             <a:avLst/>
@@ -3976,27 +3749,27 @@
           </a:bodyPr>
           <a:lstStyle/>
           <a:p>
-            <a:pPr algn="l">
+            <a:pPr algn="ctr">
               <a:spcAft>
                 <a:spcPts val="600"/>
               </a:spcAft>
               <a:buNone/>
             </a:pPr>
             <a:r>
-              <a:rPr sz="1200" b="0">
-                <a:solidFill>
-                  <a:srgbClr val="1E5EF3"/>
-                </a:solidFill>
-                <a:latin typeface="Arial"/>
-              </a:rPr>
-              <a:t>F1 = harmonic mean of both = 0.779, high only when both are decent. Metric pairing after Andrew Ng's Machine Learning Specialization (C2, W3).</a:t>
-            </a:r>
-          </a:p>
-        </p:txBody>
-      </p:sp>
-      <p:sp>
-        <p:nvSpPr>
-          <p:cNvPr id="14" name="TextBox 13"/>
+              <a:rPr sz="1100" b="0">
+                <a:solidFill>
+                  <a:srgbClr val="5B6774"/>
+                </a:solidFill>
+                <a:latin typeface="Arial"/>
+              </a:rPr>
+              <a:t>Logistic Regression, confusion matrix on the test set. Module 2, notebook 2. Harvard CS109A, Classification Metrics lecture.</a:t>
+            </a:r>
+          </a:p>
+        </p:txBody>
+      </p:sp>
+      <p:sp>
+        <p:nvSpPr>
+          <p:cNvPr id="10" name="TextBox 9"/>
           <p:cNvSpPr txBox="1"/>
           <p:nvPr/>
         </p:nvSpPr>
@@ -4036,7 +3809,7 @@
       </p:sp>
       <p:sp>
         <p:nvSpPr>
-          <p:cNvPr id="15" name="TextBox 14"/>
+          <p:cNvPr id="11" name="TextBox 10"/>
           <p:cNvSpPr txBox="1"/>
           <p:nvPr/>
         </p:nvSpPr>
@@ -4215,7 +3988,7 @@
                 </a:solidFill>
                 <a:latin typeface="Arial"/>
               </a:rPr>
-              <a:t>REAL-WORLD STAKES</a:t>
+              <a:t>TWO KINDS OF MISTAKES</a:t>
             </a:r>
           </a:p>
         </p:txBody>
@@ -4255,7 +4028,7 @@
                 </a:solidFill>
                 <a:latin typeface="Arial"/>
               </a:rPr>
-              <a:t>A pneumonia model learned "asthma lowers risk" - reading the model caught the trap</a:t>
+              <a:t>Precision and recall answer different questions - pick the one your problem asks</a:t>
             </a:r>
           </a:p>
         </p:txBody>
@@ -4306,14 +4079,58 @@
       </p:sp>
       <p:sp>
         <p:nvSpPr>
-          <p:cNvPr id="7" name="TextBox 6"/>
+          <p:cNvPr id="7" name="Rectangle 6"/>
+          <p:cNvSpPr/>
+          <p:nvPr/>
+        </p:nvSpPr>
+        <p:spPr>
+          <a:xfrm>
+            <a:off x="548640" y="1874519"/>
+            <a:ext cx="5394960" cy="3977639"/>
+          </a:xfrm>
+          <a:prstGeom prst="rect">
+            <a:avLst/>
+          </a:prstGeom>
+          <a:solidFill>
+            <a:srgbClr val="EEF3FD"/>
+          </a:solidFill>
+          <a:ln>
+            <a:noFill/>
+          </a:ln>
+          <a:effectLst/>
+        </p:spPr>
+        <p:style>
+          <a:lnRef idx="1">
+            <a:schemeClr val="accent1"/>
+          </a:lnRef>
+          <a:fillRef idx="3">
+            <a:schemeClr val="accent1"/>
+          </a:fillRef>
+          <a:effectRef idx="2">
+            <a:schemeClr val="accent1"/>
+          </a:effectRef>
+          <a:fontRef idx="minor">
+            <a:schemeClr val="lt1"/>
+          </a:fontRef>
+        </p:style>
+        <p:txBody>
+          <a:bodyPr rtlCol="0" anchor="ctr"/>
+          <a:lstStyle/>
+          <a:p>
+            <a:pPr algn="ctr"/>
+          </a:p>
+        </p:txBody>
+      </p:sp>
+      <p:sp>
+        <p:nvSpPr>
+          <p:cNvPr id="8" name="TextBox 7"/>
           <p:cNvSpPr txBox="1"/>
           <p:nvPr/>
         </p:nvSpPr>
         <p:spPr>
           <a:xfrm>
-            <a:off x="548640" y="1874519"/>
-            <a:ext cx="11091672" cy="4206240"/>
+            <a:off x="777240" y="2039111"/>
+            <a:ext cx="4937760" cy="365760"/>
           </a:xfrm>
           <a:prstGeom prst="rect">
             <a:avLst/>
@@ -4326,9 +4143,49 @@
           </a:bodyPr>
           <a:lstStyle/>
           <a:p>
+            <a:pPr algn="l">
+              <a:spcAft>
+                <a:spcPts val="600"/>
+              </a:spcAft>
+              <a:buNone/>
+            </a:pPr>
+            <a:r>
+              <a:rPr sz="1500" b="1">
+                <a:solidFill>
+                  <a:srgbClr val="0A2540"/>
+                </a:solidFill>
+                <a:latin typeface="Arial"/>
+              </a:rPr>
+              <a:t>Precision 0.823 - trust our alarms</a:t>
+            </a:r>
+          </a:p>
+        </p:txBody>
+      </p:sp>
+      <p:sp>
+        <p:nvSpPr>
+          <p:cNvPr id="9" name="TextBox 8"/>
+          <p:cNvSpPr txBox="1"/>
+          <p:nvPr/>
+        </p:nvSpPr>
+        <p:spPr>
+          <a:xfrm>
+            <a:off x="777240" y="2441447"/>
+            <a:ext cx="4937760" cy="3246119"/>
+          </a:xfrm>
+          <a:prstGeom prst="rect">
+            <a:avLst/>
+          </a:prstGeom>
+          <a:noFill/>
+        </p:spPr>
+        <p:txBody>
+          <a:bodyPr wrap="square">
+            <a:spAutoFit/>
+          </a:bodyPr>
+          <a:lstStyle/>
+          <a:p>
             <a:pPr algn="l" indent="-228600" marL="228600">
               <a:spcAft>
-                <a:spcPts val="800"/>
+                <a:spcPts val="600"/>
               </a:spcAft>
               <a:buClr>
                 <a:srgbClr val="1E5EF3"/>
@@ -4336,19 +4193,19 @@
               <a:buChar char="—"/>
             </a:pPr>
             <a:r>
-              <a:rPr sz="1600" b="0">
+              <a:rPr sz="1300" b="0">
                 <a:solidFill>
                   <a:srgbClr val="202B38"/>
                 </a:solidFill>
                 <a:latin typeface="Arial"/>
               </a:rPr>
-              <a:t>Real case: a model ranked pneumonia patients by death risk to decide who could go home.</a:t>
+              <a:t>"Of everyone we said survives, how many actually did?"</a:t>
             </a:r>
           </a:p>
           <a:p>
             <a:pPr algn="l" indent="-228600" marL="228600">
               <a:spcAft>
-                <a:spcPts val="800"/>
+                <a:spcPts val="600"/>
               </a:spcAft>
               <a:buClr>
                 <a:srgbClr val="1E5EF3"/>
@@ -4356,19 +4213,19 @@
               <a:buChar char="—"/>
             </a:pPr>
             <a:r>
-              <a:rPr sz="1600" b="0">
+              <a:rPr sz="1300" b="0">
                 <a:solidFill>
                   <a:srgbClr val="202B38"/>
                 </a:solidFill>
                 <a:latin typeface="Arial"/>
               </a:rPr>
-              <a:t>It learned that asthma predicts LOWER risk - and the data really does say that.</a:t>
+              <a:t>TP / (TP + FP) = 51 / (51 + 11) = 0.823</a:t>
             </a:r>
           </a:p>
           <a:p>
             <a:pPr algn="l" indent="-228600" marL="228600">
               <a:spcAft>
-                <a:spcPts val="800"/>
+                <a:spcPts val="600"/>
               </a:spcAft>
               <a:buClr>
                 <a:srgbClr val="1E5EF3"/>
@@ -4376,19 +4233,19 @@
               <a:buChar char="—"/>
             </a:pPr>
             <a:r>
-              <a:rPr sz="1600" b="0">
+              <a:rPr sz="1300" b="0">
                 <a:solidFill>
                   <a:srgbClr val="202B38"/>
                 </a:solidFill>
                 <a:latin typeface="Arial"/>
               </a:rPr>
-              <a:t>Why: asthmatic pneumonia patients were rushed to intensive care, and aggressive care saved them.</a:t>
+              <a:t>High precision = few false alarms.</a:t>
             </a:r>
           </a:p>
           <a:p>
             <a:pPr algn="l" indent="-228600" marL="228600">
               <a:spcAft>
-                <a:spcPts val="800"/>
+                <a:spcPts val="600"/>
               </a:spcAft>
               <a:buClr>
                 <a:srgbClr val="1E5EF3"/>
@@ -4396,19 +4253,126 @@
               <a:buChar char="—"/>
             </a:pPr>
             <a:r>
-              <a:rPr sz="1600" b="0">
+              <a:rPr sz="1300" b="0">
                 <a:solidFill>
                   <a:srgbClr val="202B38"/>
                 </a:solidFill>
                 <a:latin typeface="Arial"/>
               </a:rPr>
-              <a:t>Deploy that rule and asthmatics get sent home. The pattern was true; the action would be fatal.</a:t>
-            </a:r>
-          </a:p>
+              <a:t>Spam filter: a false alarm buries real mail. Precision first.</a:t>
+            </a:r>
+          </a:p>
+        </p:txBody>
+      </p:sp>
+      <p:sp>
+        <p:nvSpPr>
+          <p:cNvPr id="10" name="Rectangle 9"/>
+          <p:cNvSpPr/>
+          <p:nvPr/>
+        </p:nvSpPr>
+        <p:spPr>
+          <a:xfrm>
+            <a:off x="6245352" y="1874519"/>
+            <a:ext cx="5394960" cy="3977639"/>
+          </a:xfrm>
+          <a:prstGeom prst="rect">
+            <a:avLst/>
+          </a:prstGeom>
+          <a:solidFill>
+            <a:srgbClr val="EEF3FD"/>
+          </a:solidFill>
+          <a:ln>
+            <a:noFill/>
+          </a:ln>
+          <a:effectLst/>
+        </p:spPr>
+        <p:style>
+          <a:lnRef idx="1">
+            <a:schemeClr val="accent1"/>
+          </a:lnRef>
+          <a:fillRef idx="3">
+            <a:schemeClr val="accent1"/>
+          </a:fillRef>
+          <a:effectRef idx="2">
+            <a:schemeClr val="accent1"/>
+          </a:effectRef>
+          <a:fontRef idx="minor">
+            <a:schemeClr val="lt1"/>
+          </a:fontRef>
+        </p:style>
+        <p:txBody>
+          <a:bodyPr rtlCol="0" anchor="ctr"/>
+          <a:lstStyle/>
+          <a:p>
+            <a:pPr algn="ctr"/>
+          </a:p>
+        </p:txBody>
+      </p:sp>
+      <p:sp>
+        <p:nvSpPr>
+          <p:cNvPr id="11" name="TextBox 10"/>
+          <p:cNvSpPr txBox="1"/>
+          <p:nvPr/>
+        </p:nvSpPr>
+        <p:spPr>
+          <a:xfrm>
+            <a:off x="6473952" y="2039111"/>
+            <a:ext cx="4937760" cy="365760"/>
+          </a:xfrm>
+          <a:prstGeom prst="rect">
+            <a:avLst/>
+          </a:prstGeom>
+          <a:noFill/>
+        </p:spPr>
+        <p:txBody>
+          <a:bodyPr wrap="square">
+            <a:spAutoFit/>
+          </a:bodyPr>
+          <a:lstStyle/>
+          <a:p>
+            <a:pPr algn="l">
+              <a:spcAft>
+                <a:spcPts val="600"/>
+              </a:spcAft>
+              <a:buNone/>
+            </a:pPr>
+            <a:r>
+              <a:rPr sz="1500" b="1">
+                <a:solidFill>
+                  <a:srgbClr val="0A2540"/>
+                </a:solidFill>
+                <a:latin typeface="Arial"/>
+              </a:rPr>
+              <a:t>Recall 0.739 - catch them all</a:t>
+            </a:r>
+          </a:p>
+        </p:txBody>
+      </p:sp>
+      <p:sp>
+        <p:nvSpPr>
+          <p:cNvPr id="12" name="TextBox 11"/>
+          <p:cNvSpPr txBox="1"/>
+          <p:nvPr/>
+        </p:nvSpPr>
+        <p:spPr>
+          <a:xfrm>
+            <a:off x="6473952" y="2441447"/>
+            <a:ext cx="4937760" cy="3246119"/>
+          </a:xfrm>
+          <a:prstGeom prst="rect">
+            <a:avLst/>
+          </a:prstGeom>
+          <a:noFill/>
+        </p:spPr>
+        <p:txBody>
+          <a:bodyPr wrap="square">
+            <a:spAutoFit/>
+          </a:bodyPr>
+          <a:lstStyle/>
           <a:p>
             <a:pPr algn="l" indent="-228600" marL="228600">
               <a:spcAft>
-                <a:spcPts val="800"/>
+                <a:spcPts val="600"/>
               </a:spcAft>
               <a:buClr>
                 <a:srgbClr val="1E5EF3"/>
@@ -4416,26 +4380,86 @@
               <a:buChar char="—"/>
             </a:pPr>
             <a:r>
-              <a:rPr sz="1600" b="0">
+              <a:rPr sz="1300" b="0">
                 <a:solidFill>
                   <a:srgbClr val="202B38"/>
                 </a:solidFill>
                 <a:latin typeface="Arial"/>
               </a:rPr>
-              <a:t>It was caught only because the model was readable. Understand the mistakes before you ship.</a:t>
-            </a:r>
-          </a:p>
-        </p:txBody>
-      </p:sp>
-      <p:sp>
-        <p:nvSpPr>
-          <p:cNvPr id="8" name="TextBox 7"/>
+              <a:t>"Of everyone who actually survived, how many did we catch?"</a:t>
+            </a:r>
+          </a:p>
+          <a:p>
+            <a:pPr algn="l" indent="-228600" marL="228600">
+              <a:spcAft>
+                <a:spcPts val="600"/>
+              </a:spcAft>
+              <a:buClr>
+                <a:srgbClr val="1E5EF3"/>
+              </a:buClr>
+              <a:buChar char="—"/>
+            </a:pPr>
+            <a:r>
+              <a:rPr sz="1300" b="0">
+                <a:solidFill>
+                  <a:srgbClr val="202B38"/>
+                </a:solidFill>
+                <a:latin typeface="Arial"/>
+              </a:rPr>
+              <a:t>TP / (TP + FN) = 51 / (51 + 18) = 0.739</a:t>
+            </a:r>
+          </a:p>
+          <a:p>
+            <a:pPr algn="l" indent="-228600" marL="228600">
+              <a:spcAft>
+                <a:spcPts val="600"/>
+              </a:spcAft>
+              <a:buClr>
+                <a:srgbClr val="1E5EF3"/>
+              </a:buClr>
+              <a:buChar char="—"/>
+            </a:pPr>
+            <a:r>
+              <a:rPr sz="1300" b="0">
+                <a:solidFill>
+                  <a:srgbClr val="202B38"/>
+                </a:solidFill>
+                <a:latin typeface="Arial"/>
+              </a:rPr>
+              <a:t>High recall = few missed cases.</a:t>
+            </a:r>
+          </a:p>
+          <a:p>
+            <a:pPr algn="l" indent="-228600" marL="228600">
+              <a:spcAft>
+                <a:spcPts val="600"/>
+              </a:spcAft>
+              <a:buClr>
+                <a:srgbClr val="1E5EF3"/>
+              </a:buClr>
+              <a:buChar char="—"/>
+            </a:pPr>
+            <a:r>
+              <a:rPr sz="1300" b="0">
+                <a:solidFill>
+                  <a:srgbClr val="202B38"/>
+                </a:solidFill>
+                <a:latin typeface="Arial"/>
+              </a:rPr>
+              <a:t>Cancer screening: a missed case is the disaster. Recall first.</a:t>
+            </a:r>
+          </a:p>
+        </p:txBody>
+      </p:sp>
+      <p:sp>
+        <p:nvSpPr>
+          <p:cNvPr id="13" name="TextBox 12"/>
           <p:cNvSpPr txBox="1"/>
           <p:nvPr/>
         </p:nvSpPr>
         <p:spPr>
           <a:xfrm>
-            <a:off x="548640" y="5989320"/>
+            <a:off x="548640" y="6053328"/>
             <a:ext cx="11091672" cy="502920"/>
           </a:xfrm>
           <a:prstGeom prst="rect">
@@ -4462,14 +4486,14 @@
                 </a:solidFill>
                 <a:latin typeface="Arial"/>
               </a:rPr>
-              <a:t>Source: Caruana et al., KDD 2015 - pneumonia risk models in healthcare.</a:t>
-            </a:r>
-          </a:p>
-        </p:txBody>
-      </p:sp>
-      <p:sp>
-        <p:nvSpPr>
-          <p:cNvPr id="9" name="TextBox 8"/>
+              <a:t>F1 = harmonic mean of both = 0.779, high only when both are decent. Metric pairing after Andrew Ng's Machine Learning Specialization (C2, W3).</a:t>
+            </a:r>
+          </a:p>
+        </p:txBody>
+      </p:sp>
+      <p:sp>
+        <p:nvSpPr>
+          <p:cNvPr id="14" name="TextBox 13"/>
           <p:cNvSpPr txBox="1"/>
           <p:nvPr/>
         </p:nvSpPr>
@@ -4509,7 +4533,7 @@
       </p:sp>
       <p:sp>
         <p:nvSpPr>
-          <p:cNvPr id="10" name="TextBox 9"/>
+          <p:cNvPr id="15" name="TextBox 14"/>
           <p:cNvSpPr txBox="1"/>
           <p:nvPr/>
         </p:nvSpPr>
@@ -4688,7 +4712,7 @@
                 </a:solidFill>
                 <a:latin typeface="Arial"/>
               </a:rPr>
-              <a:t>BIAS AND VARIANCE</a:t>
+              <a:t>BIAS AND VARIANCE, NAMED</a:t>
             </a:r>
           </a:p>
         </p:txBody>
@@ -4835,7 +4859,7 @@
                 </a:solidFill>
                 <a:latin typeface="Arial"/>
               </a:rPr>
-              <a:t>The honest CV score peaks at 0.815 at depth 3, then slides back down.</a:t>
+              <a:t>The honest CV score peaks at 0.815 at depth 3, then slides. At depth 20 the gap is 0.236 - memorizing, not learning.</a:t>
             </a:r>
           </a:p>
           <a:p>
@@ -4855,7 +4879,7 @@
                 </a:solidFill>
                 <a:latin typeface="Arial"/>
               </a:rPr>
-              <a:t>At depth 20 the gap is 0.236. That gap is memorizing - generalization is what the CV curve measures.</a:t>
+              <a:t>MIT's names make the tradeoff mechanical: more flexibility lowers structural error and raises estimation error - every dial in Session 4 moves this dial.</a:t>
             </a:r>
           </a:p>
           <a:p>
@@ -4875,7 +4899,7 @@
                 </a:solidFill>
                 <a:latin typeface="Arial"/>
               </a:rPr>
-              <a:t>Bias = too simple to capture the real pattern: the model misses it everywhere (left zone).</a:t>
+              <a:t>The outcome is a hidden rule plus noise: Y = f(X) + ε. Learning estimates the rule; nothing can predict the noise. Error you can shrink is reducible; the noise floor is irreducible.</a:t>
             </a:r>
           </a:p>
           <a:p>
@@ -4895,27 +4919,7 @@
                 </a:solidFill>
                 <a:latin typeface="Arial"/>
               </a:rPr>
-              <a:t>Variance = so flexible it memorizes the noise of its sample: every quirk reshapes it (right zone).</a:t>
-            </a:r>
-          </a:p>
-          <a:p>
-            <a:pPr algn="l" indent="-228600" marL="228600">
-              <a:spcAft>
-                <a:spcPts val="800"/>
-              </a:spcAft>
-              <a:buClr>
-                <a:srgbClr val="1E5EF3"/>
-              </a:buClr>
-              <a:buChar char="—"/>
-            </a:pPr>
-            <a:r>
-              <a:rPr sz="1450" b="0">
-                <a:solidFill>
-                  <a:srgbClr val="202B38"/>
-                </a:solidFill>
-                <a:latin typeface="Arial"/>
-              </a:rPr>
-              <a:t>Every model choice negotiates between the two - the sweet spot is where the honest score peaks.</a:t>
+              <a:t>Why does the honest curve peak at 0.815, not 1.00? Session 1's grey bar: ε. The rest is noise nobody can predict.</a:t>
             </a:r>
           </a:p>
         </p:txBody>
@@ -4979,7 +4983,7 @@
                 </a:solidFill>
                 <a:latin typeface="Arial"/>
               </a:rPr>
-              <a:t>Decision tree, max_depth 1-20, train vs 5-fold CV accuracy. Module 2, notebook 2.</a:t>
+              <a:t>Decision tree, max_depth 1-20, train vs 5-fold CV accuracy. Module 2, notebook 2. MIT 6.390, ch. 2 &amp; ch. 5; Harvard CS109A / ISLR ch. 2.</a:t>
             </a:r>
           </a:p>
         </p:txBody>
@@ -5205,7 +5209,7 @@
                 </a:solidFill>
                 <a:latin typeface="Arial"/>
               </a:rPr>
-              <a:t>THE CHECKLIST</a:t>
+              <a:t>WOULD MORE DATA HELP?</a:t>
             </a:r>
           </a:p>
         </p:txBody>
@@ -5245,7 +5249,7 @@
                 </a:solidFill>
                 <a:latin typeface="Arial"/>
               </a:rPr>
-              <a:t>In real life, pick the simplest model that beats the baseline on the right metric</a:t>
+              <a:t>The learning curve answers "would more data help?" - for us: no</a:t>
             </a:r>
           </a:p>
         </p:txBody>
@@ -5303,7 +5307,7 @@
         <p:spPr>
           <a:xfrm>
             <a:off x="548640" y="1874519"/>
-            <a:ext cx="11091672" cy="4206240"/>
+            <a:ext cx="4297680" cy="4206240"/>
           </a:xfrm>
           <a:prstGeom prst="rect">
             <a:avLst/>
@@ -5326,13 +5330,13 @@
               <a:buChar char="—"/>
             </a:pPr>
             <a:r>
-              <a:rPr sz="1600" b="0">
+              <a:rPr sz="1450" b="0">
                 <a:solidFill>
                   <a:srgbClr val="202B38"/>
                 </a:solidFill>
                 <a:latin typeface="Arial"/>
               </a:rPr>
-              <a:t>Does it clearly beat the baseline? If not, stop.</a:t>
+              <a:t>Plot the honest score against training-set size: our CV accuracy climbs from 0.758 at 56 rows to 0.819 at 569 rows - then flattens.</a:t>
             </a:r>
           </a:p>
           <a:p>
@@ -5346,13 +5350,13 @@
               <a:buChar char="—"/>
             </a:pPr>
             <a:r>
-              <a:rPr sz="1600" b="0">
+              <a:rPr sz="1450" b="0">
                 <a:solidFill>
                   <a:srgbClr val="202B38"/>
                 </a:solidFill>
                 <a:latin typeface="Arial"/>
               </a:rPr>
-              <a:t>Does the metric match the problem? Accuracy, precision, recall, or F1 - decide before you rank.</a:t>
+              <a:t>Regime 1, high bias: train and CV converge close together but below the score you need. The curve has flattened - more rows cannot get you there; change the model or features, not the dataset.</a:t>
             </a:r>
           </a:p>
           <a:p>
@@ -5366,13 +5370,13 @@
               <a:buChar char="—"/>
             </a:pPr>
             <a:r>
-              <a:rPr sz="1600" b="0">
+              <a:rPr sz="1450" b="0">
                 <a:solidFill>
                   <a:srgbClr val="202B38"/>
                 </a:solidFill>
                 <a:latin typeface="Arial"/>
               </a:rPr>
-              <a:t>Simple model first: if the scorecard is within a hair of the forest, ship the scorecard.</a:t>
+              <a:t>Regime 2, high variance: training score is fine but a wide gap separates it from CV - the curves haven't converged; more data plausibly helps.</a:t>
             </a:r>
           </a:p>
           <a:p>
@@ -5386,67 +5390,51 @@
               <a:buChar char="—"/>
             </a:pPr>
             <a:r>
-              <a:rPr sz="1600" b="0">
+              <a:rPr sz="1450" b="0">
                 <a:solidFill>
                   <a:srgbClr val="202B38"/>
                 </a:solidFill>
                 <a:latin typeface="Arial"/>
               </a:rPr>
-              <a:t>Check the std across folds: a model that wobbles (Random Forest: +/- 0.054) is harder to trust.</a:t>
-            </a:r>
-          </a:p>
-          <a:p>
-            <a:pPr algn="l" indent="-228600" marL="228600">
-              <a:spcAft>
-                <a:spcPts val="800"/>
-              </a:spcAft>
-              <a:buClr>
-                <a:srgbClr val="1E5EF3"/>
-              </a:buClr>
-              <a:buChar char="—"/>
-            </a:pPr>
-            <a:r>
-              <a:rPr sz="1600" b="0">
-                <a:solidFill>
-                  <a:srgbClr val="202B38"/>
-                </a:solidFill>
-                <a:latin typeface="Arial"/>
-              </a:rPr>
-              <a:t>Weigh speed and explainability - you will have to retrain it and defend it.</a:t>
-            </a:r>
-          </a:p>
-          <a:p>
-            <a:pPr algn="l" indent="-228600" marL="228600">
-              <a:spcAft>
-                <a:spcPts val="800"/>
-              </a:spcAft>
-              <a:buClr>
-                <a:srgbClr val="1E5EF3"/>
-              </a:buClr>
-              <a:buChar char="—"/>
-            </a:pPr>
-            <a:r>
-              <a:rPr sz="1600" b="0">
-                <a:solidFill>
-                  <a:srgbClr val="202B38"/>
-                </a:solidFill>
-                <a:latin typeface="Arial"/>
-              </a:rPr>
-              <a:t>AUC 0.878 = chance a random survivor is ranked above a random non-survivor (0.5 coin flip, 0.8+ solid).</a:t>
-            </a:r>
-          </a:p>
-        </p:txBody>
-      </p:sp>
-      <p:sp>
-        <p:nvSpPr>
-          <p:cNvPr id="8" name="TextBox 7"/>
+              <a:t>Read ours: flat and close - more passengers would buy little. Better features or settings are the lever. That is exactly Session 4's job.</a:t>
+            </a:r>
+          </a:p>
+        </p:txBody>
+      </p:sp>
+      <p:pic>
+        <p:nvPicPr>
+          <p:cNvPr id="8" name="Picture 7" descr="learning_curve.png"/>
+          <p:cNvPicPr>
+            <a:picLocks noChangeAspect="1"/>
+          </p:cNvPicPr>
+          <p:nvPr/>
+        </p:nvPicPr>
+        <p:blipFill>
+          <a:blip r:embed="rId2"/>
+          <a:stretch>
+            <a:fillRect/>
+          </a:stretch>
+        </p:blipFill>
+        <p:spPr>
+          <a:xfrm>
+            <a:off x="5120640" y="1874519"/>
+            <a:ext cx="6492240" cy="3766389"/>
+          </a:xfrm>
+          <a:prstGeom prst="rect">
+            <a:avLst/>
+          </a:prstGeom>
+        </p:spPr>
+      </p:pic>
+      <p:sp>
+        <p:nvSpPr>
+          <p:cNvPr id="9" name="TextBox 8"/>
           <p:cNvSpPr txBox="1"/>
           <p:nvPr/>
         </p:nvSpPr>
         <p:spPr>
           <a:xfrm>
-            <a:off x="548640" y="5989320"/>
-            <a:ext cx="11091672" cy="502920"/>
+            <a:off x="5120640" y="6062471"/>
+            <a:ext cx="6492240" cy="365760"/>
           </a:xfrm>
           <a:prstGeom prst="rect">
             <a:avLst/>
@@ -5459,27 +5447,27 @@
           </a:bodyPr>
           <a:lstStyle/>
           <a:p>
-            <a:pPr algn="l">
+            <a:pPr algn="ctr">
               <a:spcAft>
                 <a:spcPts val="600"/>
               </a:spcAft>
               <a:buNone/>
             </a:pPr>
             <a:r>
-              <a:rPr sz="1200" b="0">
-                <a:solidFill>
-                  <a:srgbClr val="1E5EF3"/>
-                </a:solidFill>
-                <a:latin typeface="Arial"/>
-              </a:rPr>
-              <a:t>The notebook's one-liner: "the best model is the simplest one that beats the baseline on the metric that matches your problem, reliably across folds."</a:t>
-            </a:r>
-          </a:p>
-        </p:txBody>
-      </p:sp>
-      <p:sp>
-        <p:nvSpPr>
-          <p:cNvPr id="9" name="TextBox 8"/>
+              <a:rPr sz="1100" b="0">
+                <a:solidFill>
+                  <a:srgbClr val="5B6774"/>
+                </a:solidFill>
+                <a:latin typeface="Arial"/>
+              </a:rPr>
+              <a:t>Main panel: real curve, Module 2, notebook 2. Insets: regime sketches - illustration. Ng, Machine Learning Yearning chs. 28-32.</a:t>
+            </a:r>
+          </a:p>
+        </p:txBody>
+      </p:sp>
+      <p:sp>
+        <p:nvSpPr>
+          <p:cNvPr id="10" name="TextBox 9"/>
           <p:cNvSpPr txBox="1"/>
           <p:nvPr/>
         </p:nvSpPr>
@@ -5519,7 +5507,7 @@
       </p:sp>
       <p:sp>
         <p:nvSpPr>
-          <p:cNvPr id="10" name="TextBox 9"/>
+          <p:cNvPr id="11" name="TextBox 10"/>
           <p:cNvSpPr txBox="1"/>
           <p:nvPr/>
         </p:nvSpPr>
@@ -5738,7 +5726,7 @@
                 </a:solidFill>
                 <a:latin typeface="Arial"/>
               </a:rPr>
-              <a:t>Logistic Regression is the honest champion - the forest gets a second chance</a:t>
+              <a:t>The verdict: the simplest model that beats the floor on the right metric - the scorecard</a:t>
             </a:r>
           </a:p>
         </p:txBody>
@@ -5796,7 +5784,7 @@
         <p:spPr>
           <a:xfrm>
             <a:off x="548640" y="1874519"/>
-            <a:ext cx="5394960" cy="4297680"/>
+            <a:ext cx="5394960" cy="3977639"/>
           </a:xfrm>
           <a:prstGeom prst="rect">
             <a:avLst/>
@@ -5866,7 +5854,7 @@
                 </a:solidFill>
                 <a:latin typeface="Arial"/>
               </a:rPr>
-              <a:t>The verdict</a:t>
+              <a:t>The checklist</a:t>
             </a:r>
           </a:p>
         </p:txBody>
@@ -5880,7 +5868,7 @@
         <p:spPr>
           <a:xfrm>
             <a:off x="777240" y="2441447"/>
-            <a:ext cx="4937760" cy="3566160"/>
+            <a:ext cx="4937760" cy="3246119"/>
           </a:xfrm>
           <a:prstGeom prst="rect">
             <a:avLst/>
@@ -5909,7 +5897,7 @@
                 </a:solidFill>
                 <a:latin typeface="Arial"/>
               </a:rPr>
-              <a:t>Champion by CV: Logistic Regression, 0.819 (+/- 0.020).</a:t>
+              <a:t>Beats the baseline clearly? The floor is 0.617 - if not, stop.</a:t>
             </a:r>
           </a:p>
           <a:p>
@@ -5929,7 +5917,7 @@
                 </a:solidFill>
                 <a:latin typeface="Arial"/>
               </a:rPr>
-              <a:t>One look at the locked test set: accuracy 0.838.</a:t>
+              <a:t>Metric matches the problem? Accuracy, precision, recall, or F1 - decide before you rank.</a:t>
             </a:r>
           </a:p>
           <a:p>
@@ -5949,7 +5937,7 @@
                 </a:solidFill>
                 <a:latin typeface="Arial"/>
               </a:rPr>
-              <a:t>Precision 0.823, recall 0.739, F1 0.779 on "survived".</a:t>
+              <a:t>Simple first: if the scorecard is within a hair of the forest, ship the scorecard.</a:t>
             </a:r>
           </a:p>
           <a:p>
@@ -5969,27 +5957,7 @@
                 </a:solidFill>
                 <a:latin typeface="Arial"/>
               </a:rPr>
-              <a:t>Test score close to CV: the referee did not fool itself.</a:t>
-            </a:r>
-          </a:p>
-          <a:p>
-            <a:pPr algn="l" indent="-228600" marL="228600">
-              <a:spcAft>
-                <a:spcPts val="600"/>
-              </a:spcAft>
-              <a:buClr>
-                <a:srgbClr val="1E5EF3"/>
-              </a:buClr>
-              <a:buChar char="—"/>
-            </a:pPr>
-            <a:r>
-              <a:rPr sz="1300" b="0">
-                <a:solidFill>
-                  <a:srgbClr val="202B38"/>
-                </a:solidFill>
-                <a:latin typeface="Arial"/>
-              </a:rPr>
-              <a:t>Simple, fast, and you can read its weights.</a:t>
+              <a:t>Stable across folds? A model that wobbles (Random Forest: +/- 0.054) is harder to trust.</a:t>
             </a:r>
           </a:p>
         </p:txBody>
@@ -6003,7 +5971,7 @@
         <p:spPr>
           <a:xfrm>
             <a:off x="6245352" y="1874519"/>
-            <a:ext cx="5394960" cy="4297680"/>
+            <a:ext cx="5394960" cy="3977639"/>
           </a:xfrm>
           <a:prstGeom prst="rect">
             <a:avLst/>
@@ -6073,7 +6041,7 @@
                 </a:solidFill>
                 <a:latin typeface="Arial"/>
               </a:rPr>
-              <a:t>The handoff to Session 4</a:t>
+              <a:t>Verdict &amp; handoff</a:t>
             </a:r>
           </a:p>
         </p:txBody>
@@ -6087,7 +6055,7 @@
         <p:spPr>
           <a:xfrm>
             <a:off x="6473952" y="2441447"/>
-            <a:ext cx="4937760" cy="3566160"/>
+            <a:ext cx="4937760" cy="3246119"/>
           </a:xfrm>
           <a:prstGeom prst="rect">
             <a:avLst/>
@@ -6116,7 +6084,7 @@
                 </a:solidFill>
                 <a:latin typeface="Arial"/>
               </a:rPr>
-              <a:t>Random Forest finished mid-table: 0.797 (+/- 0.054).</a:t>
+              <a:t>Champion by CV: Logistic Regression, 0.819 (+/- 0.020).</a:t>
             </a:r>
           </a:p>
           <a:p>
@@ -6136,7 +6104,7 @@
                 </a:solidFill>
                 <a:latin typeface="Arial"/>
               </a:rPr>
-              <a:t>But it has the most knobs left: depth, trees, leaf size.</a:t>
+              <a:t>One look at the locked test set: accuracy 0.838.</a:t>
             </a:r>
           </a:p>
           <a:p>
@@ -6156,7 +6124,7 @@
                 </a:solidFill>
                 <a:latin typeface="Arial"/>
               </a:rPr>
-              <a:t>LogReg won by a whisker and has almost no knobs left to turn.</a:t>
+              <a:t>Precision 0.823, recall 0.739, F1 0.779 on "survived".</a:t>
             </a:r>
           </a:p>
           <a:p>
@@ -6176,7 +6144,7 @@
                 </a:solidFill>
                 <a:latin typeface="Arial"/>
               </a:rPr>
-              <a:t>Session 4: tune the forest with grid and random search.</a:t>
+              <a:t>AUC 0.878 = chance a random survivor ranks above a random non-survivor.</a:t>
             </a:r>
           </a:p>
           <a:p>
@@ -6196,7 +6164,7 @@
                 </a:solidFill>
                 <a:latin typeface="Arial"/>
               </a:rPr>
-              <a:t>Then one look at the test set - and ship it as a real app.</a:t>
+              <a:t>Random Forest finished 0.797 but has the most knobs - Session 4 tunes it, then ships it.</a:t>
             </a:r>
           </a:p>
         </p:txBody>
@@ -6209,8 +6177,8 @@
         </p:nvSpPr>
         <p:spPr>
           <a:xfrm>
-            <a:off x="548640" y="6473952"/>
-            <a:ext cx="7315200" cy="292608"/>
+            <a:off x="548640" y="6053328"/>
+            <a:ext cx="11091672" cy="502920"/>
           </a:xfrm>
           <a:prstGeom prst="rect">
             <a:avLst/>
@@ -6230,6 +6198,46 @@
               <a:buNone/>
             </a:pPr>
             <a:r>
+              <a:rPr sz="1200" b="0">
+                <a:solidFill>
+                  <a:srgbClr val="1E5EF3"/>
+                </a:solidFill>
+                <a:latin typeface="Arial"/>
+              </a:rPr>
+              <a:t>Why interpretability is on the checklist: a real pneumonia model learned "asthma lowers risk" - true in the data (asthmatics were rushed to intensive care), fatal if acted on; caught only because the model was readable. Source: Caruana et al., KDD 2015.</a:t>
+            </a:r>
+          </a:p>
+        </p:txBody>
+      </p:sp>
+      <p:sp>
+        <p:nvSpPr>
+          <p:cNvPr id="14" name="TextBox 13"/>
+          <p:cNvSpPr txBox="1"/>
+          <p:nvPr/>
+        </p:nvSpPr>
+        <p:spPr>
+          <a:xfrm>
+            <a:off x="548640" y="6473952"/>
+            <a:ext cx="7315200" cy="292608"/>
+          </a:xfrm>
+          <a:prstGeom prst="rect">
+            <a:avLst/>
+          </a:prstGeom>
+          <a:noFill/>
+        </p:spPr>
+        <p:txBody>
+          <a:bodyPr wrap="square">
+            <a:spAutoFit/>
+          </a:bodyPr>
+          <a:lstStyle/>
+          <a:p>
+            <a:pPr algn="l">
+              <a:spcAft>
+                <a:spcPts val="600"/>
+              </a:spcAft>
+              <a:buNone/>
+            </a:pPr>
+            <a:r>
               <a:rPr sz="900" b="0">
                 <a:solidFill>
                   <a:srgbClr val="5B6774"/>
@@ -6243,7 +6251,7 @@
       </p:sp>
       <p:sp>
         <p:nvSpPr>
-          <p:cNvPr id="14" name="TextBox 13"/>
+          <p:cNvPr id="15" name="TextBox 14"/>
           <p:cNvSpPr txBox="1"/>
           <p:nvPr/>
         </p:nvSpPr>
@@ -6421,7 +6429,7 @@
                 </a:solidFill>
                 <a:latin typeface="Arial"/>
               </a:rPr>
-              <a:t>Training accuracy lies. Cross-validation is the honest score - mean and wobble.</a:t>
+              <a:t>Two numbers, always: the training score lies, CV is honest - and the gap is variance.</a:t>
             </a:r>
           </a:p>
           <a:p>
@@ -6461,7 +6469,7 @@
                 </a:solidFill>
                 <a:latin typeface="Arial"/>
               </a:rPr>
-              <a:t>Accuracy is one question of many. Precision, recall, and F1 ask sharper ones.</a:t>
+              <a:t>Underfit = structural error, overfit = estimation error - the sweet spot is where the honest curve peaks, and ε keeps it under 1.00.</a:t>
             </a:r>
           </a:p>
           <a:p>
@@ -6481,7 +6489,27 @@
                 </a:solidFill>
                 <a:latin typeface="Arial"/>
               </a:rPr>
-              <a:t>The simplest model that beats the baseline on the right metric wins.</a:t>
+              <a:t>The learning curve says more rows won't save us - better settings might (Session 4).</a:t>
+            </a:r>
+          </a:p>
+          <a:p>
+            <a:pPr algn="l" indent="-228600" marL="228600">
+              <a:spcAft>
+                <a:spcPts val="1000"/>
+              </a:spcAft>
+              <a:buClr>
+                <a:srgbClr val="1E5EF3"/>
+              </a:buClr>
+              <a:buChar char="—"/>
+            </a:pPr>
+            <a:r>
+              <a:rPr sz="1600" b="0">
+                <a:solidFill>
+                  <a:srgbClr val="B9D0FA"/>
+                </a:solidFill>
+                <a:latin typeface="Arial"/>
+              </a:rPr>
+              <a:t>Accuracy is one question of many. Precision, recall, and F1 ask sharper ones.</a:t>
             </a:r>
           </a:p>
           <a:p>
@@ -6767,7 +6795,7 @@
                 </a:solidFill>
                 <a:latin typeface="Arial"/>
               </a:rPr>
-              <a:t>TODAY'S QUESTION</a:t>
+              <a:t>THE MAP FOR TODAY</a:t>
             </a:r>
           </a:p>
         </p:txBody>
@@ -6807,7 +6835,7 @@
                 </a:solidFill>
                 <a:latin typeface="Arial"/>
               </a:rPr>
-              <a:t>"Which model is best?" really asks: how do we compare fairly?</a:t>
+              <a:t>Today we live in the CHOOSE band: selection and assessment are different jobs</a:t>
             </a:r>
           </a:p>
         </p:txBody>
@@ -6865,7 +6893,7 @@
         <p:spPr>
           <a:xfrm>
             <a:off x="548640" y="1874519"/>
-            <a:ext cx="11091672" cy="4206240"/>
+            <a:ext cx="4297680" cy="4206240"/>
           </a:xfrm>
           <a:prstGeom prst="rect">
             <a:avLst/>
@@ -6888,13 +6916,13 @@
               <a:buChar char="—"/>
             </a:pPr>
             <a:r>
-              <a:rPr sz="1600" b="0">
+              <a:rPr sz="1450" b="0">
                 <a:solidFill>
                   <a:srgbClr val="202B38"/>
                 </a:solidFill>
                 <a:latin typeface="Arial"/>
               </a:rPr>
-              <a:t>Session 2 left us a model-ready table: 712 training rows, 179 test rows, 18 features.</a:t>
+              <a:t>Session 2 left a model-ready table: 712 training rows, 179 test rows, 18 features.</a:t>
             </a:r>
           </a:p>
           <a:p>
@@ -6908,33 +6936,13 @@
               <a:buChar char="—"/>
             </a:pPr>
             <a:r>
-              <a:rPr sz="1600" b="0">
+              <a:rPr sz="1450" b="0">
                 <a:solidFill>
                   <a:srgbClr val="202B38"/>
                 </a:solidFill>
                 <a:latin typeface="Arial"/>
               </a:rPr>
-              <a:t>Six algorithms could predict who survived. Picking by name or fashion is guessing.</a:t>
-            </a:r>
-          </a:p>
-          <a:p>
-            <a:pPr algn="l" lvl="1" indent="-228600" marL="514350">
-              <a:spcAft>
-                <a:spcPts val="600"/>
-              </a:spcAft>
-              <a:buClr>
-                <a:srgbClr val="1E5EF3"/>
-              </a:buClr>
-              <a:buChar char="·"/>
-            </a:pPr>
-            <a:r>
-              <a:rPr sz="1350" b="0">
-                <a:solidFill>
-                  <a:srgbClr val="5B6774"/>
-                </a:solidFill>
-                <a:latin typeface="Arial"/>
-              </a:rPr>
-              <a:t>The scorecard weighs Florence's class and sex; the forest asks hundreds of yes/no flowcharts about Owen.</a:t>
+              <a:t>Six algorithms could predict who survived - picking by name or fashion is guessing.</a:t>
             </a:r>
           </a:p>
           <a:p>
@@ -6948,73 +6956,13 @@
               <a:buChar char="—"/>
             </a:pPr>
             <a:r>
-              <a:rPr sz="1600" b="0">
+              <a:rPr sz="1450" b="0">
                 <a:solidFill>
                   <a:srgbClr val="202B38"/>
                 </a:solidFill>
                 <a:latin typeface="Arial"/>
               </a:rPr>
-              <a:t>The whole answer in one line: a baseline, a fair referee, and the right metric.</a:t>
-            </a:r>
-          </a:p>
-          <a:p>
-            <a:pPr algn="l" lvl="1" indent="-228600" marL="514350">
-              <a:spcAft>
-                <a:spcPts val="600"/>
-              </a:spcAft>
-              <a:buClr>
-                <a:srgbClr val="1E5EF3"/>
-              </a:buClr>
-              <a:buChar char="·"/>
-            </a:pPr>
-            <a:r>
-              <a:rPr sz="1350" b="0">
-                <a:solidFill>
-                  <a:srgbClr val="5B6774"/>
-                </a:solidFill>
-                <a:latin typeface="Arial"/>
-              </a:rPr>
-              <a:t>Baseline = the floor any real model must clearly beat.</a:t>
-            </a:r>
-          </a:p>
-          <a:p>
-            <a:pPr algn="l" lvl="1" indent="-228600" marL="514350">
-              <a:spcAft>
-                <a:spcPts val="600"/>
-              </a:spcAft>
-              <a:buClr>
-                <a:srgbClr val="1E5EF3"/>
-              </a:buClr>
-              <a:buChar char="·"/>
-            </a:pPr>
-            <a:r>
-              <a:rPr sz="1350" b="0">
-                <a:solidFill>
-                  <a:srgbClr val="5B6774"/>
-                </a:solidFill>
-                <a:latin typeface="Arial"/>
-              </a:rPr>
-              <a:t>Fair referee = 5-fold cross-validation, the honest score.</a:t>
-            </a:r>
-          </a:p>
-          <a:p>
-            <a:pPr algn="l" lvl="1" indent="-228600" marL="514350">
-              <a:spcAft>
-                <a:spcPts val="600"/>
-              </a:spcAft>
-              <a:buClr>
-                <a:srgbClr val="1E5EF3"/>
-              </a:buClr>
-              <a:buChar char="·"/>
-            </a:pPr>
-            <a:r>
-              <a:rPr sz="1350" b="0">
-                <a:solidFill>
-                  <a:srgbClr val="5B6774"/>
-                </a:solidFill>
-                <a:latin typeface="Arial"/>
-              </a:rPr>
-              <a:t>Right metric = accuracy is not always the question your problem asks.</a:t>
+              <a:t>Model SELECTION = choosing among models and settings. Done many times, in the CHOOSE band, by cross-validation.</a:t>
             </a:r>
           </a:p>
           <a:p>
@@ -7028,27 +6976,71 @@
               <a:buChar char="—"/>
             </a:pPr>
             <a:r>
-              <a:rPr sz="1600" b="0">
+              <a:rPr sz="1450" b="0">
                 <a:solidFill>
                   <a:srgbClr val="202B38"/>
                 </a:solidFill>
                 <a:latin typeface="Arial"/>
               </a:rPr>
-              <a:t>The test set stays locked away until the very end. We open it exactly once.</a:t>
-            </a:r>
-          </a:p>
-        </p:txBody>
-      </p:sp>
-      <p:sp>
-        <p:nvSpPr>
-          <p:cNvPr id="8" name="TextBox 7"/>
+              <a:t>Model ASSESSMENT = grading the final choice. Done once, in the REPORT band. Select on the test set and its score stops being a forecast.</a:t>
+            </a:r>
+          </a:p>
+          <a:p>
+            <a:pPr algn="l" indent="-228600" marL="228600">
+              <a:spcAft>
+                <a:spcPts val="800"/>
+              </a:spcAft>
+              <a:buClr>
+                <a:srgbClr val="1E5EF3"/>
+              </a:buClr>
+              <a:buChar char="—"/>
+            </a:pPr>
+            <a:r>
+              <a:rPr sz="1450" b="0">
+                <a:solidFill>
+                  <a:srgbClr val="202B38"/>
+                </a:solidFill>
+                <a:latin typeface="Arial"/>
+              </a:rPr>
+              <a:t>The plan: a floor, a fair referee, the right metric - then one look at the test set.</a:t>
+            </a:r>
+          </a:p>
+        </p:txBody>
+      </p:sp>
+      <p:pic>
+        <p:nvPicPr>
+          <p:cNvPr id="8" name="Picture 7" descr="frame_c_bar.png"/>
+          <p:cNvPicPr>
+            <a:picLocks noChangeAspect="1"/>
+          </p:cNvPicPr>
+          <p:nvPr/>
+        </p:nvPicPr>
+        <p:blipFill>
+          <a:blip r:embed="rId2"/>
+          <a:stretch>
+            <a:fillRect/>
+          </a:stretch>
+        </p:blipFill>
+        <p:spPr>
+          <a:xfrm>
+            <a:off x="5120640" y="1874519"/>
+            <a:ext cx="6492240" cy="1668970"/>
+          </a:xfrm>
+          <a:prstGeom prst="rect">
+            <a:avLst/>
+          </a:prstGeom>
+        </p:spPr>
+      </p:pic>
+      <p:sp>
+        <p:nvSpPr>
+          <p:cNvPr id="9" name="TextBox 8"/>
           <p:cNvSpPr txBox="1"/>
           <p:nvPr/>
         </p:nvSpPr>
         <p:spPr>
           <a:xfrm>
-            <a:off x="548640" y="5989320"/>
-            <a:ext cx="11091672" cy="502920"/>
+            <a:off x="5120640" y="6062471"/>
+            <a:ext cx="6492240" cy="365760"/>
           </a:xfrm>
           <a:prstGeom prst="rect">
             <a:avLst/>
@@ -7061,27 +7053,27 @@
           </a:bodyPr>
           <a:lstStyle/>
           <a:p>
-            <a:pPr algn="l">
+            <a:pPr algn="ctr">
               <a:spcAft>
                 <a:spcPts val="600"/>
               </a:spcAft>
               <a:buNone/>
             </a:pPr>
             <a:r>
-              <a:rPr sz="1200" b="0">
-                <a:solidFill>
-                  <a:srgbClr val="1E5EF3"/>
-                </a:solidFill>
-                <a:latin typeface="Arial"/>
-              </a:rPr>
-              <a:t>Plan: run the tournament first, then look at what accuracy hides.</a:t>
-            </a:r>
-          </a:p>
-        </p:txBody>
-      </p:sp>
-      <p:sp>
-        <p:nvSpPr>
-          <p:cNvPr id="9" name="TextBox 8"/>
+              <a:rPr sz="1100" b="0">
+                <a:solidFill>
+                  <a:srgbClr val="5B6774"/>
+                </a:solidFill>
+                <a:latin typeface="Arial"/>
+              </a:rPr>
+              <a:t>One bar rules the module, re-shown from Session 2. Harvard CS109A / ISLR ch. 5 (model selection vs model assessment).</a:t>
+            </a:r>
+          </a:p>
+        </p:txBody>
+      </p:sp>
+      <p:sp>
+        <p:nvSpPr>
+          <p:cNvPr id="10" name="TextBox 9"/>
           <p:cNvSpPr txBox="1"/>
           <p:nvPr/>
         </p:nvSpPr>
@@ -7121,7 +7113,7 @@
       </p:sp>
       <p:sp>
         <p:nvSpPr>
-          <p:cNvPr id="10" name="TextBox 9"/>
+          <p:cNvPr id="11" name="TextBox 10"/>
           <p:cNvSpPr txBox="1"/>
           <p:nvPr/>
         </p:nvSpPr>
@@ -8263,8 +8255,8 @@
         </p:nvSpPr>
         <p:spPr>
           <a:xfrm>
-            <a:off x="548640" y="6473952"/>
-            <a:ext cx="7315200" cy="292608"/>
+            <a:off x="548640" y="5440680"/>
+            <a:ext cx="11091672" cy="502920"/>
           </a:xfrm>
           <a:prstGeom prst="rect">
             <a:avLst/>
@@ -8284,6 +8276,46 @@
               <a:buNone/>
             </a:pPr>
             <a:r>
+              <a:rPr sz="1200" b="0">
+                <a:solidFill>
+                  <a:srgbClr val="1E5EF3"/>
+                </a:solidFill>
+                <a:latin typeface="Arial"/>
+              </a:rPr>
+              <a:t>Session 1's recipe, refilled six times: each contestant is a different filling of the MODEL slot — the loss and the referee stay the same for everyone. (MIT 6.390, Appendix C)</a:t>
+            </a:r>
+          </a:p>
+        </p:txBody>
+      </p:sp>
+      <p:sp>
+        <p:nvSpPr>
+          <p:cNvPr id="10" name="TextBox 9"/>
+          <p:cNvSpPr txBox="1"/>
+          <p:nvPr/>
+        </p:nvSpPr>
+        <p:spPr>
+          <a:xfrm>
+            <a:off x="548640" y="6473952"/>
+            <a:ext cx="7315200" cy="292608"/>
+          </a:xfrm>
+          <a:prstGeom prst="rect">
+            <a:avLst/>
+          </a:prstGeom>
+          <a:noFill/>
+        </p:spPr>
+        <p:txBody>
+          <a:bodyPr wrap="square">
+            <a:spAutoFit/>
+          </a:bodyPr>
+          <a:lstStyle/>
+          <a:p>
+            <a:pPr algn="l">
+              <a:spcAft>
+                <a:spcPts val="600"/>
+              </a:spcAft>
+              <a:buNone/>
+            </a:pPr>
+            <a:r>
               <a:rPr sz="900" b="0">
                 <a:solidFill>
                   <a:srgbClr val="5B6774"/>
@@ -8297,7 +8329,7 @@
       </p:sp>
       <p:sp>
         <p:nvSpPr>
-          <p:cNvPr id="10" name="TextBox 9"/>
+          <p:cNvPr id="11" name="TextBox 10"/>
           <p:cNvSpPr txBox="1"/>
           <p:nvPr/>
         </p:nvSpPr>
@@ -8603,7 +8635,7 @@
                 </a:solidFill>
                 <a:latin typeface="Arial"/>
               </a:rPr>
-              <a:t>Let a decision tree grow without limits, then grade it on its own training data: 0.985.</a:t>
+              <a:t>Let a decision tree grow without limits, then grade it on its own training data: 0.985. Grade it honestly with cross-validation: 0.751.</a:t>
             </a:r>
           </a:p>
           <a:p>
@@ -8623,7 +8655,7 @@
                 </a:solidFill>
                 <a:latin typeface="Arial"/>
               </a:rPr>
-              <a:t>Grade the same tree honestly with cross-validation: 0.751. The gap is 0.233.</a:t>
+              <a:t>It memorized the answers instead of learning the subject - like grading students on the exact questions they practiced at home.</a:t>
             </a:r>
           </a:p>
           <a:p>
@@ -8643,7 +8675,7 @@
                 </a:solidFill>
                 <a:latin typeface="Arial"/>
               </a:rPr>
-              <a:t>It memorized the answers instead of learning the subject - passengers, noise included.</a:t>
+              <a:t>Ng's diagnostic: always read TWO numbers - training score and honest score. Poor training score = bias (too simple). Big gap = variance (memorizing). Our tree: gap 0.233 = variance.</a:t>
             </a:r>
           </a:p>
           <a:p>
@@ -8663,7 +8695,7 @@
                 </a:solidFill>
                 <a:latin typeface="Arial"/>
               </a:rPr>
-              <a:t>Generalization = performing well on data you have never seen. It is the whole point of ML: the next passenger is always unseen.</a:t>
+              <a:t>Ng's drill: train error 1% / dev error 11% = variance problem; train 15% / dev 16% = bias problem. (Ng's teaching examples, not course numbers.)</a:t>
             </a:r>
           </a:p>
           <a:p>
@@ -8683,7 +8715,7 @@
                 </a:solidFill>
                 <a:latin typeface="Arial"/>
               </a:rPr>
-              <a:t>Overfitting = brilliant on seen data, stumbling on unseen - like grading students on the exact questions they practiced at home.</a:t>
+              <a:t>Diagnose first - the cures are different and often opposite.</a:t>
             </a:r>
           </a:p>
         </p:txBody>
@@ -8747,7 +8779,7 @@
                 </a:solidFill>
                 <a:latin typeface="Arial"/>
               </a:rPr>
-              <a:t>Unlimited decision tree, training vs 5-fold CV accuracy. Module 2, notebook 2.</a:t>
+              <a:t>Unlimited decision tree, training vs 5-fold CV accuracy. Module 2, notebook 2. Diagnostic: Ng, Machine Learning Yearning chs. 20-21.</a:t>
             </a:r>
           </a:p>
         </p:txBody>
@@ -9100,7 +9132,7 @@
                 </a:solidFill>
                 <a:latin typeface="Arial"/>
               </a:rPr>
-              <a:t>Split the 712 training rows into 5 equal folds. Run 5 rounds.</a:t>
+              <a:t>Split the 712 training rows into 5 equal folds; run 5 rounds - each fold sits out once as the judge.</a:t>
             </a:r>
           </a:p>
           <a:p>
@@ -9120,7 +9152,7 @@
                 </a:solidFill>
                 <a:latin typeface="Arial"/>
               </a:rPr>
-              <a:t>Each round, one fold sits out as the judge; the model trains on the other four.</a:t>
+              <a:t>Five honest scores instead of one: we see the mean AND the wobble (std). One lucky split can flatter a model; five cannot.</a:t>
             </a:r>
           </a:p>
           <a:p>
@@ -9140,7 +9172,7 @@
                 </a:solidFill>
                 <a:latin typeface="Arial"/>
               </a:rPr>
-              <a:t>Five honest scores instead of one: we see the mean AND how much the model wobbles (std).</a:t>
+              <a:t>Subtle but crucial: CV evaluates the recipe (algorithm + settings), not one fitted model - CV scores the recipe, not the cake.</a:t>
             </a:r>
           </a:p>
           <a:p>
@@ -9160,7 +9192,7 @@
                 </a:solidFill>
                 <a:latin typeface="Arial"/>
               </a:rPr>
-              <a:t>One lucky split can flatter a model. Five splits cannot.</a:t>
+              <a:t>Why 5 folds? Fewer folds starve training; leave-one-out folds are nearly identical and their average gets noisy - 5 or 10 is the empirical sweet spot.</a:t>
             </a:r>
           </a:p>
           <a:p>
@@ -9180,7 +9212,7 @@
                 </a:solidFill>
                 <a:latin typeface="Arial"/>
               </a:rPr>
-              <a:t>The real test set is never touched - CV lives entirely inside the training data.</a:t>
+              <a:t>The real test set is never touched - CV lives entirely inside the CHOOSE band.</a:t>
             </a:r>
           </a:p>
         </p:txBody>
@@ -9244,7 +9276,7 @@
                 </a:solidFill>
                 <a:latin typeface="Arial"/>
               </a:rPr>
-              <a:t>5-fold cross-validation. Module 2, notebook 2.</a:t>
+              <a:t>5-fold cross-validation. Module 2, notebook 2. MIT 6.390, Appendix C; Harvard CS109A / ISLR §5.1.</a:t>
             </a:r>
           </a:p>
         </p:txBody>
@@ -10067,7 +10099,7 @@
                 </a:solidFill>
                 <a:latin typeface="Arial"/>
               </a:rPr>
-              <a:t>Random Forest wobbles the most between folds: 0.797 with std 0.054.</a:t>
+              <a:t>Those error bars are information: Random Forest wobbles most (+/- 0.054) - the same model refit on slightly different data gives noticeably different answers. Next slide shows why.</a:t>
             </a:r>
           </a:p>
           <a:p>
@@ -10289,7 +10321,7 @@
             <a:avLst/>
           </a:prstGeom>
           <a:solidFill>
-            <a:srgbClr val="0A2540"/>
+            <a:srgbClr val="FFFFFF"/>
           </a:solidFill>
           <a:ln>
             <a:noFill/>
@@ -10320,14 +10352,58 @@
       </p:sp>
       <p:sp>
         <p:nvSpPr>
-          <p:cNvPr id="3" name="TextBox 2"/>
+          <p:cNvPr id="3" name="Rectangle 2"/>
+          <p:cNvSpPr/>
+          <p:nvPr/>
+        </p:nvSpPr>
+        <p:spPr>
+          <a:xfrm>
+            <a:off x="548640" y="475488"/>
+            <a:ext cx="457200" cy="54864"/>
+          </a:xfrm>
+          <a:prstGeom prst="rect">
+            <a:avLst/>
+          </a:prstGeom>
+          <a:solidFill>
+            <a:srgbClr val="1E5EF3"/>
+          </a:solidFill>
+          <a:ln>
+            <a:noFill/>
+          </a:ln>
+          <a:effectLst/>
+        </p:spPr>
+        <p:style>
+          <a:lnRef idx="1">
+            <a:schemeClr val="accent1"/>
+          </a:lnRef>
+          <a:fillRef idx="3">
+            <a:schemeClr val="accent1"/>
+          </a:fillRef>
+          <a:effectRef idx="2">
+            <a:schemeClr val="accent1"/>
+          </a:effectRef>
+          <a:fontRef idx="minor">
+            <a:schemeClr val="lt1"/>
+          </a:fontRef>
+        </p:style>
+        <p:txBody>
+          <a:bodyPr rtlCol="0" anchor="ctr"/>
+          <a:lstStyle/>
+          <a:p>
+            <a:pPr algn="ctr"/>
+          </a:p>
+        </p:txBody>
+      </p:sp>
+      <p:sp>
+        <p:nvSpPr>
+          <p:cNvPr id="4" name="TextBox 3"/>
           <p:cNvSpPr txBox="1"/>
           <p:nvPr/>
         </p:nvSpPr>
         <p:spPr>
           <a:xfrm>
-            <a:off x="822960" y="1463040"/>
-            <a:ext cx="3657600" cy="2011680"/>
+            <a:off x="548640" y="603504"/>
+            <a:ext cx="11091672" cy="274320"/>
           </a:xfrm>
           <a:prstGeom prst="rect">
             <a:avLst/>
@@ -10347,27 +10423,27 @@
               <a:buNone/>
             </a:pPr>
             <a:r>
-              <a:rPr sz="11000" b="1">
+              <a:rPr sz="1100" b="1">
                 <a:solidFill>
                   <a:srgbClr val="1E5EF3"/>
                 </a:solidFill>
                 <a:latin typeface="Arial"/>
               </a:rPr>
-              <a:t>02</a:t>
-            </a:r>
-          </a:p>
-        </p:txBody>
-      </p:sp>
-      <p:sp>
-        <p:nvSpPr>
-          <p:cNvPr id="4" name="TextBox 3"/>
+              <a:t>PARALLEL UNIVERSES</a:t>
+            </a:r>
+          </a:p>
+        </p:txBody>
+      </p:sp>
+      <p:sp>
+        <p:nvSpPr>
+          <p:cNvPr id="5" name="TextBox 4"/>
           <p:cNvSpPr txBox="1"/>
           <p:nvPr/>
         </p:nvSpPr>
         <p:spPr>
           <a:xfrm>
-            <a:off x="868680" y="3566160"/>
-            <a:ext cx="10424160" cy="1280160"/>
+            <a:off x="548640" y="868680"/>
+            <a:ext cx="11091672" cy="777240"/>
           </a:xfrm>
           <a:prstGeom prst="rect">
             <a:avLst/>
@@ -10382,32 +10458,76 @@
           <a:p>
             <a:pPr algn="l">
               <a:spcAft>
-                <a:spcPts val="600"/>
-              </a:spcAft>
-              <a:buNone/>
-            </a:pPr>
-            <a:r>
-              <a:rPr sz="3400" b="1">
-                <a:solidFill>
-                  <a:srgbClr val="FFFFFF"/>
-                </a:solidFill>
-                <a:latin typeface="Arial"/>
-              </a:rPr>
-              <a:t>Beyond accuracy</a:t>
-            </a:r>
-          </a:p>
-        </p:txBody>
-      </p:sp>
-      <p:sp>
-        <p:nvSpPr>
-          <p:cNvPr id="5" name="TextBox 4"/>
+                <a:spcPts val="0"/>
+              </a:spcAft>
+              <a:buNone/>
+            </a:pPr>
+            <a:r>
+              <a:rPr sz="2600" b="1">
+                <a:solidFill>
+                  <a:srgbClr val="0A2540"/>
+                </a:solidFill>
+                <a:latin typeface="Arial"/>
+              </a:rPr>
+              <a:t>Why the forest wobbles: flexible models change with every sample they see</a:t>
+            </a:r>
+          </a:p>
+        </p:txBody>
+      </p:sp>
+      <p:sp>
+        <p:nvSpPr>
+          <p:cNvPr id="6" name="Rectangle 5"/>
+          <p:cNvSpPr/>
+          <p:nvPr/>
+        </p:nvSpPr>
+        <p:spPr>
+          <a:xfrm>
+            <a:off x="548640" y="1664208"/>
+            <a:ext cx="11091672" cy="12801"/>
+          </a:xfrm>
+          <a:prstGeom prst="rect">
+            <a:avLst/>
+          </a:prstGeom>
+          <a:solidFill>
+            <a:srgbClr val="B9D0FA"/>
+          </a:solidFill>
+          <a:ln>
+            <a:noFill/>
+          </a:ln>
+          <a:effectLst/>
+        </p:spPr>
+        <p:style>
+          <a:lnRef idx="1">
+            <a:schemeClr val="accent1"/>
+          </a:lnRef>
+          <a:fillRef idx="3">
+            <a:schemeClr val="accent1"/>
+          </a:fillRef>
+          <a:effectRef idx="2">
+            <a:schemeClr val="accent1"/>
+          </a:effectRef>
+          <a:fontRef idx="minor">
+            <a:schemeClr val="lt1"/>
+          </a:fontRef>
+        </p:style>
+        <p:txBody>
+          <a:bodyPr rtlCol="0" anchor="ctr"/>
+          <a:lstStyle/>
+          <a:p>
+            <a:pPr algn="ctr"/>
+          </a:p>
+        </p:txBody>
+      </p:sp>
+      <p:sp>
+        <p:nvSpPr>
+          <p:cNvPr id="7" name="TextBox 6"/>
           <p:cNvSpPr txBox="1"/>
           <p:nvPr/>
         </p:nvSpPr>
         <p:spPr>
           <a:xfrm>
-            <a:off x="868680" y="4709160"/>
-            <a:ext cx="10058400" cy="914400"/>
+            <a:off x="548640" y="1874519"/>
+            <a:ext cx="4297680" cy="4206240"/>
           </a:xfrm>
           <a:prstGeom prst="rect">
             <a:avLst/>
@@ -10420,34 +10540,121 @@
           </a:bodyPr>
           <a:lstStyle/>
           <a:p>
-            <a:pPr algn="l">
-              <a:spcAft>
-                <a:spcPts val="600"/>
-              </a:spcAft>
-              <a:buNone/>
-            </a:pPr>
-            <a:r>
-              <a:rPr sz="1600" b="0">
-                <a:solidFill>
-                  <a:srgbClr val="B9D0FA"/>
-                </a:solidFill>
-                <a:latin typeface="Arial"/>
-              </a:rPr>
-              <a:t>When 99% right is 100% useless: the mistakes have names, so count all four kinds before you trust a score.</a:t>
-            </a:r>
-          </a:p>
-        </p:txBody>
-      </p:sp>
-      <p:sp>
-        <p:nvSpPr>
-          <p:cNvPr id="6" name="TextBox 5"/>
+            <a:pPr algn="l" indent="-228600" marL="228600">
+              <a:spcAft>
+                <a:spcPts val="800"/>
+              </a:spcAft>
+              <a:buClr>
+                <a:srgbClr val="1E5EF3"/>
+              </a:buClr>
+              <a:buChar char="—"/>
+            </a:pPr>
+            <a:r>
+              <a:rPr sz="1450" b="0">
+                <a:solidFill>
+                  <a:srgbClr val="202B38"/>
+                </a:solidFill>
+                <a:latin typeface="Arial"/>
+              </a:rPr>
+              <a:t>Thought experiment: refit the same model on many different samples from the same population - parallel universes - and watch the fits scatter.</a:t>
+            </a:r>
+          </a:p>
+          <a:p>
+            <a:pPr algn="l" indent="-228600" marL="228600">
+              <a:spcAft>
+                <a:spcPts val="800"/>
+              </a:spcAft>
+              <a:buClr>
+                <a:srgbClr val="1E5EF3"/>
+              </a:buClr>
+              <a:buChar char="—"/>
+            </a:pPr>
+            <a:r>
+              <a:rPr sz="1450" b="0">
+                <a:solidFill>
+                  <a:srgbClr val="202B38"/>
+                </a:solidFill>
+                <a:latin typeface="Arial"/>
+              </a:rPr>
+              <a:t>Simple models (a straight line) form a tight bundle: they miss the same way every time. Biased, but stable.</a:t>
+            </a:r>
+          </a:p>
+          <a:p>
+            <a:pPr algn="l" indent="-228600" marL="228600">
+              <a:spcAft>
+                <a:spcPts val="800"/>
+              </a:spcAft>
+              <a:buClr>
+                <a:srgbClr val="1E5EF3"/>
+              </a:buClr>
+              <a:buChar char="—"/>
+            </a:pPr>
+            <a:r>
+              <a:rPr sz="1450" b="0">
+                <a:solidFill>
+                  <a:srgbClr val="202B38"/>
+                </a:solidFill>
+                <a:latin typeface="Arial"/>
+              </a:rPr>
+              <a:t>Very flexible models form spaghetti: unbiased on average, but each sample yields a wildly different fit. That is variance.</a:t>
+            </a:r>
+          </a:p>
+          <a:p>
+            <a:pPr algn="l" indent="-228600" marL="228600">
+              <a:spcAft>
+                <a:spcPts val="800"/>
+              </a:spcAft>
+              <a:buClr>
+                <a:srgbClr val="1E5EF3"/>
+              </a:buClr>
+              <a:buChar char="—"/>
+            </a:pPr>
+            <a:r>
+              <a:rPr sz="1450" b="0">
+                <a:solidFill>
+                  <a:srgbClr val="202B38"/>
+                </a:solidFill>
+                <a:latin typeface="Arial"/>
+              </a:rPr>
+              <a:t>Our tournament ran a small version of this: the 5 folds are 5 mini-universes, and the fold-to-fold std is the wobble made visible - RF +/- 0.054 vs LogReg +/- 0.020.</a:t>
+            </a:r>
+          </a:p>
+        </p:txBody>
+      </p:sp>
+      <p:pic>
+        <p:nvPicPr>
+          <p:cNvPr id="8" name="Picture 7" descr="models_2000.png"/>
+          <p:cNvPicPr>
+            <a:picLocks noChangeAspect="1"/>
+          </p:cNvPicPr>
+          <p:nvPr/>
+        </p:nvPicPr>
+        <p:blipFill>
+          <a:blip r:embed="rId2"/>
+          <a:stretch>
+            <a:fillRect/>
+          </a:stretch>
+        </p:blipFill>
+        <p:spPr>
+          <a:xfrm>
+            <a:off x="5120640" y="1874519"/>
+            <a:ext cx="6492240" cy="3982591"/>
+          </a:xfrm>
+          <a:prstGeom prst="rect">
+            <a:avLst/>
+          </a:prstGeom>
+        </p:spPr>
+      </p:pic>
+      <p:sp>
+        <p:nvSpPr>
+          <p:cNvPr id="9" name="TextBox 8"/>
           <p:cNvSpPr txBox="1"/>
           <p:nvPr/>
         </p:nvSpPr>
         <p:spPr>
           <a:xfrm>
-            <a:off x="548640" y="6473952"/>
-            <a:ext cx="7315200" cy="292608"/>
+            <a:off x="5120640" y="6062471"/>
+            <a:ext cx="6492240" cy="365760"/>
           </a:xfrm>
           <a:prstGeom prst="rect">
             <a:avLst/>
@@ -10460,34 +10667,34 @@
           </a:bodyPr>
           <a:lstStyle/>
           <a:p>
-            <a:pPr algn="l">
+            <a:pPr algn="ctr">
               <a:spcAft>
                 <a:spcPts val="600"/>
               </a:spcAft>
               <a:buNone/>
             </a:pPr>
             <a:r>
-              <a:rPr sz="900" b="0">
-                <a:solidFill>
-                  <a:srgbClr val="B9D0FA"/>
-                </a:solidFill>
-                <a:latin typeface="Arial"/>
-              </a:rPr>
-              <a:t>M2 Session 3 - Model Selection and Evaluation</a:t>
-            </a:r>
-          </a:p>
-        </p:txBody>
-      </p:sp>
-      <p:sp>
-        <p:nvSpPr>
-          <p:cNvPr id="7" name="TextBox 6"/>
+              <a:rPr sz="1100" b="0">
+                <a:solidFill>
+                  <a:srgbClr val="5B6774"/>
+                </a:solidFill>
+                <a:latin typeface="Arial"/>
+              </a:rPr>
+              <a:t>Illustration - synthetic data, 60 refits per panel. Device from Harvard CS109A L6 / ISLR §2.2.</a:t>
+            </a:r>
+          </a:p>
+        </p:txBody>
+      </p:sp>
+      <p:sp>
+        <p:nvSpPr>
+          <p:cNvPr id="10" name="TextBox 9"/>
           <p:cNvSpPr txBox="1"/>
           <p:nvPr/>
         </p:nvSpPr>
         <p:spPr>
           <a:xfrm>
-            <a:off x="11292840" y="6473952"/>
-            <a:ext cx="548640" cy="292608"/>
+            <a:off x="548640" y="6473952"/>
+            <a:ext cx="7315200" cy="292608"/>
           </a:xfrm>
           <a:prstGeom prst="rect">
             <a:avLst/>
@@ -10500,6 +10707,46 @@
           </a:bodyPr>
           <a:lstStyle/>
           <a:p>
+            <a:pPr algn="l">
+              <a:spcAft>
+                <a:spcPts val="600"/>
+              </a:spcAft>
+              <a:buNone/>
+            </a:pPr>
+            <a:r>
+              <a:rPr sz="900" b="0">
+                <a:solidFill>
+                  <a:srgbClr val="5B6774"/>
+                </a:solidFill>
+                <a:latin typeface="Arial"/>
+              </a:rPr>
+              <a:t>M2 Session 3 - Model Selection and Evaluation</a:t>
+            </a:r>
+          </a:p>
+        </p:txBody>
+      </p:sp>
+      <p:sp>
+        <p:nvSpPr>
+          <p:cNvPr id="11" name="TextBox 10"/>
+          <p:cNvSpPr txBox="1"/>
+          <p:nvPr/>
+        </p:nvSpPr>
+        <p:spPr>
+          <a:xfrm>
+            <a:off x="11292840" y="6473952"/>
+            <a:ext cx="548640" cy="292608"/>
+          </a:xfrm>
+          <a:prstGeom prst="rect">
+            <a:avLst/>
+          </a:prstGeom>
+          <a:noFill/>
+        </p:spPr>
+        <p:txBody>
+          <a:bodyPr wrap="square">
+            <a:spAutoFit/>
+          </a:bodyPr>
+          <a:lstStyle/>
+          <a:p>
             <a:pPr algn="r">
               <a:spcAft>
                 <a:spcPts val="600"/>
@@ -10509,7 +10756,7 @@
             <a:r>
               <a:rPr sz="900" b="0">
                 <a:solidFill>
-                  <a:srgbClr val="B9D0FA"/>
+                  <a:srgbClr val="5B6774"/>
                 </a:solidFill>
                 <a:latin typeface="Arial"/>
               </a:rPr>
@@ -10551,7 +10798,7 @@
             <a:avLst/>
           </a:prstGeom>
           <a:solidFill>
-            <a:srgbClr val="FFFFFF"/>
+            <a:srgbClr val="0A2540"/>
           </a:solidFill>
           <a:ln>
             <a:noFill/>
@@ -10582,58 +10829,14 @@
       </p:sp>
       <p:sp>
         <p:nvSpPr>
-          <p:cNvPr id="3" name="Rectangle 2"/>
-          <p:cNvSpPr/>
-          <p:nvPr/>
-        </p:nvSpPr>
-        <p:spPr>
-          <a:xfrm>
-            <a:off x="548640" y="475488"/>
-            <a:ext cx="457200" cy="54864"/>
-          </a:xfrm>
-          <a:prstGeom prst="rect">
-            <a:avLst/>
-          </a:prstGeom>
-          <a:solidFill>
-            <a:srgbClr val="1E5EF3"/>
-          </a:solidFill>
-          <a:ln>
-            <a:noFill/>
-          </a:ln>
-          <a:effectLst/>
-        </p:spPr>
-        <p:style>
-          <a:lnRef idx="1">
-            <a:schemeClr val="accent1"/>
-          </a:lnRef>
-          <a:fillRef idx="3">
-            <a:schemeClr val="accent1"/>
-          </a:fillRef>
-          <a:effectRef idx="2">
-            <a:schemeClr val="accent1"/>
-          </a:effectRef>
-          <a:fontRef idx="minor">
-            <a:schemeClr val="lt1"/>
-          </a:fontRef>
-        </p:style>
-        <p:txBody>
-          <a:bodyPr rtlCol="0" anchor="ctr"/>
-          <a:lstStyle/>
-          <a:p>
-            <a:pPr algn="ctr"/>
-          </a:p>
-        </p:txBody>
-      </p:sp>
-      <p:sp>
-        <p:nvSpPr>
-          <p:cNvPr id="4" name="TextBox 3"/>
+          <p:cNvPr id="3" name="TextBox 2"/>
           <p:cNvSpPr txBox="1"/>
           <p:nvPr/>
         </p:nvSpPr>
         <p:spPr>
           <a:xfrm>
-            <a:off x="548640" y="603504"/>
-            <a:ext cx="11091672" cy="274320"/>
+            <a:off x="822960" y="1463040"/>
+            <a:ext cx="3657600" cy="2011680"/>
           </a:xfrm>
           <a:prstGeom prst="rect">
             <a:avLst/>
@@ -10653,27 +10856,27 @@
               <a:buNone/>
             </a:pPr>
             <a:r>
-              <a:rPr sz="1100" b="1">
+              <a:rPr sz="11000" b="1">
                 <a:solidFill>
                   <a:srgbClr val="1E5EF3"/>
                 </a:solidFill>
                 <a:latin typeface="Arial"/>
               </a:rPr>
-              <a:t>THE 99% TRAP</a:t>
-            </a:r>
-          </a:p>
-        </p:txBody>
-      </p:sp>
-      <p:sp>
-        <p:nvSpPr>
-          <p:cNvPr id="5" name="TextBox 4"/>
+              <a:t>02</a:t>
+            </a:r>
+          </a:p>
+        </p:txBody>
+      </p:sp>
+      <p:sp>
+        <p:nvSpPr>
+          <p:cNvPr id="4" name="TextBox 3"/>
           <p:cNvSpPr txBox="1"/>
           <p:nvPr/>
         </p:nvSpPr>
         <p:spPr>
           <a:xfrm>
-            <a:off x="548640" y="868680"/>
-            <a:ext cx="11091672" cy="777240"/>
+            <a:off x="868680" y="3566160"/>
+            <a:ext cx="10424160" cy="1280160"/>
           </a:xfrm>
           <a:prstGeom prst="rect">
             <a:avLst/>
@@ -10688,76 +10891,32 @@
           <a:p>
             <a:pPr algn="l">
               <a:spcAft>
-                <a:spcPts val="0"/>
-              </a:spcAft>
-              <a:buNone/>
-            </a:pPr>
-            <a:r>
-              <a:rPr sz="2600" b="1">
-                <a:solidFill>
-                  <a:srgbClr val="0A2540"/>
-                </a:solidFill>
-                <a:latin typeface="Arial"/>
-              </a:rPr>
-              <a:t>Accuracy can hide the mistakes that matter - the confusion matrix shows all four</a:t>
-            </a:r>
-          </a:p>
-        </p:txBody>
-      </p:sp>
-      <p:sp>
-        <p:nvSpPr>
-          <p:cNvPr id="6" name="Rectangle 5"/>
-          <p:cNvSpPr/>
-          <p:nvPr/>
-        </p:nvSpPr>
-        <p:spPr>
-          <a:xfrm>
-            <a:off x="548640" y="1664208"/>
-            <a:ext cx="11091672" cy="12801"/>
-          </a:xfrm>
-          <a:prstGeom prst="rect">
-            <a:avLst/>
-          </a:prstGeom>
-          <a:solidFill>
-            <a:srgbClr val="B9D0FA"/>
-          </a:solidFill>
-          <a:ln>
-            <a:noFill/>
-          </a:ln>
-          <a:effectLst/>
-        </p:spPr>
-        <p:style>
-          <a:lnRef idx="1">
-            <a:schemeClr val="accent1"/>
-          </a:lnRef>
-          <a:fillRef idx="3">
-            <a:schemeClr val="accent1"/>
-          </a:fillRef>
-          <a:effectRef idx="2">
-            <a:schemeClr val="accent1"/>
-          </a:effectRef>
-          <a:fontRef idx="minor">
-            <a:schemeClr val="lt1"/>
-          </a:fontRef>
-        </p:style>
-        <p:txBody>
-          <a:bodyPr rtlCol="0" anchor="ctr"/>
-          <a:lstStyle/>
-          <a:p>
-            <a:pPr algn="ctr"/>
-          </a:p>
-        </p:txBody>
-      </p:sp>
-      <p:sp>
-        <p:nvSpPr>
-          <p:cNvPr id="7" name="TextBox 6"/>
+                <a:spcPts val="600"/>
+              </a:spcAft>
+              <a:buNone/>
+            </a:pPr>
+            <a:r>
+              <a:rPr sz="3400" b="1">
+                <a:solidFill>
+                  <a:srgbClr val="FFFFFF"/>
+                </a:solidFill>
+                <a:latin typeface="Arial"/>
+              </a:rPr>
+              <a:t>Beyond accuracy</a:t>
+            </a:r>
+          </a:p>
+        </p:txBody>
+      </p:sp>
+      <p:sp>
+        <p:nvSpPr>
+          <p:cNvPr id="5" name="TextBox 4"/>
           <p:cNvSpPr txBox="1"/>
           <p:nvPr/>
         </p:nvSpPr>
         <p:spPr>
           <a:xfrm>
-            <a:off x="548640" y="1874519"/>
-            <a:ext cx="4297680" cy="4206240"/>
+            <a:off x="868680" y="4709160"/>
+            <a:ext cx="10058400" cy="914400"/>
           </a:xfrm>
           <a:prstGeom prst="rect">
             <a:avLst/>
@@ -10770,141 +10929,34 @@
           </a:bodyPr>
           <a:lstStyle/>
           <a:p>
-            <a:pPr algn="l" indent="-228600" marL="228600">
-              <a:spcAft>
-                <a:spcPts val="800"/>
-              </a:spcAft>
-              <a:buClr>
-                <a:srgbClr val="1E5EF3"/>
-              </a:buClr>
-              <a:buChar char="—"/>
-            </a:pPr>
-            <a:r>
-              <a:rPr sz="1450" b="0">
-                <a:solidFill>
-                  <a:srgbClr val="202B38"/>
-                </a:solidFill>
-                <a:latin typeface="Arial"/>
-              </a:rPr>
-              <a:t>A disease hits 1 in 100 people. A model that always says "no disease" is 99% accurate - and worthless.</a:t>
-            </a:r>
-          </a:p>
-          <a:p>
-            <a:pPr algn="l" indent="-228600" marL="228600">
-              <a:spcAft>
-                <a:spcPts val="800"/>
-              </a:spcAft>
-              <a:buClr>
-                <a:srgbClr val="1E5EF3"/>
-              </a:buClr>
-              <a:buChar char="—"/>
-            </a:pPr>
-            <a:r>
-              <a:rPr sz="1450" b="0">
-                <a:solidFill>
-                  <a:srgbClr val="202B38"/>
-                </a:solidFill>
-                <a:latin typeface="Arial"/>
-              </a:rPr>
-              <a:t>Confusion matrix = a count of the four ways a prediction can go right or wrong.</a:t>
-            </a:r>
-          </a:p>
-          <a:p>
-            <a:pPr algn="l" indent="-228600" marL="228600">
-              <a:spcAft>
-                <a:spcPts val="800"/>
-              </a:spcAft>
-              <a:buClr>
-                <a:srgbClr val="1E5EF3"/>
-              </a:buClr>
-              <a:buChar char="—"/>
-            </a:pPr>
-            <a:r>
-              <a:rPr sz="1450" b="0">
-                <a:solidFill>
-                  <a:srgbClr val="202B38"/>
-                </a:solidFill>
-                <a:latin typeface="Arial"/>
-              </a:rPr>
-              <a:t>Our champion on the 179 test passengers: 99 correct "died" (TN), 51 correct "survived" (TP).</a:t>
-            </a:r>
-          </a:p>
-          <a:p>
-            <a:pPr algn="l" indent="-228600" marL="228600">
-              <a:spcAft>
-                <a:spcPts val="800"/>
-              </a:spcAft>
-              <a:buClr>
-                <a:srgbClr val="1E5EF3"/>
-              </a:buClr>
-              <a:buChar char="—"/>
-            </a:pPr>
-            <a:r>
-              <a:rPr sz="1450" b="0">
-                <a:solidFill>
-                  <a:srgbClr val="202B38"/>
-                </a:solidFill>
-                <a:latin typeface="Arial"/>
-              </a:rPr>
-              <a:t>11 false alarms (predicted survived, did not) and 18 missed survivors.</a:t>
-            </a:r>
-          </a:p>
-          <a:p>
-            <a:pPr algn="l" indent="-228600" marL="228600">
-              <a:spcAft>
-                <a:spcPts val="800"/>
-              </a:spcAft>
-              <a:buClr>
-                <a:srgbClr val="1E5EF3"/>
-              </a:buClr>
-              <a:buChar char="—"/>
-            </a:pPr>
-            <a:r>
-              <a:rPr sz="1450" b="0">
-                <a:solidFill>
-                  <a:srgbClr val="202B38"/>
-                </a:solidFill>
-                <a:latin typeface="Arial"/>
-              </a:rPr>
-              <a:t>One number became four. Now we can ask sharper questions.</a:t>
-            </a:r>
-          </a:p>
-        </p:txBody>
-      </p:sp>
-      <p:pic>
-        <p:nvPicPr>
-          <p:cNvPr id="8" name="Picture 7" descr="confusion.png"/>
-          <p:cNvPicPr>
-            <a:picLocks noChangeAspect="1"/>
-          </p:cNvPicPr>
-          <p:nvPr/>
-        </p:nvPicPr>
-        <p:blipFill>
-          <a:blip r:embed="rId2"/>
-          <a:stretch>
-            <a:fillRect/>
-          </a:stretch>
-        </p:blipFill>
-        <p:spPr>
-          <a:xfrm>
-            <a:off x="5587654" y="1874519"/>
-            <a:ext cx="5558211" cy="4114800"/>
-          </a:xfrm>
-          <a:prstGeom prst="rect">
-            <a:avLst/>
-          </a:prstGeom>
-        </p:spPr>
-      </p:pic>
-      <p:sp>
-        <p:nvSpPr>
-          <p:cNvPr id="9" name="TextBox 8"/>
+            <a:pPr algn="l">
+              <a:spcAft>
+                <a:spcPts val="600"/>
+              </a:spcAft>
+              <a:buNone/>
+            </a:pPr>
+            <a:r>
+              <a:rPr sz="1600" b="0">
+                <a:solidFill>
+                  <a:srgbClr val="B9D0FA"/>
+                </a:solidFill>
+                <a:latin typeface="Arial"/>
+              </a:rPr>
+              <a:t>When 99% right is 100% useless: the mistakes have names, so count all four kinds before you trust a score.</a:t>
+            </a:r>
+          </a:p>
+        </p:txBody>
+      </p:sp>
+      <p:sp>
+        <p:nvSpPr>
+          <p:cNvPr id="6" name="TextBox 5"/>
           <p:cNvSpPr txBox="1"/>
           <p:nvPr/>
         </p:nvSpPr>
         <p:spPr>
           <a:xfrm>
-            <a:off x="5120640" y="6062471"/>
-            <a:ext cx="6492240" cy="365760"/>
+            <a:off x="548640" y="6473952"/>
+            <a:ext cx="7315200" cy="292608"/>
           </a:xfrm>
           <a:prstGeom prst="rect">
             <a:avLst/>
@@ -10917,34 +10969,34 @@
           </a:bodyPr>
           <a:lstStyle/>
           <a:p>
-            <a:pPr algn="ctr">
+            <a:pPr algn="l">
               <a:spcAft>
                 <a:spcPts val="600"/>
               </a:spcAft>
               <a:buNone/>
             </a:pPr>
             <a:r>
-              <a:rPr sz="1100" b="0">
-                <a:solidFill>
-                  <a:srgbClr val="5B6774"/>
-                </a:solidFill>
-                <a:latin typeface="Arial"/>
-              </a:rPr>
-              <a:t>Logistic Regression, confusion matrix on the test set. Module 2, notebook 2.</a:t>
-            </a:r>
-          </a:p>
-        </p:txBody>
-      </p:sp>
-      <p:sp>
-        <p:nvSpPr>
-          <p:cNvPr id="10" name="TextBox 9"/>
+              <a:rPr sz="900" b="0">
+                <a:solidFill>
+                  <a:srgbClr val="B9D0FA"/>
+                </a:solidFill>
+                <a:latin typeface="Arial"/>
+              </a:rPr>
+              <a:t>M2 Session 3 - Model Selection and Evaluation</a:t>
+            </a:r>
+          </a:p>
+        </p:txBody>
+      </p:sp>
+      <p:sp>
+        <p:nvSpPr>
+          <p:cNvPr id="7" name="TextBox 6"/>
           <p:cNvSpPr txBox="1"/>
           <p:nvPr/>
         </p:nvSpPr>
         <p:spPr>
           <a:xfrm>
-            <a:off x="548640" y="6473952"/>
-            <a:ext cx="7315200" cy="292608"/>
+            <a:off x="11292840" y="6473952"/>
+            <a:ext cx="548640" cy="292608"/>
           </a:xfrm>
           <a:prstGeom prst="rect">
             <a:avLst/>
@@ -10957,7 +11009,7 @@
           </a:bodyPr>
           <a:lstStyle/>
           <a:p>
-            <a:pPr algn="l">
+            <a:pPr algn="r">
               <a:spcAft>
                 <a:spcPts val="600"/>
               </a:spcAft>
@@ -10966,47 +11018,7 @@
             <a:r>
               <a:rPr sz="900" b="0">
                 <a:solidFill>
-                  <a:srgbClr val="5B6774"/>
-                </a:solidFill>
-                <a:latin typeface="Arial"/>
-              </a:rPr>
-              <a:t>M2 Session 3 - Model Selection and Evaluation</a:t>
-            </a:r>
-          </a:p>
-        </p:txBody>
-      </p:sp>
-      <p:sp>
-        <p:nvSpPr>
-          <p:cNvPr id="11" name="TextBox 10"/>
-          <p:cNvSpPr txBox="1"/>
-          <p:nvPr/>
-        </p:nvSpPr>
-        <p:spPr>
-          <a:xfrm>
-            <a:off x="11292840" y="6473952"/>
-            <a:ext cx="548640" cy="292608"/>
-          </a:xfrm>
-          <a:prstGeom prst="rect">
-            <a:avLst/>
-          </a:prstGeom>
-          <a:noFill/>
-        </p:spPr>
-        <p:txBody>
-          <a:bodyPr wrap="square">
-            <a:spAutoFit/>
-          </a:bodyPr>
-          <a:lstStyle/>
-          <a:p>
-            <a:pPr algn="r">
-              <a:spcAft>
-                <a:spcPts val="600"/>
-              </a:spcAft>
-              <a:buNone/>
-            </a:pPr>
-            <a:r>
-              <a:rPr sz="900" b="0">
-                <a:solidFill>
-                  <a:srgbClr val="5B6774"/>
+                  <a:srgbClr val="B9D0FA"/>
                 </a:solidFill>
                 <a:latin typeface="Arial"/>
               </a:rPr>

--- a/presentations/m2-session-3-model-selection-and-evaluation.pptx
+++ b/presentations/m2-session-3-model-selection-and-evaluation.pptx
@@ -20,6 +20,12 @@
     <p:sldId id="268" r:id="rId19"/>
     <p:sldId id="269" r:id="rId20"/>
     <p:sldId id="270" r:id="rId21"/>
+    <p:sldId id="271" r:id="rId22"/>
+    <p:sldId id="272" r:id="rId23"/>
+    <p:sldId id="273" r:id="rId24"/>
+    <p:sldId id="274" r:id="rId25"/>
+    <p:sldId id="275" r:id="rId26"/>
+    <p:sldId id="276" r:id="rId27"/>
   </p:sldIdLst>
   <p:sldSz cx="12191695" cy="6858000" type="screen4x3"/>
   <p:notesSz cx="6858000" cy="9144000"/>
@@ -3491,7 +3497,7 @@
                 </a:solidFill>
                 <a:latin typeface="Arial"/>
               </a:rPr>
-              <a:t>THE 99% TRAP</a:t>
+              <a:t>ESTIMATING THE TRUE ERROR</a:t>
             </a:r>
           </a:p>
         </p:txBody>
@@ -3531,7 +3537,7 @@
                 </a:solidFill>
                 <a:latin typeface="Arial"/>
               </a:rPr>
-              <a:t>Accuracy can hide the mistakes that matter - the confusion matrix shows all four</a:t>
+              <a:t>Cross-validation gives every row a turn at being the test</a:t>
             </a:r>
           </a:p>
         </p:txBody>
@@ -3618,7 +3624,7 @@
                 </a:solidFill>
                 <a:latin typeface="Arial"/>
               </a:rPr>
-              <a:t>A disease hits 1 in 100 people. A model that always says "no disease" is 99% accurate - and worthless.</a:t>
+              <a:t>Training error flatters, so hold data out and measure there. One split can be lucky or unlucky - so rotate it: 5 folds, 5 rounds, each fold sits out once as the judge.</a:t>
             </a:r>
           </a:p>
           <a:p>
@@ -3638,7 +3644,7 @@
                 </a:solidFill>
                 <a:latin typeface="Arial"/>
               </a:rPr>
-              <a:t>Confusion matrix = a count of the four ways a prediction can go right or wrong - and every metric you will ever meet is just arithmetic on these four counts.</a:t>
+              <a:t>Five honest scores instead of one: we see the mean AND the wobble (std). One lucky split can flatter a model; five cannot.</a:t>
             </a:r>
           </a:p>
           <a:p>
@@ -3658,7 +3664,7 @@
                 </a:solidFill>
                 <a:latin typeface="Arial"/>
               </a:rPr>
-              <a:t>Our champion on the 179 test passengers: 99 correct "died" (TN), 51 correct "survived" (TP).</a:t>
+              <a:t>Subtle but crucial: CV evaluates the recipe (algorithm + settings), not one fitted model - CV scores the recipe, not the cake.</a:t>
             </a:r>
           </a:p>
           <a:p>
@@ -3678,7 +3684,7 @@
                 </a:solidFill>
                 <a:latin typeface="Arial"/>
               </a:rPr>
-              <a:t>11 false alarms (predicted survived, did not) and 18 missed survivors.</a:t>
+              <a:t>Why 5 folds? Fewer folds starve training; leave-one-out folds are nearly identical and their average gets noisy - 5 or 10 is the empirical sweet spot.</a:t>
             </a:r>
           </a:p>
           <a:p>
@@ -3698,14 +3704,14 @@
                 </a:solidFill>
                 <a:latin typeface="Arial"/>
               </a:rPr>
-              <a:t>One number became four. Now we can ask sharper questions.</a:t>
+              <a:t>The real test set is never touched - CV lives entirely inside the CHOOSE band.</a:t>
             </a:r>
           </a:p>
         </p:txBody>
       </p:sp>
       <p:pic>
         <p:nvPicPr>
-          <p:cNvPr id="8" name="Picture 7" descr="confusion.png"/>
+          <p:cNvPr id="8" name="Picture 7" descr="cv_folds.png"/>
           <p:cNvPicPr>
             <a:picLocks noChangeAspect="1"/>
           </p:cNvPicPr>
@@ -3719,8 +3725,8 @@
         </p:blipFill>
         <p:spPr>
           <a:xfrm>
-            <a:off x="5587654" y="1874519"/>
-            <a:ext cx="5558211" cy="4114800"/>
+            <a:off x="5120640" y="1874519"/>
+            <a:ext cx="6492240" cy="3654159"/>
           </a:xfrm>
           <a:prstGeom prst="rect">
             <a:avLst/>
@@ -3762,7 +3768,7 @@
                 </a:solidFill>
                 <a:latin typeface="Arial"/>
               </a:rPr>
-              <a:t>Logistic Regression, confusion matrix on the test set. Module 2, notebook 2. Harvard CS109A, Classification Metrics lecture.</a:t>
+              <a:t>5-fold cross-validation, the referee used throughout Part 2. MIT 6.390, Appendix C; Harvard CS109A / ISLR §5.1.</a:t>
             </a:r>
           </a:p>
         </p:txBody>
@@ -3880,7 +3886,7 @@
             <a:avLst/>
           </a:prstGeom>
           <a:solidFill>
-            <a:srgbClr val="FFFFFF"/>
+            <a:srgbClr val="0A2540"/>
           </a:solidFill>
           <a:ln>
             <a:noFill/>
@@ -3911,58 +3917,14 @@
       </p:sp>
       <p:sp>
         <p:nvSpPr>
-          <p:cNvPr id="3" name="Rectangle 2"/>
-          <p:cNvSpPr/>
-          <p:nvPr/>
-        </p:nvSpPr>
-        <p:spPr>
-          <a:xfrm>
-            <a:off x="548640" y="475488"/>
-            <a:ext cx="457200" cy="54864"/>
-          </a:xfrm>
-          <a:prstGeom prst="rect">
-            <a:avLst/>
-          </a:prstGeom>
-          <a:solidFill>
-            <a:srgbClr val="1E5EF3"/>
-          </a:solidFill>
-          <a:ln>
-            <a:noFill/>
-          </a:ln>
-          <a:effectLst/>
-        </p:spPr>
-        <p:style>
-          <a:lnRef idx="1">
-            <a:schemeClr val="accent1"/>
-          </a:lnRef>
-          <a:fillRef idx="3">
-            <a:schemeClr val="accent1"/>
-          </a:fillRef>
-          <a:effectRef idx="2">
-            <a:schemeClr val="accent1"/>
-          </a:effectRef>
-          <a:fontRef idx="minor">
-            <a:schemeClr val="lt1"/>
-          </a:fontRef>
-        </p:style>
-        <p:txBody>
-          <a:bodyPr rtlCol="0" anchor="ctr"/>
-          <a:lstStyle/>
-          <a:p>
-            <a:pPr algn="ctr"/>
-          </a:p>
-        </p:txBody>
-      </p:sp>
-      <p:sp>
-        <p:nvSpPr>
-          <p:cNvPr id="4" name="TextBox 3"/>
+          <p:cNvPr id="3" name="TextBox 2"/>
           <p:cNvSpPr txBox="1"/>
           <p:nvPr/>
         </p:nvSpPr>
         <p:spPr>
           <a:xfrm>
-            <a:off x="548640" y="603504"/>
-            <a:ext cx="11091672" cy="274320"/>
+            <a:off x="822960" y="1463040"/>
+            <a:ext cx="3657600" cy="2011680"/>
           </a:xfrm>
           <a:prstGeom prst="rect">
             <a:avLst/>
@@ -3982,27 +3944,27 @@
               <a:buNone/>
             </a:pPr>
             <a:r>
-              <a:rPr sz="1100" b="1">
+              <a:rPr sz="11000" b="1">
                 <a:solidFill>
                   <a:srgbClr val="1E5EF3"/>
                 </a:solidFill>
                 <a:latin typeface="Arial"/>
               </a:rPr>
-              <a:t>TWO KINDS OF MISTAKES</a:t>
-            </a:r>
-          </a:p>
-        </p:txBody>
-      </p:sp>
-      <p:sp>
-        <p:nvSpPr>
-          <p:cNvPr id="5" name="TextBox 4"/>
+              <a:t>02</a:t>
+            </a:r>
+          </a:p>
+        </p:txBody>
+      </p:sp>
+      <p:sp>
+        <p:nvSpPr>
+          <p:cNvPr id="4" name="TextBox 3"/>
           <p:cNvSpPr txBox="1"/>
           <p:nvPr/>
         </p:nvSpPr>
         <p:spPr>
           <a:xfrm>
-            <a:off x="548640" y="868680"/>
-            <a:ext cx="11091672" cy="777240"/>
+            <a:off x="868680" y="3566160"/>
+            <a:ext cx="10424160" cy="1280160"/>
           </a:xfrm>
           <a:prstGeom prst="rect">
             <a:avLst/>
@@ -4017,120 +3979,32 @@
           <a:p>
             <a:pPr algn="l">
               <a:spcAft>
-                <a:spcPts val="0"/>
-              </a:spcAft>
-              <a:buNone/>
-            </a:pPr>
-            <a:r>
-              <a:rPr sz="2600" b="1">
-                <a:solidFill>
-                  <a:srgbClr val="0A2540"/>
-                </a:solidFill>
-                <a:latin typeface="Arial"/>
-              </a:rPr>
-              <a:t>Precision and recall answer different questions - pick the one your problem asks</a:t>
-            </a:r>
-          </a:p>
-        </p:txBody>
-      </p:sp>
-      <p:sp>
-        <p:nvSpPr>
-          <p:cNvPr id="6" name="Rectangle 5"/>
-          <p:cNvSpPr/>
-          <p:nvPr/>
-        </p:nvSpPr>
-        <p:spPr>
-          <a:xfrm>
-            <a:off x="548640" y="1664208"/>
-            <a:ext cx="11091672" cy="12801"/>
-          </a:xfrm>
-          <a:prstGeom prst="rect">
-            <a:avLst/>
-          </a:prstGeom>
-          <a:solidFill>
-            <a:srgbClr val="B9D0FA"/>
-          </a:solidFill>
-          <a:ln>
-            <a:noFill/>
-          </a:ln>
-          <a:effectLst/>
-        </p:spPr>
-        <p:style>
-          <a:lnRef idx="1">
-            <a:schemeClr val="accent1"/>
-          </a:lnRef>
-          <a:fillRef idx="3">
-            <a:schemeClr val="accent1"/>
-          </a:fillRef>
-          <a:effectRef idx="2">
-            <a:schemeClr val="accent1"/>
-          </a:effectRef>
-          <a:fontRef idx="minor">
-            <a:schemeClr val="lt1"/>
-          </a:fontRef>
-        </p:style>
-        <p:txBody>
-          <a:bodyPr rtlCol="0" anchor="ctr"/>
-          <a:lstStyle/>
-          <a:p>
-            <a:pPr algn="ctr"/>
-          </a:p>
-        </p:txBody>
-      </p:sp>
-      <p:sp>
-        <p:nvSpPr>
-          <p:cNvPr id="7" name="Rectangle 6"/>
-          <p:cNvSpPr/>
-          <p:nvPr/>
-        </p:nvSpPr>
-        <p:spPr>
-          <a:xfrm>
-            <a:off x="548640" y="1874519"/>
-            <a:ext cx="5394960" cy="3977639"/>
-          </a:xfrm>
-          <a:prstGeom prst="rect">
-            <a:avLst/>
-          </a:prstGeom>
-          <a:solidFill>
-            <a:srgbClr val="EEF3FD"/>
-          </a:solidFill>
-          <a:ln>
-            <a:noFill/>
-          </a:ln>
-          <a:effectLst/>
-        </p:spPr>
-        <p:style>
-          <a:lnRef idx="1">
-            <a:schemeClr val="accent1"/>
-          </a:lnRef>
-          <a:fillRef idx="3">
-            <a:schemeClr val="accent1"/>
-          </a:fillRef>
-          <a:effectRef idx="2">
-            <a:schemeClr val="accent1"/>
-          </a:effectRef>
-          <a:fontRef idx="minor">
-            <a:schemeClr val="lt1"/>
-          </a:fontRef>
-        </p:style>
-        <p:txBody>
-          <a:bodyPr rtlCol="0" anchor="ctr"/>
-          <a:lstStyle/>
-          <a:p>
-            <a:pPr algn="ctr"/>
-          </a:p>
-        </p:txBody>
-      </p:sp>
-      <p:sp>
-        <p:nvSpPr>
-          <p:cNvPr id="8" name="TextBox 7"/>
+                <a:spcPts val="600"/>
+              </a:spcAft>
+              <a:buNone/>
+            </a:pPr>
+            <a:r>
+              <a:rPr sz="3400" b="1">
+                <a:solidFill>
+                  <a:srgbClr val="FFFFFF"/>
+                </a:solidFill>
+                <a:latin typeface="Arial"/>
+              </a:rPr>
+              <a:t>Part 2 - Practice: the tournament</a:t>
+            </a:r>
+          </a:p>
+        </p:txBody>
+      </p:sp>
+      <p:sp>
+        <p:nvSpPr>
+          <p:cNvPr id="5" name="TextBox 4"/>
           <p:cNvSpPr txBox="1"/>
           <p:nvPr/>
         </p:nvSpPr>
         <p:spPr>
           <a:xfrm>
-            <a:off x="777240" y="2039111"/>
-            <a:ext cx="4937760" cy="365760"/>
+            <a:off x="868680" y="4709160"/>
+            <a:ext cx="10058400" cy="914400"/>
           </a:xfrm>
           <a:prstGeom prst="rect">
             <a:avLst/>
@@ -4150,27 +4024,27 @@
               <a:buNone/>
             </a:pPr>
             <a:r>
-              <a:rPr sz="1500" b="1">
-                <a:solidFill>
-                  <a:srgbClr val="0A2540"/>
-                </a:solidFill>
-                <a:latin typeface="Arial"/>
-              </a:rPr>
-              <a:t>Precision 0.823 - trust our alarms</a:t>
-            </a:r>
-          </a:p>
-        </p:txBody>
-      </p:sp>
-      <p:sp>
-        <p:nvSpPr>
-          <p:cNvPr id="9" name="TextBox 8"/>
+              <a:rPr sz="1600" b="0">
+                <a:solidFill>
+                  <a:srgbClr val="B9D0FA"/>
+                </a:solidFill>
+                <a:latin typeface="Arial"/>
+              </a:rPr>
+              <a:t>Six contestants, one fair referee, one locked test set - Part 1's theory, run for real on the Titanic manifest.</a:t>
+            </a:r>
+          </a:p>
+        </p:txBody>
+      </p:sp>
+      <p:sp>
+        <p:nvSpPr>
+          <p:cNvPr id="6" name="TextBox 5"/>
           <p:cNvSpPr txBox="1"/>
           <p:nvPr/>
         </p:nvSpPr>
         <p:spPr>
           <a:xfrm>
-            <a:off x="777240" y="2441447"/>
-            <a:ext cx="4937760" cy="3246119"/>
+            <a:off x="548640" y="6473952"/>
+            <a:ext cx="7315200" cy="292608"/>
           </a:xfrm>
           <a:prstGeom prst="rect">
             <a:avLst/>
@@ -4183,141 +4057,34 @@
           </a:bodyPr>
           <a:lstStyle/>
           <a:p>
-            <a:pPr algn="l" indent="-228600" marL="228600">
+            <a:pPr algn="l">
               <a:spcAft>
                 <a:spcPts val="600"/>
               </a:spcAft>
-              <a:buClr>
-                <a:srgbClr val="1E5EF3"/>
-              </a:buClr>
-              <a:buChar char="—"/>
-            </a:pPr>
-            <a:r>
-              <a:rPr sz="1300" b="0">
-                <a:solidFill>
-                  <a:srgbClr val="202B38"/>
-                </a:solidFill>
-                <a:latin typeface="Arial"/>
-              </a:rPr>
-              <a:t>"Of everyone we said survives, how many actually did?"</a:t>
-            </a:r>
-          </a:p>
-          <a:p>
-            <a:pPr algn="l" indent="-228600" marL="228600">
-              <a:spcAft>
-                <a:spcPts val="600"/>
-              </a:spcAft>
-              <a:buClr>
-                <a:srgbClr val="1E5EF3"/>
-              </a:buClr>
-              <a:buChar char="—"/>
-            </a:pPr>
-            <a:r>
-              <a:rPr sz="1300" b="0">
-                <a:solidFill>
-                  <a:srgbClr val="202B38"/>
-                </a:solidFill>
-                <a:latin typeface="Arial"/>
-              </a:rPr>
-              <a:t>TP / (TP + FP) = 51 / (51 + 11) = 0.823</a:t>
-            </a:r>
-          </a:p>
-          <a:p>
-            <a:pPr algn="l" indent="-228600" marL="228600">
-              <a:spcAft>
-                <a:spcPts val="600"/>
-              </a:spcAft>
-              <a:buClr>
-                <a:srgbClr val="1E5EF3"/>
-              </a:buClr>
-              <a:buChar char="—"/>
-            </a:pPr>
-            <a:r>
-              <a:rPr sz="1300" b="0">
-                <a:solidFill>
-                  <a:srgbClr val="202B38"/>
-                </a:solidFill>
-                <a:latin typeface="Arial"/>
-              </a:rPr>
-              <a:t>High precision = few false alarms.</a:t>
-            </a:r>
-          </a:p>
-          <a:p>
-            <a:pPr algn="l" indent="-228600" marL="228600">
-              <a:spcAft>
-                <a:spcPts val="600"/>
-              </a:spcAft>
-              <a:buClr>
-                <a:srgbClr val="1E5EF3"/>
-              </a:buClr>
-              <a:buChar char="—"/>
-            </a:pPr>
-            <a:r>
-              <a:rPr sz="1300" b="0">
-                <a:solidFill>
-                  <a:srgbClr val="202B38"/>
-                </a:solidFill>
-                <a:latin typeface="Arial"/>
-              </a:rPr>
-              <a:t>Spam filter: a false alarm buries real mail. Precision first.</a:t>
-            </a:r>
-          </a:p>
-        </p:txBody>
-      </p:sp>
-      <p:sp>
-        <p:nvSpPr>
-          <p:cNvPr id="10" name="Rectangle 9"/>
-          <p:cNvSpPr/>
-          <p:nvPr/>
-        </p:nvSpPr>
-        <p:spPr>
-          <a:xfrm>
-            <a:off x="6245352" y="1874519"/>
-            <a:ext cx="5394960" cy="3977639"/>
-          </a:xfrm>
-          <a:prstGeom prst="rect">
-            <a:avLst/>
-          </a:prstGeom>
-          <a:solidFill>
-            <a:srgbClr val="EEF3FD"/>
-          </a:solidFill>
-          <a:ln>
-            <a:noFill/>
-          </a:ln>
-          <a:effectLst/>
-        </p:spPr>
-        <p:style>
-          <a:lnRef idx="1">
-            <a:schemeClr val="accent1"/>
-          </a:lnRef>
-          <a:fillRef idx="3">
-            <a:schemeClr val="accent1"/>
-          </a:fillRef>
-          <a:effectRef idx="2">
-            <a:schemeClr val="accent1"/>
-          </a:effectRef>
-          <a:fontRef idx="minor">
-            <a:schemeClr val="lt1"/>
-          </a:fontRef>
-        </p:style>
-        <p:txBody>
-          <a:bodyPr rtlCol="0" anchor="ctr"/>
-          <a:lstStyle/>
-          <a:p>
-            <a:pPr algn="ctr"/>
-          </a:p>
-        </p:txBody>
-      </p:sp>
-      <p:sp>
-        <p:nvSpPr>
-          <p:cNvPr id="11" name="TextBox 10"/>
+              <a:buNone/>
+            </a:pPr>
+            <a:r>
+              <a:rPr sz="900" b="0">
+                <a:solidFill>
+                  <a:srgbClr val="B9D0FA"/>
+                </a:solidFill>
+                <a:latin typeface="Arial"/>
+              </a:rPr>
+              <a:t>M2 Session 3 - Model Selection and Evaluation</a:t>
+            </a:r>
+          </a:p>
+        </p:txBody>
+      </p:sp>
+      <p:sp>
+        <p:nvSpPr>
+          <p:cNvPr id="7" name="TextBox 6"/>
           <p:cNvSpPr txBox="1"/>
           <p:nvPr/>
         </p:nvSpPr>
         <p:spPr>
           <a:xfrm>
-            <a:off x="6473952" y="2039111"/>
-            <a:ext cx="4937760" cy="365760"/>
+            <a:off x="11292840" y="6473952"/>
+            <a:ext cx="548640" cy="292608"/>
           </a:xfrm>
           <a:prstGeom prst="rect">
             <a:avLst/>
@@ -4330,239 +4097,16 @@
           </a:bodyPr>
           <a:lstStyle/>
           <a:p>
-            <a:pPr algn="l">
+            <a:pPr algn="r">
               <a:spcAft>
                 <a:spcPts val="600"/>
               </a:spcAft>
               <a:buNone/>
             </a:pPr>
             <a:r>
-              <a:rPr sz="1500" b="1">
-                <a:solidFill>
-                  <a:srgbClr val="0A2540"/>
-                </a:solidFill>
-                <a:latin typeface="Arial"/>
-              </a:rPr>
-              <a:t>Recall 0.739 - catch them all</a:t>
-            </a:r>
-          </a:p>
-        </p:txBody>
-      </p:sp>
-      <p:sp>
-        <p:nvSpPr>
-          <p:cNvPr id="12" name="TextBox 11"/>
-          <p:cNvSpPr txBox="1"/>
-          <p:nvPr/>
-        </p:nvSpPr>
-        <p:spPr>
-          <a:xfrm>
-            <a:off x="6473952" y="2441447"/>
-            <a:ext cx="4937760" cy="3246119"/>
-          </a:xfrm>
-          <a:prstGeom prst="rect">
-            <a:avLst/>
-          </a:prstGeom>
-          <a:noFill/>
-        </p:spPr>
-        <p:txBody>
-          <a:bodyPr wrap="square">
-            <a:spAutoFit/>
-          </a:bodyPr>
-          <a:lstStyle/>
-          <a:p>
-            <a:pPr algn="l" indent="-228600" marL="228600">
-              <a:spcAft>
-                <a:spcPts val="600"/>
-              </a:spcAft>
-              <a:buClr>
-                <a:srgbClr val="1E5EF3"/>
-              </a:buClr>
-              <a:buChar char="—"/>
-            </a:pPr>
-            <a:r>
-              <a:rPr sz="1300" b="0">
-                <a:solidFill>
-                  <a:srgbClr val="202B38"/>
-                </a:solidFill>
-                <a:latin typeface="Arial"/>
-              </a:rPr>
-              <a:t>"Of everyone who actually survived, how many did we catch?"</a:t>
-            </a:r>
-          </a:p>
-          <a:p>
-            <a:pPr algn="l" indent="-228600" marL="228600">
-              <a:spcAft>
-                <a:spcPts val="600"/>
-              </a:spcAft>
-              <a:buClr>
-                <a:srgbClr val="1E5EF3"/>
-              </a:buClr>
-              <a:buChar char="—"/>
-            </a:pPr>
-            <a:r>
-              <a:rPr sz="1300" b="0">
-                <a:solidFill>
-                  <a:srgbClr val="202B38"/>
-                </a:solidFill>
-                <a:latin typeface="Arial"/>
-              </a:rPr>
-              <a:t>TP / (TP + FN) = 51 / (51 + 18) = 0.739</a:t>
-            </a:r>
-          </a:p>
-          <a:p>
-            <a:pPr algn="l" indent="-228600" marL="228600">
-              <a:spcAft>
-                <a:spcPts val="600"/>
-              </a:spcAft>
-              <a:buClr>
-                <a:srgbClr val="1E5EF3"/>
-              </a:buClr>
-              <a:buChar char="—"/>
-            </a:pPr>
-            <a:r>
-              <a:rPr sz="1300" b="0">
-                <a:solidFill>
-                  <a:srgbClr val="202B38"/>
-                </a:solidFill>
-                <a:latin typeface="Arial"/>
-              </a:rPr>
-              <a:t>High recall = few missed cases.</a:t>
-            </a:r>
-          </a:p>
-          <a:p>
-            <a:pPr algn="l" indent="-228600" marL="228600">
-              <a:spcAft>
-                <a:spcPts val="600"/>
-              </a:spcAft>
-              <a:buClr>
-                <a:srgbClr val="1E5EF3"/>
-              </a:buClr>
-              <a:buChar char="—"/>
-            </a:pPr>
-            <a:r>
-              <a:rPr sz="1300" b="0">
-                <a:solidFill>
-                  <a:srgbClr val="202B38"/>
-                </a:solidFill>
-                <a:latin typeface="Arial"/>
-              </a:rPr>
-              <a:t>Cancer screening: a missed case is the disaster. Recall first.</a:t>
-            </a:r>
-          </a:p>
-        </p:txBody>
-      </p:sp>
-      <p:sp>
-        <p:nvSpPr>
-          <p:cNvPr id="13" name="TextBox 12"/>
-          <p:cNvSpPr txBox="1"/>
-          <p:nvPr/>
-        </p:nvSpPr>
-        <p:spPr>
-          <a:xfrm>
-            <a:off x="548640" y="6053328"/>
-            <a:ext cx="11091672" cy="502920"/>
-          </a:xfrm>
-          <a:prstGeom prst="rect">
-            <a:avLst/>
-          </a:prstGeom>
-          <a:noFill/>
-        </p:spPr>
-        <p:txBody>
-          <a:bodyPr wrap="square">
-            <a:spAutoFit/>
-          </a:bodyPr>
-          <a:lstStyle/>
-          <a:p>
-            <a:pPr algn="l">
-              <a:spcAft>
-                <a:spcPts val="600"/>
-              </a:spcAft>
-              <a:buNone/>
-            </a:pPr>
-            <a:r>
-              <a:rPr sz="1200" b="0">
-                <a:solidFill>
-                  <a:srgbClr val="1E5EF3"/>
-                </a:solidFill>
-                <a:latin typeface="Arial"/>
-              </a:rPr>
-              <a:t>F1 = harmonic mean of both = 0.779, high only when both are decent. Metric pairing after Andrew Ng's Machine Learning Specialization (C2, W3).</a:t>
-            </a:r>
-          </a:p>
-        </p:txBody>
-      </p:sp>
-      <p:sp>
-        <p:nvSpPr>
-          <p:cNvPr id="14" name="TextBox 13"/>
-          <p:cNvSpPr txBox="1"/>
-          <p:nvPr/>
-        </p:nvSpPr>
-        <p:spPr>
-          <a:xfrm>
-            <a:off x="548640" y="6473952"/>
-            <a:ext cx="7315200" cy="292608"/>
-          </a:xfrm>
-          <a:prstGeom prst="rect">
-            <a:avLst/>
-          </a:prstGeom>
-          <a:noFill/>
-        </p:spPr>
-        <p:txBody>
-          <a:bodyPr wrap="square">
-            <a:spAutoFit/>
-          </a:bodyPr>
-          <a:lstStyle/>
-          <a:p>
-            <a:pPr algn="l">
-              <a:spcAft>
-                <a:spcPts val="600"/>
-              </a:spcAft>
-              <a:buNone/>
-            </a:pPr>
-            <a:r>
               <a:rPr sz="900" b="0">
                 <a:solidFill>
-                  <a:srgbClr val="5B6774"/>
-                </a:solidFill>
-                <a:latin typeface="Arial"/>
-              </a:rPr>
-              <a:t>M2 Session 3 - Model Selection and Evaluation</a:t>
-            </a:r>
-          </a:p>
-        </p:txBody>
-      </p:sp>
-      <p:sp>
-        <p:nvSpPr>
-          <p:cNvPr id="15" name="TextBox 14"/>
-          <p:cNvSpPr txBox="1"/>
-          <p:nvPr/>
-        </p:nvSpPr>
-        <p:spPr>
-          <a:xfrm>
-            <a:off x="11292840" y="6473952"/>
-            <a:ext cx="548640" cy="292608"/>
-          </a:xfrm>
-          <a:prstGeom prst="rect">
-            <a:avLst/>
-          </a:prstGeom>
-          <a:noFill/>
-        </p:spPr>
-        <p:txBody>
-          <a:bodyPr wrap="square">
-            <a:spAutoFit/>
-          </a:bodyPr>
-          <a:lstStyle/>
-          <a:p>
-            <a:pPr algn="r">
-              <a:spcAft>
-                <a:spcPts val="600"/>
-              </a:spcAft>
-              <a:buNone/>
-            </a:pPr>
-            <a:r>
-              <a:rPr sz="900" b="0">
-                <a:solidFill>
-                  <a:srgbClr val="5B6774"/>
+                  <a:srgbClr val="B9D0FA"/>
                 </a:solidFill>
                 <a:latin typeface="Arial"/>
               </a:rPr>
@@ -4580,2586 +4124,6 @@
 </file>
 
 <file path=ppt/slides/slide12.xml><?xml version="1.0" encoding="utf-8"?>
-<p:sld xmlns:a="http://schemas.openxmlformats.org/drawingml/2006/main" xmlns:p="http://schemas.openxmlformats.org/presentationml/2006/main" xmlns:r="http://schemas.openxmlformats.org/officeDocument/2006/relationships">
-  <p:cSld>
-    <p:spTree>
-      <p:nvGrpSpPr>
-        <p:cNvPr id="1" name=""/>
-        <p:cNvGrpSpPr/>
-        <p:nvPr/>
-      </p:nvGrpSpPr>
-      <p:grpSpPr/>
-      <p:sp>
-        <p:nvSpPr>
-          <p:cNvPr id="2" name="Rectangle 1"/>
-          <p:cNvSpPr/>
-          <p:nvPr/>
-        </p:nvSpPr>
-        <p:spPr>
-          <a:xfrm>
-            <a:off x="0" y="0"/>
-            <a:ext cx="12191695" cy="6858000"/>
-          </a:xfrm>
-          <a:prstGeom prst="rect">
-            <a:avLst/>
-          </a:prstGeom>
-          <a:solidFill>
-            <a:srgbClr val="FFFFFF"/>
-          </a:solidFill>
-          <a:ln>
-            <a:noFill/>
-          </a:ln>
-          <a:effectLst/>
-        </p:spPr>
-        <p:style>
-          <a:lnRef idx="1">
-            <a:schemeClr val="accent1"/>
-          </a:lnRef>
-          <a:fillRef idx="3">
-            <a:schemeClr val="accent1"/>
-          </a:fillRef>
-          <a:effectRef idx="2">
-            <a:schemeClr val="accent1"/>
-          </a:effectRef>
-          <a:fontRef idx="minor">
-            <a:schemeClr val="lt1"/>
-          </a:fontRef>
-        </p:style>
-        <p:txBody>
-          <a:bodyPr rtlCol="0" anchor="ctr"/>
-          <a:lstStyle/>
-          <a:p>
-            <a:pPr algn="ctr"/>
-          </a:p>
-        </p:txBody>
-      </p:sp>
-      <p:sp>
-        <p:nvSpPr>
-          <p:cNvPr id="3" name="Rectangle 2"/>
-          <p:cNvSpPr/>
-          <p:nvPr/>
-        </p:nvSpPr>
-        <p:spPr>
-          <a:xfrm>
-            <a:off x="548640" y="475488"/>
-            <a:ext cx="457200" cy="54864"/>
-          </a:xfrm>
-          <a:prstGeom prst="rect">
-            <a:avLst/>
-          </a:prstGeom>
-          <a:solidFill>
-            <a:srgbClr val="1E5EF3"/>
-          </a:solidFill>
-          <a:ln>
-            <a:noFill/>
-          </a:ln>
-          <a:effectLst/>
-        </p:spPr>
-        <p:style>
-          <a:lnRef idx="1">
-            <a:schemeClr val="accent1"/>
-          </a:lnRef>
-          <a:fillRef idx="3">
-            <a:schemeClr val="accent1"/>
-          </a:fillRef>
-          <a:effectRef idx="2">
-            <a:schemeClr val="accent1"/>
-          </a:effectRef>
-          <a:fontRef idx="minor">
-            <a:schemeClr val="lt1"/>
-          </a:fontRef>
-        </p:style>
-        <p:txBody>
-          <a:bodyPr rtlCol="0" anchor="ctr"/>
-          <a:lstStyle/>
-          <a:p>
-            <a:pPr algn="ctr"/>
-          </a:p>
-        </p:txBody>
-      </p:sp>
-      <p:sp>
-        <p:nvSpPr>
-          <p:cNvPr id="4" name="TextBox 3"/>
-          <p:cNvSpPr txBox="1"/>
-          <p:nvPr/>
-        </p:nvSpPr>
-        <p:spPr>
-          <a:xfrm>
-            <a:off x="548640" y="603504"/>
-            <a:ext cx="11091672" cy="274320"/>
-          </a:xfrm>
-          <a:prstGeom prst="rect">
-            <a:avLst/>
-          </a:prstGeom>
-          <a:noFill/>
-        </p:spPr>
-        <p:txBody>
-          <a:bodyPr wrap="square">
-            <a:spAutoFit/>
-          </a:bodyPr>
-          <a:lstStyle/>
-          <a:p>
-            <a:pPr algn="l">
-              <a:spcAft>
-                <a:spcPts val="600"/>
-              </a:spcAft>
-              <a:buNone/>
-            </a:pPr>
-            <a:r>
-              <a:rPr sz="1100" b="1">
-                <a:solidFill>
-                  <a:srgbClr val="1E5EF3"/>
-                </a:solidFill>
-                <a:latin typeface="Arial"/>
-              </a:rPr>
-              <a:t>BIAS AND VARIANCE, NAMED</a:t>
-            </a:r>
-          </a:p>
-        </p:txBody>
-      </p:sp>
-      <p:sp>
-        <p:nvSpPr>
-          <p:cNvPr id="5" name="TextBox 4"/>
-          <p:cNvSpPr txBox="1"/>
-          <p:nvPr/>
-        </p:nvSpPr>
-        <p:spPr>
-          <a:xfrm>
-            <a:off x="548640" y="868680"/>
-            <a:ext cx="11091672" cy="777240"/>
-          </a:xfrm>
-          <a:prstGeom prst="rect">
-            <a:avLst/>
-          </a:prstGeom>
-          <a:noFill/>
-        </p:spPr>
-        <p:txBody>
-          <a:bodyPr wrap="square">
-            <a:spAutoFit/>
-          </a:bodyPr>
-          <a:lstStyle/>
-          <a:p>
-            <a:pPr algn="l">
-              <a:spcAft>
-                <a:spcPts val="0"/>
-              </a:spcAft>
-              <a:buNone/>
-            </a:pPr>
-            <a:r>
-              <a:rPr sz="2600" b="1">
-                <a:solidFill>
-                  <a:srgbClr val="0A2540"/>
-                </a:solidFill>
-                <a:latin typeface="Arial"/>
-              </a:rPr>
-              <a:t>Overfitting made visible: past depth 3, the tree memorizes instead of learning</a:t>
-            </a:r>
-          </a:p>
-        </p:txBody>
-      </p:sp>
-      <p:sp>
-        <p:nvSpPr>
-          <p:cNvPr id="6" name="Rectangle 5"/>
-          <p:cNvSpPr/>
-          <p:nvPr/>
-        </p:nvSpPr>
-        <p:spPr>
-          <a:xfrm>
-            <a:off x="548640" y="1664208"/>
-            <a:ext cx="11091672" cy="12801"/>
-          </a:xfrm>
-          <a:prstGeom prst="rect">
-            <a:avLst/>
-          </a:prstGeom>
-          <a:solidFill>
-            <a:srgbClr val="B9D0FA"/>
-          </a:solidFill>
-          <a:ln>
-            <a:noFill/>
-          </a:ln>
-          <a:effectLst/>
-        </p:spPr>
-        <p:style>
-          <a:lnRef idx="1">
-            <a:schemeClr val="accent1"/>
-          </a:lnRef>
-          <a:fillRef idx="3">
-            <a:schemeClr val="accent1"/>
-          </a:fillRef>
-          <a:effectRef idx="2">
-            <a:schemeClr val="accent1"/>
-          </a:effectRef>
-          <a:fontRef idx="minor">
-            <a:schemeClr val="lt1"/>
-          </a:fontRef>
-        </p:style>
-        <p:txBody>
-          <a:bodyPr rtlCol="0" anchor="ctr"/>
-          <a:lstStyle/>
-          <a:p>
-            <a:pPr algn="ctr"/>
-          </a:p>
-        </p:txBody>
-      </p:sp>
-      <p:sp>
-        <p:nvSpPr>
-          <p:cNvPr id="7" name="TextBox 6"/>
-          <p:cNvSpPr txBox="1"/>
-          <p:nvPr/>
-        </p:nvSpPr>
-        <p:spPr>
-          <a:xfrm>
-            <a:off x="548640" y="1874519"/>
-            <a:ext cx="4297680" cy="4206240"/>
-          </a:xfrm>
-          <a:prstGeom prst="rect">
-            <a:avLst/>
-          </a:prstGeom>
-          <a:noFill/>
-        </p:spPr>
-        <p:txBody>
-          <a:bodyPr wrap="square">
-            <a:spAutoFit/>
-          </a:bodyPr>
-          <a:lstStyle/>
-          <a:p>
-            <a:pPr algn="l" indent="-228600" marL="228600">
-              <a:spcAft>
-                <a:spcPts val="800"/>
-              </a:spcAft>
-              <a:buClr>
-                <a:srgbClr val="1E5EF3"/>
-              </a:buClr>
-              <a:buChar char="—"/>
-            </a:pPr>
-            <a:r>
-              <a:rPr sz="1450" b="0">
-                <a:solidFill>
-                  <a:srgbClr val="202B38"/>
-                </a:solidFill>
-                <a:latin typeface="Arial"/>
-              </a:rPr>
-              <a:t>Grow the tree one level at a time. Training accuracy climbs to 0.985 and never looks back.</a:t>
-            </a:r>
-          </a:p>
-          <a:p>
-            <a:pPr algn="l" indent="-228600" marL="228600">
-              <a:spcAft>
-                <a:spcPts val="800"/>
-              </a:spcAft>
-              <a:buClr>
-                <a:srgbClr val="1E5EF3"/>
-              </a:buClr>
-              <a:buChar char="—"/>
-            </a:pPr>
-            <a:r>
-              <a:rPr sz="1450" b="0">
-                <a:solidFill>
-                  <a:srgbClr val="202B38"/>
-                </a:solidFill>
-                <a:latin typeface="Arial"/>
-              </a:rPr>
-              <a:t>The honest CV score peaks at 0.815 at depth 3, then slides. At depth 20 the gap is 0.236 - memorizing, not learning.</a:t>
-            </a:r>
-          </a:p>
-          <a:p>
-            <a:pPr algn="l" indent="-228600" marL="228600">
-              <a:spcAft>
-                <a:spcPts val="800"/>
-              </a:spcAft>
-              <a:buClr>
-                <a:srgbClr val="1E5EF3"/>
-              </a:buClr>
-              <a:buChar char="—"/>
-            </a:pPr>
-            <a:r>
-              <a:rPr sz="1450" b="0">
-                <a:solidFill>
-                  <a:srgbClr val="202B38"/>
-                </a:solidFill>
-                <a:latin typeface="Arial"/>
-              </a:rPr>
-              <a:t>MIT's names make the tradeoff mechanical: more flexibility lowers structural error and raises estimation error - every dial in Session 4 moves this dial.</a:t>
-            </a:r>
-          </a:p>
-          <a:p>
-            <a:pPr algn="l" indent="-228600" marL="228600">
-              <a:spcAft>
-                <a:spcPts val="800"/>
-              </a:spcAft>
-              <a:buClr>
-                <a:srgbClr val="1E5EF3"/>
-              </a:buClr>
-              <a:buChar char="—"/>
-            </a:pPr>
-            <a:r>
-              <a:rPr sz="1450" b="0">
-                <a:solidFill>
-                  <a:srgbClr val="202B38"/>
-                </a:solidFill>
-                <a:latin typeface="Arial"/>
-              </a:rPr>
-              <a:t>The outcome is a hidden rule plus noise: Y = f(X) + ε. Learning estimates the rule; nothing can predict the noise. Error you can shrink is reducible; the noise floor is irreducible.</a:t>
-            </a:r>
-          </a:p>
-          <a:p>
-            <a:pPr algn="l" indent="-228600" marL="228600">
-              <a:spcAft>
-                <a:spcPts val="800"/>
-              </a:spcAft>
-              <a:buClr>
-                <a:srgbClr val="1E5EF3"/>
-              </a:buClr>
-              <a:buChar char="—"/>
-            </a:pPr>
-            <a:r>
-              <a:rPr sz="1450" b="0">
-                <a:solidFill>
-                  <a:srgbClr val="202B38"/>
-                </a:solidFill>
-                <a:latin typeface="Arial"/>
-              </a:rPr>
-              <a:t>Why does the honest curve peak at 0.815, not 1.00? Session 1's grey bar: ε. The rest is noise nobody can predict.</a:t>
-            </a:r>
-          </a:p>
-        </p:txBody>
-      </p:sp>
-      <p:pic>
-        <p:nvPicPr>
-          <p:cNvPr id="8" name="Picture 7" descr="depth_sweep.png"/>
-          <p:cNvPicPr>
-            <a:picLocks noChangeAspect="1"/>
-          </p:cNvPicPr>
-          <p:nvPr/>
-        </p:nvPicPr>
-        <p:blipFill>
-          <a:blip r:embed="rId2"/>
-          <a:stretch>
-            <a:fillRect/>
-          </a:stretch>
-        </p:blipFill>
-        <p:spPr>
-          <a:xfrm>
-            <a:off x="5120640" y="1874519"/>
-            <a:ext cx="6492240" cy="3951584"/>
-          </a:xfrm>
-          <a:prstGeom prst="rect">
-            <a:avLst/>
-          </a:prstGeom>
-        </p:spPr>
-      </p:pic>
-      <p:sp>
-        <p:nvSpPr>
-          <p:cNvPr id="9" name="TextBox 8"/>
-          <p:cNvSpPr txBox="1"/>
-          <p:nvPr/>
-        </p:nvSpPr>
-        <p:spPr>
-          <a:xfrm>
-            <a:off x="5120640" y="6062471"/>
-            <a:ext cx="6492240" cy="365760"/>
-          </a:xfrm>
-          <a:prstGeom prst="rect">
-            <a:avLst/>
-          </a:prstGeom>
-          <a:noFill/>
-        </p:spPr>
-        <p:txBody>
-          <a:bodyPr wrap="square">
-            <a:spAutoFit/>
-          </a:bodyPr>
-          <a:lstStyle/>
-          <a:p>
-            <a:pPr algn="ctr">
-              <a:spcAft>
-                <a:spcPts val="600"/>
-              </a:spcAft>
-              <a:buNone/>
-            </a:pPr>
-            <a:r>
-              <a:rPr sz="1100" b="0">
-                <a:solidFill>
-                  <a:srgbClr val="5B6774"/>
-                </a:solidFill>
-                <a:latin typeface="Arial"/>
-              </a:rPr>
-              <a:t>Decision tree, max_depth 1-20, train vs 5-fold CV accuracy. Module 2, notebook 2. MIT 6.390, ch. 2 &amp; ch. 5; Harvard CS109A / ISLR ch. 2.</a:t>
-            </a:r>
-          </a:p>
-        </p:txBody>
-      </p:sp>
-      <p:sp>
-        <p:nvSpPr>
-          <p:cNvPr id="10" name="TextBox 9"/>
-          <p:cNvSpPr txBox="1"/>
-          <p:nvPr/>
-        </p:nvSpPr>
-        <p:spPr>
-          <a:xfrm>
-            <a:off x="548640" y="6473952"/>
-            <a:ext cx="7315200" cy="292608"/>
-          </a:xfrm>
-          <a:prstGeom prst="rect">
-            <a:avLst/>
-          </a:prstGeom>
-          <a:noFill/>
-        </p:spPr>
-        <p:txBody>
-          <a:bodyPr wrap="square">
-            <a:spAutoFit/>
-          </a:bodyPr>
-          <a:lstStyle/>
-          <a:p>
-            <a:pPr algn="l">
-              <a:spcAft>
-                <a:spcPts val="600"/>
-              </a:spcAft>
-              <a:buNone/>
-            </a:pPr>
-            <a:r>
-              <a:rPr sz="900" b="0">
-                <a:solidFill>
-                  <a:srgbClr val="5B6774"/>
-                </a:solidFill>
-                <a:latin typeface="Arial"/>
-              </a:rPr>
-              <a:t>M2 Session 3 - Model Selection and Evaluation</a:t>
-            </a:r>
-          </a:p>
-        </p:txBody>
-      </p:sp>
-      <p:sp>
-        <p:nvSpPr>
-          <p:cNvPr id="11" name="TextBox 10"/>
-          <p:cNvSpPr txBox="1"/>
-          <p:nvPr/>
-        </p:nvSpPr>
-        <p:spPr>
-          <a:xfrm>
-            <a:off x="11292840" y="6473952"/>
-            <a:ext cx="548640" cy="292608"/>
-          </a:xfrm>
-          <a:prstGeom prst="rect">
-            <a:avLst/>
-          </a:prstGeom>
-          <a:noFill/>
-        </p:spPr>
-        <p:txBody>
-          <a:bodyPr wrap="square">
-            <a:spAutoFit/>
-          </a:bodyPr>
-          <a:lstStyle/>
-          <a:p>
-            <a:pPr algn="r">
-              <a:spcAft>
-                <a:spcPts val="600"/>
-              </a:spcAft>
-              <a:buNone/>
-            </a:pPr>
-            <a:r>
-              <a:rPr sz="900" b="0">
-                <a:solidFill>
-                  <a:srgbClr val="5B6774"/>
-                </a:solidFill>
-                <a:latin typeface="Arial"/>
-              </a:rPr>
-              <a:t>12</a:t>
-            </a:r>
-          </a:p>
-        </p:txBody>
-      </p:sp>
-    </p:spTree>
-  </p:cSld>
-  <p:clrMapOvr>
-    <a:masterClrMapping/>
-  </p:clrMapOvr>
-</p:sld>
-</file>
-
-<file path=ppt/slides/slide13.xml><?xml version="1.0" encoding="utf-8"?>
-<p:sld xmlns:a="http://schemas.openxmlformats.org/drawingml/2006/main" xmlns:p="http://schemas.openxmlformats.org/presentationml/2006/main" xmlns:r="http://schemas.openxmlformats.org/officeDocument/2006/relationships">
-  <p:cSld>
-    <p:spTree>
-      <p:nvGrpSpPr>
-        <p:cNvPr id="1" name=""/>
-        <p:cNvGrpSpPr/>
-        <p:nvPr/>
-      </p:nvGrpSpPr>
-      <p:grpSpPr/>
-      <p:sp>
-        <p:nvSpPr>
-          <p:cNvPr id="2" name="Rectangle 1"/>
-          <p:cNvSpPr/>
-          <p:nvPr/>
-        </p:nvSpPr>
-        <p:spPr>
-          <a:xfrm>
-            <a:off x="0" y="0"/>
-            <a:ext cx="12191695" cy="6858000"/>
-          </a:xfrm>
-          <a:prstGeom prst="rect">
-            <a:avLst/>
-          </a:prstGeom>
-          <a:solidFill>
-            <a:srgbClr val="FFFFFF"/>
-          </a:solidFill>
-          <a:ln>
-            <a:noFill/>
-          </a:ln>
-          <a:effectLst/>
-        </p:spPr>
-        <p:style>
-          <a:lnRef idx="1">
-            <a:schemeClr val="accent1"/>
-          </a:lnRef>
-          <a:fillRef idx="3">
-            <a:schemeClr val="accent1"/>
-          </a:fillRef>
-          <a:effectRef idx="2">
-            <a:schemeClr val="accent1"/>
-          </a:effectRef>
-          <a:fontRef idx="minor">
-            <a:schemeClr val="lt1"/>
-          </a:fontRef>
-        </p:style>
-        <p:txBody>
-          <a:bodyPr rtlCol="0" anchor="ctr"/>
-          <a:lstStyle/>
-          <a:p>
-            <a:pPr algn="ctr"/>
-          </a:p>
-        </p:txBody>
-      </p:sp>
-      <p:sp>
-        <p:nvSpPr>
-          <p:cNvPr id="3" name="Rectangle 2"/>
-          <p:cNvSpPr/>
-          <p:nvPr/>
-        </p:nvSpPr>
-        <p:spPr>
-          <a:xfrm>
-            <a:off x="548640" y="475488"/>
-            <a:ext cx="457200" cy="54864"/>
-          </a:xfrm>
-          <a:prstGeom prst="rect">
-            <a:avLst/>
-          </a:prstGeom>
-          <a:solidFill>
-            <a:srgbClr val="1E5EF3"/>
-          </a:solidFill>
-          <a:ln>
-            <a:noFill/>
-          </a:ln>
-          <a:effectLst/>
-        </p:spPr>
-        <p:style>
-          <a:lnRef idx="1">
-            <a:schemeClr val="accent1"/>
-          </a:lnRef>
-          <a:fillRef idx="3">
-            <a:schemeClr val="accent1"/>
-          </a:fillRef>
-          <a:effectRef idx="2">
-            <a:schemeClr val="accent1"/>
-          </a:effectRef>
-          <a:fontRef idx="minor">
-            <a:schemeClr val="lt1"/>
-          </a:fontRef>
-        </p:style>
-        <p:txBody>
-          <a:bodyPr rtlCol="0" anchor="ctr"/>
-          <a:lstStyle/>
-          <a:p>
-            <a:pPr algn="ctr"/>
-          </a:p>
-        </p:txBody>
-      </p:sp>
-      <p:sp>
-        <p:nvSpPr>
-          <p:cNvPr id="4" name="TextBox 3"/>
-          <p:cNvSpPr txBox="1"/>
-          <p:nvPr/>
-        </p:nvSpPr>
-        <p:spPr>
-          <a:xfrm>
-            <a:off x="548640" y="603504"/>
-            <a:ext cx="11091672" cy="274320"/>
-          </a:xfrm>
-          <a:prstGeom prst="rect">
-            <a:avLst/>
-          </a:prstGeom>
-          <a:noFill/>
-        </p:spPr>
-        <p:txBody>
-          <a:bodyPr wrap="square">
-            <a:spAutoFit/>
-          </a:bodyPr>
-          <a:lstStyle/>
-          <a:p>
-            <a:pPr algn="l">
-              <a:spcAft>
-                <a:spcPts val="600"/>
-              </a:spcAft>
-              <a:buNone/>
-            </a:pPr>
-            <a:r>
-              <a:rPr sz="1100" b="1">
-                <a:solidFill>
-                  <a:srgbClr val="1E5EF3"/>
-                </a:solidFill>
-                <a:latin typeface="Arial"/>
-              </a:rPr>
-              <a:t>WOULD MORE DATA HELP?</a:t>
-            </a:r>
-          </a:p>
-        </p:txBody>
-      </p:sp>
-      <p:sp>
-        <p:nvSpPr>
-          <p:cNvPr id="5" name="TextBox 4"/>
-          <p:cNvSpPr txBox="1"/>
-          <p:nvPr/>
-        </p:nvSpPr>
-        <p:spPr>
-          <a:xfrm>
-            <a:off x="548640" y="868680"/>
-            <a:ext cx="11091672" cy="777240"/>
-          </a:xfrm>
-          <a:prstGeom prst="rect">
-            <a:avLst/>
-          </a:prstGeom>
-          <a:noFill/>
-        </p:spPr>
-        <p:txBody>
-          <a:bodyPr wrap="square">
-            <a:spAutoFit/>
-          </a:bodyPr>
-          <a:lstStyle/>
-          <a:p>
-            <a:pPr algn="l">
-              <a:spcAft>
-                <a:spcPts val="0"/>
-              </a:spcAft>
-              <a:buNone/>
-            </a:pPr>
-            <a:r>
-              <a:rPr sz="2600" b="1">
-                <a:solidFill>
-                  <a:srgbClr val="0A2540"/>
-                </a:solidFill>
-                <a:latin typeface="Arial"/>
-              </a:rPr>
-              <a:t>The learning curve answers "would more data help?" - for us: no</a:t>
-            </a:r>
-          </a:p>
-        </p:txBody>
-      </p:sp>
-      <p:sp>
-        <p:nvSpPr>
-          <p:cNvPr id="6" name="Rectangle 5"/>
-          <p:cNvSpPr/>
-          <p:nvPr/>
-        </p:nvSpPr>
-        <p:spPr>
-          <a:xfrm>
-            <a:off x="548640" y="1664208"/>
-            <a:ext cx="11091672" cy="12801"/>
-          </a:xfrm>
-          <a:prstGeom prst="rect">
-            <a:avLst/>
-          </a:prstGeom>
-          <a:solidFill>
-            <a:srgbClr val="B9D0FA"/>
-          </a:solidFill>
-          <a:ln>
-            <a:noFill/>
-          </a:ln>
-          <a:effectLst/>
-        </p:spPr>
-        <p:style>
-          <a:lnRef idx="1">
-            <a:schemeClr val="accent1"/>
-          </a:lnRef>
-          <a:fillRef idx="3">
-            <a:schemeClr val="accent1"/>
-          </a:fillRef>
-          <a:effectRef idx="2">
-            <a:schemeClr val="accent1"/>
-          </a:effectRef>
-          <a:fontRef idx="minor">
-            <a:schemeClr val="lt1"/>
-          </a:fontRef>
-        </p:style>
-        <p:txBody>
-          <a:bodyPr rtlCol="0" anchor="ctr"/>
-          <a:lstStyle/>
-          <a:p>
-            <a:pPr algn="ctr"/>
-          </a:p>
-        </p:txBody>
-      </p:sp>
-      <p:sp>
-        <p:nvSpPr>
-          <p:cNvPr id="7" name="TextBox 6"/>
-          <p:cNvSpPr txBox="1"/>
-          <p:nvPr/>
-        </p:nvSpPr>
-        <p:spPr>
-          <a:xfrm>
-            <a:off x="548640" y="1874519"/>
-            <a:ext cx="4297680" cy="4206240"/>
-          </a:xfrm>
-          <a:prstGeom prst="rect">
-            <a:avLst/>
-          </a:prstGeom>
-          <a:noFill/>
-        </p:spPr>
-        <p:txBody>
-          <a:bodyPr wrap="square">
-            <a:spAutoFit/>
-          </a:bodyPr>
-          <a:lstStyle/>
-          <a:p>
-            <a:pPr algn="l" indent="-228600" marL="228600">
-              <a:spcAft>
-                <a:spcPts val="800"/>
-              </a:spcAft>
-              <a:buClr>
-                <a:srgbClr val="1E5EF3"/>
-              </a:buClr>
-              <a:buChar char="—"/>
-            </a:pPr>
-            <a:r>
-              <a:rPr sz="1450" b="0">
-                <a:solidFill>
-                  <a:srgbClr val="202B38"/>
-                </a:solidFill>
-                <a:latin typeface="Arial"/>
-              </a:rPr>
-              <a:t>Plot the honest score against training-set size: our CV accuracy climbs from 0.758 at 56 rows to 0.819 at 569 rows - then flattens.</a:t>
-            </a:r>
-          </a:p>
-          <a:p>
-            <a:pPr algn="l" indent="-228600" marL="228600">
-              <a:spcAft>
-                <a:spcPts val="800"/>
-              </a:spcAft>
-              <a:buClr>
-                <a:srgbClr val="1E5EF3"/>
-              </a:buClr>
-              <a:buChar char="—"/>
-            </a:pPr>
-            <a:r>
-              <a:rPr sz="1450" b="0">
-                <a:solidFill>
-                  <a:srgbClr val="202B38"/>
-                </a:solidFill>
-                <a:latin typeface="Arial"/>
-              </a:rPr>
-              <a:t>Regime 1, high bias: train and CV converge close together but below the score you need. The curve has flattened - more rows cannot get you there; change the model or features, not the dataset.</a:t>
-            </a:r>
-          </a:p>
-          <a:p>
-            <a:pPr algn="l" indent="-228600" marL="228600">
-              <a:spcAft>
-                <a:spcPts val="800"/>
-              </a:spcAft>
-              <a:buClr>
-                <a:srgbClr val="1E5EF3"/>
-              </a:buClr>
-              <a:buChar char="—"/>
-            </a:pPr>
-            <a:r>
-              <a:rPr sz="1450" b="0">
-                <a:solidFill>
-                  <a:srgbClr val="202B38"/>
-                </a:solidFill>
-                <a:latin typeface="Arial"/>
-              </a:rPr>
-              <a:t>Regime 2, high variance: training score is fine but a wide gap separates it from CV - the curves haven't converged; more data plausibly helps.</a:t>
-            </a:r>
-          </a:p>
-          <a:p>
-            <a:pPr algn="l" indent="-228600" marL="228600">
-              <a:spcAft>
-                <a:spcPts val="800"/>
-              </a:spcAft>
-              <a:buClr>
-                <a:srgbClr val="1E5EF3"/>
-              </a:buClr>
-              <a:buChar char="—"/>
-            </a:pPr>
-            <a:r>
-              <a:rPr sz="1450" b="0">
-                <a:solidFill>
-                  <a:srgbClr val="202B38"/>
-                </a:solidFill>
-                <a:latin typeface="Arial"/>
-              </a:rPr>
-              <a:t>Read ours: flat and close - more passengers would buy little. Better features or settings are the lever. That is exactly Session 4's job.</a:t>
-            </a:r>
-          </a:p>
-        </p:txBody>
-      </p:sp>
-      <p:pic>
-        <p:nvPicPr>
-          <p:cNvPr id="8" name="Picture 7" descr="learning_curve.png"/>
-          <p:cNvPicPr>
-            <a:picLocks noChangeAspect="1"/>
-          </p:cNvPicPr>
-          <p:nvPr/>
-        </p:nvPicPr>
-        <p:blipFill>
-          <a:blip r:embed="rId2"/>
-          <a:stretch>
-            <a:fillRect/>
-          </a:stretch>
-        </p:blipFill>
-        <p:spPr>
-          <a:xfrm>
-            <a:off x="5120640" y="1874519"/>
-            <a:ext cx="6492240" cy="3766389"/>
-          </a:xfrm>
-          <a:prstGeom prst="rect">
-            <a:avLst/>
-          </a:prstGeom>
-        </p:spPr>
-      </p:pic>
-      <p:sp>
-        <p:nvSpPr>
-          <p:cNvPr id="9" name="TextBox 8"/>
-          <p:cNvSpPr txBox="1"/>
-          <p:nvPr/>
-        </p:nvSpPr>
-        <p:spPr>
-          <a:xfrm>
-            <a:off x="5120640" y="6062471"/>
-            <a:ext cx="6492240" cy="365760"/>
-          </a:xfrm>
-          <a:prstGeom prst="rect">
-            <a:avLst/>
-          </a:prstGeom>
-          <a:noFill/>
-        </p:spPr>
-        <p:txBody>
-          <a:bodyPr wrap="square">
-            <a:spAutoFit/>
-          </a:bodyPr>
-          <a:lstStyle/>
-          <a:p>
-            <a:pPr algn="ctr">
-              <a:spcAft>
-                <a:spcPts val="600"/>
-              </a:spcAft>
-              <a:buNone/>
-            </a:pPr>
-            <a:r>
-              <a:rPr sz="1100" b="0">
-                <a:solidFill>
-                  <a:srgbClr val="5B6774"/>
-                </a:solidFill>
-                <a:latin typeface="Arial"/>
-              </a:rPr>
-              <a:t>Main panel: real curve, Module 2, notebook 2. Insets: regime sketches - illustration. Ng, Machine Learning Yearning chs. 28-32.</a:t>
-            </a:r>
-          </a:p>
-        </p:txBody>
-      </p:sp>
-      <p:sp>
-        <p:nvSpPr>
-          <p:cNvPr id="10" name="TextBox 9"/>
-          <p:cNvSpPr txBox="1"/>
-          <p:nvPr/>
-        </p:nvSpPr>
-        <p:spPr>
-          <a:xfrm>
-            <a:off x="548640" y="6473952"/>
-            <a:ext cx="7315200" cy="292608"/>
-          </a:xfrm>
-          <a:prstGeom prst="rect">
-            <a:avLst/>
-          </a:prstGeom>
-          <a:noFill/>
-        </p:spPr>
-        <p:txBody>
-          <a:bodyPr wrap="square">
-            <a:spAutoFit/>
-          </a:bodyPr>
-          <a:lstStyle/>
-          <a:p>
-            <a:pPr algn="l">
-              <a:spcAft>
-                <a:spcPts val="600"/>
-              </a:spcAft>
-              <a:buNone/>
-            </a:pPr>
-            <a:r>
-              <a:rPr sz="900" b="0">
-                <a:solidFill>
-                  <a:srgbClr val="5B6774"/>
-                </a:solidFill>
-                <a:latin typeface="Arial"/>
-              </a:rPr>
-              <a:t>M2 Session 3 - Model Selection and Evaluation</a:t>
-            </a:r>
-          </a:p>
-        </p:txBody>
-      </p:sp>
-      <p:sp>
-        <p:nvSpPr>
-          <p:cNvPr id="11" name="TextBox 10"/>
-          <p:cNvSpPr txBox="1"/>
-          <p:nvPr/>
-        </p:nvSpPr>
-        <p:spPr>
-          <a:xfrm>
-            <a:off x="11292840" y="6473952"/>
-            <a:ext cx="548640" cy="292608"/>
-          </a:xfrm>
-          <a:prstGeom prst="rect">
-            <a:avLst/>
-          </a:prstGeom>
-          <a:noFill/>
-        </p:spPr>
-        <p:txBody>
-          <a:bodyPr wrap="square">
-            <a:spAutoFit/>
-          </a:bodyPr>
-          <a:lstStyle/>
-          <a:p>
-            <a:pPr algn="r">
-              <a:spcAft>
-                <a:spcPts val="600"/>
-              </a:spcAft>
-              <a:buNone/>
-            </a:pPr>
-            <a:r>
-              <a:rPr sz="900" b="0">
-                <a:solidFill>
-                  <a:srgbClr val="5B6774"/>
-                </a:solidFill>
-                <a:latin typeface="Arial"/>
-              </a:rPr>
-              <a:t>13</a:t>
-            </a:r>
-          </a:p>
-        </p:txBody>
-      </p:sp>
-    </p:spTree>
-  </p:cSld>
-  <p:clrMapOvr>
-    <a:masterClrMapping/>
-  </p:clrMapOvr>
-</p:sld>
-</file>
-
-<file path=ppt/slides/slide14.xml><?xml version="1.0" encoding="utf-8"?>
-<p:sld xmlns:a="http://schemas.openxmlformats.org/drawingml/2006/main" xmlns:p="http://schemas.openxmlformats.org/presentationml/2006/main" xmlns:r="http://schemas.openxmlformats.org/officeDocument/2006/relationships">
-  <p:cSld>
-    <p:spTree>
-      <p:nvGrpSpPr>
-        <p:cNvPr id="1" name=""/>
-        <p:cNvGrpSpPr/>
-        <p:nvPr/>
-      </p:nvGrpSpPr>
-      <p:grpSpPr/>
-      <p:sp>
-        <p:nvSpPr>
-          <p:cNvPr id="2" name="Rectangle 1"/>
-          <p:cNvSpPr/>
-          <p:nvPr/>
-        </p:nvSpPr>
-        <p:spPr>
-          <a:xfrm>
-            <a:off x="0" y="0"/>
-            <a:ext cx="12191695" cy="6858000"/>
-          </a:xfrm>
-          <a:prstGeom prst="rect">
-            <a:avLst/>
-          </a:prstGeom>
-          <a:solidFill>
-            <a:srgbClr val="FFFFFF"/>
-          </a:solidFill>
-          <a:ln>
-            <a:noFill/>
-          </a:ln>
-          <a:effectLst/>
-        </p:spPr>
-        <p:style>
-          <a:lnRef idx="1">
-            <a:schemeClr val="accent1"/>
-          </a:lnRef>
-          <a:fillRef idx="3">
-            <a:schemeClr val="accent1"/>
-          </a:fillRef>
-          <a:effectRef idx="2">
-            <a:schemeClr val="accent1"/>
-          </a:effectRef>
-          <a:fontRef idx="minor">
-            <a:schemeClr val="lt1"/>
-          </a:fontRef>
-        </p:style>
-        <p:txBody>
-          <a:bodyPr rtlCol="0" anchor="ctr"/>
-          <a:lstStyle/>
-          <a:p>
-            <a:pPr algn="ctr"/>
-          </a:p>
-        </p:txBody>
-      </p:sp>
-      <p:sp>
-        <p:nvSpPr>
-          <p:cNvPr id="3" name="Rectangle 2"/>
-          <p:cNvSpPr/>
-          <p:nvPr/>
-        </p:nvSpPr>
-        <p:spPr>
-          <a:xfrm>
-            <a:off x="548640" y="475488"/>
-            <a:ext cx="457200" cy="54864"/>
-          </a:xfrm>
-          <a:prstGeom prst="rect">
-            <a:avLst/>
-          </a:prstGeom>
-          <a:solidFill>
-            <a:srgbClr val="1E5EF3"/>
-          </a:solidFill>
-          <a:ln>
-            <a:noFill/>
-          </a:ln>
-          <a:effectLst/>
-        </p:spPr>
-        <p:style>
-          <a:lnRef idx="1">
-            <a:schemeClr val="accent1"/>
-          </a:lnRef>
-          <a:fillRef idx="3">
-            <a:schemeClr val="accent1"/>
-          </a:fillRef>
-          <a:effectRef idx="2">
-            <a:schemeClr val="accent1"/>
-          </a:effectRef>
-          <a:fontRef idx="minor">
-            <a:schemeClr val="lt1"/>
-          </a:fontRef>
-        </p:style>
-        <p:txBody>
-          <a:bodyPr rtlCol="0" anchor="ctr"/>
-          <a:lstStyle/>
-          <a:p>
-            <a:pPr algn="ctr"/>
-          </a:p>
-        </p:txBody>
-      </p:sp>
-      <p:sp>
-        <p:nvSpPr>
-          <p:cNvPr id="4" name="TextBox 3"/>
-          <p:cNvSpPr txBox="1"/>
-          <p:nvPr/>
-        </p:nvSpPr>
-        <p:spPr>
-          <a:xfrm>
-            <a:off x="548640" y="603504"/>
-            <a:ext cx="11091672" cy="274320"/>
-          </a:xfrm>
-          <a:prstGeom prst="rect">
-            <a:avLst/>
-          </a:prstGeom>
-          <a:noFill/>
-        </p:spPr>
-        <p:txBody>
-          <a:bodyPr wrap="square">
-            <a:spAutoFit/>
-          </a:bodyPr>
-          <a:lstStyle/>
-          <a:p>
-            <a:pPr algn="l">
-              <a:spcAft>
-                <a:spcPts val="600"/>
-              </a:spcAft>
-              <a:buNone/>
-            </a:pPr>
-            <a:r>
-              <a:rPr sz="1100" b="1">
-                <a:solidFill>
-                  <a:srgbClr val="1E5EF3"/>
-                </a:solidFill>
-                <a:latin typeface="Arial"/>
-              </a:rPr>
-              <a:t>DECISION AND NEXT STEP</a:t>
-            </a:r>
-          </a:p>
-        </p:txBody>
-      </p:sp>
-      <p:sp>
-        <p:nvSpPr>
-          <p:cNvPr id="5" name="TextBox 4"/>
-          <p:cNvSpPr txBox="1"/>
-          <p:nvPr/>
-        </p:nvSpPr>
-        <p:spPr>
-          <a:xfrm>
-            <a:off x="548640" y="868680"/>
-            <a:ext cx="11091672" cy="777240"/>
-          </a:xfrm>
-          <a:prstGeom prst="rect">
-            <a:avLst/>
-          </a:prstGeom>
-          <a:noFill/>
-        </p:spPr>
-        <p:txBody>
-          <a:bodyPr wrap="square">
-            <a:spAutoFit/>
-          </a:bodyPr>
-          <a:lstStyle/>
-          <a:p>
-            <a:pPr algn="l">
-              <a:spcAft>
-                <a:spcPts val="0"/>
-              </a:spcAft>
-              <a:buNone/>
-            </a:pPr>
-            <a:r>
-              <a:rPr sz="2600" b="1">
-                <a:solidFill>
-                  <a:srgbClr val="0A2540"/>
-                </a:solidFill>
-                <a:latin typeface="Arial"/>
-              </a:rPr>
-              <a:t>The verdict: the simplest model that beats the floor on the right metric - the scorecard</a:t>
-            </a:r>
-          </a:p>
-        </p:txBody>
-      </p:sp>
-      <p:sp>
-        <p:nvSpPr>
-          <p:cNvPr id="6" name="Rectangle 5"/>
-          <p:cNvSpPr/>
-          <p:nvPr/>
-        </p:nvSpPr>
-        <p:spPr>
-          <a:xfrm>
-            <a:off x="548640" y="1664208"/>
-            <a:ext cx="11091672" cy="12801"/>
-          </a:xfrm>
-          <a:prstGeom prst="rect">
-            <a:avLst/>
-          </a:prstGeom>
-          <a:solidFill>
-            <a:srgbClr val="B9D0FA"/>
-          </a:solidFill>
-          <a:ln>
-            <a:noFill/>
-          </a:ln>
-          <a:effectLst/>
-        </p:spPr>
-        <p:style>
-          <a:lnRef idx="1">
-            <a:schemeClr val="accent1"/>
-          </a:lnRef>
-          <a:fillRef idx="3">
-            <a:schemeClr val="accent1"/>
-          </a:fillRef>
-          <a:effectRef idx="2">
-            <a:schemeClr val="accent1"/>
-          </a:effectRef>
-          <a:fontRef idx="minor">
-            <a:schemeClr val="lt1"/>
-          </a:fontRef>
-        </p:style>
-        <p:txBody>
-          <a:bodyPr rtlCol="0" anchor="ctr"/>
-          <a:lstStyle/>
-          <a:p>
-            <a:pPr algn="ctr"/>
-          </a:p>
-        </p:txBody>
-      </p:sp>
-      <p:sp>
-        <p:nvSpPr>
-          <p:cNvPr id="7" name="Rectangle 6"/>
-          <p:cNvSpPr/>
-          <p:nvPr/>
-        </p:nvSpPr>
-        <p:spPr>
-          <a:xfrm>
-            <a:off x="548640" y="1874519"/>
-            <a:ext cx="5394960" cy="3977639"/>
-          </a:xfrm>
-          <a:prstGeom prst="rect">
-            <a:avLst/>
-          </a:prstGeom>
-          <a:solidFill>
-            <a:srgbClr val="EEF3FD"/>
-          </a:solidFill>
-          <a:ln>
-            <a:noFill/>
-          </a:ln>
-          <a:effectLst/>
-        </p:spPr>
-        <p:style>
-          <a:lnRef idx="1">
-            <a:schemeClr val="accent1"/>
-          </a:lnRef>
-          <a:fillRef idx="3">
-            <a:schemeClr val="accent1"/>
-          </a:fillRef>
-          <a:effectRef idx="2">
-            <a:schemeClr val="accent1"/>
-          </a:effectRef>
-          <a:fontRef idx="minor">
-            <a:schemeClr val="lt1"/>
-          </a:fontRef>
-        </p:style>
-        <p:txBody>
-          <a:bodyPr rtlCol="0" anchor="ctr"/>
-          <a:lstStyle/>
-          <a:p>
-            <a:pPr algn="ctr"/>
-          </a:p>
-        </p:txBody>
-      </p:sp>
-      <p:sp>
-        <p:nvSpPr>
-          <p:cNvPr id="8" name="TextBox 7"/>
-          <p:cNvSpPr txBox="1"/>
-          <p:nvPr/>
-        </p:nvSpPr>
-        <p:spPr>
-          <a:xfrm>
-            <a:off x="777240" y="2039111"/>
-            <a:ext cx="4937760" cy="365760"/>
-          </a:xfrm>
-          <a:prstGeom prst="rect">
-            <a:avLst/>
-          </a:prstGeom>
-          <a:noFill/>
-        </p:spPr>
-        <p:txBody>
-          <a:bodyPr wrap="square">
-            <a:spAutoFit/>
-          </a:bodyPr>
-          <a:lstStyle/>
-          <a:p>
-            <a:pPr algn="l">
-              <a:spcAft>
-                <a:spcPts val="600"/>
-              </a:spcAft>
-              <a:buNone/>
-            </a:pPr>
-            <a:r>
-              <a:rPr sz="1500" b="1">
-                <a:solidFill>
-                  <a:srgbClr val="0A2540"/>
-                </a:solidFill>
-                <a:latin typeface="Arial"/>
-              </a:rPr>
-              <a:t>The checklist</a:t>
-            </a:r>
-          </a:p>
-        </p:txBody>
-      </p:sp>
-      <p:sp>
-        <p:nvSpPr>
-          <p:cNvPr id="9" name="TextBox 8"/>
-          <p:cNvSpPr txBox="1"/>
-          <p:nvPr/>
-        </p:nvSpPr>
-        <p:spPr>
-          <a:xfrm>
-            <a:off x="777240" y="2441447"/>
-            <a:ext cx="4937760" cy="3246119"/>
-          </a:xfrm>
-          <a:prstGeom prst="rect">
-            <a:avLst/>
-          </a:prstGeom>
-          <a:noFill/>
-        </p:spPr>
-        <p:txBody>
-          <a:bodyPr wrap="square">
-            <a:spAutoFit/>
-          </a:bodyPr>
-          <a:lstStyle/>
-          <a:p>
-            <a:pPr algn="l" indent="-228600" marL="228600">
-              <a:spcAft>
-                <a:spcPts val="600"/>
-              </a:spcAft>
-              <a:buClr>
-                <a:srgbClr val="1E5EF3"/>
-              </a:buClr>
-              <a:buChar char="—"/>
-            </a:pPr>
-            <a:r>
-              <a:rPr sz="1300" b="0">
-                <a:solidFill>
-                  <a:srgbClr val="202B38"/>
-                </a:solidFill>
-                <a:latin typeface="Arial"/>
-              </a:rPr>
-              <a:t>Beats the baseline clearly? The floor is 0.617 - if not, stop.</a:t>
-            </a:r>
-          </a:p>
-          <a:p>
-            <a:pPr algn="l" indent="-228600" marL="228600">
-              <a:spcAft>
-                <a:spcPts val="600"/>
-              </a:spcAft>
-              <a:buClr>
-                <a:srgbClr val="1E5EF3"/>
-              </a:buClr>
-              <a:buChar char="—"/>
-            </a:pPr>
-            <a:r>
-              <a:rPr sz="1300" b="0">
-                <a:solidFill>
-                  <a:srgbClr val="202B38"/>
-                </a:solidFill>
-                <a:latin typeface="Arial"/>
-              </a:rPr>
-              <a:t>Metric matches the problem? Accuracy, precision, recall, or F1 - decide before you rank.</a:t>
-            </a:r>
-          </a:p>
-          <a:p>
-            <a:pPr algn="l" indent="-228600" marL="228600">
-              <a:spcAft>
-                <a:spcPts val="600"/>
-              </a:spcAft>
-              <a:buClr>
-                <a:srgbClr val="1E5EF3"/>
-              </a:buClr>
-              <a:buChar char="—"/>
-            </a:pPr>
-            <a:r>
-              <a:rPr sz="1300" b="0">
-                <a:solidFill>
-                  <a:srgbClr val="202B38"/>
-                </a:solidFill>
-                <a:latin typeface="Arial"/>
-              </a:rPr>
-              <a:t>Simple first: if the scorecard is within a hair of the forest, ship the scorecard.</a:t>
-            </a:r>
-          </a:p>
-          <a:p>
-            <a:pPr algn="l" indent="-228600" marL="228600">
-              <a:spcAft>
-                <a:spcPts val="600"/>
-              </a:spcAft>
-              <a:buClr>
-                <a:srgbClr val="1E5EF3"/>
-              </a:buClr>
-              <a:buChar char="—"/>
-            </a:pPr>
-            <a:r>
-              <a:rPr sz="1300" b="0">
-                <a:solidFill>
-                  <a:srgbClr val="202B38"/>
-                </a:solidFill>
-                <a:latin typeface="Arial"/>
-              </a:rPr>
-              <a:t>Stable across folds? A model that wobbles (Random Forest: +/- 0.054) is harder to trust.</a:t>
-            </a:r>
-          </a:p>
-        </p:txBody>
-      </p:sp>
-      <p:sp>
-        <p:nvSpPr>
-          <p:cNvPr id="10" name="Rectangle 9"/>
-          <p:cNvSpPr/>
-          <p:nvPr/>
-        </p:nvSpPr>
-        <p:spPr>
-          <a:xfrm>
-            <a:off x="6245352" y="1874519"/>
-            <a:ext cx="5394960" cy="3977639"/>
-          </a:xfrm>
-          <a:prstGeom prst="rect">
-            <a:avLst/>
-          </a:prstGeom>
-          <a:solidFill>
-            <a:srgbClr val="EEF3FD"/>
-          </a:solidFill>
-          <a:ln>
-            <a:noFill/>
-          </a:ln>
-          <a:effectLst/>
-        </p:spPr>
-        <p:style>
-          <a:lnRef idx="1">
-            <a:schemeClr val="accent1"/>
-          </a:lnRef>
-          <a:fillRef idx="3">
-            <a:schemeClr val="accent1"/>
-          </a:fillRef>
-          <a:effectRef idx="2">
-            <a:schemeClr val="accent1"/>
-          </a:effectRef>
-          <a:fontRef idx="minor">
-            <a:schemeClr val="lt1"/>
-          </a:fontRef>
-        </p:style>
-        <p:txBody>
-          <a:bodyPr rtlCol="0" anchor="ctr"/>
-          <a:lstStyle/>
-          <a:p>
-            <a:pPr algn="ctr"/>
-          </a:p>
-        </p:txBody>
-      </p:sp>
-      <p:sp>
-        <p:nvSpPr>
-          <p:cNvPr id="11" name="TextBox 10"/>
-          <p:cNvSpPr txBox="1"/>
-          <p:nvPr/>
-        </p:nvSpPr>
-        <p:spPr>
-          <a:xfrm>
-            <a:off x="6473952" y="2039111"/>
-            <a:ext cx="4937760" cy="365760"/>
-          </a:xfrm>
-          <a:prstGeom prst="rect">
-            <a:avLst/>
-          </a:prstGeom>
-          <a:noFill/>
-        </p:spPr>
-        <p:txBody>
-          <a:bodyPr wrap="square">
-            <a:spAutoFit/>
-          </a:bodyPr>
-          <a:lstStyle/>
-          <a:p>
-            <a:pPr algn="l">
-              <a:spcAft>
-                <a:spcPts val="600"/>
-              </a:spcAft>
-              <a:buNone/>
-            </a:pPr>
-            <a:r>
-              <a:rPr sz="1500" b="1">
-                <a:solidFill>
-                  <a:srgbClr val="0A2540"/>
-                </a:solidFill>
-                <a:latin typeface="Arial"/>
-              </a:rPr>
-              <a:t>Verdict &amp; handoff</a:t>
-            </a:r>
-          </a:p>
-        </p:txBody>
-      </p:sp>
-      <p:sp>
-        <p:nvSpPr>
-          <p:cNvPr id="12" name="TextBox 11"/>
-          <p:cNvSpPr txBox="1"/>
-          <p:nvPr/>
-        </p:nvSpPr>
-        <p:spPr>
-          <a:xfrm>
-            <a:off x="6473952" y="2441447"/>
-            <a:ext cx="4937760" cy="3246119"/>
-          </a:xfrm>
-          <a:prstGeom prst="rect">
-            <a:avLst/>
-          </a:prstGeom>
-          <a:noFill/>
-        </p:spPr>
-        <p:txBody>
-          <a:bodyPr wrap="square">
-            <a:spAutoFit/>
-          </a:bodyPr>
-          <a:lstStyle/>
-          <a:p>
-            <a:pPr algn="l" indent="-228600" marL="228600">
-              <a:spcAft>
-                <a:spcPts val="600"/>
-              </a:spcAft>
-              <a:buClr>
-                <a:srgbClr val="1E5EF3"/>
-              </a:buClr>
-              <a:buChar char="—"/>
-            </a:pPr>
-            <a:r>
-              <a:rPr sz="1300" b="0">
-                <a:solidFill>
-                  <a:srgbClr val="202B38"/>
-                </a:solidFill>
-                <a:latin typeface="Arial"/>
-              </a:rPr>
-              <a:t>Champion by CV: Logistic Regression, 0.819 (+/- 0.020).</a:t>
-            </a:r>
-          </a:p>
-          <a:p>
-            <a:pPr algn="l" indent="-228600" marL="228600">
-              <a:spcAft>
-                <a:spcPts val="600"/>
-              </a:spcAft>
-              <a:buClr>
-                <a:srgbClr val="1E5EF3"/>
-              </a:buClr>
-              <a:buChar char="—"/>
-            </a:pPr>
-            <a:r>
-              <a:rPr sz="1300" b="0">
-                <a:solidFill>
-                  <a:srgbClr val="202B38"/>
-                </a:solidFill>
-                <a:latin typeface="Arial"/>
-              </a:rPr>
-              <a:t>One look at the locked test set: accuracy 0.838.</a:t>
-            </a:r>
-          </a:p>
-          <a:p>
-            <a:pPr algn="l" indent="-228600" marL="228600">
-              <a:spcAft>
-                <a:spcPts val="600"/>
-              </a:spcAft>
-              <a:buClr>
-                <a:srgbClr val="1E5EF3"/>
-              </a:buClr>
-              <a:buChar char="—"/>
-            </a:pPr>
-            <a:r>
-              <a:rPr sz="1300" b="0">
-                <a:solidFill>
-                  <a:srgbClr val="202B38"/>
-                </a:solidFill>
-                <a:latin typeface="Arial"/>
-              </a:rPr>
-              <a:t>Precision 0.823, recall 0.739, F1 0.779 on "survived".</a:t>
-            </a:r>
-          </a:p>
-          <a:p>
-            <a:pPr algn="l" indent="-228600" marL="228600">
-              <a:spcAft>
-                <a:spcPts val="600"/>
-              </a:spcAft>
-              <a:buClr>
-                <a:srgbClr val="1E5EF3"/>
-              </a:buClr>
-              <a:buChar char="—"/>
-            </a:pPr>
-            <a:r>
-              <a:rPr sz="1300" b="0">
-                <a:solidFill>
-                  <a:srgbClr val="202B38"/>
-                </a:solidFill>
-                <a:latin typeface="Arial"/>
-              </a:rPr>
-              <a:t>AUC 0.878 = chance a random survivor ranks above a random non-survivor.</a:t>
-            </a:r>
-          </a:p>
-          <a:p>
-            <a:pPr algn="l" indent="-228600" marL="228600">
-              <a:spcAft>
-                <a:spcPts val="600"/>
-              </a:spcAft>
-              <a:buClr>
-                <a:srgbClr val="1E5EF3"/>
-              </a:buClr>
-              <a:buChar char="—"/>
-            </a:pPr>
-            <a:r>
-              <a:rPr sz="1300" b="0">
-                <a:solidFill>
-                  <a:srgbClr val="202B38"/>
-                </a:solidFill>
-                <a:latin typeface="Arial"/>
-              </a:rPr>
-              <a:t>Random Forest finished 0.797 but has the most knobs - Session 4 tunes it, then ships it.</a:t>
-            </a:r>
-          </a:p>
-        </p:txBody>
-      </p:sp>
-      <p:sp>
-        <p:nvSpPr>
-          <p:cNvPr id="13" name="TextBox 12"/>
-          <p:cNvSpPr txBox="1"/>
-          <p:nvPr/>
-        </p:nvSpPr>
-        <p:spPr>
-          <a:xfrm>
-            <a:off x="548640" y="6053328"/>
-            <a:ext cx="11091672" cy="502920"/>
-          </a:xfrm>
-          <a:prstGeom prst="rect">
-            <a:avLst/>
-          </a:prstGeom>
-          <a:noFill/>
-        </p:spPr>
-        <p:txBody>
-          <a:bodyPr wrap="square">
-            <a:spAutoFit/>
-          </a:bodyPr>
-          <a:lstStyle/>
-          <a:p>
-            <a:pPr algn="l">
-              <a:spcAft>
-                <a:spcPts val="600"/>
-              </a:spcAft>
-              <a:buNone/>
-            </a:pPr>
-            <a:r>
-              <a:rPr sz="1200" b="0">
-                <a:solidFill>
-                  <a:srgbClr val="1E5EF3"/>
-                </a:solidFill>
-                <a:latin typeface="Arial"/>
-              </a:rPr>
-              <a:t>Why interpretability is on the checklist: a real pneumonia model learned "asthma lowers risk" - true in the data (asthmatics were rushed to intensive care), fatal if acted on; caught only because the model was readable. Source: Caruana et al., KDD 2015.</a:t>
-            </a:r>
-          </a:p>
-        </p:txBody>
-      </p:sp>
-      <p:sp>
-        <p:nvSpPr>
-          <p:cNvPr id="14" name="TextBox 13"/>
-          <p:cNvSpPr txBox="1"/>
-          <p:nvPr/>
-        </p:nvSpPr>
-        <p:spPr>
-          <a:xfrm>
-            <a:off x="548640" y="6473952"/>
-            <a:ext cx="7315200" cy="292608"/>
-          </a:xfrm>
-          <a:prstGeom prst="rect">
-            <a:avLst/>
-          </a:prstGeom>
-          <a:noFill/>
-        </p:spPr>
-        <p:txBody>
-          <a:bodyPr wrap="square">
-            <a:spAutoFit/>
-          </a:bodyPr>
-          <a:lstStyle/>
-          <a:p>
-            <a:pPr algn="l">
-              <a:spcAft>
-                <a:spcPts val="600"/>
-              </a:spcAft>
-              <a:buNone/>
-            </a:pPr>
-            <a:r>
-              <a:rPr sz="900" b="0">
-                <a:solidFill>
-                  <a:srgbClr val="5B6774"/>
-                </a:solidFill>
-                <a:latin typeface="Arial"/>
-              </a:rPr>
-              <a:t>M2 Session 3 - Model Selection and Evaluation</a:t>
-            </a:r>
-          </a:p>
-        </p:txBody>
-      </p:sp>
-      <p:sp>
-        <p:nvSpPr>
-          <p:cNvPr id="15" name="TextBox 14"/>
-          <p:cNvSpPr txBox="1"/>
-          <p:nvPr/>
-        </p:nvSpPr>
-        <p:spPr>
-          <a:xfrm>
-            <a:off x="11292840" y="6473952"/>
-            <a:ext cx="548640" cy="292608"/>
-          </a:xfrm>
-          <a:prstGeom prst="rect">
-            <a:avLst/>
-          </a:prstGeom>
-          <a:noFill/>
-        </p:spPr>
-        <p:txBody>
-          <a:bodyPr wrap="square">
-            <a:spAutoFit/>
-          </a:bodyPr>
-          <a:lstStyle/>
-          <a:p>
-            <a:pPr algn="r">
-              <a:spcAft>
-                <a:spcPts val="600"/>
-              </a:spcAft>
-              <a:buNone/>
-            </a:pPr>
-            <a:r>
-              <a:rPr sz="900" b="0">
-                <a:solidFill>
-                  <a:srgbClr val="5B6774"/>
-                </a:solidFill>
-                <a:latin typeface="Arial"/>
-              </a:rPr>
-              <a:t>14</a:t>
-            </a:r>
-          </a:p>
-        </p:txBody>
-      </p:sp>
-    </p:spTree>
-  </p:cSld>
-  <p:clrMapOvr>
-    <a:masterClrMapping/>
-  </p:clrMapOvr>
-</p:sld>
-</file>
-
-<file path=ppt/slides/slide15.xml><?xml version="1.0" encoding="utf-8"?>
-<p:sld xmlns:a="http://schemas.openxmlformats.org/drawingml/2006/main" xmlns:p="http://schemas.openxmlformats.org/presentationml/2006/main" xmlns:r="http://schemas.openxmlformats.org/officeDocument/2006/relationships">
-  <p:cSld>
-    <p:spTree>
-      <p:nvGrpSpPr>
-        <p:cNvPr id="1" name=""/>
-        <p:cNvGrpSpPr/>
-        <p:nvPr/>
-      </p:nvGrpSpPr>
-      <p:grpSpPr/>
-      <p:sp>
-        <p:nvSpPr>
-          <p:cNvPr id="2" name="Rectangle 1"/>
-          <p:cNvSpPr/>
-          <p:nvPr/>
-        </p:nvSpPr>
-        <p:spPr>
-          <a:xfrm>
-            <a:off x="0" y="0"/>
-            <a:ext cx="12191695" cy="6858000"/>
-          </a:xfrm>
-          <a:prstGeom prst="rect">
-            <a:avLst/>
-          </a:prstGeom>
-          <a:solidFill>
-            <a:srgbClr val="0A2540"/>
-          </a:solidFill>
-          <a:ln>
-            <a:noFill/>
-          </a:ln>
-          <a:effectLst/>
-        </p:spPr>
-        <p:style>
-          <a:lnRef idx="1">
-            <a:schemeClr val="accent1"/>
-          </a:lnRef>
-          <a:fillRef idx="3">
-            <a:schemeClr val="accent1"/>
-          </a:fillRef>
-          <a:effectRef idx="2">
-            <a:schemeClr val="accent1"/>
-          </a:effectRef>
-          <a:fontRef idx="minor">
-            <a:schemeClr val="lt1"/>
-          </a:fontRef>
-        </p:style>
-        <p:txBody>
-          <a:bodyPr rtlCol="0" anchor="ctr"/>
-          <a:lstStyle/>
-          <a:p>
-            <a:pPr algn="ctr"/>
-          </a:p>
-        </p:txBody>
-      </p:sp>
-      <p:sp>
-        <p:nvSpPr>
-          <p:cNvPr id="3" name="TextBox 2"/>
-          <p:cNvSpPr txBox="1"/>
-          <p:nvPr/>
-        </p:nvSpPr>
-        <p:spPr>
-          <a:xfrm>
-            <a:off x="914400" y="1280160"/>
-            <a:ext cx="10332720" cy="1097280"/>
-          </a:xfrm>
-          <a:prstGeom prst="rect">
-            <a:avLst/>
-          </a:prstGeom>
-          <a:noFill/>
-        </p:spPr>
-        <p:txBody>
-          <a:bodyPr wrap="square">
-            <a:spAutoFit/>
-          </a:bodyPr>
-          <a:lstStyle/>
-          <a:p>
-            <a:pPr algn="l">
-              <a:spcAft>
-                <a:spcPts val="600"/>
-              </a:spcAft>
-              <a:buNone/>
-            </a:pPr>
-            <a:r>
-              <a:rPr sz="3400" b="1">
-                <a:solidFill>
-                  <a:srgbClr val="FFFFFF"/>
-                </a:solidFill>
-                <a:latin typeface="Arial"/>
-              </a:rPr>
-              <a:t>The referee, the floor, and the right question</a:t>
-            </a:r>
-          </a:p>
-        </p:txBody>
-      </p:sp>
-      <p:sp>
-        <p:nvSpPr>
-          <p:cNvPr id="4" name="TextBox 3"/>
-          <p:cNvSpPr txBox="1"/>
-          <p:nvPr/>
-        </p:nvSpPr>
-        <p:spPr>
-          <a:xfrm>
-            <a:off x="914400" y="2651760"/>
-            <a:ext cx="10058400" cy="2926080"/>
-          </a:xfrm>
-          <a:prstGeom prst="rect">
-            <a:avLst/>
-          </a:prstGeom>
-          <a:noFill/>
-        </p:spPr>
-        <p:txBody>
-          <a:bodyPr wrap="square">
-            <a:spAutoFit/>
-          </a:bodyPr>
-          <a:lstStyle/>
-          <a:p>
-            <a:pPr algn="l" indent="-228600" marL="228600">
-              <a:spcAft>
-                <a:spcPts val="1000"/>
-              </a:spcAft>
-              <a:buClr>
-                <a:srgbClr val="1E5EF3"/>
-              </a:buClr>
-              <a:buChar char="—"/>
-            </a:pPr>
-            <a:r>
-              <a:rPr sz="1600" b="0">
-                <a:solidFill>
-                  <a:srgbClr val="B9D0FA"/>
-                </a:solidFill>
-                <a:latin typeface="Arial"/>
-              </a:rPr>
-              <a:t>Two numbers, always: the training score lies, CV is honest - and the gap is variance.</a:t>
-            </a:r>
-          </a:p>
-          <a:p>
-            <a:pPr algn="l" indent="-228600" marL="228600">
-              <a:spcAft>
-                <a:spcPts val="1000"/>
-              </a:spcAft>
-              <a:buClr>
-                <a:srgbClr val="1E5EF3"/>
-              </a:buClr>
-              <a:buChar char="—"/>
-            </a:pPr>
-            <a:r>
-              <a:rPr sz="1600" b="0">
-                <a:solidFill>
-                  <a:srgbClr val="B9D0FA"/>
-                </a:solidFill>
-                <a:latin typeface="Arial"/>
-              </a:rPr>
-              <a:t>Baseline first: the floor is 0.617. Beat it clearly, or go home.</a:t>
-            </a:r>
-          </a:p>
-          <a:p>
-            <a:pPr algn="l" indent="-228600" marL="228600">
-              <a:spcAft>
-                <a:spcPts val="1000"/>
-              </a:spcAft>
-              <a:buClr>
-                <a:srgbClr val="1E5EF3"/>
-              </a:buClr>
-              <a:buChar char="—"/>
-            </a:pPr>
-            <a:r>
-              <a:rPr sz="1600" b="0">
-                <a:solidFill>
-                  <a:srgbClr val="B9D0FA"/>
-                </a:solidFill>
-                <a:latin typeface="Arial"/>
-              </a:rPr>
-              <a:t>Underfit = structural error, overfit = estimation error - the sweet spot is where the honest curve peaks, and ε keeps it under 1.00.</a:t>
-            </a:r>
-          </a:p>
-          <a:p>
-            <a:pPr algn="l" indent="-228600" marL="228600">
-              <a:spcAft>
-                <a:spcPts val="1000"/>
-              </a:spcAft>
-              <a:buClr>
-                <a:srgbClr val="1E5EF3"/>
-              </a:buClr>
-              <a:buChar char="—"/>
-            </a:pPr>
-            <a:r>
-              <a:rPr sz="1600" b="0">
-                <a:solidFill>
-                  <a:srgbClr val="B9D0FA"/>
-                </a:solidFill>
-                <a:latin typeface="Arial"/>
-              </a:rPr>
-              <a:t>The learning curve says more rows won't save us - better settings might (Session 4).</a:t>
-            </a:r>
-          </a:p>
-          <a:p>
-            <a:pPr algn="l" indent="-228600" marL="228600">
-              <a:spcAft>
-                <a:spcPts val="1000"/>
-              </a:spcAft>
-              <a:buClr>
-                <a:srgbClr val="1E5EF3"/>
-              </a:buClr>
-              <a:buChar char="—"/>
-            </a:pPr>
-            <a:r>
-              <a:rPr sz="1600" b="0">
-                <a:solidFill>
-                  <a:srgbClr val="B9D0FA"/>
-                </a:solidFill>
-                <a:latin typeface="Arial"/>
-              </a:rPr>
-              <a:t>Accuracy is one question of many. Precision, recall, and F1 ask sharper ones.</a:t>
-            </a:r>
-          </a:p>
-          <a:p>
-            <a:pPr algn="l" indent="-228600" marL="228600">
-              <a:spcAft>
-                <a:spcPts val="1000"/>
-              </a:spcAft>
-              <a:buClr>
-                <a:srgbClr val="1E5EF3"/>
-              </a:buClr>
-              <a:buChar char="—"/>
-            </a:pPr>
-            <a:r>
-              <a:rPr sz="1600" b="0">
-                <a:solidFill>
-                  <a:srgbClr val="B9D0FA"/>
-                </a:solidFill>
-                <a:latin typeface="Arial"/>
-              </a:rPr>
-              <a:t>Practice now: notebook 02-model-selection in Colab.</a:t>
-            </a:r>
-          </a:p>
-        </p:txBody>
-      </p:sp>
-      <p:sp>
-        <p:nvSpPr>
-          <p:cNvPr id="5" name="TextBox 4"/>
-          <p:cNvSpPr txBox="1"/>
-          <p:nvPr/>
-        </p:nvSpPr>
-        <p:spPr>
-          <a:xfrm>
-            <a:off x="914400" y="6035040"/>
-            <a:ext cx="9144000" cy="365760"/>
-          </a:xfrm>
-          <a:prstGeom prst="rect">
-            <a:avLst/>
-          </a:prstGeom>
-          <a:noFill/>
-        </p:spPr>
-        <p:txBody>
-          <a:bodyPr wrap="square">
-            <a:spAutoFit/>
-          </a:bodyPr>
-          <a:lstStyle/>
-          <a:p>
-            <a:pPr algn="l">
-              <a:spcAft>
-                <a:spcPts val="600"/>
-              </a:spcAft>
-              <a:buNone/>
-            </a:pPr>
-            <a:r>
-              <a:rPr sz="1200" b="0">
-                <a:solidFill>
-                  <a:srgbClr val="B9D0FA"/>
-                </a:solidFill>
-                <a:latin typeface="Arial"/>
-              </a:rPr>
-              <a:t>Machine Learning - Module 2</a:t>
-            </a:r>
-          </a:p>
-        </p:txBody>
-      </p:sp>
-      <p:sp>
-        <p:nvSpPr>
-          <p:cNvPr id="6" name="TextBox 5"/>
-          <p:cNvSpPr txBox="1"/>
-          <p:nvPr/>
-        </p:nvSpPr>
-        <p:spPr>
-          <a:xfrm>
-            <a:off x="548640" y="6473952"/>
-            <a:ext cx="7315200" cy="292608"/>
-          </a:xfrm>
-          <a:prstGeom prst="rect">
-            <a:avLst/>
-          </a:prstGeom>
-          <a:noFill/>
-        </p:spPr>
-        <p:txBody>
-          <a:bodyPr wrap="square">
-            <a:spAutoFit/>
-          </a:bodyPr>
-          <a:lstStyle/>
-          <a:p>
-            <a:pPr algn="l">
-              <a:spcAft>
-                <a:spcPts val="600"/>
-              </a:spcAft>
-              <a:buNone/>
-            </a:pPr>
-            <a:r>
-              <a:rPr sz="900" b="0">
-                <a:solidFill>
-                  <a:srgbClr val="B9D0FA"/>
-                </a:solidFill>
-                <a:latin typeface="Arial"/>
-              </a:rPr>
-              <a:t>M2 Session 3 - Model Selection and Evaluation</a:t>
-            </a:r>
-          </a:p>
-        </p:txBody>
-      </p:sp>
-      <p:sp>
-        <p:nvSpPr>
-          <p:cNvPr id="7" name="TextBox 6"/>
-          <p:cNvSpPr txBox="1"/>
-          <p:nvPr/>
-        </p:nvSpPr>
-        <p:spPr>
-          <a:xfrm>
-            <a:off x="11292840" y="6473952"/>
-            <a:ext cx="548640" cy="292608"/>
-          </a:xfrm>
-          <a:prstGeom prst="rect">
-            <a:avLst/>
-          </a:prstGeom>
-          <a:noFill/>
-        </p:spPr>
-        <p:txBody>
-          <a:bodyPr wrap="square">
-            <a:spAutoFit/>
-          </a:bodyPr>
-          <a:lstStyle/>
-          <a:p>
-            <a:pPr algn="r">
-              <a:spcAft>
-                <a:spcPts val="600"/>
-              </a:spcAft>
-              <a:buNone/>
-            </a:pPr>
-            <a:r>
-              <a:rPr sz="900" b="0">
-                <a:solidFill>
-                  <a:srgbClr val="B9D0FA"/>
-                </a:solidFill>
-                <a:latin typeface="Arial"/>
-              </a:rPr>
-              <a:t>15</a:t>
-            </a:r>
-          </a:p>
-        </p:txBody>
-      </p:sp>
-    </p:spTree>
-  </p:cSld>
-  <p:clrMapOvr>
-    <a:masterClrMapping/>
-  </p:clrMapOvr>
-</p:sld>
-</file>
-
-<file path=ppt/slides/slide2.xml><?xml version="1.0" encoding="utf-8"?>
-<p:sld xmlns:a="http://schemas.openxmlformats.org/drawingml/2006/main" xmlns:p="http://schemas.openxmlformats.org/presentationml/2006/main" xmlns:r="http://schemas.openxmlformats.org/officeDocument/2006/relationships">
-  <p:cSld>
-    <p:spTree>
-      <p:nvGrpSpPr>
-        <p:cNvPr id="1" name=""/>
-        <p:cNvGrpSpPr/>
-        <p:nvPr/>
-      </p:nvGrpSpPr>
-      <p:grpSpPr/>
-      <p:sp>
-        <p:nvSpPr>
-          <p:cNvPr id="2" name="Rectangle 1"/>
-          <p:cNvSpPr/>
-          <p:nvPr/>
-        </p:nvSpPr>
-        <p:spPr>
-          <a:xfrm>
-            <a:off x="0" y="0"/>
-            <a:ext cx="12191695" cy="6858000"/>
-          </a:xfrm>
-          <a:prstGeom prst="rect">
-            <a:avLst/>
-          </a:prstGeom>
-          <a:solidFill>
-            <a:srgbClr val="FFFFFF"/>
-          </a:solidFill>
-          <a:ln>
-            <a:noFill/>
-          </a:ln>
-          <a:effectLst/>
-        </p:spPr>
-        <p:style>
-          <a:lnRef idx="1">
-            <a:schemeClr val="accent1"/>
-          </a:lnRef>
-          <a:fillRef idx="3">
-            <a:schemeClr val="accent1"/>
-          </a:fillRef>
-          <a:effectRef idx="2">
-            <a:schemeClr val="accent1"/>
-          </a:effectRef>
-          <a:fontRef idx="minor">
-            <a:schemeClr val="lt1"/>
-          </a:fontRef>
-        </p:style>
-        <p:txBody>
-          <a:bodyPr rtlCol="0" anchor="ctr"/>
-          <a:lstStyle/>
-          <a:p>
-            <a:pPr algn="ctr"/>
-          </a:p>
-        </p:txBody>
-      </p:sp>
-      <p:sp>
-        <p:nvSpPr>
-          <p:cNvPr id="3" name="Rectangle 2"/>
-          <p:cNvSpPr/>
-          <p:nvPr/>
-        </p:nvSpPr>
-        <p:spPr>
-          <a:xfrm>
-            <a:off x="548640" y="475488"/>
-            <a:ext cx="457200" cy="54864"/>
-          </a:xfrm>
-          <a:prstGeom prst="rect">
-            <a:avLst/>
-          </a:prstGeom>
-          <a:solidFill>
-            <a:srgbClr val="1E5EF3"/>
-          </a:solidFill>
-          <a:ln>
-            <a:noFill/>
-          </a:ln>
-          <a:effectLst/>
-        </p:spPr>
-        <p:style>
-          <a:lnRef idx="1">
-            <a:schemeClr val="accent1"/>
-          </a:lnRef>
-          <a:fillRef idx="3">
-            <a:schemeClr val="accent1"/>
-          </a:fillRef>
-          <a:effectRef idx="2">
-            <a:schemeClr val="accent1"/>
-          </a:effectRef>
-          <a:fontRef idx="minor">
-            <a:schemeClr val="lt1"/>
-          </a:fontRef>
-        </p:style>
-        <p:txBody>
-          <a:bodyPr rtlCol="0" anchor="ctr"/>
-          <a:lstStyle/>
-          <a:p>
-            <a:pPr algn="ctr"/>
-          </a:p>
-        </p:txBody>
-      </p:sp>
-      <p:sp>
-        <p:nvSpPr>
-          <p:cNvPr id="4" name="TextBox 3"/>
-          <p:cNvSpPr txBox="1"/>
-          <p:nvPr/>
-        </p:nvSpPr>
-        <p:spPr>
-          <a:xfrm>
-            <a:off x="548640" y="603504"/>
-            <a:ext cx="11091672" cy="274320"/>
-          </a:xfrm>
-          <a:prstGeom prst="rect">
-            <a:avLst/>
-          </a:prstGeom>
-          <a:noFill/>
-        </p:spPr>
-        <p:txBody>
-          <a:bodyPr wrap="square">
-            <a:spAutoFit/>
-          </a:bodyPr>
-          <a:lstStyle/>
-          <a:p>
-            <a:pPr algn="l">
-              <a:spcAft>
-                <a:spcPts val="600"/>
-              </a:spcAft>
-              <a:buNone/>
-            </a:pPr>
-            <a:r>
-              <a:rPr sz="1100" b="1">
-                <a:solidFill>
-                  <a:srgbClr val="1E5EF3"/>
-                </a:solidFill>
-                <a:latin typeface="Arial"/>
-              </a:rPr>
-              <a:t>THE MAP FOR TODAY</a:t>
-            </a:r>
-          </a:p>
-        </p:txBody>
-      </p:sp>
-      <p:sp>
-        <p:nvSpPr>
-          <p:cNvPr id="5" name="TextBox 4"/>
-          <p:cNvSpPr txBox="1"/>
-          <p:nvPr/>
-        </p:nvSpPr>
-        <p:spPr>
-          <a:xfrm>
-            <a:off x="548640" y="868680"/>
-            <a:ext cx="11091672" cy="777240"/>
-          </a:xfrm>
-          <a:prstGeom prst="rect">
-            <a:avLst/>
-          </a:prstGeom>
-          <a:noFill/>
-        </p:spPr>
-        <p:txBody>
-          <a:bodyPr wrap="square">
-            <a:spAutoFit/>
-          </a:bodyPr>
-          <a:lstStyle/>
-          <a:p>
-            <a:pPr algn="l">
-              <a:spcAft>
-                <a:spcPts val="0"/>
-              </a:spcAft>
-              <a:buNone/>
-            </a:pPr>
-            <a:r>
-              <a:rPr sz="2600" b="1">
-                <a:solidFill>
-                  <a:srgbClr val="0A2540"/>
-                </a:solidFill>
-                <a:latin typeface="Arial"/>
-              </a:rPr>
-              <a:t>Today we live in the CHOOSE band: selection and assessment are different jobs</a:t>
-            </a:r>
-          </a:p>
-        </p:txBody>
-      </p:sp>
-      <p:sp>
-        <p:nvSpPr>
-          <p:cNvPr id="6" name="Rectangle 5"/>
-          <p:cNvSpPr/>
-          <p:nvPr/>
-        </p:nvSpPr>
-        <p:spPr>
-          <a:xfrm>
-            <a:off x="548640" y="1664208"/>
-            <a:ext cx="11091672" cy="12801"/>
-          </a:xfrm>
-          <a:prstGeom prst="rect">
-            <a:avLst/>
-          </a:prstGeom>
-          <a:solidFill>
-            <a:srgbClr val="B9D0FA"/>
-          </a:solidFill>
-          <a:ln>
-            <a:noFill/>
-          </a:ln>
-          <a:effectLst/>
-        </p:spPr>
-        <p:style>
-          <a:lnRef idx="1">
-            <a:schemeClr val="accent1"/>
-          </a:lnRef>
-          <a:fillRef idx="3">
-            <a:schemeClr val="accent1"/>
-          </a:fillRef>
-          <a:effectRef idx="2">
-            <a:schemeClr val="accent1"/>
-          </a:effectRef>
-          <a:fontRef idx="minor">
-            <a:schemeClr val="lt1"/>
-          </a:fontRef>
-        </p:style>
-        <p:txBody>
-          <a:bodyPr rtlCol="0" anchor="ctr"/>
-          <a:lstStyle/>
-          <a:p>
-            <a:pPr algn="ctr"/>
-          </a:p>
-        </p:txBody>
-      </p:sp>
-      <p:sp>
-        <p:nvSpPr>
-          <p:cNvPr id="7" name="TextBox 6"/>
-          <p:cNvSpPr txBox="1"/>
-          <p:nvPr/>
-        </p:nvSpPr>
-        <p:spPr>
-          <a:xfrm>
-            <a:off x="548640" y="1874519"/>
-            <a:ext cx="4297680" cy="4206240"/>
-          </a:xfrm>
-          <a:prstGeom prst="rect">
-            <a:avLst/>
-          </a:prstGeom>
-          <a:noFill/>
-        </p:spPr>
-        <p:txBody>
-          <a:bodyPr wrap="square">
-            <a:spAutoFit/>
-          </a:bodyPr>
-          <a:lstStyle/>
-          <a:p>
-            <a:pPr algn="l" indent="-228600" marL="228600">
-              <a:spcAft>
-                <a:spcPts val="800"/>
-              </a:spcAft>
-              <a:buClr>
-                <a:srgbClr val="1E5EF3"/>
-              </a:buClr>
-              <a:buChar char="—"/>
-            </a:pPr>
-            <a:r>
-              <a:rPr sz="1450" b="0">
-                <a:solidFill>
-                  <a:srgbClr val="202B38"/>
-                </a:solidFill>
-                <a:latin typeface="Arial"/>
-              </a:rPr>
-              <a:t>Session 2 left a model-ready table: 712 training rows, 179 test rows, 18 features.</a:t>
-            </a:r>
-          </a:p>
-          <a:p>
-            <a:pPr algn="l" indent="-228600" marL="228600">
-              <a:spcAft>
-                <a:spcPts val="800"/>
-              </a:spcAft>
-              <a:buClr>
-                <a:srgbClr val="1E5EF3"/>
-              </a:buClr>
-              <a:buChar char="—"/>
-            </a:pPr>
-            <a:r>
-              <a:rPr sz="1450" b="0">
-                <a:solidFill>
-                  <a:srgbClr val="202B38"/>
-                </a:solidFill>
-                <a:latin typeface="Arial"/>
-              </a:rPr>
-              <a:t>Six algorithms could predict who survived - picking by name or fashion is guessing.</a:t>
-            </a:r>
-          </a:p>
-          <a:p>
-            <a:pPr algn="l" indent="-228600" marL="228600">
-              <a:spcAft>
-                <a:spcPts val="800"/>
-              </a:spcAft>
-              <a:buClr>
-                <a:srgbClr val="1E5EF3"/>
-              </a:buClr>
-              <a:buChar char="—"/>
-            </a:pPr>
-            <a:r>
-              <a:rPr sz="1450" b="0">
-                <a:solidFill>
-                  <a:srgbClr val="202B38"/>
-                </a:solidFill>
-                <a:latin typeface="Arial"/>
-              </a:rPr>
-              <a:t>Model SELECTION = choosing among models and settings. Done many times, in the CHOOSE band, by cross-validation.</a:t>
-            </a:r>
-          </a:p>
-          <a:p>
-            <a:pPr algn="l" indent="-228600" marL="228600">
-              <a:spcAft>
-                <a:spcPts val="800"/>
-              </a:spcAft>
-              <a:buClr>
-                <a:srgbClr val="1E5EF3"/>
-              </a:buClr>
-              <a:buChar char="—"/>
-            </a:pPr>
-            <a:r>
-              <a:rPr sz="1450" b="0">
-                <a:solidFill>
-                  <a:srgbClr val="202B38"/>
-                </a:solidFill>
-                <a:latin typeface="Arial"/>
-              </a:rPr>
-              <a:t>Model ASSESSMENT = grading the final choice. Done once, in the REPORT band. Select on the test set and its score stops being a forecast.</a:t>
-            </a:r>
-          </a:p>
-          <a:p>
-            <a:pPr algn="l" indent="-228600" marL="228600">
-              <a:spcAft>
-                <a:spcPts val="800"/>
-              </a:spcAft>
-              <a:buClr>
-                <a:srgbClr val="1E5EF3"/>
-              </a:buClr>
-              <a:buChar char="—"/>
-            </a:pPr>
-            <a:r>
-              <a:rPr sz="1450" b="0">
-                <a:solidFill>
-                  <a:srgbClr val="202B38"/>
-                </a:solidFill>
-                <a:latin typeface="Arial"/>
-              </a:rPr>
-              <a:t>The plan: a floor, a fair referee, the right metric - then one look at the test set.</a:t>
-            </a:r>
-          </a:p>
-        </p:txBody>
-      </p:sp>
-      <p:pic>
-        <p:nvPicPr>
-          <p:cNvPr id="8" name="Picture 7" descr="frame_c_bar.png"/>
-          <p:cNvPicPr>
-            <a:picLocks noChangeAspect="1"/>
-          </p:cNvPicPr>
-          <p:nvPr/>
-        </p:nvPicPr>
-        <p:blipFill>
-          <a:blip r:embed="rId2"/>
-          <a:stretch>
-            <a:fillRect/>
-          </a:stretch>
-        </p:blipFill>
-        <p:spPr>
-          <a:xfrm>
-            <a:off x="5120640" y="1874519"/>
-            <a:ext cx="6492240" cy="1668970"/>
-          </a:xfrm>
-          <a:prstGeom prst="rect">
-            <a:avLst/>
-          </a:prstGeom>
-        </p:spPr>
-      </p:pic>
-      <p:sp>
-        <p:nvSpPr>
-          <p:cNvPr id="9" name="TextBox 8"/>
-          <p:cNvSpPr txBox="1"/>
-          <p:nvPr/>
-        </p:nvSpPr>
-        <p:spPr>
-          <a:xfrm>
-            <a:off x="5120640" y="6062471"/>
-            <a:ext cx="6492240" cy="365760"/>
-          </a:xfrm>
-          <a:prstGeom prst="rect">
-            <a:avLst/>
-          </a:prstGeom>
-          <a:noFill/>
-        </p:spPr>
-        <p:txBody>
-          <a:bodyPr wrap="square">
-            <a:spAutoFit/>
-          </a:bodyPr>
-          <a:lstStyle/>
-          <a:p>
-            <a:pPr algn="ctr">
-              <a:spcAft>
-                <a:spcPts val="600"/>
-              </a:spcAft>
-              <a:buNone/>
-            </a:pPr>
-            <a:r>
-              <a:rPr sz="1100" b="0">
-                <a:solidFill>
-                  <a:srgbClr val="5B6774"/>
-                </a:solidFill>
-                <a:latin typeface="Arial"/>
-              </a:rPr>
-              <a:t>One bar rules the module, re-shown from Session 2. Harvard CS109A / ISLR ch. 5 (model selection vs model assessment).</a:t>
-            </a:r>
-          </a:p>
-        </p:txBody>
-      </p:sp>
-      <p:sp>
-        <p:nvSpPr>
-          <p:cNvPr id="10" name="TextBox 9"/>
-          <p:cNvSpPr txBox="1"/>
-          <p:nvPr/>
-        </p:nvSpPr>
-        <p:spPr>
-          <a:xfrm>
-            <a:off x="548640" y="6473952"/>
-            <a:ext cx="7315200" cy="292608"/>
-          </a:xfrm>
-          <a:prstGeom prst="rect">
-            <a:avLst/>
-          </a:prstGeom>
-          <a:noFill/>
-        </p:spPr>
-        <p:txBody>
-          <a:bodyPr wrap="square">
-            <a:spAutoFit/>
-          </a:bodyPr>
-          <a:lstStyle/>
-          <a:p>
-            <a:pPr algn="l">
-              <a:spcAft>
-                <a:spcPts val="600"/>
-              </a:spcAft>
-              <a:buNone/>
-            </a:pPr>
-            <a:r>
-              <a:rPr sz="900" b="0">
-                <a:solidFill>
-                  <a:srgbClr val="5B6774"/>
-                </a:solidFill>
-                <a:latin typeface="Arial"/>
-              </a:rPr>
-              <a:t>M2 Session 3 - Model Selection and Evaluation</a:t>
-            </a:r>
-          </a:p>
-        </p:txBody>
-      </p:sp>
-      <p:sp>
-        <p:nvSpPr>
-          <p:cNvPr id="11" name="TextBox 10"/>
-          <p:cNvSpPr txBox="1"/>
-          <p:nvPr/>
-        </p:nvSpPr>
-        <p:spPr>
-          <a:xfrm>
-            <a:off x="11292840" y="6473952"/>
-            <a:ext cx="548640" cy="292608"/>
-          </a:xfrm>
-          <a:prstGeom prst="rect">
-            <a:avLst/>
-          </a:prstGeom>
-          <a:noFill/>
-        </p:spPr>
-        <p:txBody>
-          <a:bodyPr wrap="square">
-            <a:spAutoFit/>
-          </a:bodyPr>
-          <a:lstStyle/>
-          <a:p>
-            <a:pPr algn="r">
-              <a:spcAft>
-                <a:spcPts val="600"/>
-              </a:spcAft>
-              <a:buNone/>
-            </a:pPr>
-            <a:r>
-              <a:rPr sz="900" b="0">
-                <a:solidFill>
-                  <a:srgbClr val="5B6774"/>
-                </a:solidFill>
-                <a:latin typeface="Arial"/>
-              </a:rPr>
-              <a:t>2</a:t>
-            </a:r>
-          </a:p>
-        </p:txBody>
-      </p:sp>
-    </p:spTree>
-  </p:cSld>
-  <p:clrMapOvr>
-    <a:masterClrMapping/>
-  </p:clrMapOvr>
-</p:sld>
-</file>
-
-<file path=ppt/slides/slide3.xml><?xml version="1.0" encoding="utf-8"?>
 <p:sld xmlns:a="http://schemas.openxmlformats.org/drawingml/2006/main" xmlns:p="http://schemas.openxmlformats.org/presentationml/2006/main" xmlns:r="http://schemas.openxmlformats.org/officeDocument/2006/relationships">
   <p:cSld>
     <p:spTree>
@@ -8282,7 +5246,7 @@
                 </a:solidFill>
                 <a:latin typeface="Arial"/>
               </a:rPr>
-              <a:t>Session 1's recipe, refilled six times: each contestant is a different filling of the MODEL slot — the loss and the referee stay the same for everyone. (MIT 6.390, Appendix C)</a:t>
+              <a:t>Session 1's recipe, refilled six times: each contestant is a different filling of the MODEL slot - the loss and the referee stay the same for everyone. (MIT 6.390, Appendix C)</a:t>
             </a:r>
           </a:p>
         </p:txBody>
@@ -8359,6 +5323,5473 @@
               <a:rPr sz="900" b="0">
                 <a:solidFill>
                   <a:srgbClr val="5B6774"/>
+                </a:solidFill>
+                <a:latin typeface="Arial"/>
+              </a:rPr>
+              <a:t>12</a:t>
+            </a:r>
+          </a:p>
+        </p:txBody>
+      </p:sp>
+    </p:spTree>
+  </p:cSld>
+  <p:clrMapOvr>
+    <a:masterClrMapping/>
+  </p:clrMapOvr>
+</p:sld>
+</file>
+
+<file path=ppt/slides/slide13.xml><?xml version="1.0" encoding="utf-8"?>
+<p:sld xmlns:a="http://schemas.openxmlformats.org/drawingml/2006/main" xmlns:p="http://schemas.openxmlformats.org/presentationml/2006/main" xmlns:r="http://schemas.openxmlformats.org/officeDocument/2006/relationships">
+  <p:cSld>
+    <p:spTree>
+      <p:nvGrpSpPr>
+        <p:cNvPr id="1" name=""/>
+        <p:cNvGrpSpPr/>
+        <p:nvPr/>
+      </p:nvGrpSpPr>
+      <p:grpSpPr/>
+      <p:sp>
+        <p:nvSpPr>
+          <p:cNvPr id="2" name="Rectangle 1"/>
+          <p:cNvSpPr/>
+          <p:nvPr/>
+        </p:nvSpPr>
+        <p:spPr>
+          <a:xfrm>
+            <a:off x="0" y="0"/>
+            <a:ext cx="12191695" cy="6858000"/>
+          </a:xfrm>
+          <a:prstGeom prst="rect">
+            <a:avLst/>
+          </a:prstGeom>
+          <a:solidFill>
+            <a:srgbClr val="FFFFFF"/>
+          </a:solidFill>
+          <a:ln>
+            <a:noFill/>
+          </a:ln>
+          <a:effectLst/>
+        </p:spPr>
+        <p:style>
+          <a:lnRef idx="1">
+            <a:schemeClr val="accent1"/>
+          </a:lnRef>
+          <a:fillRef idx="3">
+            <a:schemeClr val="accent1"/>
+          </a:fillRef>
+          <a:effectRef idx="2">
+            <a:schemeClr val="accent1"/>
+          </a:effectRef>
+          <a:fontRef idx="minor">
+            <a:schemeClr val="lt1"/>
+          </a:fontRef>
+        </p:style>
+        <p:txBody>
+          <a:bodyPr rtlCol="0" anchor="ctr"/>
+          <a:lstStyle/>
+          <a:p>
+            <a:pPr algn="ctr"/>
+          </a:p>
+        </p:txBody>
+      </p:sp>
+      <p:sp>
+        <p:nvSpPr>
+          <p:cNvPr id="3" name="Rectangle 2"/>
+          <p:cNvSpPr/>
+          <p:nvPr/>
+        </p:nvSpPr>
+        <p:spPr>
+          <a:xfrm>
+            <a:off x="548640" y="475488"/>
+            <a:ext cx="457200" cy="54864"/>
+          </a:xfrm>
+          <a:prstGeom prst="rect">
+            <a:avLst/>
+          </a:prstGeom>
+          <a:solidFill>
+            <a:srgbClr val="1E5EF3"/>
+          </a:solidFill>
+          <a:ln>
+            <a:noFill/>
+          </a:ln>
+          <a:effectLst/>
+        </p:spPr>
+        <p:style>
+          <a:lnRef idx="1">
+            <a:schemeClr val="accent1"/>
+          </a:lnRef>
+          <a:fillRef idx="3">
+            <a:schemeClr val="accent1"/>
+          </a:fillRef>
+          <a:effectRef idx="2">
+            <a:schemeClr val="accent1"/>
+          </a:effectRef>
+          <a:fontRef idx="minor">
+            <a:schemeClr val="lt1"/>
+          </a:fontRef>
+        </p:style>
+        <p:txBody>
+          <a:bodyPr rtlCol="0" anchor="ctr"/>
+          <a:lstStyle/>
+          <a:p>
+            <a:pPr algn="ctr"/>
+          </a:p>
+        </p:txBody>
+      </p:sp>
+      <p:sp>
+        <p:nvSpPr>
+          <p:cNvPr id="4" name="TextBox 3"/>
+          <p:cNvSpPr txBox="1"/>
+          <p:nvPr/>
+        </p:nvSpPr>
+        <p:spPr>
+          <a:xfrm>
+            <a:off x="548640" y="603504"/>
+            <a:ext cx="11091672" cy="274320"/>
+          </a:xfrm>
+          <a:prstGeom prst="rect">
+            <a:avLst/>
+          </a:prstGeom>
+          <a:noFill/>
+        </p:spPr>
+        <p:txBody>
+          <a:bodyPr wrap="square">
+            <a:spAutoFit/>
+          </a:bodyPr>
+          <a:lstStyle/>
+          <a:p>
+            <a:pPr algn="l">
+              <a:spcAft>
+                <a:spcPts val="600"/>
+              </a:spcAft>
+              <a:buNone/>
+            </a:pPr>
+            <a:r>
+              <a:rPr sz="1100" b="1">
+                <a:solidFill>
+                  <a:srgbClr val="1E5EF3"/>
+                </a:solidFill>
+                <a:latin typeface="Arial"/>
+              </a:rPr>
+              <a:t>PART 1'S WARNING, LIVE</a:t>
+            </a:r>
+          </a:p>
+        </p:txBody>
+      </p:sp>
+      <p:sp>
+        <p:nvSpPr>
+          <p:cNvPr id="5" name="TextBox 4"/>
+          <p:cNvSpPr txBox="1"/>
+          <p:nvPr/>
+        </p:nvSpPr>
+        <p:spPr>
+          <a:xfrm>
+            <a:off x="548640" y="868680"/>
+            <a:ext cx="11091672" cy="777240"/>
+          </a:xfrm>
+          <a:prstGeom prst="rect">
+            <a:avLst/>
+          </a:prstGeom>
+          <a:noFill/>
+        </p:spPr>
+        <p:txBody>
+          <a:bodyPr wrap="square">
+            <a:spAutoFit/>
+          </a:bodyPr>
+          <a:lstStyle/>
+          <a:p>
+            <a:pPr algn="l">
+              <a:spcAft>
+                <a:spcPts val="0"/>
+              </a:spcAft>
+              <a:buNone/>
+            </a:pPr>
+            <a:r>
+              <a:rPr sz="2600" b="1">
+                <a:solidFill>
+                  <a:srgbClr val="0A2540"/>
+                </a:solidFill>
+                <a:latin typeface="Arial"/>
+              </a:rPr>
+              <a:t>Training accuracy lies: an unlimited tree scores 0.985 on itself, 0.751 honestly</a:t>
+            </a:r>
+          </a:p>
+        </p:txBody>
+      </p:sp>
+      <p:sp>
+        <p:nvSpPr>
+          <p:cNvPr id="6" name="Rectangle 5"/>
+          <p:cNvSpPr/>
+          <p:nvPr/>
+        </p:nvSpPr>
+        <p:spPr>
+          <a:xfrm>
+            <a:off x="548640" y="1664208"/>
+            <a:ext cx="11091672" cy="12801"/>
+          </a:xfrm>
+          <a:prstGeom prst="rect">
+            <a:avLst/>
+          </a:prstGeom>
+          <a:solidFill>
+            <a:srgbClr val="B9D0FA"/>
+          </a:solidFill>
+          <a:ln>
+            <a:noFill/>
+          </a:ln>
+          <a:effectLst/>
+        </p:spPr>
+        <p:style>
+          <a:lnRef idx="1">
+            <a:schemeClr val="accent1"/>
+          </a:lnRef>
+          <a:fillRef idx="3">
+            <a:schemeClr val="accent1"/>
+          </a:fillRef>
+          <a:effectRef idx="2">
+            <a:schemeClr val="accent1"/>
+          </a:effectRef>
+          <a:fontRef idx="minor">
+            <a:schemeClr val="lt1"/>
+          </a:fontRef>
+        </p:style>
+        <p:txBody>
+          <a:bodyPr rtlCol="0" anchor="ctr"/>
+          <a:lstStyle/>
+          <a:p>
+            <a:pPr algn="ctr"/>
+          </a:p>
+        </p:txBody>
+      </p:sp>
+      <p:sp>
+        <p:nvSpPr>
+          <p:cNvPr id="7" name="TextBox 6"/>
+          <p:cNvSpPr txBox="1"/>
+          <p:nvPr/>
+        </p:nvSpPr>
+        <p:spPr>
+          <a:xfrm>
+            <a:off x="548640" y="1874519"/>
+            <a:ext cx="4297680" cy="4206240"/>
+          </a:xfrm>
+          <a:prstGeom prst="rect">
+            <a:avLst/>
+          </a:prstGeom>
+          <a:noFill/>
+        </p:spPr>
+        <p:txBody>
+          <a:bodyPr wrap="square">
+            <a:spAutoFit/>
+          </a:bodyPr>
+          <a:lstStyle/>
+          <a:p>
+            <a:pPr algn="l" indent="-228600" marL="228600">
+              <a:spcAft>
+                <a:spcPts val="800"/>
+              </a:spcAft>
+              <a:buClr>
+                <a:srgbClr val="1E5EF3"/>
+              </a:buClr>
+              <a:buChar char="—"/>
+            </a:pPr>
+            <a:r>
+              <a:rPr sz="1450" b="0">
+                <a:solidFill>
+                  <a:srgbClr val="202B38"/>
+                </a:solidFill>
+                <a:latin typeface="Arial"/>
+              </a:rPr>
+              <a:t>Let a decision tree grow without limits, then grade it on its own training data: 0.985. Grade it honestly with cross-validation: 0.751.</a:t>
+            </a:r>
+          </a:p>
+          <a:p>
+            <a:pPr algn="l" indent="-228600" marL="228600">
+              <a:spcAft>
+                <a:spcPts val="800"/>
+              </a:spcAft>
+              <a:buClr>
+                <a:srgbClr val="1E5EF3"/>
+              </a:buClr>
+              <a:buChar char="—"/>
+            </a:pPr>
+            <a:r>
+              <a:rPr sz="1450" b="0">
+                <a:solidFill>
+                  <a:srgbClr val="202B38"/>
+                </a:solidFill>
+                <a:latin typeface="Arial"/>
+              </a:rPr>
+              <a:t>It memorized the answers instead of learning the subject - like grading students on the exact questions they practiced at home.</a:t>
+            </a:r>
+          </a:p>
+          <a:p>
+            <a:pPr algn="l" indent="-228600" marL="228600">
+              <a:spcAft>
+                <a:spcPts val="800"/>
+              </a:spcAft>
+              <a:buClr>
+                <a:srgbClr val="1E5EF3"/>
+              </a:buClr>
+              <a:buChar char="—"/>
+            </a:pPr>
+            <a:r>
+              <a:rPr sz="1450" b="0">
+                <a:solidFill>
+                  <a:srgbClr val="202B38"/>
+                </a:solidFill>
+                <a:latin typeface="Arial"/>
+              </a:rPr>
+              <a:t>This is Rule D from the ERM slide, caught in the act: the flexible candidate aces the past and stumbles on fresh rows.</a:t>
+            </a:r>
+          </a:p>
+          <a:p>
+            <a:pPr algn="l" indent="-228600" marL="228600">
+              <a:spcAft>
+                <a:spcPts val="800"/>
+              </a:spcAft>
+              <a:buClr>
+                <a:srgbClr val="1E5EF3"/>
+              </a:buClr>
+              <a:buChar char="—"/>
+            </a:pPr>
+            <a:r>
+              <a:rPr sz="1450" b="0">
+                <a:solidFill>
+                  <a:srgbClr val="202B38"/>
+                </a:solidFill>
+                <a:latin typeface="Arial"/>
+              </a:rPr>
+              <a:t>Read it with the two-number grid: training error low, gap 0.233 wide - the high-variance box.</a:t>
+            </a:r>
+          </a:p>
+          <a:p>
+            <a:pPr algn="l" indent="-228600" marL="228600">
+              <a:spcAft>
+                <a:spcPts val="800"/>
+              </a:spcAft>
+              <a:buClr>
+                <a:srgbClr val="1E5EF3"/>
+              </a:buClr>
+              <a:buChar char="—"/>
+            </a:pPr>
+            <a:r>
+              <a:rPr sz="1450" b="0">
+                <a:solidFill>
+                  <a:srgbClr val="202B38"/>
+                </a:solidFill>
+                <a:latin typeface="Arial"/>
+              </a:rPr>
+              <a:t>That is why the tournament's referee is cross-validation, never training accuracy.</a:t>
+            </a:r>
+          </a:p>
+        </p:txBody>
+      </p:sp>
+      <p:pic>
+        <p:nvPicPr>
+          <p:cNvPr id="8" name="Picture 7" descr="train_vs_cv.png"/>
+          <p:cNvPicPr>
+            <a:picLocks noChangeAspect="1"/>
+          </p:cNvPicPr>
+          <p:nvPr/>
+        </p:nvPicPr>
+        <p:blipFill>
+          <a:blip r:embed="rId2"/>
+          <a:stretch>
+            <a:fillRect/>
+          </a:stretch>
+        </p:blipFill>
+        <p:spPr>
+          <a:xfrm>
+            <a:off x="5120640" y="1874519"/>
+            <a:ext cx="6492240" cy="3951584"/>
+          </a:xfrm>
+          <a:prstGeom prst="rect">
+            <a:avLst/>
+          </a:prstGeom>
+        </p:spPr>
+      </p:pic>
+      <p:sp>
+        <p:nvSpPr>
+          <p:cNvPr id="9" name="TextBox 8"/>
+          <p:cNvSpPr txBox="1"/>
+          <p:nvPr/>
+        </p:nvSpPr>
+        <p:spPr>
+          <a:xfrm>
+            <a:off x="5120640" y="6062471"/>
+            <a:ext cx="6492240" cy="365760"/>
+          </a:xfrm>
+          <a:prstGeom prst="rect">
+            <a:avLst/>
+          </a:prstGeom>
+          <a:noFill/>
+        </p:spPr>
+        <p:txBody>
+          <a:bodyPr wrap="square">
+            <a:spAutoFit/>
+          </a:bodyPr>
+          <a:lstStyle/>
+          <a:p>
+            <a:pPr algn="ctr">
+              <a:spcAft>
+                <a:spcPts val="600"/>
+              </a:spcAft>
+              <a:buNone/>
+            </a:pPr>
+            <a:r>
+              <a:rPr sz="1100" b="0">
+                <a:solidFill>
+                  <a:srgbClr val="5B6774"/>
+                </a:solidFill>
+                <a:latin typeface="Arial"/>
+              </a:rPr>
+              <a:t>Unlimited decision tree, training vs 5-fold CV accuracy. Module 2, notebook 2.</a:t>
+            </a:r>
+          </a:p>
+        </p:txBody>
+      </p:sp>
+      <p:sp>
+        <p:nvSpPr>
+          <p:cNvPr id="10" name="TextBox 9"/>
+          <p:cNvSpPr txBox="1"/>
+          <p:nvPr/>
+        </p:nvSpPr>
+        <p:spPr>
+          <a:xfrm>
+            <a:off x="548640" y="6473952"/>
+            <a:ext cx="7315200" cy="292608"/>
+          </a:xfrm>
+          <a:prstGeom prst="rect">
+            <a:avLst/>
+          </a:prstGeom>
+          <a:noFill/>
+        </p:spPr>
+        <p:txBody>
+          <a:bodyPr wrap="square">
+            <a:spAutoFit/>
+          </a:bodyPr>
+          <a:lstStyle/>
+          <a:p>
+            <a:pPr algn="l">
+              <a:spcAft>
+                <a:spcPts val="600"/>
+              </a:spcAft>
+              <a:buNone/>
+            </a:pPr>
+            <a:r>
+              <a:rPr sz="900" b="0">
+                <a:solidFill>
+                  <a:srgbClr val="5B6774"/>
+                </a:solidFill>
+                <a:latin typeface="Arial"/>
+              </a:rPr>
+              <a:t>M2 Session 3 - Model Selection and Evaluation</a:t>
+            </a:r>
+          </a:p>
+        </p:txBody>
+      </p:sp>
+      <p:sp>
+        <p:nvSpPr>
+          <p:cNvPr id="11" name="TextBox 10"/>
+          <p:cNvSpPr txBox="1"/>
+          <p:nvPr/>
+        </p:nvSpPr>
+        <p:spPr>
+          <a:xfrm>
+            <a:off x="11292840" y="6473952"/>
+            <a:ext cx="548640" cy="292608"/>
+          </a:xfrm>
+          <a:prstGeom prst="rect">
+            <a:avLst/>
+          </a:prstGeom>
+          <a:noFill/>
+        </p:spPr>
+        <p:txBody>
+          <a:bodyPr wrap="square">
+            <a:spAutoFit/>
+          </a:bodyPr>
+          <a:lstStyle/>
+          <a:p>
+            <a:pPr algn="r">
+              <a:spcAft>
+                <a:spcPts val="600"/>
+              </a:spcAft>
+              <a:buNone/>
+            </a:pPr>
+            <a:r>
+              <a:rPr sz="900" b="0">
+                <a:solidFill>
+                  <a:srgbClr val="5B6774"/>
+                </a:solidFill>
+                <a:latin typeface="Arial"/>
+              </a:rPr>
+              <a:t>13</a:t>
+            </a:r>
+          </a:p>
+        </p:txBody>
+      </p:sp>
+    </p:spTree>
+  </p:cSld>
+  <p:clrMapOvr>
+    <a:masterClrMapping/>
+  </p:clrMapOvr>
+</p:sld>
+</file>
+
+<file path=ppt/slides/slide14.xml><?xml version="1.0" encoding="utf-8"?>
+<p:sld xmlns:a="http://schemas.openxmlformats.org/drawingml/2006/main" xmlns:p="http://schemas.openxmlformats.org/presentationml/2006/main" xmlns:r="http://schemas.openxmlformats.org/officeDocument/2006/relationships">
+  <p:cSld>
+    <p:spTree>
+      <p:nvGrpSpPr>
+        <p:cNvPr id="1" name=""/>
+        <p:cNvGrpSpPr/>
+        <p:nvPr/>
+      </p:nvGrpSpPr>
+      <p:grpSpPr/>
+      <p:sp>
+        <p:nvSpPr>
+          <p:cNvPr id="2" name="Rectangle 1"/>
+          <p:cNvSpPr/>
+          <p:nvPr/>
+        </p:nvSpPr>
+        <p:spPr>
+          <a:xfrm>
+            <a:off x="0" y="0"/>
+            <a:ext cx="12191695" cy="6858000"/>
+          </a:xfrm>
+          <a:prstGeom prst="rect">
+            <a:avLst/>
+          </a:prstGeom>
+          <a:solidFill>
+            <a:srgbClr val="FFFFFF"/>
+          </a:solidFill>
+          <a:ln>
+            <a:noFill/>
+          </a:ln>
+          <a:effectLst/>
+        </p:spPr>
+        <p:style>
+          <a:lnRef idx="1">
+            <a:schemeClr val="accent1"/>
+          </a:lnRef>
+          <a:fillRef idx="3">
+            <a:schemeClr val="accent1"/>
+          </a:fillRef>
+          <a:effectRef idx="2">
+            <a:schemeClr val="accent1"/>
+          </a:effectRef>
+          <a:fontRef idx="minor">
+            <a:schemeClr val="lt1"/>
+          </a:fontRef>
+        </p:style>
+        <p:txBody>
+          <a:bodyPr rtlCol="0" anchor="ctr"/>
+          <a:lstStyle/>
+          <a:p>
+            <a:pPr algn="ctr"/>
+          </a:p>
+        </p:txBody>
+      </p:sp>
+      <p:sp>
+        <p:nvSpPr>
+          <p:cNvPr id="3" name="Rectangle 2"/>
+          <p:cNvSpPr/>
+          <p:nvPr/>
+        </p:nvSpPr>
+        <p:spPr>
+          <a:xfrm>
+            <a:off x="548640" y="475488"/>
+            <a:ext cx="457200" cy="54864"/>
+          </a:xfrm>
+          <a:prstGeom prst="rect">
+            <a:avLst/>
+          </a:prstGeom>
+          <a:solidFill>
+            <a:srgbClr val="1E5EF3"/>
+          </a:solidFill>
+          <a:ln>
+            <a:noFill/>
+          </a:ln>
+          <a:effectLst/>
+        </p:spPr>
+        <p:style>
+          <a:lnRef idx="1">
+            <a:schemeClr val="accent1"/>
+          </a:lnRef>
+          <a:fillRef idx="3">
+            <a:schemeClr val="accent1"/>
+          </a:fillRef>
+          <a:effectRef idx="2">
+            <a:schemeClr val="accent1"/>
+          </a:effectRef>
+          <a:fontRef idx="minor">
+            <a:schemeClr val="lt1"/>
+          </a:fontRef>
+        </p:style>
+        <p:txBody>
+          <a:bodyPr rtlCol="0" anchor="ctr"/>
+          <a:lstStyle/>
+          <a:p>
+            <a:pPr algn="ctr"/>
+          </a:p>
+        </p:txBody>
+      </p:sp>
+      <p:sp>
+        <p:nvSpPr>
+          <p:cNvPr id="4" name="TextBox 3"/>
+          <p:cNvSpPr txBox="1"/>
+          <p:nvPr/>
+        </p:nvSpPr>
+        <p:spPr>
+          <a:xfrm>
+            <a:off x="548640" y="603504"/>
+            <a:ext cx="11091672" cy="274320"/>
+          </a:xfrm>
+          <a:prstGeom prst="rect">
+            <a:avLst/>
+          </a:prstGeom>
+          <a:noFill/>
+        </p:spPr>
+        <p:txBody>
+          <a:bodyPr wrap="square">
+            <a:spAutoFit/>
+          </a:bodyPr>
+          <a:lstStyle/>
+          <a:p>
+            <a:pPr algn="l">
+              <a:spcAft>
+                <a:spcPts val="600"/>
+              </a:spcAft>
+              <a:buNone/>
+            </a:pPr>
+            <a:r>
+              <a:rPr sz="1100" b="1">
+                <a:solidFill>
+                  <a:srgbClr val="1E5EF3"/>
+                </a:solidFill>
+                <a:latin typeface="Arial"/>
+              </a:rPr>
+              <a:t>BASELINE FIRST</a:t>
+            </a:r>
+          </a:p>
+        </p:txBody>
+      </p:sp>
+      <p:sp>
+        <p:nvSpPr>
+          <p:cNvPr id="5" name="TextBox 4"/>
+          <p:cNvSpPr txBox="1"/>
+          <p:nvPr/>
+        </p:nvSpPr>
+        <p:spPr>
+          <a:xfrm>
+            <a:off x="548640" y="868680"/>
+            <a:ext cx="11091672" cy="777240"/>
+          </a:xfrm>
+          <a:prstGeom prst="rect">
+            <a:avLst/>
+          </a:prstGeom>
+          <a:noFill/>
+        </p:spPr>
+        <p:txBody>
+          <a:bodyPr wrap="square">
+            <a:spAutoFit/>
+          </a:bodyPr>
+          <a:lstStyle/>
+          <a:p>
+            <a:pPr algn="l">
+              <a:spcAft>
+                <a:spcPts val="0"/>
+              </a:spcAft>
+              <a:buNone/>
+            </a:pPr>
+            <a:r>
+              <a:rPr sz="2600" b="1">
+                <a:solidFill>
+                  <a:srgbClr val="0A2540"/>
+                </a:solidFill>
+                <a:latin typeface="Arial"/>
+              </a:rPr>
+              <a:t>Beat the floor first: always saying "died" already scores 0.617</a:t>
+            </a:r>
+          </a:p>
+        </p:txBody>
+      </p:sp>
+      <p:sp>
+        <p:nvSpPr>
+          <p:cNvPr id="6" name="Rectangle 5"/>
+          <p:cNvSpPr/>
+          <p:nvPr/>
+        </p:nvSpPr>
+        <p:spPr>
+          <a:xfrm>
+            <a:off x="548640" y="1664208"/>
+            <a:ext cx="11091672" cy="12801"/>
+          </a:xfrm>
+          <a:prstGeom prst="rect">
+            <a:avLst/>
+          </a:prstGeom>
+          <a:solidFill>
+            <a:srgbClr val="B9D0FA"/>
+          </a:solidFill>
+          <a:ln>
+            <a:noFill/>
+          </a:ln>
+          <a:effectLst/>
+        </p:spPr>
+        <p:style>
+          <a:lnRef idx="1">
+            <a:schemeClr val="accent1"/>
+          </a:lnRef>
+          <a:fillRef idx="3">
+            <a:schemeClr val="accent1"/>
+          </a:fillRef>
+          <a:effectRef idx="2">
+            <a:schemeClr val="accent1"/>
+          </a:effectRef>
+          <a:fontRef idx="minor">
+            <a:schemeClr val="lt1"/>
+          </a:fontRef>
+        </p:style>
+        <p:txBody>
+          <a:bodyPr rtlCol="0" anchor="ctr"/>
+          <a:lstStyle/>
+          <a:p>
+            <a:pPr algn="ctr"/>
+          </a:p>
+        </p:txBody>
+      </p:sp>
+      <p:sp>
+        <p:nvSpPr>
+          <p:cNvPr id="7" name="TextBox 6"/>
+          <p:cNvSpPr txBox="1"/>
+          <p:nvPr/>
+        </p:nvSpPr>
+        <p:spPr>
+          <a:xfrm>
+            <a:off x="1371600" y="2286000"/>
+            <a:ext cx="9418320" cy="2011680"/>
+          </a:xfrm>
+          <a:prstGeom prst="rect">
+            <a:avLst/>
+          </a:prstGeom>
+          <a:noFill/>
+        </p:spPr>
+        <p:txBody>
+          <a:bodyPr wrap="square">
+            <a:spAutoFit/>
+          </a:bodyPr>
+          <a:lstStyle/>
+          <a:p>
+            <a:pPr algn="ctr">
+              <a:spcAft>
+                <a:spcPts val="600"/>
+              </a:spcAft>
+              <a:buNone/>
+            </a:pPr>
+            <a:r>
+              <a:rPr sz="9600" b="1">
+                <a:solidFill>
+                  <a:srgbClr val="1E5EF3"/>
+                </a:solidFill>
+                <a:latin typeface="Arial"/>
+              </a:rPr>
+              <a:t>0.617</a:t>
+            </a:r>
+          </a:p>
+        </p:txBody>
+      </p:sp>
+      <p:sp>
+        <p:nvSpPr>
+          <p:cNvPr id="8" name="TextBox 7"/>
+          <p:cNvSpPr txBox="1"/>
+          <p:nvPr/>
+        </p:nvSpPr>
+        <p:spPr>
+          <a:xfrm>
+            <a:off x="1371600" y="4434840"/>
+            <a:ext cx="9418320" cy="731520"/>
+          </a:xfrm>
+          <a:prstGeom prst="rect">
+            <a:avLst/>
+          </a:prstGeom>
+          <a:noFill/>
+        </p:spPr>
+        <p:txBody>
+          <a:bodyPr wrap="square">
+            <a:spAutoFit/>
+          </a:bodyPr>
+          <a:lstStyle/>
+          <a:p>
+            <a:pPr algn="ctr">
+              <a:spcAft>
+                <a:spcPts val="600"/>
+              </a:spcAft>
+              <a:buNone/>
+            </a:pPr>
+            <a:r>
+              <a:rPr sz="1800" b="0">
+                <a:solidFill>
+                  <a:srgbClr val="0A2540"/>
+                </a:solidFill>
+                <a:latin typeface="Arial"/>
+              </a:rPr>
+              <a:t>Dummy baseline, 5-fold CV accuracy (+/- 0.003). It ignores the data and always predicts "died".</a:t>
+            </a:r>
+          </a:p>
+        </p:txBody>
+      </p:sp>
+      <p:sp>
+        <p:nvSpPr>
+          <p:cNvPr id="9" name="TextBox 8"/>
+          <p:cNvSpPr txBox="1"/>
+          <p:nvPr/>
+        </p:nvSpPr>
+        <p:spPr>
+          <a:xfrm>
+            <a:off x="1371600" y="5257800"/>
+            <a:ext cx="9418320" cy="640080"/>
+          </a:xfrm>
+          <a:prstGeom prst="rect">
+            <a:avLst/>
+          </a:prstGeom>
+          <a:noFill/>
+        </p:spPr>
+        <p:txBody>
+          <a:bodyPr wrap="square">
+            <a:spAutoFit/>
+          </a:bodyPr>
+          <a:lstStyle/>
+          <a:p>
+            <a:pPr algn="ctr">
+              <a:spcAft>
+                <a:spcPts val="600"/>
+              </a:spcAft>
+              <a:buNone/>
+            </a:pPr>
+            <a:r>
+              <a:rPr sz="1250" b="0">
+                <a:solidFill>
+                  <a:srgbClr val="5B6774"/>
+                </a:solidFill>
+                <a:latin typeface="Arial"/>
+              </a:rPr>
+              <a:t>Any model that cannot clearly beat this floor is useless, no matter how fancy its name. Andrew Ng's doctrine: build your first system quickly, then iterate (Machine Learning Yearning, ch. 13).</a:t>
+            </a:r>
+          </a:p>
+        </p:txBody>
+      </p:sp>
+      <p:sp>
+        <p:nvSpPr>
+          <p:cNvPr id="10" name="TextBox 9"/>
+          <p:cNvSpPr txBox="1"/>
+          <p:nvPr/>
+        </p:nvSpPr>
+        <p:spPr>
+          <a:xfrm>
+            <a:off x="548640" y="6473952"/>
+            <a:ext cx="7315200" cy="292608"/>
+          </a:xfrm>
+          <a:prstGeom prst="rect">
+            <a:avLst/>
+          </a:prstGeom>
+          <a:noFill/>
+        </p:spPr>
+        <p:txBody>
+          <a:bodyPr wrap="square">
+            <a:spAutoFit/>
+          </a:bodyPr>
+          <a:lstStyle/>
+          <a:p>
+            <a:pPr algn="l">
+              <a:spcAft>
+                <a:spcPts val="600"/>
+              </a:spcAft>
+              <a:buNone/>
+            </a:pPr>
+            <a:r>
+              <a:rPr sz="900" b="0">
+                <a:solidFill>
+                  <a:srgbClr val="5B6774"/>
+                </a:solidFill>
+                <a:latin typeface="Arial"/>
+              </a:rPr>
+              <a:t>M2 Session 3 - Model Selection and Evaluation</a:t>
+            </a:r>
+          </a:p>
+        </p:txBody>
+      </p:sp>
+      <p:sp>
+        <p:nvSpPr>
+          <p:cNvPr id="11" name="TextBox 10"/>
+          <p:cNvSpPr txBox="1"/>
+          <p:nvPr/>
+        </p:nvSpPr>
+        <p:spPr>
+          <a:xfrm>
+            <a:off x="11292840" y="6473952"/>
+            <a:ext cx="548640" cy="292608"/>
+          </a:xfrm>
+          <a:prstGeom prst="rect">
+            <a:avLst/>
+          </a:prstGeom>
+          <a:noFill/>
+        </p:spPr>
+        <p:txBody>
+          <a:bodyPr wrap="square">
+            <a:spAutoFit/>
+          </a:bodyPr>
+          <a:lstStyle/>
+          <a:p>
+            <a:pPr algn="r">
+              <a:spcAft>
+                <a:spcPts val="600"/>
+              </a:spcAft>
+              <a:buNone/>
+            </a:pPr>
+            <a:r>
+              <a:rPr sz="900" b="0">
+                <a:solidFill>
+                  <a:srgbClr val="5B6774"/>
+                </a:solidFill>
+                <a:latin typeface="Arial"/>
+              </a:rPr>
+              <a:t>14</a:t>
+            </a:r>
+          </a:p>
+        </p:txBody>
+      </p:sp>
+    </p:spTree>
+  </p:cSld>
+  <p:clrMapOvr>
+    <a:masterClrMapping/>
+  </p:clrMapOvr>
+</p:sld>
+</file>
+
+<file path=ppt/slides/slide15.xml><?xml version="1.0" encoding="utf-8"?>
+<p:sld xmlns:a="http://schemas.openxmlformats.org/drawingml/2006/main" xmlns:p="http://schemas.openxmlformats.org/presentationml/2006/main" xmlns:r="http://schemas.openxmlformats.org/officeDocument/2006/relationships">
+  <p:cSld>
+    <p:spTree>
+      <p:nvGrpSpPr>
+        <p:cNvPr id="1" name=""/>
+        <p:cNvGrpSpPr/>
+        <p:nvPr/>
+      </p:nvGrpSpPr>
+      <p:grpSpPr/>
+      <p:sp>
+        <p:nvSpPr>
+          <p:cNvPr id="2" name="Rectangle 1"/>
+          <p:cNvSpPr/>
+          <p:nvPr/>
+        </p:nvSpPr>
+        <p:spPr>
+          <a:xfrm>
+            <a:off x="0" y="0"/>
+            <a:ext cx="12191695" cy="6858000"/>
+          </a:xfrm>
+          <a:prstGeom prst="rect">
+            <a:avLst/>
+          </a:prstGeom>
+          <a:solidFill>
+            <a:srgbClr val="FFFFFF"/>
+          </a:solidFill>
+          <a:ln>
+            <a:noFill/>
+          </a:ln>
+          <a:effectLst/>
+        </p:spPr>
+        <p:style>
+          <a:lnRef idx="1">
+            <a:schemeClr val="accent1"/>
+          </a:lnRef>
+          <a:fillRef idx="3">
+            <a:schemeClr val="accent1"/>
+          </a:fillRef>
+          <a:effectRef idx="2">
+            <a:schemeClr val="accent1"/>
+          </a:effectRef>
+          <a:fontRef idx="minor">
+            <a:schemeClr val="lt1"/>
+          </a:fontRef>
+        </p:style>
+        <p:txBody>
+          <a:bodyPr rtlCol="0" anchor="ctr"/>
+          <a:lstStyle/>
+          <a:p>
+            <a:pPr algn="ctr"/>
+          </a:p>
+        </p:txBody>
+      </p:sp>
+      <p:sp>
+        <p:nvSpPr>
+          <p:cNvPr id="3" name="Rectangle 2"/>
+          <p:cNvSpPr/>
+          <p:nvPr/>
+        </p:nvSpPr>
+        <p:spPr>
+          <a:xfrm>
+            <a:off x="548640" y="475488"/>
+            <a:ext cx="457200" cy="54864"/>
+          </a:xfrm>
+          <a:prstGeom prst="rect">
+            <a:avLst/>
+          </a:prstGeom>
+          <a:solidFill>
+            <a:srgbClr val="1E5EF3"/>
+          </a:solidFill>
+          <a:ln>
+            <a:noFill/>
+          </a:ln>
+          <a:effectLst/>
+        </p:spPr>
+        <p:style>
+          <a:lnRef idx="1">
+            <a:schemeClr val="accent1"/>
+          </a:lnRef>
+          <a:fillRef idx="3">
+            <a:schemeClr val="accent1"/>
+          </a:fillRef>
+          <a:effectRef idx="2">
+            <a:schemeClr val="accent1"/>
+          </a:effectRef>
+          <a:fontRef idx="minor">
+            <a:schemeClr val="lt1"/>
+          </a:fontRef>
+        </p:style>
+        <p:txBody>
+          <a:bodyPr rtlCol="0" anchor="ctr"/>
+          <a:lstStyle/>
+          <a:p>
+            <a:pPr algn="ctr"/>
+          </a:p>
+        </p:txBody>
+      </p:sp>
+      <p:sp>
+        <p:nvSpPr>
+          <p:cNvPr id="4" name="TextBox 3"/>
+          <p:cNvSpPr txBox="1"/>
+          <p:nvPr/>
+        </p:nvSpPr>
+        <p:spPr>
+          <a:xfrm>
+            <a:off x="548640" y="603504"/>
+            <a:ext cx="11091672" cy="274320"/>
+          </a:xfrm>
+          <a:prstGeom prst="rect">
+            <a:avLst/>
+          </a:prstGeom>
+          <a:noFill/>
+        </p:spPr>
+        <p:txBody>
+          <a:bodyPr wrap="square">
+            <a:spAutoFit/>
+          </a:bodyPr>
+          <a:lstStyle/>
+          <a:p>
+            <a:pPr algn="l">
+              <a:spcAft>
+                <a:spcPts val="600"/>
+              </a:spcAft>
+              <a:buNone/>
+            </a:pPr>
+            <a:r>
+              <a:rPr sz="1100" b="1">
+                <a:solidFill>
+                  <a:srgbClr val="1E5EF3"/>
+                </a:solidFill>
+                <a:latin typeface="Arial"/>
+              </a:rPr>
+              <a:t>SIX MODELS, ONE REFEREE</a:t>
+            </a:r>
+          </a:p>
+        </p:txBody>
+      </p:sp>
+      <p:sp>
+        <p:nvSpPr>
+          <p:cNvPr id="5" name="TextBox 4"/>
+          <p:cNvSpPr txBox="1"/>
+          <p:nvPr/>
+        </p:nvSpPr>
+        <p:spPr>
+          <a:xfrm>
+            <a:off x="548640" y="868680"/>
+            <a:ext cx="11091672" cy="777240"/>
+          </a:xfrm>
+          <a:prstGeom prst="rect">
+            <a:avLst/>
+          </a:prstGeom>
+          <a:noFill/>
+        </p:spPr>
+        <p:txBody>
+          <a:bodyPr wrap="square">
+            <a:spAutoFit/>
+          </a:bodyPr>
+          <a:lstStyle/>
+          <a:p>
+            <a:pPr algn="l">
+              <a:spcAft>
+                <a:spcPts val="0"/>
+              </a:spcAft>
+              <a:buNone/>
+            </a:pPr>
+            <a:r>
+              <a:rPr sz="2600" b="1">
+                <a:solidFill>
+                  <a:srgbClr val="0A2540"/>
+                </a:solidFill>
+                <a:latin typeface="Arial"/>
+              </a:rPr>
+              <a:t>The tournament verdict: the humble scorecard wins at 0.819</a:t>
+            </a:r>
+          </a:p>
+        </p:txBody>
+      </p:sp>
+      <p:sp>
+        <p:nvSpPr>
+          <p:cNvPr id="6" name="Rectangle 5"/>
+          <p:cNvSpPr/>
+          <p:nvPr/>
+        </p:nvSpPr>
+        <p:spPr>
+          <a:xfrm>
+            <a:off x="548640" y="1664208"/>
+            <a:ext cx="11091672" cy="12801"/>
+          </a:xfrm>
+          <a:prstGeom prst="rect">
+            <a:avLst/>
+          </a:prstGeom>
+          <a:solidFill>
+            <a:srgbClr val="B9D0FA"/>
+          </a:solidFill>
+          <a:ln>
+            <a:noFill/>
+          </a:ln>
+          <a:effectLst/>
+        </p:spPr>
+        <p:style>
+          <a:lnRef idx="1">
+            <a:schemeClr val="accent1"/>
+          </a:lnRef>
+          <a:fillRef idx="3">
+            <a:schemeClr val="accent1"/>
+          </a:fillRef>
+          <a:effectRef idx="2">
+            <a:schemeClr val="accent1"/>
+          </a:effectRef>
+          <a:fontRef idx="minor">
+            <a:schemeClr val="lt1"/>
+          </a:fontRef>
+        </p:style>
+        <p:txBody>
+          <a:bodyPr rtlCol="0" anchor="ctr"/>
+          <a:lstStyle/>
+          <a:p>
+            <a:pPr algn="ctr"/>
+          </a:p>
+        </p:txBody>
+      </p:sp>
+      <p:sp>
+        <p:nvSpPr>
+          <p:cNvPr id="7" name="TextBox 6"/>
+          <p:cNvSpPr txBox="1"/>
+          <p:nvPr/>
+        </p:nvSpPr>
+        <p:spPr>
+          <a:xfrm>
+            <a:off x="548640" y="1874519"/>
+            <a:ext cx="4297680" cy="4206240"/>
+          </a:xfrm>
+          <a:prstGeom prst="rect">
+            <a:avLst/>
+          </a:prstGeom>
+          <a:noFill/>
+        </p:spPr>
+        <p:txBody>
+          <a:bodyPr wrap="square">
+            <a:spAutoFit/>
+          </a:bodyPr>
+          <a:lstStyle/>
+          <a:p>
+            <a:pPr algn="l" indent="-228600" marL="228600">
+              <a:spcAft>
+                <a:spcPts val="800"/>
+              </a:spcAft>
+              <a:buClr>
+                <a:srgbClr val="1E5EF3"/>
+              </a:buClr>
+              <a:buChar char="—"/>
+            </a:pPr>
+            <a:r>
+              <a:rPr sz="1450" b="0">
+                <a:solidFill>
+                  <a:srgbClr val="202B38"/>
+                </a:solidFill>
+                <a:latin typeface="Arial"/>
+              </a:rPr>
+              <a:t>Same referee for all six: 5-fold CV, preprocessing re-fit inside every fold - no leaks.</a:t>
+            </a:r>
+          </a:p>
+          <a:p>
+            <a:pPr algn="l" indent="-228600" marL="228600">
+              <a:spcAft>
+                <a:spcPts val="800"/>
+              </a:spcAft>
+              <a:buClr>
+                <a:srgbClr val="1E5EF3"/>
+              </a:buClr>
+              <a:buChar char="—"/>
+            </a:pPr>
+            <a:r>
+              <a:rPr sz="1450" b="0">
+                <a:solidFill>
+                  <a:srgbClr val="202B38"/>
+                </a:solidFill>
+                <a:latin typeface="Arial"/>
+              </a:rPr>
+              <a:t>Logistic Regression leads at 0.819. Gradient Boosting is a close second at 0.816.</a:t>
+            </a:r>
+          </a:p>
+          <a:p>
+            <a:pPr algn="l" indent="-228600" marL="228600">
+              <a:spcAft>
+                <a:spcPts val="800"/>
+              </a:spcAft>
+              <a:buClr>
+                <a:srgbClr val="1E5EF3"/>
+              </a:buClr>
+              <a:buChar char="—"/>
+            </a:pPr>
+            <a:r>
+              <a:rPr sz="1450" b="0">
+                <a:solidFill>
+                  <a:srgbClr val="202B38"/>
+                </a:solidFill>
+                <a:latin typeface="Arial"/>
+              </a:rPr>
+              <a:t>Those error bars are Part 1's spaghetti, measured: the 5 folds are 5 mini-universes, and Random Forest wobbles most (+/- 0.054) while the scorecard barely moves (+/- 0.020).</a:t>
+            </a:r>
+          </a:p>
+          <a:p>
+            <a:pPr algn="l" indent="-228600" marL="228600">
+              <a:spcAft>
+                <a:spcPts val="800"/>
+              </a:spcAft>
+              <a:buClr>
+                <a:srgbClr val="1E5EF3"/>
+              </a:buClr>
+              <a:buChar char="—"/>
+            </a:pPr>
+            <a:r>
+              <a:rPr sz="1450" b="0">
+                <a:solidFill>
+                  <a:srgbClr val="202B38"/>
+                </a:solidFill>
+                <a:latin typeface="Arial"/>
+              </a:rPr>
+              <a:t>Every real model clears the floor. The Dummy's F1 is 0.000 - it never predicts "survived".</a:t>
+            </a:r>
+          </a:p>
+          <a:p>
+            <a:pPr algn="l" indent="-228600" marL="228600">
+              <a:spcAft>
+                <a:spcPts val="800"/>
+              </a:spcAft>
+              <a:buClr>
+                <a:srgbClr val="1E5EF3"/>
+              </a:buClr>
+              <a:buChar char="—"/>
+            </a:pPr>
+            <a:r>
+              <a:rPr sz="1450" b="0">
+                <a:solidFill>
+                  <a:srgbClr val="202B38"/>
+                </a:solidFill>
+                <a:latin typeface="Arial"/>
+              </a:rPr>
+              <a:t>The surprise: fancy does not automatically mean better.</a:t>
+            </a:r>
+          </a:p>
+        </p:txBody>
+      </p:sp>
+      <p:pic>
+        <p:nvPicPr>
+          <p:cNvPr id="8" name="Picture 7" descr="tournament.png"/>
+          <p:cNvPicPr>
+            <a:picLocks noChangeAspect="1"/>
+          </p:cNvPicPr>
+          <p:nvPr/>
+        </p:nvPicPr>
+        <p:blipFill>
+          <a:blip r:embed="rId2"/>
+          <a:stretch>
+            <a:fillRect/>
+          </a:stretch>
+        </p:blipFill>
+        <p:spPr>
+          <a:xfrm>
+            <a:off x="5120640" y="1874519"/>
+            <a:ext cx="6492240" cy="3339938"/>
+          </a:xfrm>
+          <a:prstGeom prst="rect">
+            <a:avLst/>
+          </a:prstGeom>
+        </p:spPr>
+      </p:pic>
+      <p:sp>
+        <p:nvSpPr>
+          <p:cNvPr id="9" name="TextBox 8"/>
+          <p:cNvSpPr txBox="1"/>
+          <p:nvPr/>
+        </p:nvSpPr>
+        <p:spPr>
+          <a:xfrm>
+            <a:off x="5120640" y="6062471"/>
+            <a:ext cx="6492240" cy="365760"/>
+          </a:xfrm>
+          <a:prstGeom prst="rect">
+            <a:avLst/>
+          </a:prstGeom>
+          <a:noFill/>
+        </p:spPr>
+        <p:txBody>
+          <a:bodyPr wrap="square">
+            <a:spAutoFit/>
+          </a:bodyPr>
+          <a:lstStyle/>
+          <a:p>
+            <a:pPr algn="ctr">
+              <a:spcAft>
+                <a:spcPts val="600"/>
+              </a:spcAft>
+              <a:buNone/>
+            </a:pPr>
+            <a:r>
+              <a:rPr sz="1100" b="0">
+                <a:solidFill>
+                  <a:srgbClr val="5B6774"/>
+                </a:solidFill>
+                <a:latin typeface="Arial"/>
+              </a:rPr>
+              <a:t>Mean 5-fold CV accuracy, +/- 1 std. Module 2, notebook 2.</a:t>
+            </a:r>
+          </a:p>
+        </p:txBody>
+      </p:sp>
+      <p:sp>
+        <p:nvSpPr>
+          <p:cNvPr id="10" name="TextBox 9"/>
+          <p:cNvSpPr txBox="1"/>
+          <p:nvPr/>
+        </p:nvSpPr>
+        <p:spPr>
+          <a:xfrm>
+            <a:off x="548640" y="6473952"/>
+            <a:ext cx="7315200" cy="292608"/>
+          </a:xfrm>
+          <a:prstGeom prst="rect">
+            <a:avLst/>
+          </a:prstGeom>
+          <a:noFill/>
+        </p:spPr>
+        <p:txBody>
+          <a:bodyPr wrap="square">
+            <a:spAutoFit/>
+          </a:bodyPr>
+          <a:lstStyle/>
+          <a:p>
+            <a:pPr algn="l">
+              <a:spcAft>
+                <a:spcPts val="600"/>
+              </a:spcAft>
+              <a:buNone/>
+            </a:pPr>
+            <a:r>
+              <a:rPr sz="900" b="0">
+                <a:solidFill>
+                  <a:srgbClr val="5B6774"/>
+                </a:solidFill>
+                <a:latin typeface="Arial"/>
+              </a:rPr>
+              <a:t>M2 Session 3 - Model Selection and Evaluation</a:t>
+            </a:r>
+          </a:p>
+        </p:txBody>
+      </p:sp>
+      <p:sp>
+        <p:nvSpPr>
+          <p:cNvPr id="11" name="TextBox 10"/>
+          <p:cNvSpPr txBox="1"/>
+          <p:nvPr/>
+        </p:nvSpPr>
+        <p:spPr>
+          <a:xfrm>
+            <a:off x="11292840" y="6473952"/>
+            <a:ext cx="548640" cy="292608"/>
+          </a:xfrm>
+          <a:prstGeom prst="rect">
+            <a:avLst/>
+          </a:prstGeom>
+          <a:noFill/>
+        </p:spPr>
+        <p:txBody>
+          <a:bodyPr wrap="square">
+            <a:spAutoFit/>
+          </a:bodyPr>
+          <a:lstStyle/>
+          <a:p>
+            <a:pPr algn="r">
+              <a:spcAft>
+                <a:spcPts val="600"/>
+              </a:spcAft>
+              <a:buNone/>
+            </a:pPr>
+            <a:r>
+              <a:rPr sz="900" b="0">
+                <a:solidFill>
+                  <a:srgbClr val="5B6774"/>
+                </a:solidFill>
+                <a:latin typeface="Arial"/>
+              </a:rPr>
+              <a:t>15</a:t>
+            </a:r>
+          </a:p>
+        </p:txBody>
+      </p:sp>
+    </p:spTree>
+  </p:cSld>
+  <p:clrMapOvr>
+    <a:masterClrMapping/>
+  </p:clrMapOvr>
+</p:sld>
+</file>
+
+<file path=ppt/slides/slide16.xml><?xml version="1.0" encoding="utf-8"?>
+<p:sld xmlns:a="http://schemas.openxmlformats.org/drawingml/2006/main" xmlns:p="http://schemas.openxmlformats.org/presentationml/2006/main" xmlns:r="http://schemas.openxmlformats.org/officeDocument/2006/relationships">
+  <p:cSld>
+    <p:spTree>
+      <p:nvGrpSpPr>
+        <p:cNvPr id="1" name=""/>
+        <p:cNvGrpSpPr/>
+        <p:nvPr/>
+      </p:nvGrpSpPr>
+      <p:grpSpPr/>
+      <p:sp>
+        <p:nvSpPr>
+          <p:cNvPr id="2" name="Rectangle 1"/>
+          <p:cNvSpPr/>
+          <p:nvPr/>
+        </p:nvSpPr>
+        <p:spPr>
+          <a:xfrm>
+            <a:off x="0" y="0"/>
+            <a:ext cx="12191695" cy="6858000"/>
+          </a:xfrm>
+          <a:prstGeom prst="rect">
+            <a:avLst/>
+          </a:prstGeom>
+          <a:solidFill>
+            <a:srgbClr val="FFFFFF"/>
+          </a:solidFill>
+          <a:ln>
+            <a:noFill/>
+          </a:ln>
+          <a:effectLst/>
+        </p:spPr>
+        <p:style>
+          <a:lnRef idx="1">
+            <a:schemeClr val="accent1"/>
+          </a:lnRef>
+          <a:fillRef idx="3">
+            <a:schemeClr val="accent1"/>
+          </a:fillRef>
+          <a:effectRef idx="2">
+            <a:schemeClr val="accent1"/>
+          </a:effectRef>
+          <a:fontRef idx="minor">
+            <a:schemeClr val="lt1"/>
+          </a:fontRef>
+        </p:style>
+        <p:txBody>
+          <a:bodyPr rtlCol="0" anchor="ctr"/>
+          <a:lstStyle/>
+          <a:p>
+            <a:pPr algn="ctr"/>
+          </a:p>
+        </p:txBody>
+      </p:sp>
+      <p:sp>
+        <p:nvSpPr>
+          <p:cNvPr id="3" name="Rectangle 2"/>
+          <p:cNvSpPr/>
+          <p:nvPr/>
+        </p:nvSpPr>
+        <p:spPr>
+          <a:xfrm>
+            <a:off x="548640" y="475488"/>
+            <a:ext cx="457200" cy="54864"/>
+          </a:xfrm>
+          <a:prstGeom prst="rect">
+            <a:avLst/>
+          </a:prstGeom>
+          <a:solidFill>
+            <a:srgbClr val="1E5EF3"/>
+          </a:solidFill>
+          <a:ln>
+            <a:noFill/>
+          </a:ln>
+          <a:effectLst/>
+        </p:spPr>
+        <p:style>
+          <a:lnRef idx="1">
+            <a:schemeClr val="accent1"/>
+          </a:lnRef>
+          <a:fillRef idx="3">
+            <a:schemeClr val="accent1"/>
+          </a:fillRef>
+          <a:effectRef idx="2">
+            <a:schemeClr val="accent1"/>
+          </a:effectRef>
+          <a:fontRef idx="minor">
+            <a:schemeClr val="lt1"/>
+          </a:fontRef>
+        </p:style>
+        <p:txBody>
+          <a:bodyPr rtlCol="0" anchor="ctr"/>
+          <a:lstStyle/>
+          <a:p>
+            <a:pPr algn="ctr"/>
+          </a:p>
+        </p:txBody>
+      </p:sp>
+      <p:sp>
+        <p:nvSpPr>
+          <p:cNvPr id="4" name="TextBox 3"/>
+          <p:cNvSpPr txBox="1"/>
+          <p:nvPr/>
+        </p:nvSpPr>
+        <p:spPr>
+          <a:xfrm>
+            <a:off x="548640" y="603504"/>
+            <a:ext cx="11091672" cy="274320"/>
+          </a:xfrm>
+          <a:prstGeom prst="rect">
+            <a:avLst/>
+          </a:prstGeom>
+          <a:noFill/>
+        </p:spPr>
+        <p:txBody>
+          <a:bodyPr wrap="square">
+            <a:spAutoFit/>
+          </a:bodyPr>
+          <a:lstStyle/>
+          <a:p>
+            <a:pPr algn="l">
+              <a:spcAft>
+                <a:spcPts val="600"/>
+              </a:spcAft>
+              <a:buNone/>
+            </a:pPr>
+            <a:r>
+              <a:rPr sz="1100" b="1">
+                <a:solidFill>
+                  <a:srgbClr val="1E5EF3"/>
+                </a:solidFill>
+                <a:latin typeface="Arial"/>
+              </a:rPr>
+              <a:t>THE 99% TRAP</a:t>
+            </a:r>
+          </a:p>
+        </p:txBody>
+      </p:sp>
+      <p:sp>
+        <p:nvSpPr>
+          <p:cNvPr id="5" name="TextBox 4"/>
+          <p:cNvSpPr txBox="1"/>
+          <p:nvPr/>
+        </p:nvSpPr>
+        <p:spPr>
+          <a:xfrm>
+            <a:off x="548640" y="868680"/>
+            <a:ext cx="11091672" cy="777240"/>
+          </a:xfrm>
+          <a:prstGeom prst="rect">
+            <a:avLst/>
+          </a:prstGeom>
+          <a:noFill/>
+        </p:spPr>
+        <p:txBody>
+          <a:bodyPr wrap="square">
+            <a:spAutoFit/>
+          </a:bodyPr>
+          <a:lstStyle/>
+          <a:p>
+            <a:pPr algn="l">
+              <a:spcAft>
+                <a:spcPts val="0"/>
+              </a:spcAft>
+              <a:buNone/>
+            </a:pPr>
+            <a:r>
+              <a:rPr sz="2600" b="1">
+                <a:solidFill>
+                  <a:srgbClr val="0A2540"/>
+                </a:solidFill>
+                <a:latin typeface="Arial"/>
+              </a:rPr>
+              <a:t>Accuracy can hide the mistakes that matter - the confusion matrix shows all four</a:t>
+            </a:r>
+          </a:p>
+        </p:txBody>
+      </p:sp>
+      <p:sp>
+        <p:nvSpPr>
+          <p:cNvPr id="6" name="Rectangle 5"/>
+          <p:cNvSpPr/>
+          <p:nvPr/>
+        </p:nvSpPr>
+        <p:spPr>
+          <a:xfrm>
+            <a:off x="548640" y="1664208"/>
+            <a:ext cx="11091672" cy="12801"/>
+          </a:xfrm>
+          <a:prstGeom prst="rect">
+            <a:avLst/>
+          </a:prstGeom>
+          <a:solidFill>
+            <a:srgbClr val="B9D0FA"/>
+          </a:solidFill>
+          <a:ln>
+            <a:noFill/>
+          </a:ln>
+          <a:effectLst/>
+        </p:spPr>
+        <p:style>
+          <a:lnRef idx="1">
+            <a:schemeClr val="accent1"/>
+          </a:lnRef>
+          <a:fillRef idx="3">
+            <a:schemeClr val="accent1"/>
+          </a:fillRef>
+          <a:effectRef idx="2">
+            <a:schemeClr val="accent1"/>
+          </a:effectRef>
+          <a:fontRef idx="minor">
+            <a:schemeClr val="lt1"/>
+          </a:fontRef>
+        </p:style>
+        <p:txBody>
+          <a:bodyPr rtlCol="0" anchor="ctr"/>
+          <a:lstStyle/>
+          <a:p>
+            <a:pPr algn="ctr"/>
+          </a:p>
+        </p:txBody>
+      </p:sp>
+      <p:sp>
+        <p:nvSpPr>
+          <p:cNvPr id="7" name="TextBox 6"/>
+          <p:cNvSpPr txBox="1"/>
+          <p:nvPr/>
+        </p:nvSpPr>
+        <p:spPr>
+          <a:xfrm>
+            <a:off x="548640" y="1874519"/>
+            <a:ext cx="4297680" cy="4206240"/>
+          </a:xfrm>
+          <a:prstGeom prst="rect">
+            <a:avLst/>
+          </a:prstGeom>
+          <a:noFill/>
+        </p:spPr>
+        <p:txBody>
+          <a:bodyPr wrap="square">
+            <a:spAutoFit/>
+          </a:bodyPr>
+          <a:lstStyle/>
+          <a:p>
+            <a:pPr algn="l" indent="-228600" marL="228600">
+              <a:spcAft>
+                <a:spcPts val="800"/>
+              </a:spcAft>
+              <a:buClr>
+                <a:srgbClr val="1E5EF3"/>
+              </a:buClr>
+              <a:buChar char="—"/>
+            </a:pPr>
+            <a:r>
+              <a:rPr sz="1450" b="0">
+                <a:solidFill>
+                  <a:srgbClr val="202B38"/>
+                </a:solidFill>
+                <a:latin typeface="Arial"/>
+              </a:rPr>
+              <a:t>A disease hits 1 in 100 people. A model that always says "no disease" is 99% accurate - and worthless.</a:t>
+            </a:r>
+          </a:p>
+          <a:p>
+            <a:pPr algn="l" indent="-228600" marL="228600">
+              <a:spcAft>
+                <a:spcPts val="800"/>
+              </a:spcAft>
+              <a:buClr>
+                <a:srgbClr val="1E5EF3"/>
+              </a:buClr>
+              <a:buChar char="—"/>
+            </a:pPr>
+            <a:r>
+              <a:rPr sz="1450" b="0">
+                <a:solidFill>
+                  <a:srgbClr val="202B38"/>
+                </a:solidFill>
+                <a:latin typeface="Arial"/>
+              </a:rPr>
+              <a:t>Confusion matrix = a count of the four ways a prediction can go right or wrong - and every metric you will ever meet is just arithmetic on these four counts.</a:t>
+            </a:r>
+          </a:p>
+          <a:p>
+            <a:pPr algn="l" indent="-228600" marL="228600">
+              <a:spcAft>
+                <a:spcPts val="800"/>
+              </a:spcAft>
+              <a:buClr>
+                <a:srgbClr val="1E5EF3"/>
+              </a:buClr>
+              <a:buChar char="—"/>
+            </a:pPr>
+            <a:r>
+              <a:rPr sz="1450" b="0">
+                <a:solidFill>
+                  <a:srgbClr val="202B38"/>
+                </a:solidFill>
+                <a:latin typeface="Arial"/>
+              </a:rPr>
+              <a:t>Our champion on the 179 test passengers: 99 correct "died" (TN), 51 correct "survived" (TP).</a:t>
+            </a:r>
+          </a:p>
+          <a:p>
+            <a:pPr algn="l" indent="-228600" marL="228600">
+              <a:spcAft>
+                <a:spcPts val="800"/>
+              </a:spcAft>
+              <a:buClr>
+                <a:srgbClr val="1E5EF3"/>
+              </a:buClr>
+              <a:buChar char="—"/>
+            </a:pPr>
+            <a:r>
+              <a:rPr sz="1450" b="0">
+                <a:solidFill>
+                  <a:srgbClr val="202B38"/>
+                </a:solidFill>
+                <a:latin typeface="Arial"/>
+              </a:rPr>
+              <a:t>11 false alarms (predicted survived, did not) and 18 missed survivors.</a:t>
+            </a:r>
+          </a:p>
+          <a:p>
+            <a:pPr algn="l" indent="-228600" marL="228600">
+              <a:spcAft>
+                <a:spcPts val="800"/>
+              </a:spcAft>
+              <a:buClr>
+                <a:srgbClr val="1E5EF3"/>
+              </a:buClr>
+              <a:buChar char="—"/>
+            </a:pPr>
+            <a:r>
+              <a:rPr sz="1450" b="0">
+                <a:solidFill>
+                  <a:srgbClr val="202B38"/>
+                </a:solidFill>
+                <a:latin typeface="Arial"/>
+              </a:rPr>
+              <a:t>One number became four. Now we can ask sharper questions.</a:t>
+            </a:r>
+          </a:p>
+        </p:txBody>
+      </p:sp>
+      <p:pic>
+        <p:nvPicPr>
+          <p:cNvPr id="8" name="Picture 7" descr="confusion.png"/>
+          <p:cNvPicPr>
+            <a:picLocks noChangeAspect="1"/>
+          </p:cNvPicPr>
+          <p:nvPr/>
+        </p:nvPicPr>
+        <p:blipFill>
+          <a:blip r:embed="rId2"/>
+          <a:stretch>
+            <a:fillRect/>
+          </a:stretch>
+        </p:blipFill>
+        <p:spPr>
+          <a:xfrm>
+            <a:off x="5587654" y="1874519"/>
+            <a:ext cx="5558211" cy="4114800"/>
+          </a:xfrm>
+          <a:prstGeom prst="rect">
+            <a:avLst/>
+          </a:prstGeom>
+        </p:spPr>
+      </p:pic>
+      <p:sp>
+        <p:nvSpPr>
+          <p:cNvPr id="9" name="TextBox 8"/>
+          <p:cNvSpPr txBox="1"/>
+          <p:nvPr/>
+        </p:nvSpPr>
+        <p:spPr>
+          <a:xfrm>
+            <a:off x="5120640" y="6062471"/>
+            <a:ext cx="6492240" cy="365760"/>
+          </a:xfrm>
+          <a:prstGeom prst="rect">
+            <a:avLst/>
+          </a:prstGeom>
+          <a:noFill/>
+        </p:spPr>
+        <p:txBody>
+          <a:bodyPr wrap="square">
+            <a:spAutoFit/>
+          </a:bodyPr>
+          <a:lstStyle/>
+          <a:p>
+            <a:pPr algn="ctr">
+              <a:spcAft>
+                <a:spcPts val="600"/>
+              </a:spcAft>
+              <a:buNone/>
+            </a:pPr>
+            <a:r>
+              <a:rPr sz="1100" b="0">
+                <a:solidFill>
+                  <a:srgbClr val="5B6774"/>
+                </a:solidFill>
+                <a:latin typeface="Arial"/>
+              </a:rPr>
+              <a:t>Logistic Regression, confusion matrix on the test set. Module 2, notebook 2. Harvard CS109A, Classification Metrics lecture.</a:t>
+            </a:r>
+          </a:p>
+        </p:txBody>
+      </p:sp>
+      <p:sp>
+        <p:nvSpPr>
+          <p:cNvPr id="10" name="TextBox 9"/>
+          <p:cNvSpPr txBox="1"/>
+          <p:nvPr/>
+        </p:nvSpPr>
+        <p:spPr>
+          <a:xfrm>
+            <a:off x="548640" y="6473952"/>
+            <a:ext cx="7315200" cy="292608"/>
+          </a:xfrm>
+          <a:prstGeom prst="rect">
+            <a:avLst/>
+          </a:prstGeom>
+          <a:noFill/>
+        </p:spPr>
+        <p:txBody>
+          <a:bodyPr wrap="square">
+            <a:spAutoFit/>
+          </a:bodyPr>
+          <a:lstStyle/>
+          <a:p>
+            <a:pPr algn="l">
+              <a:spcAft>
+                <a:spcPts val="600"/>
+              </a:spcAft>
+              <a:buNone/>
+            </a:pPr>
+            <a:r>
+              <a:rPr sz="900" b="0">
+                <a:solidFill>
+                  <a:srgbClr val="5B6774"/>
+                </a:solidFill>
+                <a:latin typeface="Arial"/>
+              </a:rPr>
+              <a:t>M2 Session 3 - Model Selection and Evaluation</a:t>
+            </a:r>
+          </a:p>
+        </p:txBody>
+      </p:sp>
+      <p:sp>
+        <p:nvSpPr>
+          <p:cNvPr id="11" name="TextBox 10"/>
+          <p:cNvSpPr txBox="1"/>
+          <p:nvPr/>
+        </p:nvSpPr>
+        <p:spPr>
+          <a:xfrm>
+            <a:off x="11292840" y="6473952"/>
+            <a:ext cx="548640" cy="292608"/>
+          </a:xfrm>
+          <a:prstGeom prst="rect">
+            <a:avLst/>
+          </a:prstGeom>
+          <a:noFill/>
+        </p:spPr>
+        <p:txBody>
+          <a:bodyPr wrap="square">
+            <a:spAutoFit/>
+          </a:bodyPr>
+          <a:lstStyle/>
+          <a:p>
+            <a:pPr algn="r">
+              <a:spcAft>
+                <a:spcPts val="600"/>
+              </a:spcAft>
+              <a:buNone/>
+            </a:pPr>
+            <a:r>
+              <a:rPr sz="900" b="0">
+                <a:solidFill>
+                  <a:srgbClr val="5B6774"/>
+                </a:solidFill>
+                <a:latin typeface="Arial"/>
+              </a:rPr>
+              <a:t>16</a:t>
+            </a:r>
+          </a:p>
+        </p:txBody>
+      </p:sp>
+    </p:spTree>
+  </p:cSld>
+  <p:clrMapOvr>
+    <a:masterClrMapping/>
+  </p:clrMapOvr>
+</p:sld>
+</file>
+
+<file path=ppt/slides/slide17.xml><?xml version="1.0" encoding="utf-8"?>
+<p:sld xmlns:a="http://schemas.openxmlformats.org/drawingml/2006/main" xmlns:p="http://schemas.openxmlformats.org/presentationml/2006/main" xmlns:r="http://schemas.openxmlformats.org/officeDocument/2006/relationships">
+  <p:cSld>
+    <p:spTree>
+      <p:nvGrpSpPr>
+        <p:cNvPr id="1" name=""/>
+        <p:cNvGrpSpPr/>
+        <p:nvPr/>
+      </p:nvGrpSpPr>
+      <p:grpSpPr/>
+      <p:sp>
+        <p:nvSpPr>
+          <p:cNvPr id="2" name="Rectangle 1"/>
+          <p:cNvSpPr/>
+          <p:nvPr/>
+        </p:nvSpPr>
+        <p:spPr>
+          <a:xfrm>
+            <a:off x="0" y="0"/>
+            <a:ext cx="12191695" cy="6858000"/>
+          </a:xfrm>
+          <a:prstGeom prst="rect">
+            <a:avLst/>
+          </a:prstGeom>
+          <a:solidFill>
+            <a:srgbClr val="FFFFFF"/>
+          </a:solidFill>
+          <a:ln>
+            <a:noFill/>
+          </a:ln>
+          <a:effectLst/>
+        </p:spPr>
+        <p:style>
+          <a:lnRef idx="1">
+            <a:schemeClr val="accent1"/>
+          </a:lnRef>
+          <a:fillRef idx="3">
+            <a:schemeClr val="accent1"/>
+          </a:fillRef>
+          <a:effectRef idx="2">
+            <a:schemeClr val="accent1"/>
+          </a:effectRef>
+          <a:fontRef idx="minor">
+            <a:schemeClr val="lt1"/>
+          </a:fontRef>
+        </p:style>
+        <p:txBody>
+          <a:bodyPr rtlCol="0" anchor="ctr"/>
+          <a:lstStyle/>
+          <a:p>
+            <a:pPr algn="ctr"/>
+          </a:p>
+        </p:txBody>
+      </p:sp>
+      <p:sp>
+        <p:nvSpPr>
+          <p:cNvPr id="3" name="Rectangle 2"/>
+          <p:cNvSpPr/>
+          <p:nvPr/>
+        </p:nvSpPr>
+        <p:spPr>
+          <a:xfrm>
+            <a:off x="548640" y="475488"/>
+            <a:ext cx="457200" cy="54864"/>
+          </a:xfrm>
+          <a:prstGeom prst="rect">
+            <a:avLst/>
+          </a:prstGeom>
+          <a:solidFill>
+            <a:srgbClr val="1E5EF3"/>
+          </a:solidFill>
+          <a:ln>
+            <a:noFill/>
+          </a:ln>
+          <a:effectLst/>
+        </p:spPr>
+        <p:style>
+          <a:lnRef idx="1">
+            <a:schemeClr val="accent1"/>
+          </a:lnRef>
+          <a:fillRef idx="3">
+            <a:schemeClr val="accent1"/>
+          </a:fillRef>
+          <a:effectRef idx="2">
+            <a:schemeClr val="accent1"/>
+          </a:effectRef>
+          <a:fontRef idx="minor">
+            <a:schemeClr val="lt1"/>
+          </a:fontRef>
+        </p:style>
+        <p:txBody>
+          <a:bodyPr rtlCol="0" anchor="ctr"/>
+          <a:lstStyle/>
+          <a:p>
+            <a:pPr algn="ctr"/>
+          </a:p>
+        </p:txBody>
+      </p:sp>
+      <p:sp>
+        <p:nvSpPr>
+          <p:cNvPr id="4" name="TextBox 3"/>
+          <p:cNvSpPr txBox="1"/>
+          <p:nvPr/>
+        </p:nvSpPr>
+        <p:spPr>
+          <a:xfrm>
+            <a:off x="548640" y="603504"/>
+            <a:ext cx="11091672" cy="274320"/>
+          </a:xfrm>
+          <a:prstGeom prst="rect">
+            <a:avLst/>
+          </a:prstGeom>
+          <a:noFill/>
+        </p:spPr>
+        <p:txBody>
+          <a:bodyPr wrap="square">
+            <a:spAutoFit/>
+          </a:bodyPr>
+          <a:lstStyle/>
+          <a:p>
+            <a:pPr algn="l">
+              <a:spcAft>
+                <a:spcPts val="600"/>
+              </a:spcAft>
+              <a:buNone/>
+            </a:pPr>
+            <a:r>
+              <a:rPr sz="1100" b="1">
+                <a:solidFill>
+                  <a:srgbClr val="1E5EF3"/>
+                </a:solidFill>
+                <a:latin typeface="Arial"/>
+              </a:rPr>
+              <a:t>TWO KINDS OF MISTAKES</a:t>
+            </a:r>
+          </a:p>
+        </p:txBody>
+      </p:sp>
+      <p:sp>
+        <p:nvSpPr>
+          <p:cNvPr id="5" name="TextBox 4"/>
+          <p:cNvSpPr txBox="1"/>
+          <p:nvPr/>
+        </p:nvSpPr>
+        <p:spPr>
+          <a:xfrm>
+            <a:off x="548640" y="868680"/>
+            <a:ext cx="11091672" cy="777240"/>
+          </a:xfrm>
+          <a:prstGeom prst="rect">
+            <a:avLst/>
+          </a:prstGeom>
+          <a:noFill/>
+        </p:spPr>
+        <p:txBody>
+          <a:bodyPr wrap="square">
+            <a:spAutoFit/>
+          </a:bodyPr>
+          <a:lstStyle/>
+          <a:p>
+            <a:pPr algn="l">
+              <a:spcAft>
+                <a:spcPts val="0"/>
+              </a:spcAft>
+              <a:buNone/>
+            </a:pPr>
+            <a:r>
+              <a:rPr sz="2600" b="1">
+                <a:solidFill>
+                  <a:srgbClr val="0A2540"/>
+                </a:solidFill>
+                <a:latin typeface="Arial"/>
+              </a:rPr>
+              <a:t>Precision and recall answer different questions - pick the one your problem asks</a:t>
+            </a:r>
+          </a:p>
+        </p:txBody>
+      </p:sp>
+      <p:sp>
+        <p:nvSpPr>
+          <p:cNvPr id="6" name="Rectangle 5"/>
+          <p:cNvSpPr/>
+          <p:nvPr/>
+        </p:nvSpPr>
+        <p:spPr>
+          <a:xfrm>
+            <a:off x="548640" y="1664208"/>
+            <a:ext cx="11091672" cy="12801"/>
+          </a:xfrm>
+          <a:prstGeom prst="rect">
+            <a:avLst/>
+          </a:prstGeom>
+          <a:solidFill>
+            <a:srgbClr val="B9D0FA"/>
+          </a:solidFill>
+          <a:ln>
+            <a:noFill/>
+          </a:ln>
+          <a:effectLst/>
+        </p:spPr>
+        <p:style>
+          <a:lnRef idx="1">
+            <a:schemeClr val="accent1"/>
+          </a:lnRef>
+          <a:fillRef idx="3">
+            <a:schemeClr val="accent1"/>
+          </a:fillRef>
+          <a:effectRef idx="2">
+            <a:schemeClr val="accent1"/>
+          </a:effectRef>
+          <a:fontRef idx="minor">
+            <a:schemeClr val="lt1"/>
+          </a:fontRef>
+        </p:style>
+        <p:txBody>
+          <a:bodyPr rtlCol="0" anchor="ctr"/>
+          <a:lstStyle/>
+          <a:p>
+            <a:pPr algn="ctr"/>
+          </a:p>
+        </p:txBody>
+      </p:sp>
+      <p:sp>
+        <p:nvSpPr>
+          <p:cNvPr id="7" name="Rectangle 6"/>
+          <p:cNvSpPr/>
+          <p:nvPr/>
+        </p:nvSpPr>
+        <p:spPr>
+          <a:xfrm>
+            <a:off x="548640" y="1874519"/>
+            <a:ext cx="5394960" cy="3977639"/>
+          </a:xfrm>
+          <a:prstGeom prst="rect">
+            <a:avLst/>
+          </a:prstGeom>
+          <a:solidFill>
+            <a:srgbClr val="EEF3FD"/>
+          </a:solidFill>
+          <a:ln>
+            <a:noFill/>
+          </a:ln>
+          <a:effectLst/>
+        </p:spPr>
+        <p:style>
+          <a:lnRef idx="1">
+            <a:schemeClr val="accent1"/>
+          </a:lnRef>
+          <a:fillRef idx="3">
+            <a:schemeClr val="accent1"/>
+          </a:fillRef>
+          <a:effectRef idx="2">
+            <a:schemeClr val="accent1"/>
+          </a:effectRef>
+          <a:fontRef idx="minor">
+            <a:schemeClr val="lt1"/>
+          </a:fontRef>
+        </p:style>
+        <p:txBody>
+          <a:bodyPr rtlCol="0" anchor="ctr"/>
+          <a:lstStyle/>
+          <a:p>
+            <a:pPr algn="ctr"/>
+          </a:p>
+        </p:txBody>
+      </p:sp>
+      <p:sp>
+        <p:nvSpPr>
+          <p:cNvPr id="8" name="TextBox 7"/>
+          <p:cNvSpPr txBox="1"/>
+          <p:nvPr/>
+        </p:nvSpPr>
+        <p:spPr>
+          <a:xfrm>
+            <a:off x="777240" y="2039111"/>
+            <a:ext cx="4937760" cy="365760"/>
+          </a:xfrm>
+          <a:prstGeom prst="rect">
+            <a:avLst/>
+          </a:prstGeom>
+          <a:noFill/>
+        </p:spPr>
+        <p:txBody>
+          <a:bodyPr wrap="square">
+            <a:spAutoFit/>
+          </a:bodyPr>
+          <a:lstStyle/>
+          <a:p>
+            <a:pPr algn="l">
+              <a:spcAft>
+                <a:spcPts val="600"/>
+              </a:spcAft>
+              <a:buNone/>
+            </a:pPr>
+            <a:r>
+              <a:rPr sz="1500" b="1">
+                <a:solidFill>
+                  <a:srgbClr val="0A2540"/>
+                </a:solidFill>
+                <a:latin typeface="Arial"/>
+              </a:rPr>
+              <a:t>Precision 0.823 - trust our alarms</a:t>
+            </a:r>
+          </a:p>
+        </p:txBody>
+      </p:sp>
+      <p:sp>
+        <p:nvSpPr>
+          <p:cNvPr id="9" name="TextBox 8"/>
+          <p:cNvSpPr txBox="1"/>
+          <p:nvPr/>
+        </p:nvSpPr>
+        <p:spPr>
+          <a:xfrm>
+            <a:off x="777240" y="2441447"/>
+            <a:ext cx="4937760" cy="3246119"/>
+          </a:xfrm>
+          <a:prstGeom prst="rect">
+            <a:avLst/>
+          </a:prstGeom>
+          <a:noFill/>
+        </p:spPr>
+        <p:txBody>
+          <a:bodyPr wrap="square">
+            <a:spAutoFit/>
+          </a:bodyPr>
+          <a:lstStyle/>
+          <a:p>
+            <a:pPr algn="l" indent="-228600" marL="228600">
+              <a:spcAft>
+                <a:spcPts val="600"/>
+              </a:spcAft>
+              <a:buClr>
+                <a:srgbClr val="1E5EF3"/>
+              </a:buClr>
+              <a:buChar char="—"/>
+            </a:pPr>
+            <a:r>
+              <a:rPr sz="1300" b="0">
+                <a:solidFill>
+                  <a:srgbClr val="202B38"/>
+                </a:solidFill>
+                <a:latin typeface="Arial"/>
+              </a:rPr>
+              <a:t>"Of everyone we said survives, how many actually did?"</a:t>
+            </a:r>
+          </a:p>
+          <a:p>
+            <a:pPr algn="l" indent="-228600" marL="228600">
+              <a:spcAft>
+                <a:spcPts val="600"/>
+              </a:spcAft>
+              <a:buClr>
+                <a:srgbClr val="1E5EF3"/>
+              </a:buClr>
+              <a:buChar char="—"/>
+            </a:pPr>
+            <a:r>
+              <a:rPr sz="1300" b="0">
+                <a:solidFill>
+                  <a:srgbClr val="202B38"/>
+                </a:solidFill>
+                <a:latin typeface="Arial"/>
+              </a:rPr>
+              <a:t>TP / (TP + FP) = 51 / (51 + 11) = 0.823</a:t>
+            </a:r>
+          </a:p>
+          <a:p>
+            <a:pPr algn="l" indent="-228600" marL="228600">
+              <a:spcAft>
+                <a:spcPts val="600"/>
+              </a:spcAft>
+              <a:buClr>
+                <a:srgbClr val="1E5EF3"/>
+              </a:buClr>
+              <a:buChar char="—"/>
+            </a:pPr>
+            <a:r>
+              <a:rPr sz="1300" b="0">
+                <a:solidFill>
+                  <a:srgbClr val="202B38"/>
+                </a:solidFill>
+                <a:latin typeface="Arial"/>
+              </a:rPr>
+              <a:t>High precision = few false alarms.</a:t>
+            </a:r>
+          </a:p>
+          <a:p>
+            <a:pPr algn="l" indent="-228600" marL="228600">
+              <a:spcAft>
+                <a:spcPts val="600"/>
+              </a:spcAft>
+              <a:buClr>
+                <a:srgbClr val="1E5EF3"/>
+              </a:buClr>
+              <a:buChar char="—"/>
+            </a:pPr>
+            <a:r>
+              <a:rPr sz="1300" b="0">
+                <a:solidFill>
+                  <a:srgbClr val="202B38"/>
+                </a:solidFill>
+                <a:latin typeface="Arial"/>
+              </a:rPr>
+              <a:t>Spam filter: a false alarm buries real mail. Precision first.</a:t>
+            </a:r>
+          </a:p>
+        </p:txBody>
+      </p:sp>
+      <p:sp>
+        <p:nvSpPr>
+          <p:cNvPr id="10" name="Rectangle 9"/>
+          <p:cNvSpPr/>
+          <p:nvPr/>
+        </p:nvSpPr>
+        <p:spPr>
+          <a:xfrm>
+            <a:off x="6245352" y="1874519"/>
+            <a:ext cx="5394960" cy="3977639"/>
+          </a:xfrm>
+          <a:prstGeom prst="rect">
+            <a:avLst/>
+          </a:prstGeom>
+          <a:solidFill>
+            <a:srgbClr val="EEF3FD"/>
+          </a:solidFill>
+          <a:ln>
+            <a:noFill/>
+          </a:ln>
+          <a:effectLst/>
+        </p:spPr>
+        <p:style>
+          <a:lnRef idx="1">
+            <a:schemeClr val="accent1"/>
+          </a:lnRef>
+          <a:fillRef idx="3">
+            <a:schemeClr val="accent1"/>
+          </a:fillRef>
+          <a:effectRef idx="2">
+            <a:schemeClr val="accent1"/>
+          </a:effectRef>
+          <a:fontRef idx="minor">
+            <a:schemeClr val="lt1"/>
+          </a:fontRef>
+        </p:style>
+        <p:txBody>
+          <a:bodyPr rtlCol="0" anchor="ctr"/>
+          <a:lstStyle/>
+          <a:p>
+            <a:pPr algn="ctr"/>
+          </a:p>
+        </p:txBody>
+      </p:sp>
+      <p:sp>
+        <p:nvSpPr>
+          <p:cNvPr id="11" name="TextBox 10"/>
+          <p:cNvSpPr txBox="1"/>
+          <p:nvPr/>
+        </p:nvSpPr>
+        <p:spPr>
+          <a:xfrm>
+            <a:off x="6473952" y="2039111"/>
+            <a:ext cx="4937760" cy="365760"/>
+          </a:xfrm>
+          <a:prstGeom prst="rect">
+            <a:avLst/>
+          </a:prstGeom>
+          <a:noFill/>
+        </p:spPr>
+        <p:txBody>
+          <a:bodyPr wrap="square">
+            <a:spAutoFit/>
+          </a:bodyPr>
+          <a:lstStyle/>
+          <a:p>
+            <a:pPr algn="l">
+              <a:spcAft>
+                <a:spcPts val="600"/>
+              </a:spcAft>
+              <a:buNone/>
+            </a:pPr>
+            <a:r>
+              <a:rPr sz="1500" b="1">
+                <a:solidFill>
+                  <a:srgbClr val="0A2540"/>
+                </a:solidFill>
+                <a:latin typeface="Arial"/>
+              </a:rPr>
+              <a:t>Recall 0.739 - catch them all</a:t>
+            </a:r>
+          </a:p>
+        </p:txBody>
+      </p:sp>
+      <p:sp>
+        <p:nvSpPr>
+          <p:cNvPr id="12" name="TextBox 11"/>
+          <p:cNvSpPr txBox="1"/>
+          <p:nvPr/>
+        </p:nvSpPr>
+        <p:spPr>
+          <a:xfrm>
+            <a:off x="6473952" y="2441447"/>
+            <a:ext cx="4937760" cy="3246119"/>
+          </a:xfrm>
+          <a:prstGeom prst="rect">
+            <a:avLst/>
+          </a:prstGeom>
+          <a:noFill/>
+        </p:spPr>
+        <p:txBody>
+          <a:bodyPr wrap="square">
+            <a:spAutoFit/>
+          </a:bodyPr>
+          <a:lstStyle/>
+          <a:p>
+            <a:pPr algn="l" indent="-228600" marL="228600">
+              <a:spcAft>
+                <a:spcPts val="600"/>
+              </a:spcAft>
+              <a:buClr>
+                <a:srgbClr val="1E5EF3"/>
+              </a:buClr>
+              <a:buChar char="—"/>
+            </a:pPr>
+            <a:r>
+              <a:rPr sz="1300" b="0">
+                <a:solidFill>
+                  <a:srgbClr val="202B38"/>
+                </a:solidFill>
+                <a:latin typeface="Arial"/>
+              </a:rPr>
+              <a:t>"Of everyone who actually survived, how many did we catch?"</a:t>
+            </a:r>
+          </a:p>
+          <a:p>
+            <a:pPr algn="l" indent="-228600" marL="228600">
+              <a:spcAft>
+                <a:spcPts val="600"/>
+              </a:spcAft>
+              <a:buClr>
+                <a:srgbClr val="1E5EF3"/>
+              </a:buClr>
+              <a:buChar char="—"/>
+            </a:pPr>
+            <a:r>
+              <a:rPr sz="1300" b="0">
+                <a:solidFill>
+                  <a:srgbClr val="202B38"/>
+                </a:solidFill>
+                <a:latin typeface="Arial"/>
+              </a:rPr>
+              <a:t>TP / (TP + FN) = 51 / (51 + 18) = 0.739</a:t>
+            </a:r>
+          </a:p>
+          <a:p>
+            <a:pPr algn="l" indent="-228600" marL="228600">
+              <a:spcAft>
+                <a:spcPts val="600"/>
+              </a:spcAft>
+              <a:buClr>
+                <a:srgbClr val="1E5EF3"/>
+              </a:buClr>
+              <a:buChar char="—"/>
+            </a:pPr>
+            <a:r>
+              <a:rPr sz="1300" b="0">
+                <a:solidFill>
+                  <a:srgbClr val="202B38"/>
+                </a:solidFill>
+                <a:latin typeface="Arial"/>
+              </a:rPr>
+              <a:t>High recall = few missed cases.</a:t>
+            </a:r>
+          </a:p>
+          <a:p>
+            <a:pPr algn="l" indent="-228600" marL="228600">
+              <a:spcAft>
+                <a:spcPts val="600"/>
+              </a:spcAft>
+              <a:buClr>
+                <a:srgbClr val="1E5EF3"/>
+              </a:buClr>
+              <a:buChar char="—"/>
+            </a:pPr>
+            <a:r>
+              <a:rPr sz="1300" b="0">
+                <a:solidFill>
+                  <a:srgbClr val="202B38"/>
+                </a:solidFill>
+                <a:latin typeface="Arial"/>
+              </a:rPr>
+              <a:t>Cancer screening: a missed case is the disaster. Recall first.</a:t>
+            </a:r>
+          </a:p>
+        </p:txBody>
+      </p:sp>
+      <p:sp>
+        <p:nvSpPr>
+          <p:cNvPr id="13" name="TextBox 12"/>
+          <p:cNvSpPr txBox="1"/>
+          <p:nvPr/>
+        </p:nvSpPr>
+        <p:spPr>
+          <a:xfrm>
+            <a:off x="548640" y="6053328"/>
+            <a:ext cx="11091672" cy="502920"/>
+          </a:xfrm>
+          <a:prstGeom prst="rect">
+            <a:avLst/>
+          </a:prstGeom>
+          <a:noFill/>
+        </p:spPr>
+        <p:txBody>
+          <a:bodyPr wrap="square">
+            <a:spAutoFit/>
+          </a:bodyPr>
+          <a:lstStyle/>
+          <a:p>
+            <a:pPr algn="l">
+              <a:spcAft>
+                <a:spcPts val="600"/>
+              </a:spcAft>
+              <a:buNone/>
+            </a:pPr>
+            <a:r>
+              <a:rPr sz="1200" b="0">
+                <a:solidFill>
+                  <a:srgbClr val="1E5EF3"/>
+                </a:solidFill>
+                <a:latin typeface="Arial"/>
+              </a:rPr>
+              <a:t>F1 = harmonic mean of both = 0.779, high only when both are decent. Metric pairing after Andrew Ng's Machine Learning Specialization (C2, W3).</a:t>
+            </a:r>
+          </a:p>
+        </p:txBody>
+      </p:sp>
+      <p:sp>
+        <p:nvSpPr>
+          <p:cNvPr id="14" name="TextBox 13"/>
+          <p:cNvSpPr txBox="1"/>
+          <p:nvPr/>
+        </p:nvSpPr>
+        <p:spPr>
+          <a:xfrm>
+            <a:off x="548640" y="6473952"/>
+            <a:ext cx="7315200" cy="292608"/>
+          </a:xfrm>
+          <a:prstGeom prst="rect">
+            <a:avLst/>
+          </a:prstGeom>
+          <a:noFill/>
+        </p:spPr>
+        <p:txBody>
+          <a:bodyPr wrap="square">
+            <a:spAutoFit/>
+          </a:bodyPr>
+          <a:lstStyle/>
+          <a:p>
+            <a:pPr algn="l">
+              <a:spcAft>
+                <a:spcPts val="600"/>
+              </a:spcAft>
+              <a:buNone/>
+            </a:pPr>
+            <a:r>
+              <a:rPr sz="900" b="0">
+                <a:solidFill>
+                  <a:srgbClr val="5B6774"/>
+                </a:solidFill>
+                <a:latin typeface="Arial"/>
+              </a:rPr>
+              <a:t>M2 Session 3 - Model Selection and Evaluation</a:t>
+            </a:r>
+          </a:p>
+        </p:txBody>
+      </p:sp>
+      <p:sp>
+        <p:nvSpPr>
+          <p:cNvPr id="15" name="TextBox 14"/>
+          <p:cNvSpPr txBox="1"/>
+          <p:nvPr/>
+        </p:nvSpPr>
+        <p:spPr>
+          <a:xfrm>
+            <a:off x="11292840" y="6473952"/>
+            <a:ext cx="548640" cy="292608"/>
+          </a:xfrm>
+          <a:prstGeom prst="rect">
+            <a:avLst/>
+          </a:prstGeom>
+          <a:noFill/>
+        </p:spPr>
+        <p:txBody>
+          <a:bodyPr wrap="square">
+            <a:spAutoFit/>
+          </a:bodyPr>
+          <a:lstStyle/>
+          <a:p>
+            <a:pPr algn="r">
+              <a:spcAft>
+                <a:spcPts val="600"/>
+              </a:spcAft>
+              <a:buNone/>
+            </a:pPr>
+            <a:r>
+              <a:rPr sz="900" b="0">
+                <a:solidFill>
+                  <a:srgbClr val="5B6774"/>
+                </a:solidFill>
+                <a:latin typeface="Arial"/>
+              </a:rPr>
+              <a:t>17</a:t>
+            </a:r>
+          </a:p>
+        </p:txBody>
+      </p:sp>
+    </p:spTree>
+  </p:cSld>
+  <p:clrMapOvr>
+    <a:masterClrMapping/>
+  </p:clrMapOvr>
+</p:sld>
+</file>
+
+<file path=ppt/slides/slide18.xml><?xml version="1.0" encoding="utf-8"?>
+<p:sld xmlns:a="http://schemas.openxmlformats.org/drawingml/2006/main" xmlns:p="http://schemas.openxmlformats.org/presentationml/2006/main" xmlns:r="http://schemas.openxmlformats.org/officeDocument/2006/relationships">
+  <p:cSld>
+    <p:spTree>
+      <p:nvGrpSpPr>
+        <p:cNvPr id="1" name=""/>
+        <p:cNvGrpSpPr/>
+        <p:nvPr/>
+      </p:nvGrpSpPr>
+      <p:grpSpPr/>
+      <p:sp>
+        <p:nvSpPr>
+          <p:cNvPr id="2" name="Rectangle 1"/>
+          <p:cNvSpPr/>
+          <p:nvPr/>
+        </p:nvSpPr>
+        <p:spPr>
+          <a:xfrm>
+            <a:off x="0" y="0"/>
+            <a:ext cx="12191695" cy="6858000"/>
+          </a:xfrm>
+          <a:prstGeom prst="rect">
+            <a:avLst/>
+          </a:prstGeom>
+          <a:solidFill>
+            <a:srgbClr val="FFFFFF"/>
+          </a:solidFill>
+          <a:ln>
+            <a:noFill/>
+          </a:ln>
+          <a:effectLst/>
+        </p:spPr>
+        <p:style>
+          <a:lnRef idx="1">
+            <a:schemeClr val="accent1"/>
+          </a:lnRef>
+          <a:fillRef idx="3">
+            <a:schemeClr val="accent1"/>
+          </a:fillRef>
+          <a:effectRef idx="2">
+            <a:schemeClr val="accent1"/>
+          </a:effectRef>
+          <a:fontRef idx="minor">
+            <a:schemeClr val="lt1"/>
+          </a:fontRef>
+        </p:style>
+        <p:txBody>
+          <a:bodyPr rtlCol="0" anchor="ctr"/>
+          <a:lstStyle/>
+          <a:p>
+            <a:pPr algn="ctr"/>
+          </a:p>
+        </p:txBody>
+      </p:sp>
+      <p:sp>
+        <p:nvSpPr>
+          <p:cNvPr id="3" name="Rectangle 2"/>
+          <p:cNvSpPr/>
+          <p:nvPr/>
+        </p:nvSpPr>
+        <p:spPr>
+          <a:xfrm>
+            <a:off x="548640" y="475488"/>
+            <a:ext cx="457200" cy="54864"/>
+          </a:xfrm>
+          <a:prstGeom prst="rect">
+            <a:avLst/>
+          </a:prstGeom>
+          <a:solidFill>
+            <a:srgbClr val="1E5EF3"/>
+          </a:solidFill>
+          <a:ln>
+            <a:noFill/>
+          </a:ln>
+          <a:effectLst/>
+        </p:spPr>
+        <p:style>
+          <a:lnRef idx="1">
+            <a:schemeClr val="accent1"/>
+          </a:lnRef>
+          <a:fillRef idx="3">
+            <a:schemeClr val="accent1"/>
+          </a:fillRef>
+          <a:effectRef idx="2">
+            <a:schemeClr val="accent1"/>
+          </a:effectRef>
+          <a:fontRef idx="minor">
+            <a:schemeClr val="lt1"/>
+          </a:fontRef>
+        </p:style>
+        <p:txBody>
+          <a:bodyPr rtlCol="0" anchor="ctr"/>
+          <a:lstStyle/>
+          <a:p>
+            <a:pPr algn="ctr"/>
+          </a:p>
+        </p:txBody>
+      </p:sp>
+      <p:sp>
+        <p:nvSpPr>
+          <p:cNvPr id="4" name="TextBox 3"/>
+          <p:cNvSpPr txBox="1"/>
+          <p:nvPr/>
+        </p:nvSpPr>
+        <p:spPr>
+          <a:xfrm>
+            <a:off x="548640" y="603504"/>
+            <a:ext cx="11091672" cy="274320"/>
+          </a:xfrm>
+          <a:prstGeom prst="rect">
+            <a:avLst/>
+          </a:prstGeom>
+          <a:noFill/>
+        </p:spPr>
+        <p:txBody>
+          <a:bodyPr wrap="square">
+            <a:spAutoFit/>
+          </a:bodyPr>
+          <a:lstStyle/>
+          <a:p>
+            <a:pPr algn="l">
+              <a:spcAft>
+                <a:spcPts val="600"/>
+              </a:spcAft>
+              <a:buNone/>
+            </a:pPr>
+            <a:r>
+              <a:rPr sz="1100" b="1">
+                <a:solidFill>
+                  <a:srgbClr val="1E5EF3"/>
+                </a:solidFill>
+                <a:latin typeface="Arial"/>
+              </a:rPr>
+              <a:t>THE U-CURVE, FOR REAL</a:t>
+            </a:r>
+          </a:p>
+        </p:txBody>
+      </p:sp>
+      <p:sp>
+        <p:nvSpPr>
+          <p:cNvPr id="5" name="TextBox 4"/>
+          <p:cNvSpPr txBox="1"/>
+          <p:nvPr/>
+        </p:nvSpPr>
+        <p:spPr>
+          <a:xfrm>
+            <a:off x="548640" y="868680"/>
+            <a:ext cx="11091672" cy="777240"/>
+          </a:xfrm>
+          <a:prstGeom prst="rect">
+            <a:avLst/>
+          </a:prstGeom>
+          <a:noFill/>
+        </p:spPr>
+        <p:txBody>
+          <a:bodyPr wrap="square">
+            <a:spAutoFit/>
+          </a:bodyPr>
+          <a:lstStyle/>
+          <a:p>
+            <a:pPr algn="l">
+              <a:spcAft>
+                <a:spcPts val="0"/>
+              </a:spcAft>
+              <a:buNone/>
+            </a:pPr>
+            <a:r>
+              <a:rPr sz="2600" b="1">
+                <a:solidFill>
+                  <a:srgbClr val="0A2540"/>
+                </a:solidFill>
+                <a:latin typeface="Arial"/>
+              </a:rPr>
+              <a:t>Overfitting made visible: past depth 3, the tree memorizes instead of learning</a:t>
+            </a:r>
+          </a:p>
+        </p:txBody>
+      </p:sp>
+      <p:sp>
+        <p:nvSpPr>
+          <p:cNvPr id="6" name="Rectangle 5"/>
+          <p:cNvSpPr/>
+          <p:nvPr/>
+        </p:nvSpPr>
+        <p:spPr>
+          <a:xfrm>
+            <a:off x="548640" y="1664208"/>
+            <a:ext cx="11091672" cy="12801"/>
+          </a:xfrm>
+          <a:prstGeom prst="rect">
+            <a:avLst/>
+          </a:prstGeom>
+          <a:solidFill>
+            <a:srgbClr val="B9D0FA"/>
+          </a:solidFill>
+          <a:ln>
+            <a:noFill/>
+          </a:ln>
+          <a:effectLst/>
+        </p:spPr>
+        <p:style>
+          <a:lnRef idx="1">
+            <a:schemeClr val="accent1"/>
+          </a:lnRef>
+          <a:fillRef idx="3">
+            <a:schemeClr val="accent1"/>
+          </a:fillRef>
+          <a:effectRef idx="2">
+            <a:schemeClr val="accent1"/>
+          </a:effectRef>
+          <a:fontRef idx="minor">
+            <a:schemeClr val="lt1"/>
+          </a:fontRef>
+        </p:style>
+        <p:txBody>
+          <a:bodyPr rtlCol="0" anchor="ctr"/>
+          <a:lstStyle/>
+          <a:p>
+            <a:pPr algn="ctr"/>
+          </a:p>
+        </p:txBody>
+      </p:sp>
+      <p:sp>
+        <p:nvSpPr>
+          <p:cNvPr id="7" name="TextBox 6"/>
+          <p:cNvSpPr txBox="1"/>
+          <p:nvPr/>
+        </p:nvSpPr>
+        <p:spPr>
+          <a:xfrm>
+            <a:off x="548640" y="1874519"/>
+            <a:ext cx="4297680" cy="4206240"/>
+          </a:xfrm>
+          <a:prstGeom prst="rect">
+            <a:avLst/>
+          </a:prstGeom>
+          <a:noFill/>
+        </p:spPr>
+        <p:txBody>
+          <a:bodyPr wrap="square">
+            <a:spAutoFit/>
+          </a:bodyPr>
+          <a:lstStyle/>
+          <a:p>
+            <a:pPr algn="l" indent="-228600" marL="228600">
+              <a:spcAft>
+                <a:spcPts val="800"/>
+              </a:spcAft>
+              <a:buClr>
+                <a:srgbClr val="1E5EF3"/>
+              </a:buClr>
+              <a:buChar char="—"/>
+            </a:pPr>
+            <a:r>
+              <a:rPr sz="1450" b="0">
+                <a:solidFill>
+                  <a:srgbClr val="202B38"/>
+                </a:solidFill>
+                <a:latin typeface="Arial"/>
+              </a:rPr>
+              <a:t>Grow the tree one level at a time. Training accuracy climbs to 0.985 and never looks back.</a:t>
+            </a:r>
+          </a:p>
+          <a:p>
+            <a:pPr algn="l" indent="-228600" marL="228600">
+              <a:spcAft>
+                <a:spcPts val="800"/>
+              </a:spcAft>
+              <a:buClr>
+                <a:srgbClr val="1E5EF3"/>
+              </a:buClr>
+              <a:buChar char="—"/>
+            </a:pPr>
+            <a:r>
+              <a:rPr sz="1450" b="0">
+                <a:solidFill>
+                  <a:srgbClr val="202B38"/>
+                </a:solidFill>
+                <a:latin typeface="Arial"/>
+              </a:rPr>
+              <a:t>The honest CV score peaks at 0.815 at depth 3, then slides. At depth 20 the gap is 0.236 - memorizing, not learning.</a:t>
+            </a:r>
+          </a:p>
+          <a:p>
+            <a:pPr algn="l" indent="-228600" marL="228600">
+              <a:spcAft>
+                <a:spcPts val="800"/>
+              </a:spcAft>
+              <a:buClr>
+                <a:srgbClr val="1E5EF3"/>
+              </a:buClr>
+              <a:buChar char="—"/>
+            </a:pPr>
+            <a:r>
+              <a:rPr sz="1450" b="0">
+                <a:solidFill>
+                  <a:srgbClr val="202B38"/>
+                </a:solidFill>
+                <a:latin typeface="Arial"/>
+              </a:rPr>
+              <a:t>This is Part 1's two-zone diagram drawn by real data: left of the peak, structural error dominates (family too rigid); right of it, estimation error takes over. Every dial Session 4 turns moves along this axis.</a:t>
+            </a:r>
+          </a:p>
+          <a:p>
+            <a:pPr algn="l" indent="-228600" marL="228600">
+              <a:spcAft>
+                <a:spcPts val="800"/>
+              </a:spcAft>
+              <a:buClr>
+                <a:srgbClr val="1E5EF3"/>
+              </a:buClr>
+              <a:buChar char="—"/>
+            </a:pPr>
+            <a:r>
+              <a:rPr sz="1450" b="0">
+                <a:solidFill>
+                  <a:srgbClr val="202B38"/>
+                </a:solidFill>
+                <a:latin typeface="Arial"/>
+              </a:rPr>
+              <a:t>Why does the honest curve peak at 0.815, not 1.00? The irreducible floor: the outcome is a hidden rule plus noise, Y = f(X) + ε, and nothing can predict the ε.</a:t>
+            </a:r>
+          </a:p>
+        </p:txBody>
+      </p:sp>
+      <p:pic>
+        <p:nvPicPr>
+          <p:cNvPr id="8" name="Picture 7" descr="depth_sweep.png"/>
+          <p:cNvPicPr>
+            <a:picLocks noChangeAspect="1"/>
+          </p:cNvPicPr>
+          <p:nvPr/>
+        </p:nvPicPr>
+        <p:blipFill>
+          <a:blip r:embed="rId2"/>
+          <a:stretch>
+            <a:fillRect/>
+          </a:stretch>
+        </p:blipFill>
+        <p:spPr>
+          <a:xfrm>
+            <a:off x="5120640" y="1874519"/>
+            <a:ext cx="6492240" cy="3951584"/>
+          </a:xfrm>
+          <a:prstGeom prst="rect">
+            <a:avLst/>
+          </a:prstGeom>
+        </p:spPr>
+      </p:pic>
+      <p:sp>
+        <p:nvSpPr>
+          <p:cNvPr id="9" name="TextBox 8"/>
+          <p:cNvSpPr txBox="1"/>
+          <p:nvPr/>
+        </p:nvSpPr>
+        <p:spPr>
+          <a:xfrm>
+            <a:off x="5120640" y="6062471"/>
+            <a:ext cx="6492240" cy="365760"/>
+          </a:xfrm>
+          <a:prstGeom prst="rect">
+            <a:avLst/>
+          </a:prstGeom>
+          <a:noFill/>
+        </p:spPr>
+        <p:txBody>
+          <a:bodyPr wrap="square">
+            <a:spAutoFit/>
+          </a:bodyPr>
+          <a:lstStyle/>
+          <a:p>
+            <a:pPr algn="ctr">
+              <a:spcAft>
+                <a:spcPts val="600"/>
+              </a:spcAft>
+              <a:buNone/>
+            </a:pPr>
+            <a:r>
+              <a:rPr sz="1100" b="0">
+                <a:solidFill>
+                  <a:srgbClr val="5B6774"/>
+                </a:solidFill>
+                <a:latin typeface="Arial"/>
+              </a:rPr>
+              <a:t>Decision tree, max_depth 1-20, train vs 5-fold CV accuracy. Module 2, notebook 2. MIT 6.390, ch. 2 &amp; ch. 5; Harvard CS109A / ISLR ch. 2.</a:t>
+            </a:r>
+          </a:p>
+        </p:txBody>
+      </p:sp>
+      <p:sp>
+        <p:nvSpPr>
+          <p:cNvPr id="10" name="TextBox 9"/>
+          <p:cNvSpPr txBox="1"/>
+          <p:nvPr/>
+        </p:nvSpPr>
+        <p:spPr>
+          <a:xfrm>
+            <a:off x="548640" y="6473952"/>
+            <a:ext cx="7315200" cy="292608"/>
+          </a:xfrm>
+          <a:prstGeom prst="rect">
+            <a:avLst/>
+          </a:prstGeom>
+          <a:noFill/>
+        </p:spPr>
+        <p:txBody>
+          <a:bodyPr wrap="square">
+            <a:spAutoFit/>
+          </a:bodyPr>
+          <a:lstStyle/>
+          <a:p>
+            <a:pPr algn="l">
+              <a:spcAft>
+                <a:spcPts val="600"/>
+              </a:spcAft>
+              <a:buNone/>
+            </a:pPr>
+            <a:r>
+              <a:rPr sz="900" b="0">
+                <a:solidFill>
+                  <a:srgbClr val="5B6774"/>
+                </a:solidFill>
+                <a:latin typeface="Arial"/>
+              </a:rPr>
+              <a:t>M2 Session 3 - Model Selection and Evaluation</a:t>
+            </a:r>
+          </a:p>
+        </p:txBody>
+      </p:sp>
+      <p:sp>
+        <p:nvSpPr>
+          <p:cNvPr id="11" name="TextBox 10"/>
+          <p:cNvSpPr txBox="1"/>
+          <p:nvPr/>
+        </p:nvSpPr>
+        <p:spPr>
+          <a:xfrm>
+            <a:off x="11292840" y="6473952"/>
+            <a:ext cx="548640" cy="292608"/>
+          </a:xfrm>
+          <a:prstGeom prst="rect">
+            <a:avLst/>
+          </a:prstGeom>
+          <a:noFill/>
+        </p:spPr>
+        <p:txBody>
+          <a:bodyPr wrap="square">
+            <a:spAutoFit/>
+          </a:bodyPr>
+          <a:lstStyle/>
+          <a:p>
+            <a:pPr algn="r">
+              <a:spcAft>
+                <a:spcPts val="600"/>
+              </a:spcAft>
+              <a:buNone/>
+            </a:pPr>
+            <a:r>
+              <a:rPr sz="900" b="0">
+                <a:solidFill>
+                  <a:srgbClr val="5B6774"/>
+                </a:solidFill>
+                <a:latin typeface="Arial"/>
+              </a:rPr>
+              <a:t>18</a:t>
+            </a:r>
+          </a:p>
+        </p:txBody>
+      </p:sp>
+    </p:spTree>
+  </p:cSld>
+  <p:clrMapOvr>
+    <a:masterClrMapping/>
+  </p:clrMapOvr>
+</p:sld>
+</file>
+
+<file path=ppt/slides/slide19.xml><?xml version="1.0" encoding="utf-8"?>
+<p:sld xmlns:a="http://schemas.openxmlformats.org/drawingml/2006/main" xmlns:p="http://schemas.openxmlformats.org/presentationml/2006/main" xmlns:r="http://schemas.openxmlformats.org/officeDocument/2006/relationships">
+  <p:cSld>
+    <p:spTree>
+      <p:nvGrpSpPr>
+        <p:cNvPr id="1" name=""/>
+        <p:cNvGrpSpPr/>
+        <p:nvPr/>
+      </p:nvGrpSpPr>
+      <p:grpSpPr/>
+      <p:sp>
+        <p:nvSpPr>
+          <p:cNvPr id="2" name="Rectangle 1"/>
+          <p:cNvSpPr/>
+          <p:nvPr/>
+        </p:nvSpPr>
+        <p:spPr>
+          <a:xfrm>
+            <a:off x="0" y="0"/>
+            <a:ext cx="12191695" cy="6858000"/>
+          </a:xfrm>
+          <a:prstGeom prst="rect">
+            <a:avLst/>
+          </a:prstGeom>
+          <a:solidFill>
+            <a:srgbClr val="FFFFFF"/>
+          </a:solidFill>
+          <a:ln>
+            <a:noFill/>
+          </a:ln>
+          <a:effectLst/>
+        </p:spPr>
+        <p:style>
+          <a:lnRef idx="1">
+            <a:schemeClr val="accent1"/>
+          </a:lnRef>
+          <a:fillRef idx="3">
+            <a:schemeClr val="accent1"/>
+          </a:fillRef>
+          <a:effectRef idx="2">
+            <a:schemeClr val="accent1"/>
+          </a:effectRef>
+          <a:fontRef idx="minor">
+            <a:schemeClr val="lt1"/>
+          </a:fontRef>
+        </p:style>
+        <p:txBody>
+          <a:bodyPr rtlCol="0" anchor="ctr"/>
+          <a:lstStyle/>
+          <a:p>
+            <a:pPr algn="ctr"/>
+          </a:p>
+        </p:txBody>
+      </p:sp>
+      <p:sp>
+        <p:nvSpPr>
+          <p:cNvPr id="3" name="Rectangle 2"/>
+          <p:cNvSpPr/>
+          <p:nvPr/>
+        </p:nvSpPr>
+        <p:spPr>
+          <a:xfrm>
+            <a:off x="548640" y="475488"/>
+            <a:ext cx="457200" cy="54864"/>
+          </a:xfrm>
+          <a:prstGeom prst="rect">
+            <a:avLst/>
+          </a:prstGeom>
+          <a:solidFill>
+            <a:srgbClr val="1E5EF3"/>
+          </a:solidFill>
+          <a:ln>
+            <a:noFill/>
+          </a:ln>
+          <a:effectLst/>
+        </p:spPr>
+        <p:style>
+          <a:lnRef idx="1">
+            <a:schemeClr val="accent1"/>
+          </a:lnRef>
+          <a:fillRef idx="3">
+            <a:schemeClr val="accent1"/>
+          </a:fillRef>
+          <a:effectRef idx="2">
+            <a:schemeClr val="accent1"/>
+          </a:effectRef>
+          <a:fontRef idx="minor">
+            <a:schemeClr val="lt1"/>
+          </a:fontRef>
+        </p:style>
+        <p:txBody>
+          <a:bodyPr rtlCol="0" anchor="ctr"/>
+          <a:lstStyle/>
+          <a:p>
+            <a:pPr algn="ctr"/>
+          </a:p>
+        </p:txBody>
+      </p:sp>
+      <p:sp>
+        <p:nvSpPr>
+          <p:cNvPr id="4" name="TextBox 3"/>
+          <p:cNvSpPr txBox="1"/>
+          <p:nvPr/>
+        </p:nvSpPr>
+        <p:spPr>
+          <a:xfrm>
+            <a:off x="548640" y="603504"/>
+            <a:ext cx="11091672" cy="274320"/>
+          </a:xfrm>
+          <a:prstGeom prst="rect">
+            <a:avLst/>
+          </a:prstGeom>
+          <a:noFill/>
+        </p:spPr>
+        <p:txBody>
+          <a:bodyPr wrap="square">
+            <a:spAutoFit/>
+          </a:bodyPr>
+          <a:lstStyle/>
+          <a:p>
+            <a:pPr algn="l">
+              <a:spcAft>
+                <a:spcPts val="600"/>
+              </a:spcAft>
+              <a:buNone/>
+            </a:pPr>
+            <a:r>
+              <a:rPr sz="1100" b="1">
+                <a:solidFill>
+                  <a:srgbClr val="1E5EF3"/>
+                </a:solidFill>
+                <a:latin typeface="Arial"/>
+              </a:rPr>
+              <a:t>WOULD MORE DATA HELP?</a:t>
+            </a:r>
+          </a:p>
+        </p:txBody>
+      </p:sp>
+      <p:sp>
+        <p:nvSpPr>
+          <p:cNvPr id="5" name="TextBox 4"/>
+          <p:cNvSpPr txBox="1"/>
+          <p:nvPr/>
+        </p:nvSpPr>
+        <p:spPr>
+          <a:xfrm>
+            <a:off x="548640" y="868680"/>
+            <a:ext cx="11091672" cy="777240"/>
+          </a:xfrm>
+          <a:prstGeom prst="rect">
+            <a:avLst/>
+          </a:prstGeom>
+          <a:noFill/>
+        </p:spPr>
+        <p:txBody>
+          <a:bodyPr wrap="square">
+            <a:spAutoFit/>
+          </a:bodyPr>
+          <a:lstStyle/>
+          <a:p>
+            <a:pPr algn="l">
+              <a:spcAft>
+                <a:spcPts val="0"/>
+              </a:spcAft>
+              <a:buNone/>
+            </a:pPr>
+            <a:r>
+              <a:rPr sz="2600" b="1">
+                <a:solidFill>
+                  <a:srgbClr val="0A2540"/>
+                </a:solidFill>
+                <a:latin typeface="Arial"/>
+              </a:rPr>
+              <a:t>The learning curve answers "would more data help?" - for us: no</a:t>
+            </a:r>
+          </a:p>
+        </p:txBody>
+      </p:sp>
+      <p:sp>
+        <p:nvSpPr>
+          <p:cNvPr id="6" name="Rectangle 5"/>
+          <p:cNvSpPr/>
+          <p:nvPr/>
+        </p:nvSpPr>
+        <p:spPr>
+          <a:xfrm>
+            <a:off x="548640" y="1664208"/>
+            <a:ext cx="11091672" cy="12801"/>
+          </a:xfrm>
+          <a:prstGeom prst="rect">
+            <a:avLst/>
+          </a:prstGeom>
+          <a:solidFill>
+            <a:srgbClr val="B9D0FA"/>
+          </a:solidFill>
+          <a:ln>
+            <a:noFill/>
+          </a:ln>
+          <a:effectLst/>
+        </p:spPr>
+        <p:style>
+          <a:lnRef idx="1">
+            <a:schemeClr val="accent1"/>
+          </a:lnRef>
+          <a:fillRef idx="3">
+            <a:schemeClr val="accent1"/>
+          </a:fillRef>
+          <a:effectRef idx="2">
+            <a:schemeClr val="accent1"/>
+          </a:effectRef>
+          <a:fontRef idx="minor">
+            <a:schemeClr val="lt1"/>
+          </a:fontRef>
+        </p:style>
+        <p:txBody>
+          <a:bodyPr rtlCol="0" anchor="ctr"/>
+          <a:lstStyle/>
+          <a:p>
+            <a:pPr algn="ctr"/>
+          </a:p>
+        </p:txBody>
+      </p:sp>
+      <p:sp>
+        <p:nvSpPr>
+          <p:cNvPr id="7" name="TextBox 6"/>
+          <p:cNvSpPr txBox="1"/>
+          <p:nvPr/>
+        </p:nvSpPr>
+        <p:spPr>
+          <a:xfrm>
+            <a:off x="548640" y="1874519"/>
+            <a:ext cx="4297680" cy="4206240"/>
+          </a:xfrm>
+          <a:prstGeom prst="rect">
+            <a:avLst/>
+          </a:prstGeom>
+          <a:noFill/>
+        </p:spPr>
+        <p:txBody>
+          <a:bodyPr wrap="square">
+            <a:spAutoFit/>
+          </a:bodyPr>
+          <a:lstStyle/>
+          <a:p>
+            <a:pPr algn="l" indent="-228600" marL="228600">
+              <a:spcAft>
+                <a:spcPts val="800"/>
+              </a:spcAft>
+              <a:buClr>
+                <a:srgbClr val="1E5EF3"/>
+              </a:buClr>
+              <a:buChar char="—"/>
+            </a:pPr>
+            <a:r>
+              <a:rPr sz="1450" b="0">
+                <a:solidFill>
+                  <a:srgbClr val="202B38"/>
+                </a:solidFill>
+                <a:latin typeface="Arial"/>
+              </a:rPr>
+              <a:t>Plot the honest score against training-set size: our CV accuracy climbs from 0.758 at 56 rows to 0.819 at 569 rows - then flattens.</a:t>
+            </a:r>
+          </a:p>
+          <a:p>
+            <a:pPr algn="l" indent="-228600" marL="228600">
+              <a:spcAft>
+                <a:spcPts val="800"/>
+              </a:spcAft>
+              <a:buClr>
+                <a:srgbClr val="1E5EF3"/>
+              </a:buClr>
+              <a:buChar char="—"/>
+            </a:pPr>
+            <a:r>
+              <a:rPr sz="1450" b="0">
+                <a:solidFill>
+                  <a:srgbClr val="202B38"/>
+                </a:solidFill>
+                <a:latin typeface="Arial"/>
+              </a:rPr>
+              <a:t>Regime 1, high bias: train and CV converge close together but below the score you need. The curve has flattened - more rows cannot get you there; change the model or features, not the dataset.</a:t>
+            </a:r>
+          </a:p>
+          <a:p>
+            <a:pPr algn="l" indent="-228600" marL="228600">
+              <a:spcAft>
+                <a:spcPts val="800"/>
+              </a:spcAft>
+              <a:buClr>
+                <a:srgbClr val="1E5EF3"/>
+              </a:buClr>
+              <a:buChar char="—"/>
+            </a:pPr>
+            <a:r>
+              <a:rPr sz="1450" b="0">
+                <a:solidFill>
+                  <a:srgbClr val="202B38"/>
+                </a:solidFill>
+                <a:latin typeface="Arial"/>
+              </a:rPr>
+              <a:t>Regime 2, high variance: training score is fine but a wide gap separates it from CV - the curves haven't converged; more data plausibly helps.</a:t>
+            </a:r>
+          </a:p>
+          <a:p>
+            <a:pPr algn="l" indent="-228600" marL="228600">
+              <a:spcAft>
+                <a:spcPts val="800"/>
+              </a:spcAft>
+              <a:buClr>
+                <a:srgbClr val="1E5EF3"/>
+              </a:buClr>
+              <a:buChar char="—"/>
+            </a:pPr>
+            <a:r>
+              <a:rPr sz="1450" b="0">
+                <a:solidFill>
+                  <a:srgbClr val="202B38"/>
+                </a:solidFill>
+                <a:latin typeface="Arial"/>
+              </a:rPr>
+              <a:t>Read ours: flat and close - more passengers would buy little. Better features or settings are the lever. That is exactly Session 4's job.</a:t>
+            </a:r>
+          </a:p>
+        </p:txBody>
+      </p:sp>
+      <p:pic>
+        <p:nvPicPr>
+          <p:cNvPr id="8" name="Picture 7" descr="learning_curve.png"/>
+          <p:cNvPicPr>
+            <a:picLocks noChangeAspect="1"/>
+          </p:cNvPicPr>
+          <p:nvPr/>
+        </p:nvPicPr>
+        <p:blipFill>
+          <a:blip r:embed="rId2"/>
+          <a:stretch>
+            <a:fillRect/>
+          </a:stretch>
+        </p:blipFill>
+        <p:spPr>
+          <a:xfrm>
+            <a:off x="5120640" y="1874519"/>
+            <a:ext cx="6492240" cy="3766389"/>
+          </a:xfrm>
+          <a:prstGeom prst="rect">
+            <a:avLst/>
+          </a:prstGeom>
+        </p:spPr>
+      </p:pic>
+      <p:sp>
+        <p:nvSpPr>
+          <p:cNvPr id="9" name="TextBox 8"/>
+          <p:cNvSpPr txBox="1"/>
+          <p:nvPr/>
+        </p:nvSpPr>
+        <p:spPr>
+          <a:xfrm>
+            <a:off x="5120640" y="6062471"/>
+            <a:ext cx="6492240" cy="365760"/>
+          </a:xfrm>
+          <a:prstGeom prst="rect">
+            <a:avLst/>
+          </a:prstGeom>
+          <a:noFill/>
+        </p:spPr>
+        <p:txBody>
+          <a:bodyPr wrap="square">
+            <a:spAutoFit/>
+          </a:bodyPr>
+          <a:lstStyle/>
+          <a:p>
+            <a:pPr algn="ctr">
+              <a:spcAft>
+                <a:spcPts val="600"/>
+              </a:spcAft>
+              <a:buNone/>
+            </a:pPr>
+            <a:r>
+              <a:rPr sz="1100" b="0">
+                <a:solidFill>
+                  <a:srgbClr val="5B6774"/>
+                </a:solidFill>
+                <a:latin typeface="Arial"/>
+              </a:rPr>
+              <a:t>Main panel: real curve, Module 2, notebook 2. Insets: regime sketches - illustration. Ng, Machine Learning Yearning chs. 28-32.</a:t>
+            </a:r>
+          </a:p>
+        </p:txBody>
+      </p:sp>
+      <p:sp>
+        <p:nvSpPr>
+          <p:cNvPr id="10" name="TextBox 9"/>
+          <p:cNvSpPr txBox="1"/>
+          <p:nvPr/>
+        </p:nvSpPr>
+        <p:spPr>
+          <a:xfrm>
+            <a:off x="548640" y="6473952"/>
+            <a:ext cx="7315200" cy="292608"/>
+          </a:xfrm>
+          <a:prstGeom prst="rect">
+            <a:avLst/>
+          </a:prstGeom>
+          <a:noFill/>
+        </p:spPr>
+        <p:txBody>
+          <a:bodyPr wrap="square">
+            <a:spAutoFit/>
+          </a:bodyPr>
+          <a:lstStyle/>
+          <a:p>
+            <a:pPr algn="l">
+              <a:spcAft>
+                <a:spcPts val="600"/>
+              </a:spcAft>
+              <a:buNone/>
+            </a:pPr>
+            <a:r>
+              <a:rPr sz="900" b="0">
+                <a:solidFill>
+                  <a:srgbClr val="5B6774"/>
+                </a:solidFill>
+                <a:latin typeface="Arial"/>
+              </a:rPr>
+              <a:t>M2 Session 3 - Model Selection and Evaluation</a:t>
+            </a:r>
+          </a:p>
+        </p:txBody>
+      </p:sp>
+      <p:sp>
+        <p:nvSpPr>
+          <p:cNvPr id="11" name="TextBox 10"/>
+          <p:cNvSpPr txBox="1"/>
+          <p:nvPr/>
+        </p:nvSpPr>
+        <p:spPr>
+          <a:xfrm>
+            <a:off x="11292840" y="6473952"/>
+            <a:ext cx="548640" cy="292608"/>
+          </a:xfrm>
+          <a:prstGeom prst="rect">
+            <a:avLst/>
+          </a:prstGeom>
+          <a:noFill/>
+        </p:spPr>
+        <p:txBody>
+          <a:bodyPr wrap="square">
+            <a:spAutoFit/>
+          </a:bodyPr>
+          <a:lstStyle/>
+          <a:p>
+            <a:pPr algn="r">
+              <a:spcAft>
+                <a:spcPts val="600"/>
+              </a:spcAft>
+              <a:buNone/>
+            </a:pPr>
+            <a:r>
+              <a:rPr sz="900" b="0">
+                <a:solidFill>
+                  <a:srgbClr val="5B6774"/>
+                </a:solidFill>
+                <a:latin typeface="Arial"/>
+              </a:rPr>
+              <a:t>19</a:t>
+            </a:r>
+          </a:p>
+        </p:txBody>
+      </p:sp>
+    </p:spTree>
+  </p:cSld>
+  <p:clrMapOvr>
+    <a:masterClrMapping/>
+  </p:clrMapOvr>
+</p:sld>
+</file>
+
+<file path=ppt/slides/slide2.xml><?xml version="1.0" encoding="utf-8"?>
+<p:sld xmlns:a="http://schemas.openxmlformats.org/drawingml/2006/main" xmlns:p="http://schemas.openxmlformats.org/presentationml/2006/main" xmlns:r="http://schemas.openxmlformats.org/officeDocument/2006/relationships">
+  <p:cSld>
+    <p:spTree>
+      <p:nvGrpSpPr>
+        <p:cNvPr id="1" name=""/>
+        <p:cNvGrpSpPr/>
+        <p:nvPr/>
+      </p:nvGrpSpPr>
+      <p:grpSpPr/>
+      <p:sp>
+        <p:nvSpPr>
+          <p:cNvPr id="2" name="Rectangle 1"/>
+          <p:cNvSpPr/>
+          <p:nvPr/>
+        </p:nvSpPr>
+        <p:spPr>
+          <a:xfrm>
+            <a:off x="0" y="0"/>
+            <a:ext cx="12191695" cy="6858000"/>
+          </a:xfrm>
+          <a:prstGeom prst="rect">
+            <a:avLst/>
+          </a:prstGeom>
+          <a:solidFill>
+            <a:srgbClr val="FFFFFF"/>
+          </a:solidFill>
+          <a:ln>
+            <a:noFill/>
+          </a:ln>
+          <a:effectLst/>
+        </p:spPr>
+        <p:style>
+          <a:lnRef idx="1">
+            <a:schemeClr val="accent1"/>
+          </a:lnRef>
+          <a:fillRef idx="3">
+            <a:schemeClr val="accent1"/>
+          </a:fillRef>
+          <a:effectRef idx="2">
+            <a:schemeClr val="accent1"/>
+          </a:effectRef>
+          <a:fontRef idx="minor">
+            <a:schemeClr val="lt1"/>
+          </a:fontRef>
+        </p:style>
+        <p:txBody>
+          <a:bodyPr rtlCol="0" anchor="ctr"/>
+          <a:lstStyle/>
+          <a:p>
+            <a:pPr algn="ctr"/>
+          </a:p>
+        </p:txBody>
+      </p:sp>
+      <p:sp>
+        <p:nvSpPr>
+          <p:cNvPr id="3" name="Rectangle 2"/>
+          <p:cNvSpPr/>
+          <p:nvPr/>
+        </p:nvSpPr>
+        <p:spPr>
+          <a:xfrm>
+            <a:off x="548640" y="475488"/>
+            <a:ext cx="457200" cy="54864"/>
+          </a:xfrm>
+          <a:prstGeom prst="rect">
+            <a:avLst/>
+          </a:prstGeom>
+          <a:solidFill>
+            <a:srgbClr val="1E5EF3"/>
+          </a:solidFill>
+          <a:ln>
+            <a:noFill/>
+          </a:ln>
+          <a:effectLst/>
+        </p:spPr>
+        <p:style>
+          <a:lnRef idx="1">
+            <a:schemeClr val="accent1"/>
+          </a:lnRef>
+          <a:fillRef idx="3">
+            <a:schemeClr val="accent1"/>
+          </a:fillRef>
+          <a:effectRef idx="2">
+            <a:schemeClr val="accent1"/>
+          </a:effectRef>
+          <a:fontRef idx="minor">
+            <a:schemeClr val="lt1"/>
+          </a:fontRef>
+        </p:style>
+        <p:txBody>
+          <a:bodyPr rtlCol="0" anchor="ctr"/>
+          <a:lstStyle/>
+          <a:p>
+            <a:pPr algn="ctr"/>
+          </a:p>
+        </p:txBody>
+      </p:sp>
+      <p:sp>
+        <p:nvSpPr>
+          <p:cNvPr id="4" name="TextBox 3"/>
+          <p:cNvSpPr txBox="1"/>
+          <p:nvPr/>
+        </p:nvSpPr>
+        <p:spPr>
+          <a:xfrm>
+            <a:off x="548640" y="603504"/>
+            <a:ext cx="11091672" cy="274320"/>
+          </a:xfrm>
+          <a:prstGeom prst="rect">
+            <a:avLst/>
+          </a:prstGeom>
+          <a:noFill/>
+        </p:spPr>
+        <p:txBody>
+          <a:bodyPr wrap="square">
+            <a:spAutoFit/>
+          </a:bodyPr>
+          <a:lstStyle/>
+          <a:p>
+            <a:pPr algn="l">
+              <a:spcAft>
+                <a:spcPts val="600"/>
+              </a:spcAft>
+              <a:buNone/>
+            </a:pPr>
+            <a:r>
+              <a:rPr sz="1100" b="1">
+                <a:solidFill>
+                  <a:srgbClr val="1E5EF3"/>
+                </a:solidFill>
+                <a:latin typeface="Arial"/>
+              </a:rPr>
+              <a:t>THE MAP FOR TODAY</a:t>
+            </a:r>
+          </a:p>
+        </p:txBody>
+      </p:sp>
+      <p:sp>
+        <p:nvSpPr>
+          <p:cNvPr id="5" name="TextBox 4"/>
+          <p:cNvSpPr txBox="1"/>
+          <p:nvPr/>
+        </p:nvSpPr>
+        <p:spPr>
+          <a:xfrm>
+            <a:off x="548640" y="868680"/>
+            <a:ext cx="11091672" cy="777240"/>
+          </a:xfrm>
+          <a:prstGeom prst="rect">
+            <a:avLst/>
+          </a:prstGeom>
+          <a:noFill/>
+        </p:spPr>
+        <p:txBody>
+          <a:bodyPr wrap="square">
+            <a:spAutoFit/>
+          </a:bodyPr>
+          <a:lstStyle/>
+          <a:p>
+            <a:pPr algn="l">
+              <a:spcAft>
+                <a:spcPts val="0"/>
+              </a:spcAft>
+              <a:buNone/>
+            </a:pPr>
+            <a:r>
+              <a:rPr sz="2600" b="1">
+                <a:solidFill>
+                  <a:srgbClr val="0A2540"/>
+                </a:solidFill>
+                <a:latin typeface="Arial"/>
+              </a:rPr>
+              <a:t>Today we live in the CHOOSE band: selection and assessment are different jobs</a:t>
+            </a:r>
+          </a:p>
+        </p:txBody>
+      </p:sp>
+      <p:sp>
+        <p:nvSpPr>
+          <p:cNvPr id="6" name="Rectangle 5"/>
+          <p:cNvSpPr/>
+          <p:nvPr/>
+        </p:nvSpPr>
+        <p:spPr>
+          <a:xfrm>
+            <a:off x="548640" y="1664208"/>
+            <a:ext cx="11091672" cy="12801"/>
+          </a:xfrm>
+          <a:prstGeom prst="rect">
+            <a:avLst/>
+          </a:prstGeom>
+          <a:solidFill>
+            <a:srgbClr val="B9D0FA"/>
+          </a:solidFill>
+          <a:ln>
+            <a:noFill/>
+          </a:ln>
+          <a:effectLst/>
+        </p:spPr>
+        <p:style>
+          <a:lnRef idx="1">
+            <a:schemeClr val="accent1"/>
+          </a:lnRef>
+          <a:fillRef idx="3">
+            <a:schemeClr val="accent1"/>
+          </a:fillRef>
+          <a:effectRef idx="2">
+            <a:schemeClr val="accent1"/>
+          </a:effectRef>
+          <a:fontRef idx="minor">
+            <a:schemeClr val="lt1"/>
+          </a:fontRef>
+        </p:style>
+        <p:txBody>
+          <a:bodyPr rtlCol="0" anchor="ctr"/>
+          <a:lstStyle/>
+          <a:p>
+            <a:pPr algn="ctr"/>
+          </a:p>
+        </p:txBody>
+      </p:sp>
+      <p:sp>
+        <p:nvSpPr>
+          <p:cNvPr id="7" name="TextBox 6"/>
+          <p:cNvSpPr txBox="1"/>
+          <p:nvPr/>
+        </p:nvSpPr>
+        <p:spPr>
+          <a:xfrm>
+            <a:off x="548640" y="1874519"/>
+            <a:ext cx="4297680" cy="4206240"/>
+          </a:xfrm>
+          <a:prstGeom prst="rect">
+            <a:avLst/>
+          </a:prstGeom>
+          <a:noFill/>
+        </p:spPr>
+        <p:txBody>
+          <a:bodyPr wrap="square">
+            <a:spAutoFit/>
+          </a:bodyPr>
+          <a:lstStyle/>
+          <a:p>
+            <a:pPr algn="l" indent="-228600" marL="228600">
+              <a:spcAft>
+                <a:spcPts val="800"/>
+              </a:spcAft>
+              <a:buClr>
+                <a:srgbClr val="1E5EF3"/>
+              </a:buClr>
+              <a:buChar char="—"/>
+            </a:pPr>
+            <a:r>
+              <a:rPr sz="1450" b="0">
+                <a:solidFill>
+                  <a:srgbClr val="202B38"/>
+                </a:solidFill>
+                <a:latin typeface="Arial"/>
+              </a:rPr>
+              <a:t>Session 2 left a model-ready table: 712 training rows, 179 test rows, 18 features.</a:t>
+            </a:r>
+          </a:p>
+          <a:p>
+            <a:pPr algn="l" indent="-228600" marL="228600">
+              <a:spcAft>
+                <a:spcPts val="800"/>
+              </a:spcAft>
+              <a:buClr>
+                <a:srgbClr val="1E5EF3"/>
+              </a:buClr>
+              <a:buChar char="—"/>
+            </a:pPr>
+            <a:r>
+              <a:rPr sz="1450" b="0">
+                <a:solidFill>
+                  <a:srgbClr val="202B38"/>
+                </a:solidFill>
+                <a:latin typeface="Arial"/>
+              </a:rPr>
+              <a:t>Six algorithms could predict who survived - picking by name or fashion is guessing.</a:t>
+            </a:r>
+          </a:p>
+          <a:p>
+            <a:pPr algn="l" indent="-228600" marL="228600">
+              <a:spcAft>
+                <a:spcPts val="800"/>
+              </a:spcAft>
+              <a:buClr>
+                <a:srgbClr val="1E5EF3"/>
+              </a:buClr>
+              <a:buChar char="—"/>
+            </a:pPr>
+            <a:r>
+              <a:rPr sz="1450" b="0">
+                <a:solidFill>
+                  <a:srgbClr val="202B38"/>
+                </a:solidFill>
+                <a:latin typeface="Arial"/>
+              </a:rPr>
+              <a:t>Model SELECTION = choosing among models and settings. Done many times, in the CHOOSE band, by cross-validation.</a:t>
+            </a:r>
+          </a:p>
+          <a:p>
+            <a:pPr algn="l" indent="-228600" marL="228600">
+              <a:spcAft>
+                <a:spcPts val="800"/>
+              </a:spcAft>
+              <a:buClr>
+                <a:srgbClr val="1E5EF3"/>
+              </a:buClr>
+              <a:buChar char="—"/>
+            </a:pPr>
+            <a:r>
+              <a:rPr sz="1450" b="0">
+                <a:solidFill>
+                  <a:srgbClr val="202B38"/>
+                </a:solidFill>
+                <a:latin typeface="Arial"/>
+              </a:rPr>
+              <a:t>Model ASSESSMENT = grading the final choice. Done once, in the REPORT band. Select on the test set and its score stops being a forecast.</a:t>
+            </a:r>
+          </a:p>
+          <a:p>
+            <a:pPr algn="l" indent="-228600" marL="228600">
+              <a:spcAft>
+                <a:spcPts val="800"/>
+              </a:spcAft>
+              <a:buClr>
+                <a:srgbClr val="1E5EF3"/>
+              </a:buClr>
+              <a:buChar char="—"/>
+            </a:pPr>
+            <a:r>
+              <a:rPr sz="1450" b="0">
+                <a:solidFill>
+                  <a:srgbClr val="202B38"/>
+                </a:solidFill>
+                <a:latin typeface="Arial"/>
+              </a:rPr>
+              <a:t>Today in two parts: Part 1 is theory - how to judge a learner honestly. Part 2 is practice - the tournament that puts every idea to work.</a:t>
+            </a:r>
+          </a:p>
+        </p:txBody>
+      </p:sp>
+      <p:pic>
+        <p:nvPicPr>
+          <p:cNvPr id="8" name="Picture 7" descr="frame_c_bar.png"/>
+          <p:cNvPicPr>
+            <a:picLocks noChangeAspect="1"/>
+          </p:cNvPicPr>
+          <p:nvPr/>
+        </p:nvPicPr>
+        <p:blipFill>
+          <a:blip r:embed="rId2"/>
+          <a:stretch>
+            <a:fillRect/>
+          </a:stretch>
+        </p:blipFill>
+        <p:spPr>
+          <a:xfrm>
+            <a:off x="5120640" y="1874519"/>
+            <a:ext cx="6492240" cy="1668970"/>
+          </a:xfrm>
+          <a:prstGeom prst="rect">
+            <a:avLst/>
+          </a:prstGeom>
+        </p:spPr>
+      </p:pic>
+      <p:sp>
+        <p:nvSpPr>
+          <p:cNvPr id="9" name="TextBox 8"/>
+          <p:cNvSpPr txBox="1"/>
+          <p:nvPr/>
+        </p:nvSpPr>
+        <p:spPr>
+          <a:xfrm>
+            <a:off x="5120640" y="6062471"/>
+            <a:ext cx="6492240" cy="365760"/>
+          </a:xfrm>
+          <a:prstGeom prst="rect">
+            <a:avLst/>
+          </a:prstGeom>
+          <a:noFill/>
+        </p:spPr>
+        <p:txBody>
+          <a:bodyPr wrap="square">
+            <a:spAutoFit/>
+          </a:bodyPr>
+          <a:lstStyle/>
+          <a:p>
+            <a:pPr algn="ctr">
+              <a:spcAft>
+                <a:spcPts val="600"/>
+              </a:spcAft>
+              <a:buNone/>
+            </a:pPr>
+            <a:r>
+              <a:rPr sz="1100" b="0">
+                <a:solidFill>
+                  <a:srgbClr val="5B6774"/>
+                </a:solidFill>
+                <a:latin typeface="Arial"/>
+              </a:rPr>
+              <a:t>One bar rules the module, re-shown from Session 2. Harvard CS109A / ISLR ch. 5 (model selection vs model assessment).</a:t>
+            </a:r>
+          </a:p>
+        </p:txBody>
+      </p:sp>
+      <p:sp>
+        <p:nvSpPr>
+          <p:cNvPr id="10" name="TextBox 9"/>
+          <p:cNvSpPr txBox="1"/>
+          <p:nvPr/>
+        </p:nvSpPr>
+        <p:spPr>
+          <a:xfrm>
+            <a:off x="548640" y="6473952"/>
+            <a:ext cx="7315200" cy="292608"/>
+          </a:xfrm>
+          <a:prstGeom prst="rect">
+            <a:avLst/>
+          </a:prstGeom>
+          <a:noFill/>
+        </p:spPr>
+        <p:txBody>
+          <a:bodyPr wrap="square">
+            <a:spAutoFit/>
+          </a:bodyPr>
+          <a:lstStyle/>
+          <a:p>
+            <a:pPr algn="l">
+              <a:spcAft>
+                <a:spcPts val="600"/>
+              </a:spcAft>
+              <a:buNone/>
+            </a:pPr>
+            <a:r>
+              <a:rPr sz="900" b="0">
+                <a:solidFill>
+                  <a:srgbClr val="5B6774"/>
+                </a:solidFill>
+                <a:latin typeface="Arial"/>
+              </a:rPr>
+              <a:t>M2 Session 3 - Model Selection and Evaluation</a:t>
+            </a:r>
+          </a:p>
+        </p:txBody>
+      </p:sp>
+      <p:sp>
+        <p:nvSpPr>
+          <p:cNvPr id="11" name="TextBox 10"/>
+          <p:cNvSpPr txBox="1"/>
+          <p:nvPr/>
+        </p:nvSpPr>
+        <p:spPr>
+          <a:xfrm>
+            <a:off x="11292840" y="6473952"/>
+            <a:ext cx="548640" cy="292608"/>
+          </a:xfrm>
+          <a:prstGeom prst="rect">
+            <a:avLst/>
+          </a:prstGeom>
+          <a:noFill/>
+        </p:spPr>
+        <p:txBody>
+          <a:bodyPr wrap="square">
+            <a:spAutoFit/>
+          </a:bodyPr>
+          <a:lstStyle/>
+          <a:p>
+            <a:pPr algn="r">
+              <a:spcAft>
+                <a:spcPts val="600"/>
+              </a:spcAft>
+              <a:buNone/>
+            </a:pPr>
+            <a:r>
+              <a:rPr sz="900" b="0">
+                <a:solidFill>
+                  <a:srgbClr val="5B6774"/>
+                </a:solidFill>
+                <a:latin typeface="Arial"/>
+              </a:rPr>
+              <a:t>2</a:t>
+            </a:r>
+          </a:p>
+        </p:txBody>
+      </p:sp>
+    </p:spTree>
+  </p:cSld>
+  <p:clrMapOvr>
+    <a:masterClrMapping/>
+  </p:clrMapOvr>
+</p:sld>
+</file>
+
+<file path=ppt/slides/slide20.xml><?xml version="1.0" encoding="utf-8"?>
+<p:sld xmlns:a="http://schemas.openxmlformats.org/drawingml/2006/main" xmlns:p="http://schemas.openxmlformats.org/presentationml/2006/main" xmlns:r="http://schemas.openxmlformats.org/officeDocument/2006/relationships">
+  <p:cSld>
+    <p:spTree>
+      <p:nvGrpSpPr>
+        <p:cNvPr id="1" name=""/>
+        <p:cNvGrpSpPr/>
+        <p:nvPr/>
+      </p:nvGrpSpPr>
+      <p:grpSpPr/>
+      <p:sp>
+        <p:nvSpPr>
+          <p:cNvPr id="2" name="Rectangle 1"/>
+          <p:cNvSpPr/>
+          <p:nvPr/>
+        </p:nvSpPr>
+        <p:spPr>
+          <a:xfrm>
+            <a:off x="0" y="0"/>
+            <a:ext cx="12191695" cy="6858000"/>
+          </a:xfrm>
+          <a:prstGeom prst="rect">
+            <a:avLst/>
+          </a:prstGeom>
+          <a:solidFill>
+            <a:srgbClr val="FFFFFF"/>
+          </a:solidFill>
+          <a:ln>
+            <a:noFill/>
+          </a:ln>
+          <a:effectLst/>
+        </p:spPr>
+        <p:style>
+          <a:lnRef idx="1">
+            <a:schemeClr val="accent1"/>
+          </a:lnRef>
+          <a:fillRef idx="3">
+            <a:schemeClr val="accent1"/>
+          </a:fillRef>
+          <a:effectRef idx="2">
+            <a:schemeClr val="accent1"/>
+          </a:effectRef>
+          <a:fontRef idx="minor">
+            <a:schemeClr val="lt1"/>
+          </a:fontRef>
+        </p:style>
+        <p:txBody>
+          <a:bodyPr rtlCol="0" anchor="ctr"/>
+          <a:lstStyle/>
+          <a:p>
+            <a:pPr algn="ctr"/>
+          </a:p>
+        </p:txBody>
+      </p:sp>
+      <p:sp>
+        <p:nvSpPr>
+          <p:cNvPr id="3" name="Rectangle 2"/>
+          <p:cNvSpPr/>
+          <p:nvPr/>
+        </p:nvSpPr>
+        <p:spPr>
+          <a:xfrm>
+            <a:off x="548640" y="475488"/>
+            <a:ext cx="457200" cy="54864"/>
+          </a:xfrm>
+          <a:prstGeom prst="rect">
+            <a:avLst/>
+          </a:prstGeom>
+          <a:solidFill>
+            <a:srgbClr val="1E5EF3"/>
+          </a:solidFill>
+          <a:ln>
+            <a:noFill/>
+          </a:ln>
+          <a:effectLst/>
+        </p:spPr>
+        <p:style>
+          <a:lnRef idx="1">
+            <a:schemeClr val="accent1"/>
+          </a:lnRef>
+          <a:fillRef idx="3">
+            <a:schemeClr val="accent1"/>
+          </a:fillRef>
+          <a:effectRef idx="2">
+            <a:schemeClr val="accent1"/>
+          </a:effectRef>
+          <a:fontRef idx="minor">
+            <a:schemeClr val="lt1"/>
+          </a:fontRef>
+        </p:style>
+        <p:txBody>
+          <a:bodyPr rtlCol="0" anchor="ctr"/>
+          <a:lstStyle/>
+          <a:p>
+            <a:pPr algn="ctr"/>
+          </a:p>
+        </p:txBody>
+      </p:sp>
+      <p:sp>
+        <p:nvSpPr>
+          <p:cNvPr id="4" name="TextBox 3"/>
+          <p:cNvSpPr txBox="1"/>
+          <p:nvPr/>
+        </p:nvSpPr>
+        <p:spPr>
+          <a:xfrm>
+            <a:off x="548640" y="603504"/>
+            <a:ext cx="11091672" cy="274320"/>
+          </a:xfrm>
+          <a:prstGeom prst="rect">
+            <a:avLst/>
+          </a:prstGeom>
+          <a:noFill/>
+        </p:spPr>
+        <p:txBody>
+          <a:bodyPr wrap="square">
+            <a:spAutoFit/>
+          </a:bodyPr>
+          <a:lstStyle/>
+          <a:p>
+            <a:pPr algn="l">
+              <a:spcAft>
+                <a:spcPts val="600"/>
+              </a:spcAft>
+              <a:buNone/>
+            </a:pPr>
+            <a:r>
+              <a:rPr sz="1100" b="1">
+                <a:solidFill>
+                  <a:srgbClr val="1E5EF3"/>
+                </a:solidFill>
+                <a:latin typeface="Arial"/>
+              </a:rPr>
+              <a:t>DECISION AND NEXT STEP</a:t>
+            </a:r>
+          </a:p>
+        </p:txBody>
+      </p:sp>
+      <p:sp>
+        <p:nvSpPr>
+          <p:cNvPr id="5" name="TextBox 4"/>
+          <p:cNvSpPr txBox="1"/>
+          <p:nvPr/>
+        </p:nvSpPr>
+        <p:spPr>
+          <a:xfrm>
+            <a:off x="548640" y="868680"/>
+            <a:ext cx="11091672" cy="777240"/>
+          </a:xfrm>
+          <a:prstGeom prst="rect">
+            <a:avLst/>
+          </a:prstGeom>
+          <a:noFill/>
+        </p:spPr>
+        <p:txBody>
+          <a:bodyPr wrap="square">
+            <a:spAutoFit/>
+          </a:bodyPr>
+          <a:lstStyle/>
+          <a:p>
+            <a:pPr algn="l">
+              <a:spcAft>
+                <a:spcPts val="0"/>
+              </a:spcAft>
+              <a:buNone/>
+            </a:pPr>
+            <a:r>
+              <a:rPr sz="2600" b="1">
+                <a:solidFill>
+                  <a:srgbClr val="0A2540"/>
+                </a:solidFill>
+                <a:latin typeface="Arial"/>
+              </a:rPr>
+              <a:t>The verdict: the simplest model that beats the floor on the right metric - the scorecard</a:t>
+            </a:r>
+          </a:p>
+        </p:txBody>
+      </p:sp>
+      <p:sp>
+        <p:nvSpPr>
+          <p:cNvPr id="6" name="Rectangle 5"/>
+          <p:cNvSpPr/>
+          <p:nvPr/>
+        </p:nvSpPr>
+        <p:spPr>
+          <a:xfrm>
+            <a:off x="548640" y="1664208"/>
+            <a:ext cx="11091672" cy="12801"/>
+          </a:xfrm>
+          <a:prstGeom prst="rect">
+            <a:avLst/>
+          </a:prstGeom>
+          <a:solidFill>
+            <a:srgbClr val="B9D0FA"/>
+          </a:solidFill>
+          <a:ln>
+            <a:noFill/>
+          </a:ln>
+          <a:effectLst/>
+        </p:spPr>
+        <p:style>
+          <a:lnRef idx="1">
+            <a:schemeClr val="accent1"/>
+          </a:lnRef>
+          <a:fillRef idx="3">
+            <a:schemeClr val="accent1"/>
+          </a:fillRef>
+          <a:effectRef idx="2">
+            <a:schemeClr val="accent1"/>
+          </a:effectRef>
+          <a:fontRef idx="minor">
+            <a:schemeClr val="lt1"/>
+          </a:fontRef>
+        </p:style>
+        <p:txBody>
+          <a:bodyPr rtlCol="0" anchor="ctr"/>
+          <a:lstStyle/>
+          <a:p>
+            <a:pPr algn="ctr"/>
+          </a:p>
+        </p:txBody>
+      </p:sp>
+      <p:sp>
+        <p:nvSpPr>
+          <p:cNvPr id="7" name="Rectangle 6"/>
+          <p:cNvSpPr/>
+          <p:nvPr/>
+        </p:nvSpPr>
+        <p:spPr>
+          <a:xfrm>
+            <a:off x="548640" y="1874519"/>
+            <a:ext cx="5394960" cy="3977639"/>
+          </a:xfrm>
+          <a:prstGeom prst="rect">
+            <a:avLst/>
+          </a:prstGeom>
+          <a:solidFill>
+            <a:srgbClr val="EEF3FD"/>
+          </a:solidFill>
+          <a:ln>
+            <a:noFill/>
+          </a:ln>
+          <a:effectLst/>
+        </p:spPr>
+        <p:style>
+          <a:lnRef idx="1">
+            <a:schemeClr val="accent1"/>
+          </a:lnRef>
+          <a:fillRef idx="3">
+            <a:schemeClr val="accent1"/>
+          </a:fillRef>
+          <a:effectRef idx="2">
+            <a:schemeClr val="accent1"/>
+          </a:effectRef>
+          <a:fontRef idx="minor">
+            <a:schemeClr val="lt1"/>
+          </a:fontRef>
+        </p:style>
+        <p:txBody>
+          <a:bodyPr rtlCol="0" anchor="ctr"/>
+          <a:lstStyle/>
+          <a:p>
+            <a:pPr algn="ctr"/>
+          </a:p>
+        </p:txBody>
+      </p:sp>
+      <p:sp>
+        <p:nvSpPr>
+          <p:cNvPr id="8" name="TextBox 7"/>
+          <p:cNvSpPr txBox="1"/>
+          <p:nvPr/>
+        </p:nvSpPr>
+        <p:spPr>
+          <a:xfrm>
+            <a:off x="777240" y="2039111"/>
+            <a:ext cx="4937760" cy="365760"/>
+          </a:xfrm>
+          <a:prstGeom prst="rect">
+            <a:avLst/>
+          </a:prstGeom>
+          <a:noFill/>
+        </p:spPr>
+        <p:txBody>
+          <a:bodyPr wrap="square">
+            <a:spAutoFit/>
+          </a:bodyPr>
+          <a:lstStyle/>
+          <a:p>
+            <a:pPr algn="l">
+              <a:spcAft>
+                <a:spcPts val="600"/>
+              </a:spcAft>
+              <a:buNone/>
+            </a:pPr>
+            <a:r>
+              <a:rPr sz="1500" b="1">
+                <a:solidFill>
+                  <a:srgbClr val="0A2540"/>
+                </a:solidFill>
+                <a:latin typeface="Arial"/>
+              </a:rPr>
+              <a:t>The checklist</a:t>
+            </a:r>
+          </a:p>
+        </p:txBody>
+      </p:sp>
+      <p:sp>
+        <p:nvSpPr>
+          <p:cNvPr id="9" name="TextBox 8"/>
+          <p:cNvSpPr txBox="1"/>
+          <p:nvPr/>
+        </p:nvSpPr>
+        <p:spPr>
+          <a:xfrm>
+            <a:off x="777240" y="2441447"/>
+            <a:ext cx="4937760" cy="3246119"/>
+          </a:xfrm>
+          <a:prstGeom prst="rect">
+            <a:avLst/>
+          </a:prstGeom>
+          <a:noFill/>
+        </p:spPr>
+        <p:txBody>
+          <a:bodyPr wrap="square">
+            <a:spAutoFit/>
+          </a:bodyPr>
+          <a:lstStyle/>
+          <a:p>
+            <a:pPr algn="l" indent="-228600" marL="228600">
+              <a:spcAft>
+                <a:spcPts val="600"/>
+              </a:spcAft>
+              <a:buClr>
+                <a:srgbClr val="1E5EF3"/>
+              </a:buClr>
+              <a:buChar char="—"/>
+            </a:pPr>
+            <a:r>
+              <a:rPr sz="1300" b="0">
+                <a:solidFill>
+                  <a:srgbClr val="202B38"/>
+                </a:solidFill>
+                <a:latin typeface="Arial"/>
+              </a:rPr>
+              <a:t>Beats the baseline clearly? The floor is 0.617 - if not, stop.</a:t>
+            </a:r>
+          </a:p>
+          <a:p>
+            <a:pPr algn="l" indent="-228600" marL="228600">
+              <a:spcAft>
+                <a:spcPts val="600"/>
+              </a:spcAft>
+              <a:buClr>
+                <a:srgbClr val="1E5EF3"/>
+              </a:buClr>
+              <a:buChar char="—"/>
+            </a:pPr>
+            <a:r>
+              <a:rPr sz="1300" b="0">
+                <a:solidFill>
+                  <a:srgbClr val="202B38"/>
+                </a:solidFill>
+                <a:latin typeface="Arial"/>
+              </a:rPr>
+              <a:t>Metric matches the problem? Accuracy, precision, recall, or F1 - decide before you rank.</a:t>
+            </a:r>
+          </a:p>
+          <a:p>
+            <a:pPr algn="l" indent="-228600" marL="228600">
+              <a:spcAft>
+                <a:spcPts val="600"/>
+              </a:spcAft>
+              <a:buClr>
+                <a:srgbClr val="1E5EF3"/>
+              </a:buClr>
+              <a:buChar char="—"/>
+            </a:pPr>
+            <a:r>
+              <a:rPr sz="1300" b="0">
+                <a:solidFill>
+                  <a:srgbClr val="202B38"/>
+                </a:solidFill>
+                <a:latin typeface="Arial"/>
+              </a:rPr>
+              <a:t>Simple first: if the scorecard is within a hair of the forest, ship the scorecard.</a:t>
+            </a:r>
+          </a:p>
+          <a:p>
+            <a:pPr algn="l" indent="-228600" marL="228600">
+              <a:spcAft>
+                <a:spcPts val="600"/>
+              </a:spcAft>
+              <a:buClr>
+                <a:srgbClr val="1E5EF3"/>
+              </a:buClr>
+              <a:buChar char="—"/>
+            </a:pPr>
+            <a:r>
+              <a:rPr sz="1300" b="0">
+                <a:solidFill>
+                  <a:srgbClr val="202B38"/>
+                </a:solidFill>
+                <a:latin typeface="Arial"/>
+              </a:rPr>
+              <a:t>Stable across folds? A model that wobbles (Random Forest: +/- 0.054) is harder to trust.</a:t>
+            </a:r>
+          </a:p>
+        </p:txBody>
+      </p:sp>
+      <p:sp>
+        <p:nvSpPr>
+          <p:cNvPr id="10" name="Rectangle 9"/>
+          <p:cNvSpPr/>
+          <p:nvPr/>
+        </p:nvSpPr>
+        <p:spPr>
+          <a:xfrm>
+            <a:off x="6245352" y="1874519"/>
+            <a:ext cx="5394960" cy="3977639"/>
+          </a:xfrm>
+          <a:prstGeom prst="rect">
+            <a:avLst/>
+          </a:prstGeom>
+          <a:solidFill>
+            <a:srgbClr val="EEF3FD"/>
+          </a:solidFill>
+          <a:ln>
+            <a:noFill/>
+          </a:ln>
+          <a:effectLst/>
+        </p:spPr>
+        <p:style>
+          <a:lnRef idx="1">
+            <a:schemeClr val="accent1"/>
+          </a:lnRef>
+          <a:fillRef idx="3">
+            <a:schemeClr val="accent1"/>
+          </a:fillRef>
+          <a:effectRef idx="2">
+            <a:schemeClr val="accent1"/>
+          </a:effectRef>
+          <a:fontRef idx="minor">
+            <a:schemeClr val="lt1"/>
+          </a:fontRef>
+        </p:style>
+        <p:txBody>
+          <a:bodyPr rtlCol="0" anchor="ctr"/>
+          <a:lstStyle/>
+          <a:p>
+            <a:pPr algn="ctr"/>
+          </a:p>
+        </p:txBody>
+      </p:sp>
+      <p:sp>
+        <p:nvSpPr>
+          <p:cNvPr id="11" name="TextBox 10"/>
+          <p:cNvSpPr txBox="1"/>
+          <p:nvPr/>
+        </p:nvSpPr>
+        <p:spPr>
+          <a:xfrm>
+            <a:off x="6473952" y="2039111"/>
+            <a:ext cx="4937760" cy="365760"/>
+          </a:xfrm>
+          <a:prstGeom prst="rect">
+            <a:avLst/>
+          </a:prstGeom>
+          <a:noFill/>
+        </p:spPr>
+        <p:txBody>
+          <a:bodyPr wrap="square">
+            <a:spAutoFit/>
+          </a:bodyPr>
+          <a:lstStyle/>
+          <a:p>
+            <a:pPr algn="l">
+              <a:spcAft>
+                <a:spcPts val="600"/>
+              </a:spcAft>
+              <a:buNone/>
+            </a:pPr>
+            <a:r>
+              <a:rPr sz="1500" b="1">
+                <a:solidFill>
+                  <a:srgbClr val="0A2540"/>
+                </a:solidFill>
+                <a:latin typeface="Arial"/>
+              </a:rPr>
+              <a:t>Verdict &amp; handoff</a:t>
+            </a:r>
+          </a:p>
+        </p:txBody>
+      </p:sp>
+      <p:sp>
+        <p:nvSpPr>
+          <p:cNvPr id="12" name="TextBox 11"/>
+          <p:cNvSpPr txBox="1"/>
+          <p:nvPr/>
+        </p:nvSpPr>
+        <p:spPr>
+          <a:xfrm>
+            <a:off x="6473952" y="2441447"/>
+            <a:ext cx="4937760" cy="3246119"/>
+          </a:xfrm>
+          <a:prstGeom prst="rect">
+            <a:avLst/>
+          </a:prstGeom>
+          <a:noFill/>
+        </p:spPr>
+        <p:txBody>
+          <a:bodyPr wrap="square">
+            <a:spAutoFit/>
+          </a:bodyPr>
+          <a:lstStyle/>
+          <a:p>
+            <a:pPr algn="l" indent="-228600" marL="228600">
+              <a:spcAft>
+                <a:spcPts val="600"/>
+              </a:spcAft>
+              <a:buClr>
+                <a:srgbClr val="1E5EF3"/>
+              </a:buClr>
+              <a:buChar char="—"/>
+            </a:pPr>
+            <a:r>
+              <a:rPr sz="1300" b="0">
+                <a:solidFill>
+                  <a:srgbClr val="202B38"/>
+                </a:solidFill>
+                <a:latin typeface="Arial"/>
+              </a:rPr>
+              <a:t>Champion by CV: Logistic Regression, 0.819 (+/- 0.020).</a:t>
+            </a:r>
+          </a:p>
+          <a:p>
+            <a:pPr algn="l" indent="-228600" marL="228600">
+              <a:spcAft>
+                <a:spcPts val="600"/>
+              </a:spcAft>
+              <a:buClr>
+                <a:srgbClr val="1E5EF3"/>
+              </a:buClr>
+              <a:buChar char="—"/>
+            </a:pPr>
+            <a:r>
+              <a:rPr sz="1300" b="0">
+                <a:solidFill>
+                  <a:srgbClr val="202B38"/>
+                </a:solidFill>
+                <a:latin typeface="Arial"/>
+              </a:rPr>
+              <a:t>One look at the locked test set: accuracy 0.838.</a:t>
+            </a:r>
+          </a:p>
+          <a:p>
+            <a:pPr algn="l" indent="-228600" marL="228600">
+              <a:spcAft>
+                <a:spcPts val="600"/>
+              </a:spcAft>
+              <a:buClr>
+                <a:srgbClr val="1E5EF3"/>
+              </a:buClr>
+              <a:buChar char="—"/>
+            </a:pPr>
+            <a:r>
+              <a:rPr sz="1300" b="0">
+                <a:solidFill>
+                  <a:srgbClr val="202B38"/>
+                </a:solidFill>
+                <a:latin typeface="Arial"/>
+              </a:rPr>
+              <a:t>Precision 0.823, recall 0.739, F1 0.779 on "survived".</a:t>
+            </a:r>
+          </a:p>
+          <a:p>
+            <a:pPr algn="l" indent="-228600" marL="228600">
+              <a:spcAft>
+                <a:spcPts val="600"/>
+              </a:spcAft>
+              <a:buClr>
+                <a:srgbClr val="1E5EF3"/>
+              </a:buClr>
+              <a:buChar char="—"/>
+            </a:pPr>
+            <a:r>
+              <a:rPr sz="1300" b="0">
+                <a:solidFill>
+                  <a:srgbClr val="202B38"/>
+                </a:solidFill>
+                <a:latin typeface="Arial"/>
+              </a:rPr>
+              <a:t>AUC 0.878 = chance a random survivor ranks above a random non-survivor.</a:t>
+            </a:r>
+          </a:p>
+          <a:p>
+            <a:pPr algn="l" indent="-228600" marL="228600">
+              <a:spcAft>
+                <a:spcPts val="600"/>
+              </a:spcAft>
+              <a:buClr>
+                <a:srgbClr val="1E5EF3"/>
+              </a:buClr>
+              <a:buChar char="—"/>
+            </a:pPr>
+            <a:r>
+              <a:rPr sz="1300" b="0">
+                <a:solidFill>
+                  <a:srgbClr val="202B38"/>
+                </a:solidFill>
+                <a:latin typeface="Arial"/>
+              </a:rPr>
+              <a:t>Random Forest finished 0.797 but has the most knobs - Session 4 tunes it, then ships it.</a:t>
+            </a:r>
+          </a:p>
+        </p:txBody>
+      </p:sp>
+      <p:sp>
+        <p:nvSpPr>
+          <p:cNvPr id="13" name="TextBox 12"/>
+          <p:cNvSpPr txBox="1"/>
+          <p:nvPr/>
+        </p:nvSpPr>
+        <p:spPr>
+          <a:xfrm>
+            <a:off x="548640" y="6053328"/>
+            <a:ext cx="11091672" cy="502920"/>
+          </a:xfrm>
+          <a:prstGeom prst="rect">
+            <a:avLst/>
+          </a:prstGeom>
+          <a:noFill/>
+        </p:spPr>
+        <p:txBody>
+          <a:bodyPr wrap="square">
+            <a:spAutoFit/>
+          </a:bodyPr>
+          <a:lstStyle/>
+          <a:p>
+            <a:pPr algn="l">
+              <a:spcAft>
+                <a:spcPts val="600"/>
+              </a:spcAft>
+              <a:buNone/>
+            </a:pPr>
+            <a:r>
+              <a:rPr sz="1200" b="0">
+                <a:solidFill>
+                  <a:srgbClr val="1E5EF3"/>
+                </a:solidFill>
+                <a:latin typeface="Arial"/>
+              </a:rPr>
+              <a:t>Why interpretability is on the checklist: a real pneumonia model learned "asthma lowers risk" - true in the data (asthmatics were rushed to intensive care), fatal if acted on; caught only because the model was readable. Source: Caruana et al., KDD 2015.</a:t>
+            </a:r>
+          </a:p>
+        </p:txBody>
+      </p:sp>
+      <p:sp>
+        <p:nvSpPr>
+          <p:cNvPr id="14" name="TextBox 13"/>
+          <p:cNvSpPr txBox="1"/>
+          <p:nvPr/>
+        </p:nvSpPr>
+        <p:spPr>
+          <a:xfrm>
+            <a:off x="548640" y="6473952"/>
+            <a:ext cx="7315200" cy="292608"/>
+          </a:xfrm>
+          <a:prstGeom prst="rect">
+            <a:avLst/>
+          </a:prstGeom>
+          <a:noFill/>
+        </p:spPr>
+        <p:txBody>
+          <a:bodyPr wrap="square">
+            <a:spAutoFit/>
+          </a:bodyPr>
+          <a:lstStyle/>
+          <a:p>
+            <a:pPr algn="l">
+              <a:spcAft>
+                <a:spcPts val="600"/>
+              </a:spcAft>
+              <a:buNone/>
+            </a:pPr>
+            <a:r>
+              <a:rPr sz="900" b="0">
+                <a:solidFill>
+                  <a:srgbClr val="5B6774"/>
+                </a:solidFill>
+                <a:latin typeface="Arial"/>
+              </a:rPr>
+              <a:t>M2 Session 3 - Model Selection and Evaluation</a:t>
+            </a:r>
+          </a:p>
+        </p:txBody>
+      </p:sp>
+      <p:sp>
+        <p:nvSpPr>
+          <p:cNvPr id="15" name="TextBox 14"/>
+          <p:cNvSpPr txBox="1"/>
+          <p:nvPr/>
+        </p:nvSpPr>
+        <p:spPr>
+          <a:xfrm>
+            <a:off x="11292840" y="6473952"/>
+            <a:ext cx="548640" cy="292608"/>
+          </a:xfrm>
+          <a:prstGeom prst="rect">
+            <a:avLst/>
+          </a:prstGeom>
+          <a:noFill/>
+        </p:spPr>
+        <p:txBody>
+          <a:bodyPr wrap="square">
+            <a:spAutoFit/>
+          </a:bodyPr>
+          <a:lstStyle/>
+          <a:p>
+            <a:pPr algn="r">
+              <a:spcAft>
+                <a:spcPts val="600"/>
+              </a:spcAft>
+              <a:buNone/>
+            </a:pPr>
+            <a:r>
+              <a:rPr sz="900" b="0">
+                <a:solidFill>
+                  <a:srgbClr val="5B6774"/>
+                </a:solidFill>
+                <a:latin typeface="Arial"/>
+              </a:rPr>
+              <a:t>20</a:t>
+            </a:r>
+          </a:p>
+        </p:txBody>
+      </p:sp>
+    </p:spTree>
+  </p:cSld>
+  <p:clrMapOvr>
+    <a:masterClrMapping/>
+  </p:clrMapOvr>
+</p:sld>
+</file>
+
+<file path=ppt/slides/slide21.xml><?xml version="1.0" encoding="utf-8"?>
+<p:sld xmlns:a="http://schemas.openxmlformats.org/drawingml/2006/main" xmlns:p="http://schemas.openxmlformats.org/presentationml/2006/main" xmlns:r="http://schemas.openxmlformats.org/officeDocument/2006/relationships">
+  <p:cSld>
+    <p:spTree>
+      <p:nvGrpSpPr>
+        <p:cNvPr id="1" name=""/>
+        <p:cNvGrpSpPr/>
+        <p:nvPr/>
+      </p:nvGrpSpPr>
+      <p:grpSpPr/>
+      <p:sp>
+        <p:nvSpPr>
+          <p:cNvPr id="2" name="Rectangle 1"/>
+          <p:cNvSpPr/>
+          <p:nvPr/>
+        </p:nvSpPr>
+        <p:spPr>
+          <a:xfrm>
+            <a:off x="0" y="0"/>
+            <a:ext cx="12191695" cy="6858000"/>
+          </a:xfrm>
+          <a:prstGeom prst="rect">
+            <a:avLst/>
+          </a:prstGeom>
+          <a:solidFill>
+            <a:srgbClr val="0A2540"/>
+          </a:solidFill>
+          <a:ln>
+            <a:noFill/>
+          </a:ln>
+          <a:effectLst/>
+        </p:spPr>
+        <p:style>
+          <a:lnRef idx="1">
+            <a:schemeClr val="accent1"/>
+          </a:lnRef>
+          <a:fillRef idx="3">
+            <a:schemeClr val="accent1"/>
+          </a:fillRef>
+          <a:effectRef idx="2">
+            <a:schemeClr val="accent1"/>
+          </a:effectRef>
+          <a:fontRef idx="minor">
+            <a:schemeClr val="lt1"/>
+          </a:fontRef>
+        </p:style>
+        <p:txBody>
+          <a:bodyPr rtlCol="0" anchor="ctr"/>
+          <a:lstStyle/>
+          <a:p>
+            <a:pPr algn="ctr"/>
+          </a:p>
+        </p:txBody>
+      </p:sp>
+      <p:sp>
+        <p:nvSpPr>
+          <p:cNvPr id="3" name="TextBox 2"/>
+          <p:cNvSpPr txBox="1"/>
+          <p:nvPr/>
+        </p:nvSpPr>
+        <p:spPr>
+          <a:xfrm>
+            <a:off x="914400" y="1280160"/>
+            <a:ext cx="10332720" cy="1097280"/>
+          </a:xfrm>
+          <a:prstGeom prst="rect">
+            <a:avLst/>
+          </a:prstGeom>
+          <a:noFill/>
+        </p:spPr>
+        <p:txBody>
+          <a:bodyPr wrap="square">
+            <a:spAutoFit/>
+          </a:bodyPr>
+          <a:lstStyle/>
+          <a:p>
+            <a:pPr algn="l">
+              <a:spcAft>
+                <a:spcPts val="600"/>
+              </a:spcAft>
+              <a:buNone/>
+            </a:pPr>
+            <a:r>
+              <a:rPr sz="3400" b="1">
+                <a:solidFill>
+                  <a:srgbClr val="FFFFFF"/>
+                </a:solidFill>
+                <a:latin typeface="Arial"/>
+              </a:rPr>
+              <a:t>The referee, the floor, and the right question</a:t>
+            </a:r>
+          </a:p>
+        </p:txBody>
+      </p:sp>
+      <p:sp>
+        <p:nvSpPr>
+          <p:cNvPr id="4" name="TextBox 3"/>
+          <p:cNvSpPr txBox="1"/>
+          <p:nvPr/>
+        </p:nvSpPr>
+        <p:spPr>
+          <a:xfrm>
+            <a:off x="914400" y="2651760"/>
+            <a:ext cx="10058400" cy="2926080"/>
+          </a:xfrm>
+          <a:prstGeom prst="rect">
+            <a:avLst/>
+          </a:prstGeom>
+          <a:noFill/>
+        </p:spPr>
+        <p:txBody>
+          <a:bodyPr wrap="square">
+            <a:spAutoFit/>
+          </a:bodyPr>
+          <a:lstStyle/>
+          <a:p>
+            <a:pPr algn="l" indent="-228600" marL="228600">
+              <a:spcAft>
+                <a:spcPts val="1000"/>
+              </a:spcAft>
+              <a:buClr>
+                <a:srgbClr val="1E5EF3"/>
+              </a:buClr>
+              <a:buChar char="—"/>
+            </a:pPr>
+            <a:r>
+              <a:rPr sz="1600" b="0">
+                <a:solidFill>
+                  <a:srgbClr val="B9D0FA"/>
+                </a:solidFill>
+                <a:latin typeface="Arial"/>
+              </a:rPr>
+              <a:t>Part 1, the theory: training only minimizes loss on the past (ERM) - so read two numbers, and let the gap name your problem: bias or variance.</a:t>
+            </a:r>
+          </a:p>
+          <a:p>
+            <a:pPr algn="l" indent="-228600" marL="228600">
+              <a:spcAft>
+                <a:spcPts val="1000"/>
+              </a:spcAft>
+              <a:buClr>
+                <a:srgbClr val="1E5EF3"/>
+              </a:buClr>
+              <a:buChar char="—"/>
+            </a:pPr>
+            <a:r>
+              <a:rPr sz="1600" b="0">
+                <a:solidFill>
+                  <a:srgbClr val="B9D0FA"/>
+                </a:solidFill>
+                <a:latin typeface="Arial"/>
+              </a:rPr>
+              <a:t>Structural vs estimation error is the U-curve's grammar; regularization is the leash, cross-validation the honest referee - and readability is a feature, not a bonus.</a:t>
+            </a:r>
+          </a:p>
+          <a:p>
+            <a:pPr algn="l" indent="-228600" marL="228600">
+              <a:spcAft>
+                <a:spcPts val="1000"/>
+              </a:spcAft>
+              <a:buClr>
+                <a:srgbClr val="1E5EF3"/>
+              </a:buClr>
+              <a:buChar char="—"/>
+            </a:pPr>
+            <a:r>
+              <a:rPr sz="1600" b="0">
+                <a:solidFill>
+                  <a:srgbClr val="B9D0FA"/>
+                </a:solidFill>
+                <a:latin typeface="Arial"/>
+              </a:rPr>
+              <a:t>Part 2, the practice: the floor was 0.617, the humble scorecard won at 0.819, and the locked test set was opened once: 0.838.</a:t>
+            </a:r>
+          </a:p>
+          <a:p>
+            <a:pPr algn="l" indent="-228600" marL="228600">
+              <a:spcAft>
+                <a:spcPts val="1000"/>
+              </a:spcAft>
+              <a:buClr>
+                <a:srgbClr val="1E5EF3"/>
+              </a:buClr>
+              <a:buChar char="—"/>
+            </a:pPr>
+            <a:r>
+              <a:rPr sz="1600" b="0">
+                <a:solidFill>
+                  <a:srgbClr val="B9D0FA"/>
+                </a:solidFill>
+                <a:latin typeface="Arial"/>
+              </a:rPr>
+              <a:t>The real U-curve peaked at depth 3; the learning curve said more rows won't save us - better settings might (Session 4).</a:t>
+            </a:r>
+          </a:p>
+          <a:p>
+            <a:pPr algn="l" indent="-228600" marL="228600">
+              <a:spcAft>
+                <a:spcPts val="1000"/>
+              </a:spcAft>
+              <a:buClr>
+                <a:srgbClr val="1E5EF3"/>
+              </a:buClr>
+              <a:buChar char="—"/>
+            </a:pPr>
+            <a:r>
+              <a:rPr sz="1600" b="0">
+                <a:solidFill>
+                  <a:srgbClr val="B9D0FA"/>
+                </a:solidFill>
+                <a:latin typeface="Arial"/>
+              </a:rPr>
+              <a:t>Accuracy is one question of many. Precision, recall, and F1 ask sharper ones.</a:t>
+            </a:r>
+          </a:p>
+          <a:p>
+            <a:pPr algn="l" indent="-228600" marL="228600">
+              <a:spcAft>
+                <a:spcPts val="1000"/>
+              </a:spcAft>
+              <a:buClr>
+                <a:srgbClr val="1E5EF3"/>
+              </a:buClr>
+              <a:buChar char="—"/>
+            </a:pPr>
+            <a:r>
+              <a:rPr sz="1600" b="0">
+                <a:solidFill>
+                  <a:srgbClr val="B9D0FA"/>
+                </a:solidFill>
+                <a:latin typeface="Arial"/>
+              </a:rPr>
+              <a:t>Practice now: notebook 02-model-selection in Colab.</a:t>
+            </a:r>
+          </a:p>
+        </p:txBody>
+      </p:sp>
+      <p:sp>
+        <p:nvSpPr>
+          <p:cNvPr id="5" name="TextBox 4"/>
+          <p:cNvSpPr txBox="1"/>
+          <p:nvPr/>
+        </p:nvSpPr>
+        <p:spPr>
+          <a:xfrm>
+            <a:off x="914400" y="6035040"/>
+            <a:ext cx="9144000" cy="365760"/>
+          </a:xfrm>
+          <a:prstGeom prst="rect">
+            <a:avLst/>
+          </a:prstGeom>
+          <a:noFill/>
+        </p:spPr>
+        <p:txBody>
+          <a:bodyPr wrap="square">
+            <a:spAutoFit/>
+          </a:bodyPr>
+          <a:lstStyle/>
+          <a:p>
+            <a:pPr algn="l">
+              <a:spcAft>
+                <a:spcPts val="600"/>
+              </a:spcAft>
+              <a:buNone/>
+            </a:pPr>
+            <a:r>
+              <a:rPr sz="1200" b="0">
+                <a:solidFill>
+                  <a:srgbClr val="B9D0FA"/>
+                </a:solidFill>
+                <a:latin typeface="Arial"/>
+              </a:rPr>
+              <a:t>Machine Learning - Module 2</a:t>
+            </a:r>
+          </a:p>
+        </p:txBody>
+      </p:sp>
+      <p:sp>
+        <p:nvSpPr>
+          <p:cNvPr id="6" name="TextBox 5"/>
+          <p:cNvSpPr txBox="1"/>
+          <p:nvPr/>
+        </p:nvSpPr>
+        <p:spPr>
+          <a:xfrm>
+            <a:off x="548640" y="6473952"/>
+            <a:ext cx="7315200" cy="292608"/>
+          </a:xfrm>
+          <a:prstGeom prst="rect">
+            <a:avLst/>
+          </a:prstGeom>
+          <a:noFill/>
+        </p:spPr>
+        <p:txBody>
+          <a:bodyPr wrap="square">
+            <a:spAutoFit/>
+          </a:bodyPr>
+          <a:lstStyle/>
+          <a:p>
+            <a:pPr algn="l">
+              <a:spcAft>
+                <a:spcPts val="600"/>
+              </a:spcAft>
+              <a:buNone/>
+            </a:pPr>
+            <a:r>
+              <a:rPr sz="900" b="0">
+                <a:solidFill>
+                  <a:srgbClr val="B9D0FA"/>
+                </a:solidFill>
+                <a:latin typeface="Arial"/>
+              </a:rPr>
+              <a:t>M2 Session 3 - Model Selection and Evaluation</a:t>
+            </a:r>
+          </a:p>
+        </p:txBody>
+      </p:sp>
+      <p:sp>
+        <p:nvSpPr>
+          <p:cNvPr id="7" name="TextBox 6"/>
+          <p:cNvSpPr txBox="1"/>
+          <p:nvPr/>
+        </p:nvSpPr>
+        <p:spPr>
+          <a:xfrm>
+            <a:off x="11292840" y="6473952"/>
+            <a:ext cx="548640" cy="292608"/>
+          </a:xfrm>
+          <a:prstGeom prst="rect">
+            <a:avLst/>
+          </a:prstGeom>
+          <a:noFill/>
+        </p:spPr>
+        <p:txBody>
+          <a:bodyPr wrap="square">
+            <a:spAutoFit/>
+          </a:bodyPr>
+          <a:lstStyle/>
+          <a:p>
+            <a:pPr algn="r">
+              <a:spcAft>
+                <a:spcPts val="600"/>
+              </a:spcAft>
+              <a:buNone/>
+            </a:pPr>
+            <a:r>
+              <a:rPr sz="900" b="0">
+                <a:solidFill>
+                  <a:srgbClr val="B9D0FA"/>
+                </a:solidFill>
+                <a:latin typeface="Arial"/>
+              </a:rPr>
+              <a:t>21</a:t>
+            </a:r>
+          </a:p>
+        </p:txBody>
+      </p:sp>
+    </p:spTree>
+  </p:cSld>
+  <p:clrMapOvr>
+    <a:masterClrMapping/>
+  </p:clrMapOvr>
+</p:sld>
+</file>
+
+<file path=ppt/slides/slide3.xml><?xml version="1.0" encoding="utf-8"?>
+<p:sld xmlns:a="http://schemas.openxmlformats.org/drawingml/2006/main" xmlns:p="http://schemas.openxmlformats.org/presentationml/2006/main" xmlns:r="http://schemas.openxmlformats.org/officeDocument/2006/relationships">
+  <p:cSld>
+    <p:spTree>
+      <p:nvGrpSpPr>
+        <p:cNvPr id="1" name=""/>
+        <p:cNvGrpSpPr/>
+        <p:nvPr/>
+      </p:nvGrpSpPr>
+      <p:grpSpPr/>
+      <p:sp>
+        <p:nvSpPr>
+          <p:cNvPr id="2" name="Rectangle 1"/>
+          <p:cNvSpPr/>
+          <p:nvPr/>
+        </p:nvSpPr>
+        <p:spPr>
+          <a:xfrm>
+            <a:off x="0" y="0"/>
+            <a:ext cx="12191695" cy="6858000"/>
+          </a:xfrm>
+          <a:prstGeom prst="rect">
+            <a:avLst/>
+          </a:prstGeom>
+          <a:solidFill>
+            <a:srgbClr val="0A2540"/>
+          </a:solidFill>
+          <a:ln>
+            <a:noFill/>
+          </a:ln>
+          <a:effectLst/>
+        </p:spPr>
+        <p:style>
+          <a:lnRef idx="1">
+            <a:schemeClr val="accent1"/>
+          </a:lnRef>
+          <a:fillRef idx="3">
+            <a:schemeClr val="accent1"/>
+          </a:fillRef>
+          <a:effectRef idx="2">
+            <a:schemeClr val="accent1"/>
+          </a:effectRef>
+          <a:fontRef idx="minor">
+            <a:schemeClr val="lt1"/>
+          </a:fontRef>
+        </p:style>
+        <p:txBody>
+          <a:bodyPr rtlCol="0" anchor="ctr"/>
+          <a:lstStyle/>
+          <a:p>
+            <a:pPr algn="ctr"/>
+          </a:p>
+        </p:txBody>
+      </p:sp>
+      <p:sp>
+        <p:nvSpPr>
+          <p:cNvPr id="3" name="TextBox 2"/>
+          <p:cNvSpPr txBox="1"/>
+          <p:nvPr/>
+        </p:nvSpPr>
+        <p:spPr>
+          <a:xfrm>
+            <a:off x="822960" y="1463040"/>
+            <a:ext cx="3657600" cy="2011680"/>
+          </a:xfrm>
+          <a:prstGeom prst="rect">
+            <a:avLst/>
+          </a:prstGeom>
+          <a:noFill/>
+        </p:spPr>
+        <p:txBody>
+          <a:bodyPr wrap="square">
+            <a:spAutoFit/>
+          </a:bodyPr>
+          <a:lstStyle/>
+          <a:p>
+            <a:pPr algn="l">
+              <a:spcAft>
+                <a:spcPts val="600"/>
+              </a:spcAft>
+              <a:buNone/>
+            </a:pPr>
+            <a:r>
+              <a:rPr sz="11000" b="1">
+                <a:solidFill>
+                  <a:srgbClr val="1E5EF3"/>
+                </a:solidFill>
+                <a:latin typeface="Arial"/>
+              </a:rPr>
+              <a:t>01</a:t>
+            </a:r>
+          </a:p>
+        </p:txBody>
+      </p:sp>
+      <p:sp>
+        <p:nvSpPr>
+          <p:cNvPr id="4" name="TextBox 3"/>
+          <p:cNvSpPr txBox="1"/>
+          <p:nvPr/>
+        </p:nvSpPr>
+        <p:spPr>
+          <a:xfrm>
+            <a:off x="868680" y="3566160"/>
+            <a:ext cx="10424160" cy="1280160"/>
+          </a:xfrm>
+          <a:prstGeom prst="rect">
+            <a:avLst/>
+          </a:prstGeom>
+          <a:noFill/>
+        </p:spPr>
+        <p:txBody>
+          <a:bodyPr wrap="square">
+            <a:spAutoFit/>
+          </a:bodyPr>
+          <a:lstStyle/>
+          <a:p>
+            <a:pPr algn="l">
+              <a:spcAft>
+                <a:spcPts val="600"/>
+              </a:spcAft>
+              <a:buNone/>
+            </a:pPr>
+            <a:r>
+              <a:rPr sz="3400" b="1">
+                <a:solidFill>
+                  <a:srgbClr val="FFFFFF"/>
+                </a:solidFill>
+                <a:latin typeface="Arial"/>
+              </a:rPr>
+              <a:t>Part 1 - The theory: how to judge a learner honestly</a:t>
+            </a:r>
+          </a:p>
+        </p:txBody>
+      </p:sp>
+      <p:sp>
+        <p:nvSpPr>
+          <p:cNvPr id="5" name="TextBox 4"/>
+          <p:cNvSpPr txBox="1"/>
+          <p:nvPr/>
+        </p:nvSpPr>
+        <p:spPr>
+          <a:xfrm>
+            <a:off x="868680" y="4709160"/>
+            <a:ext cx="10058400" cy="914400"/>
+          </a:xfrm>
+          <a:prstGeom prst="rect">
+            <a:avLst/>
+          </a:prstGeom>
+          <a:noFill/>
+        </p:spPr>
+        <p:txBody>
+          <a:bodyPr wrap="square">
+            <a:spAutoFit/>
+          </a:bodyPr>
+          <a:lstStyle/>
+          <a:p>
+            <a:pPr algn="l">
+              <a:spcAft>
+                <a:spcPts val="600"/>
+              </a:spcAft>
+              <a:buNone/>
+            </a:pPr>
+            <a:r>
+              <a:rPr sz="1600" b="0">
+                <a:solidFill>
+                  <a:srgbClr val="B9D0FA"/>
+                </a:solidFill>
+                <a:latin typeface="Arial"/>
+              </a:rPr>
+              <a:t>Seven ideas that explain every chart you will see in Part 2: what training really does, why it flatters itself, and how to measure without fooling yourself.</a:t>
+            </a:r>
+          </a:p>
+        </p:txBody>
+      </p:sp>
+      <p:sp>
+        <p:nvSpPr>
+          <p:cNvPr id="6" name="TextBox 5"/>
+          <p:cNvSpPr txBox="1"/>
+          <p:nvPr/>
+        </p:nvSpPr>
+        <p:spPr>
+          <a:xfrm>
+            <a:off x="548640" y="6473952"/>
+            <a:ext cx="7315200" cy="292608"/>
+          </a:xfrm>
+          <a:prstGeom prst="rect">
+            <a:avLst/>
+          </a:prstGeom>
+          <a:noFill/>
+        </p:spPr>
+        <p:txBody>
+          <a:bodyPr wrap="square">
+            <a:spAutoFit/>
+          </a:bodyPr>
+          <a:lstStyle/>
+          <a:p>
+            <a:pPr algn="l">
+              <a:spcAft>
+                <a:spcPts val="600"/>
+              </a:spcAft>
+              <a:buNone/>
+            </a:pPr>
+            <a:r>
+              <a:rPr sz="900" b="0">
+                <a:solidFill>
+                  <a:srgbClr val="B9D0FA"/>
+                </a:solidFill>
+                <a:latin typeface="Arial"/>
+              </a:rPr>
+              <a:t>M2 Session 3 - Model Selection and Evaluation</a:t>
+            </a:r>
+          </a:p>
+        </p:txBody>
+      </p:sp>
+      <p:sp>
+        <p:nvSpPr>
+          <p:cNvPr id="7" name="TextBox 6"/>
+          <p:cNvSpPr txBox="1"/>
+          <p:nvPr/>
+        </p:nvSpPr>
+        <p:spPr>
+          <a:xfrm>
+            <a:off x="11292840" y="6473952"/>
+            <a:ext cx="548640" cy="292608"/>
+          </a:xfrm>
+          <a:prstGeom prst="rect">
+            <a:avLst/>
+          </a:prstGeom>
+          <a:noFill/>
+        </p:spPr>
+        <p:txBody>
+          <a:bodyPr wrap="square">
+            <a:spAutoFit/>
+          </a:bodyPr>
+          <a:lstStyle/>
+          <a:p>
+            <a:pPr algn="r">
+              <a:spcAft>
+                <a:spcPts val="600"/>
+              </a:spcAft>
+              <a:buNone/>
+            </a:pPr>
+            <a:r>
+              <a:rPr sz="900" b="0">
+                <a:solidFill>
+                  <a:srgbClr val="B9D0FA"/>
                 </a:solidFill>
                 <a:latin typeface="Arial"/>
               </a:rPr>
@@ -8508,7 +10939,7 @@
                 </a:solidFill>
                 <a:latin typeface="Arial"/>
               </a:rPr>
-              <a:t>WHY WE NEED A REFEREE</a:t>
+              <a:t>EMPIRICAL RISK MINIMIZATION</a:t>
             </a:r>
           </a:p>
         </p:txBody>
@@ -8548,7 +10979,7 @@
                 </a:solidFill>
                 <a:latin typeface="Arial"/>
               </a:rPr>
-              <a:t>Training accuracy lies: an unlimited tree scores 0.985 on itself, 0.751 honestly</a:t>
+              <a:t>Training just minimizes average loss on the past - and a flexible rule can always ace the past</a:t>
             </a:r>
           </a:p>
         </p:txBody>
@@ -8635,7 +11066,7 @@
                 </a:solidFill>
                 <a:latin typeface="Arial"/>
               </a:rPr>
-              <a:t>Let a decision tree grow without limits, then grade it on its own training data: 0.985. Grade it honestly with cross-validation: 0.751.</a:t>
+              <a:t>Almost every learning algorithm does the same thing: among all candidate rules in its family, return the one with the lowest average loss on the training rows.</a:t>
             </a:r>
           </a:p>
           <a:p>
@@ -8655,7 +11086,7 @@
                 </a:solidFill>
                 <a:latin typeface="Arial"/>
               </a:rPr>
-              <a:t>It memorized the answers instead of learning the subject - like grading students on the exact questions they practiced at home.</a:t>
+              <a:t>That average is the empirical risk - measured on the sample you have, not on the future you care about. Training loss is only a stand-in for real-world error.</a:t>
             </a:r>
           </a:p>
           <a:p>
@@ -8675,7 +11106,7 @@
                 </a:solidFill>
                 <a:latin typeface="Arial"/>
               </a:rPr>
-              <a:t>Ng's diagnostic: always read TWO numbers - training score and honest score. Poor training score = bias (too simple). Big gap = variance (memorizing). Our tree: gap 0.233 = variance.</a:t>
+              <a:t>The catch: make the family flexible enough and some rule always scores perfectly on the past - it simply memorizes every row.</a:t>
             </a:r>
           </a:p>
           <a:p>
@@ -8695,34 +11126,14 @@
                 </a:solidFill>
                 <a:latin typeface="Arial"/>
               </a:rPr>
-              <a:t>Ng's drill: train error 1% / dev error 11% = variance problem; train 15% / dev 16% = bias problem. (Ng's teaching examples, not course numbers.)</a:t>
-            </a:r>
-          </a:p>
-          <a:p>
-            <a:pPr algn="l" indent="-228600" marL="228600">
-              <a:spcAft>
-                <a:spcPts val="800"/>
-              </a:spcAft>
-              <a:buClr>
-                <a:srgbClr val="1E5EF3"/>
-              </a:buClr>
-              <a:buChar char="—"/>
-            </a:pPr>
-            <a:r>
-              <a:rPr sz="1450" b="0">
-                <a:solidFill>
-                  <a:srgbClr val="202B38"/>
-                </a:solidFill>
-                <a:latin typeface="Arial"/>
-              </a:rPr>
-              <a:t>Diagnose first - the cures are different and often opposite.</a:t>
+              <a:t>So a perfect training score proves nothing about tomorrow. The rest of Part 1 is about closing that gap honestly.</a:t>
             </a:r>
           </a:p>
         </p:txBody>
       </p:sp>
       <p:pic>
         <p:nvPicPr>
-          <p:cNvPr id="8" name="Picture 7" descr="train_vs_cv.png"/>
+          <p:cNvPr id="8" name="Picture 7" descr="erm_rules.png"/>
           <p:cNvPicPr>
             <a:picLocks noChangeAspect="1"/>
           </p:cNvPicPr>
@@ -8737,7 +11148,7 @@
         <p:spPr>
           <a:xfrm>
             <a:off x="5120640" y="1874519"/>
-            <a:ext cx="6492240" cy="3951584"/>
+            <a:ext cx="6492240" cy="3437936"/>
           </a:xfrm>
           <a:prstGeom prst="rect">
             <a:avLst/>
@@ -8779,7 +11190,7 @@
                 </a:solidFill>
                 <a:latin typeface="Arial"/>
               </a:rPr>
-              <a:t>Unlimited decision tree, training vs 5-fold CV accuracy. Module 2, notebook 2. Diagnostic: Ng, Machine Learning Yearning chs. 20-21.</a:t>
+              <a:t>Illustration - invented rules and loss values. MIT 6.390, ch. 1 and appendix C (empirical risk minimization).</a:t>
             </a:r>
           </a:p>
         </p:txBody>
@@ -9005,7 +11416,7 @@
                 </a:solidFill>
                 <a:latin typeface="Arial"/>
               </a:rPr>
-              <a:t>THE FAIR REFEREE</a:t>
+              <a:t>GENERALIZATION</a:t>
             </a:r>
           </a:p>
         </p:txBody>
@@ -9045,7 +11456,7 @@
                 </a:solidFill>
                 <a:latin typeface="Arial"/>
               </a:rPr>
-              <a:t>Cross-validation gives every row a turn at being the test</a:t>
+              <a:t>Two numbers diagnose any model: the training error and the gap to the honest score</a:t>
             </a:r>
           </a:p>
         </p:txBody>
@@ -9132,7 +11543,7 @@
                 </a:solidFill>
                 <a:latin typeface="Arial"/>
               </a:rPr>
-              <a:t>Split the 712 training rows into 5 equal folds; run 5 rounds - each fold sits out once as the judge.</a:t>
+              <a:t>Generalization = doing well on rows the model has never seen. Only that is the report card: training error can always be driven down by memorizing.</a:t>
             </a:r>
           </a:p>
           <a:p>
@@ -9152,7 +11563,7 @@
                 </a:solidFill>
                 <a:latin typeface="Arial"/>
               </a:rPr>
-              <a:t>Five honest scores instead of one: we see the mean AND the wobble (std). One lucky split can flatter a model; five cannot.</a:t>
+              <a:t>Ng's diagnostic: read TWO numbers. The training error itself is the bias signal - too high means the model is too simple even for the past.</a:t>
             </a:r>
           </a:p>
           <a:p>
@@ -9172,7 +11583,7 @@
                 </a:solidFill>
                 <a:latin typeface="Arial"/>
               </a:rPr>
-              <a:t>Subtle but crucial: CV evaluates the recipe (algorithm + settings), not one fitted model - CV scores the recipe, not the cake.</a:t>
+              <a:t>The gap between training and validation error is the variance signal - too wide means it memorized quirks that do not travel.</a:t>
             </a:r>
           </a:p>
           <a:p>
@@ -9192,7 +11603,7 @@
                 </a:solidFill>
                 <a:latin typeface="Arial"/>
               </a:rPr>
-              <a:t>Why 5 folds? Fewer folds starve training; leave-one-out folds are nearly identical and their average gets noisy - 5 or 10 is the empirical sweet spot.</a:t>
+              <a:t>Ng's labeled teaching examples: train 1% / dev 11% = variance problem; train 15% / dev 16% = bias problem.</a:t>
             </a:r>
           </a:p>
           <a:p>
@@ -9212,14 +11623,14 @@
                 </a:solidFill>
                 <a:latin typeface="Arial"/>
               </a:rPr>
-              <a:t>The real test set is never touched - CV lives entirely inside the CHOOSE band.</a:t>
+              <a:t>Diagnose first - the cures are different and often opposite.</a:t>
             </a:r>
           </a:p>
         </p:txBody>
       </p:sp>
       <p:pic>
         <p:nvPicPr>
-          <p:cNvPr id="8" name="Picture 7" descr="cv_folds.png"/>
+          <p:cNvPr id="8" name="Picture 7" descr="ng_grid.png"/>
           <p:cNvPicPr>
             <a:picLocks noChangeAspect="1"/>
           </p:cNvPicPr>
@@ -9233,8 +11644,8 @@
         </p:blipFill>
         <p:spPr>
           <a:xfrm>
-            <a:off x="5120640" y="1874519"/>
-            <a:ext cx="6492240" cy="3654159"/>
+            <a:off x="5191387" y="1874519"/>
+            <a:ext cx="6350746" cy="4114800"/>
           </a:xfrm>
           <a:prstGeom prst="rect">
             <a:avLst/>
@@ -9276,7 +11687,7 @@
                 </a:solidFill>
                 <a:latin typeface="Arial"/>
               </a:rPr>
-              <a:t>5-fold cross-validation. Module 2, notebook 2. MIT 6.390, Appendix C; Harvard CS109A / ISLR §5.1.</a:t>
+              <a:t>Grid cards: Ng's teaching examples, not course numbers. Ng, Machine Learning Yearning chs. 20-21.</a:t>
             </a:r>
           </a:p>
         </p:txBody>
@@ -9502,7 +11913,7 @@
                 </a:solidFill>
                 <a:latin typeface="Arial"/>
               </a:rPr>
-              <a:t>BASELINE FIRST</a:t>
+              <a:t>BIAS-VARIANCE DECOMPOSITION</a:t>
             </a:r>
           </a:p>
         </p:txBody>
@@ -9542,7 +11953,7 @@
                 </a:solidFill>
                 <a:latin typeface="Arial"/>
               </a:rPr>
-              <a:t>Beat the floor first: always saying "died" already scores 0.617</a:t>
+              <a:t>Refit on fresh samples and watch: simple models miss together, flexible models scatter</a:t>
             </a:r>
           </a:p>
         </p:txBody>
@@ -9599,8 +12010,8 @@
         </p:nvSpPr>
         <p:spPr>
           <a:xfrm>
-            <a:off x="1371600" y="2286000"/>
-            <a:ext cx="9418320" cy="2011680"/>
+            <a:off x="548640" y="1874519"/>
+            <a:ext cx="4297680" cy="4206240"/>
           </a:xfrm>
           <a:prstGeom prst="rect">
             <a:avLst/>
@@ -9613,34 +12024,141 @@
           </a:bodyPr>
           <a:lstStyle/>
           <a:p>
-            <a:pPr algn="ctr">
-              <a:spcAft>
-                <a:spcPts val="600"/>
-              </a:spcAft>
-              <a:buNone/>
-            </a:pPr>
-            <a:r>
-              <a:rPr sz="9600" b="1">
-                <a:solidFill>
-                  <a:srgbClr val="1E5EF3"/>
-                </a:solidFill>
-                <a:latin typeface="Arial"/>
-              </a:rPr>
-              <a:t>0.617</a:t>
-            </a:r>
-          </a:p>
-        </p:txBody>
-      </p:sp>
-      <p:sp>
-        <p:nvSpPr>
-          <p:cNvPr id="8" name="TextBox 7"/>
+            <a:pPr algn="l" indent="-228600" marL="228600">
+              <a:spcAft>
+                <a:spcPts val="800"/>
+              </a:spcAft>
+              <a:buClr>
+                <a:srgbClr val="1E5EF3"/>
+              </a:buClr>
+              <a:buChar char="—"/>
+            </a:pPr>
+            <a:r>
+              <a:rPr sz="1450" b="0">
+                <a:solidFill>
+                  <a:srgbClr val="202B38"/>
+                </a:solidFill>
+                <a:latin typeface="Arial"/>
+              </a:rPr>
+              <a:t>Thought experiment: refit the same model on many different samples from the same population - parallel universes - and watch the fits scatter.</a:t>
+            </a:r>
+          </a:p>
+          <a:p>
+            <a:pPr algn="l" indent="-228600" marL="228600">
+              <a:spcAft>
+                <a:spcPts val="800"/>
+              </a:spcAft>
+              <a:buClr>
+                <a:srgbClr val="1E5EF3"/>
+              </a:buClr>
+              <a:buChar char="—"/>
+            </a:pPr>
+            <a:r>
+              <a:rPr sz="1450" b="0">
+                <a:solidFill>
+                  <a:srgbClr val="202B38"/>
+                </a:solidFill>
+                <a:latin typeface="Arial"/>
+              </a:rPr>
+              <a:t>Simple families form a tight bundle: they miss the same way every time. That systematic miss is bias.</a:t>
+            </a:r>
+          </a:p>
+          <a:p>
+            <a:pPr algn="l" indent="-228600" marL="228600">
+              <a:spcAft>
+                <a:spcPts val="800"/>
+              </a:spcAft>
+              <a:buClr>
+                <a:srgbClr val="1E5EF3"/>
+              </a:buClr>
+              <a:buChar char="—"/>
+            </a:pPr>
+            <a:r>
+              <a:rPr sz="1450" b="0">
+                <a:solidFill>
+                  <a:srgbClr val="202B38"/>
+                </a:solidFill>
+                <a:latin typeface="Arial"/>
+              </a:rPr>
+              <a:t>Flexible families form spaghetti: right on average, but every sample yields a wildly different fit. That instability is variance.</a:t>
+            </a:r>
+          </a:p>
+          <a:p>
+            <a:pPr algn="l" indent="-228600" marL="228600">
+              <a:spcAft>
+                <a:spcPts val="800"/>
+              </a:spcAft>
+              <a:buClr>
+                <a:srgbClr val="1E5EF3"/>
+              </a:buClr>
+              <a:buChar char="—"/>
+            </a:pPr>
+            <a:r>
+              <a:rPr sz="1450" b="0">
+                <a:solidFill>
+                  <a:srgbClr val="202B38"/>
+                </a:solidFill>
+                <a:latin typeface="Arial"/>
+              </a:rPr>
+              <a:t>Total error = bias² + variance + noise. The noise floor ε is irreducible - your work lives in the other two terms.</a:t>
+            </a:r>
+          </a:p>
+          <a:p>
+            <a:pPr algn="l" indent="-228600" marL="228600">
+              <a:spcAft>
+                <a:spcPts val="800"/>
+              </a:spcAft>
+              <a:buClr>
+                <a:srgbClr val="1E5EF3"/>
+              </a:buClr>
+              <a:buChar char="—"/>
+            </a:pPr>
+            <a:r>
+              <a:rPr sz="1450" b="0">
+                <a:solidFill>
+                  <a:srgbClr val="202B38"/>
+                </a:solidFill>
+                <a:latin typeface="Arial"/>
+              </a:rPr>
+              <a:t>Hold this image: in Part 2, five cross-validation folds act as five mini-universes and make the wobble measurable.</a:t>
+            </a:r>
+          </a:p>
+        </p:txBody>
+      </p:sp>
+      <p:pic>
+        <p:nvPicPr>
+          <p:cNvPr id="8" name="Picture 7" descr="models_2000.png"/>
+          <p:cNvPicPr>
+            <a:picLocks noChangeAspect="1"/>
+          </p:cNvPicPr>
+          <p:nvPr/>
+        </p:nvPicPr>
+        <p:blipFill>
+          <a:blip r:embed="rId2"/>
+          <a:stretch>
+            <a:fillRect/>
+          </a:stretch>
+        </p:blipFill>
+        <p:spPr>
+          <a:xfrm>
+            <a:off x="5120640" y="1874519"/>
+            <a:ext cx="6492240" cy="3982591"/>
+          </a:xfrm>
+          <a:prstGeom prst="rect">
+            <a:avLst/>
+          </a:prstGeom>
+        </p:spPr>
+      </p:pic>
+      <p:sp>
+        <p:nvSpPr>
+          <p:cNvPr id="9" name="TextBox 8"/>
           <p:cNvSpPr txBox="1"/>
           <p:nvPr/>
         </p:nvSpPr>
         <p:spPr>
           <a:xfrm>
-            <a:off x="1371600" y="4434840"/>
-            <a:ext cx="9418320" cy="731520"/>
+            <a:off x="5120640" y="6062471"/>
+            <a:ext cx="6492240" cy="365760"/>
           </a:xfrm>
           <a:prstGeom prst="rect">
             <a:avLst/>
@@ -9660,53 +12178,13 @@
               <a:buNone/>
             </a:pPr>
             <a:r>
-              <a:rPr sz="1800" b="0">
-                <a:solidFill>
-                  <a:srgbClr val="0A2540"/>
-                </a:solidFill>
-                <a:latin typeface="Arial"/>
-              </a:rPr>
-              <a:t>Dummy baseline, 5-fold CV accuracy (+/- 0.003). It ignores the data and always predicts "died".</a:t>
-            </a:r>
-          </a:p>
-        </p:txBody>
-      </p:sp>
-      <p:sp>
-        <p:nvSpPr>
-          <p:cNvPr id="9" name="TextBox 8"/>
-          <p:cNvSpPr txBox="1"/>
-          <p:nvPr/>
-        </p:nvSpPr>
-        <p:spPr>
-          <a:xfrm>
-            <a:off x="1371600" y="5257800"/>
-            <a:ext cx="9418320" cy="640080"/>
-          </a:xfrm>
-          <a:prstGeom prst="rect">
-            <a:avLst/>
-          </a:prstGeom>
-          <a:noFill/>
-        </p:spPr>
-        <p:txBody>
-          <a:bodyPr wrap="square">
-            <a:spAutoFit/>
-          </a:bodyPr>
-          <a:lstStyle/>
-          <a:p>
-            <a:pPr algn="ctr">
-              <a:spcAft>
-                <a:spcPts val="600"/>
-              </a:spcAft>
-              <a:buNone/>
-            </a:pPr>
-            <a:r>
-              <a:rPr sz="1250" b="0">
+              <a:rPr sz="1100" b="0">
                 <a:solidFill>
                   <a:srgbClr val="5B6774"/>
                 </a:solidFill>
                 <a:latin typeface="Arial"/>
               </a:rPr>
-              <a:t>Any model that cannot clearly beat this floor is useless, no matter how fancy its name. Andrew Ng's doctrine: build your first system quickly, then iterate (Machine Learning Yearning, ch. 13).</a:t>
+              <a:t>Illustration - synthetic data, 60 refits per panel. Device from Harvard CS109A L6 / ISLR §2.2.</a:t>
             </a:r>
           </a:p>
         </p:txBody>
@@ -9932,7 +12410,7 @@
                 </a:solidFill>
                 <a:latin typeface="Arial"/>
               </a:rPr>
-              <a:t>SIX MODELS, ONE REFEREE</a:t>
+              <a:t>STRUCTURAL VS ESTIMATION ERROR</a:t>
             </a:r>
           </a:p>
         </p:txBody>
@@ -9972,7 +12450,7 @@
                 </a:solidFill>
                 <a:latin typeface="Arial"/>
               </a:rPr>
-              <a:t>The tournament verdict: the humble scorecard wins at 0.819</a:t>
+              <a:t>Name the two errors: a family too rigid, or too little data to find its best member</a:t>
             </a:r>
           </a:p>
         </p:txBody>
@@ -10059,7 +12537,7 @@
                 </a:solidFill>
                 <a:latin typeface="Arial"/>
               </a:rPr>
-              <a:t>Same referee for all six: 5-fold CV, preprocessing re-fit inside every fold - no leaks.</a:t>
+              <a:t>Structural error: the family is too rigid - the true rule is not in your space, so even its best member misses. Underfitting has a surname.</a:t>
             </a:r>
           </a:p>
           <a:p>
@@ -10079,7 +12557,7 @@
                 </a:solidFill>
                 <a:latin typeface="Arial"/>
               </a:rPr>
-              <a:t>Logistic Regression leads at 0.819. Gradient Boosting is a close second at 0.816.</a:t>
+              <a:t>Estimation error: the family is so flexible that limited data cannot reliably point at its best member - the search lands on a memorizer. That is overfitting.</a:t>
             </a:r>
           </a:p>
           <a:p>
@@ -10099,7 +12577,7 @@
                 </a:solidFill>
                 <a:latin typeface="Arial"/>
               </a:rPr>
-              <a:t>Those error bars are information: Random Forest wobbles most (+/- 0.054) - the same model refit on slightly different data gives noticeably different answers. Next slide shows why.</a:t>
+              <a:t>Grow flexibility and the two trade places: structural error falls, estimation error rises - their sum is U-shaped.</a:t>
             </a:r>
           </a:p>
           <a:p>
@@ -10119,34 +12597,14 @@
                 </a:solidFill>
                 <a:latin typeface="Arial"/>
               </a:rPr>
-              <a:t>Every real model clears the floor. The Dummy's F1 is 0.000 - it never predicts "survived".</a:t>
-            </a:r>
-          </a:p>
-          <a:p>
-            <a:pPr algn="l" indent="-228600" marL="228600">
-              <a:spcAft>
-                <a:spcPts val="800"/>
-              </a:spcAft>
-              <a:buClr>
-                <a:srgbClr val="1E5EF3"/>
-              </a:buClr>
-              <a:buChar char="—"/>
-            </a:pPr>
-            <a:r>
-              <a:rPr sz="1450" b="0">
-                <a:solidFill>
-                  <a:srgbClr val="202B38"/>
-                </a:solidFill>
-                <a:latin typeface="Arial"/>
-              </a:rPr>
-              <a:t>The surprise: fancy does not automatically mean better.</a:t>
+              <a:t>This is the grammar of the U-curve. In Part 2 you will watch a real one, drawn by a decision tree growing one level at a time.</a:t>
             </a:r>
           </a:p>
         </p:txBody>
       </p:sp>
       <p:pic>
         <p:nvPicPr>
-          <p:cNvPr id="8" name="Picture 7" descr="tournament.png"/>
+          <p:cNvPr id="8" name="Picture 7" descr="structural_estimation.png"/>
           <p:cNvPicPr>
             <a:picLocks noChangeAspect="1"/>
           </p:cNvPicPr>
@@ -10161,7 +12619,7 @@
         <p:spPr>
           <a:xfrm>
             <a:off x="5120640" y="1874519"/>
-            <a:ext cx="6492240" cy="3339938"/>
+            <a:ext cx="6492240" cy="3591861"/>
           </a:xfrm>
           <a:prstGeom prst="rect">
             <a:avLst/>
@@ -10203,7 +12661,7 @@
                 </a:solidFill>
                 <a:latin typeface="Arial"/>
               </a:rPr>
-              <a:t>Mean 5-fold CV accuracy, +/- 1 std. Module 2, notebook 2.</a:t>
+              <a:t>Illustration - schematic curves, no real data. MIT 6.390, ch. 2 and ch. 5 (structural vs estimation error).</a:t>
             </a:r>
           </a:p>
         </p:txBody>
@@ -10429,7 +12887,7 @@
                 </a:solidFill>
                 <a:latin typeface="Arial"/>
               </a:rPr>
-              <a:t>PARALLEL UNIVERSES</a:t>
+              <a:t>COMPLEXITY ON A LEASH</a:t>
             </a:r>
           </a:p>
         </p:txBody>
@@ -10469,7 +12927,7 @@
                 </a:solidFill>
                 <a:latin typeface="Arial"/>
               </a:rPr>
-              <a:t>Why the forest wobbles: flexible models change with every sample they see</a:t>
+              <a:t>Don't choose simple-or-flexible once: take the flexible family and make complexity pay</a:t>
             </a:r>
           </a:p>
         </p:txBody>
@@ -10556,7 +13014,7 @@
                 </a:solidFill>
                 <a:latin typeface="Arial"/>
               </a:rPr>
-              <a:t>Thought experiment: refit the same model on many different samples from the same population - parallel universes - and watch the fits scatter.</a:t>
+              <a:t>Regularization adds a price tag to the training objective: minimize (average loss + λ × complexity). One dial trades fit against simplicity.</a:t>
             </a:r>
           </a:p>
           <a:p>
@@ -10576,7 +13034,7 @@
                 </a:solidFill>
                 <a:latin typeface="Arial"/>
               </a:rPr>
-              <a:t>Simple models (a straight line) form a tight bundle: they miss the same way every time. Biased, but stable.</a:t>
+              <a:t>λ near zero trusts the data completely - memorizing is allowed. Huge λ ignores the data. The right λ follows the trend and lets the noise go.</a:t>
             </a:r>
           </a:p>
           <a:p>
@@ -10596,7 +13054,7 @@
                 </a:solidFill>
                 <a:latin typeface="Arial"/>
               </a:rPr>
-              <a:t>Very flexible models form spaghetti: unbiased on average, but each sample yields a wildly different fit. That is variance.</a:t>
+              <a:t>Ridge regression is exactly this idea for linear models: a penalty on large weights that buys a little bias to remove a lot of variance.</a:t>
             </a:r>
           </a:p>
           <a:p>
@@ -10616,14 +13074,14 @@
                 </a:solidFill>
                 <a:latin typeface="Arial"/>
               </a:rPr>
-              <a:t>Our tournament ran a small version of this: the 5 folds are 5 mini-universes, and the fold-to-fold std is the wobble made visible - RF +/- 0.054 vs LogReg +/- 0.020.</a:t>
+              <a:t>Foreshadow: Session 4 tunes max_depth and min_samples_leaf on a tree - those knobs ARE this dial. A shallow tree is a short leash.</a:t>
             </a:r>
           </a:p>
         </p:txBody>
       </p:sp>
       <p:pic>
         <p:nvPicPr>
-          <p:cNvPr id="8" name="Picture 7" descr="models_2000.png"/>
+          <p:cNvPr id="8" name="Picture 7" descr="regularization_leash.png"/>
           <p:cNvPicPr>
             <a:picLocks noChangeAspect="1"/>
           </p:cNvPicPr>
@@ -10638,7 +13096,7 @@
         <p:spPr>
           <a:xfrm>
             <a:off x="5120640" y="1874519"/>
-            <a:ext cx="6492240" cy="3982591"/>
+            <a:ext cx="6492240" cy="3313248"/>
           </a:xfrm>
           <a:prstGeom prst="rect">
             <a:avLst/>
@@ -10680,7 +13138,7 @@
                 </a:solidFill>
                 <a:latin typeface="Arial"/>
               </a:rPr>
-              <a:t>Illustration - synthetic data, 60 refits per panel. Device from Harvard CS109A L6 / ISLR §2.2.</a:t>
+              <a:t>Illustration - synthetic points, same data in all panels. MIT 6.390 ch. 2 (penalty framing); Harvard CS109A / ISLR ch. 6 (ridge).</a:t>
             </a:r>
           </a:p>
         </p:txBody>
@@ -10798,7 +13256,7 @@
             <a:avLst/>
           </a:prstGeom>
           <a:solidFill>
-            <a:srgbClr val="0A2540"/>
+            <a:srgbClr val="FFFFFF"/>
           </a:solidFill>
           <a:ln>
             <a:noFill/>
@@ -10829,14 +13287,58 @@
       </p:sp>
       <p:sp>
         <p:nvSpPr>
-          <p:cNvPr id="3" name="TextBox 2"/>
+          <p:cNvPr id="3" name="Rectangle 2"/>
+          <p:cNvSpPr/>
+          <p:nvPr/>
+        </p:nvSpPr>
+        <p:spPr>
+          <a:xfrm>
+            <a:off x="548640" y="475488"/>
+            <a:ext cx="457200" cy="54864"/>
+          </a:xfrm>
+          <a:prstGeom prst="rect">
+            <a:avLst/>
+          </a:prstGeom>
+          <a:solidFill>
+            <a:srgbClr val="1E5EF3"/>
+          </a:solidFill>
+          <a:ln>
+            <a:noFill/>
+          </a:ln>
+          <a:effectLst/>
+        </p:spPr>
+        <p:style>
+          <a:lnRef idx="1">
+            <a:schemeClr val="accent1"/>
+          </a:lnRef>
+          <a:fillRef idx="3">
+            <a:schemeClr val="accent1"/>
+          </a:fillRef>
+          <a:effectRef idx="2">
+            <a:schemeClr val="accent1"/>
+          </a:effectRef>
+          <a:fontRef idx="minor">
+            <a:schemeClr val="lt1"/>
+          </a:fontRef>
+        </p:style>
+        <p:txBody>
+          <a:bodyPr rtlCol="0" anchor="ctr"/>
+          <a:lstStyle/>
+          <a:p>
+            <a:pPr algn="ctr"/>
+          </a:p>
+        </p:txBody>
+      </p:sp>
+      <p:sp>
+        <p:nvSpPr>
+          <p:cNvPr id="4" name="TextBox 3"/>
           <p:cNvSpPr txBox="1"/>
           <p:nvPr/>
         </p:nvSpPr>
         <p:spPr>
           <a:xfrm>
-            <a:off x="822960" y="1463040"/>
-            <a:ext cx="3657600" cy="2011680"/>
+            <a:off x="548640" y="603504"/>
+            <a:ext cx="11091672" cy="274320"/>
           </a:xfrm>
           <a:prstGeom prst="rect">
             <a:avLst/>
@@ -10856,27 +13358,27 @@
               <a:buNone/>
             </a:pPr>
             <a:r>
-              <a:rPr sz="11000" b="1">
+              <a:rPr sz="1100" b="1">
                 <a:solidFill>
                   <a:srgbClr val="1E5EF3"/>
                 </a:solidFill>
                 <a:latin typeface="Arial"/>
               </a:rPr>
-              <a:t>02</a:t>
-            </a:r>
-          </a:p>
-        </p:txBody>
-      </p:sp>
-      <p:sp>
-        <p:nvSpPr>
-          <p:cNvPr id="4" name="TextBox 3"/>
+              <a:t>THE TRADE-OFF CHART</a:t>
+            </a:r>
+          </a:p>
+        </p:txBody>
+      </p:sp>
+      <p:sp>
+        <p:nvSpPr>
+          <p:cNvPr id="5" name="TextBox 4"/>
           <p:cNvSpPr txBox="1"/>
           <p:nvPr/>
         </p:nvSpPr>
         <p:spPr>
           <a:xfrm>
-            <a:off x="868680" y="3566160"/>
-            <a:ext cx="10424160" cy="1280160"/>
+            <a:off x="548640" y="868680"/>
+            <a:ext cx="11091672" cy="777240"/>
           </a:xfrm>
           <a:prstGeom prst="rect">
             <a:avLst/>
@@ -10891,32 +13393,76 @@
           <a:p>
             <a:pPr algn="l">
               <a:spcAft>
-                <a:spcPts val="600"/>
-              </a:spcAft>
-              <a:buNone/>
-            </a:pPr>
-            <a:r>
-              <a:rPr sz="3400" b="1">
-                <a:solidFill>
-                  <a:srgbClr val="FFFFFF"/>
-                </a:solidFill>
-                <a:latin typeface="Arial"/>
-              </a:rPr>
-              <a:t>Beyond accuracy</a:t>
-            </a:r>
-          </a:p>
-        </p:txBody>
-      </p:sp>
-      <p:sp>
-        <p:nvSpPr>
-          <p:cNvPr id="5" name="TextBox 4"/>
+                <a:spcPts val="0"/>
+              </a:spcAft>
+              <a:buNone/>
+            </a:pPr>
+            <a:r>
+              <a:rPr sz="2600" b="1">
+                <a:solidFill>
+                  <a:srgbClr val="0A2540"/>
+                </a:solidFill>
+                <a:latin typeface="Arial"/>
+              </a:rPr>
+              <a:t>Flexibility costs readability - and a bank or hospital may choose the explainable point</a:t>
+            </a:r>
+          </a:p>
+        </p:txBody>
+      </p:sp>
+      <p:sp>
+        <p:nvSpPr>
+          <p:cNvPr id="6" name="Rectangle 5"/>
+          <p:cNvSpPr/>
+          <p:nvPr/>
+        </p:nvSpPr>
+        <p:spPr>
+          <a:xfrm>
+            <a:off x="548640" y="1664208"/>
+            <a:ext cx="11091672" cy="12801"/>
+          </a:xfrm>
+          <a:prstGeom prst="rect">
+            <a:avLst/>
+          </a:prstGeom>
+          <a:solidFill>
+            <a:srgbClr val="B9D0FA"/>
+          </a:solidFill>
+          <a:ln>
+            <a:noFill/>
+          </a:ln>
+          <a:effectLst/>
+        </p:spPr>
+        <p:style>
+          <a:lnRef idx="1">
+            <a:schemeClr val="accent1"/>
+          </a:lnRef>
+          <a:fillRef idx="3">
+            <a:schemeClr val="accent1"/>
+          </a:fillRef>
+          <a:effectRef idx="2">
+            <a:schemeClr val="accent1"/>
+          </a:effectRef>
+          <a:fontRef idx="minor">
+            <a:schemeClr val="lt1"/>
+          </a:fontRef>
+        </p:style>
+        <p:txBody>
+          <a:bodyPr rtlCol="0" anchor="ctr"/>
+          <a:lstStyle/>
+          <a:p>
+            <a:pPr algn="ctr"/>
+          </a:p>
+        </p:txBody>
+      </p:sp>
+      <p:sp>
+        <p:nvSpPr>
+          <p:cNvPr id="7" name="TextBox 6"/>
           <p:cNvSpPr txBox="1"/>
           <p:nvPr/>
         </p:nvSpPr>
         <p:spPr>
           <a:xfrm>
-            <a:off x="868680" y="4709160"/>
-            <a:ext cx="10058400" cy="914400"/>
+            <a:off x="548640" y="1874519"/>
+            <a:ext cx="4297680" cy="4206240"/>
           </a:xfrm>
           <a:prstGeom prst="rect">
             <a:avLst/>
@@ -10929,34 +13475,121 @@
           </a:bodyPr>
           <a:lstStyle/>
           <a:p>
-            <a:pPr algn="l">
-              <a:spcAft>
-                <a:spcPts val="600"/>
-              </a:spcAft>
-              <a:buNone/>
-            </a:pPr>
-            <a:r>
-              <a:rPr sz="1600" b="0">
-                <a:solidFill>
-                  <a:srgbClr val="B9D0FA"/>
-                </a:solidFill>
-                <a:latin typeface="Arial"/>
-              </a:rPr>
-              <a:t>When 99% right is 100% useless: the mistakes have names, so count all four kinds before you trust a score.</a:t>
-            </a:r>
-          </a:p>
-        </p:txBody>
-      </p:sp>
-      <p:sp>
-        <p:nvSpPr>
-          <p:cNvPr id="6" name="TextBox 5"/>
+            <a:pPr algn="l" indent="-228600" marL="228600">
+              <a:spcAft>
+                <a:spcPts val="800"/>
+              </a:spcAft>
+              <a:buClr>
+                <a:srgbClr val="1E5EF3"/>
+              </a:buClr>
+              <a:buChar char="—"/>
+            </a:pPr>
+            <a:r>
+              <a:rPr sz="1450" b="0">
+                <a:solidFill>
+                  <a:srgbClr val="202B38"/>
+                </a:solidFill>
+                <a:latin typeface="Arial"/>
+              </a:rPr>
+              <a:t>Model families live on a spectrum: as the range of shapes they can fit grows, the ease of reading the fitted rule falls.</a:t>
+            </a:r>
+          </a:p>
+          <a:p>
+            <a:pPr algn="l" indent="-228600" marL="228600">
+              <a:spcAft>
+                <a:spcPts val="800"/>
+              </a:spcAft>
+              <a:buClr>
+                <a:srgbClr val="1E5EF3"/>
+              </a:buClr>
+              <a:buChar char="—"/>
+            </a:pPr>
+            <a:r>
+              <a:rPr sz="1450" b="0">
+                <a:solidFill>
+                  <a:srgbClr val="202B38"/>
+                </a:solidFill>
+                <a:latin typeface="Arial"/>
+              </a:rPr>
+              <a:t>Our six contestants sit along that diagonal: the scorecard and the single tree are readable; committees of hundreds of trees are not.</a:t>
+            </a:r>
+          </a:p>
+          <a:p>
+            <a:pPr algn="l" indent="-228600" marL="228600">
+              <a:spcAft>
+                <a:spcPts val="800"/>
+              </a:spcAft>
+              <a:buClr>
+                <a:srgbClr val="1E5EF3"/>
+              </a:buClr>
+              <a:buChar char="—"/>
+            </a:pPr>
+            <a:r>
+              <a:rPr sz="1450" b="0">
+                <a:solidFill>
+                  <a:srgbClr val="202B38"/>
+                </a:solidFill>
+                <a:latin typeface="Arial"/>
+              </a:rPr>
+              <a:t>Flexible is not automatically better: flexible families need more data and overfit more easily - the estimation-error trap from two slides ago.</a:t>
+            </a:r>
+          </a:p>
+          <a:p>
+            <a:pPr algn="l" indent="-228600" marL="228600">
+              <a:spcAft>
+                <a:spcPts val="800"/>
+              </a:spcAft>
+              <a:buClr>
+                <a:srgbClr val="1E5EF3"/>
+              </a:buClr>
+              <a:buChar char="—"/>
+            </a:pPr>
+            <a:r>
+              <a:rPr sz="1450" b="0">
+                <a:solidFill>
+                  <a:srgbClr val="202B38"/>
+                </a:solidFill>
+                <a:latin typeface="Arial"/>
+              </a:rPr>
+              <a:t>When a bank must explain a rejected loan, or a hospital must justify a triage call, the explainable point wins - even at some cost in raw accuracy.</a:t>
+            </a:r>
+          </a:p>
+        </p:txBody>
+      </p:sp>
+      <p:pic>
+        <p:nvPicPr>
+          <p:cNvPr id="8" name="Picture 7" descr="flex_interp.png"/>
+          <p:cNvPicPr>
+            <a:picLocks noChangeAspect="1"/>
+          </p:cNvPicPr>
+          <p:nvPr/>
+        </p:nvPicPr>
+        <p:blipFill>
+          <a:blip r:embed="rId2"/>
+          <a:stretch>
+            <a:fillRect/>
+          </a:stretch>
+        </p:blipFill>
+        <p:spPr>
+          <a:xfrm>
+            <a:off x="5248871" y="1874519"/>
+            <a:ext cx="6235778" cy="4114800"/>
+          </a:xfrm>
+          <a:prstGeom prst="rect">
+            <a:avLst/>
+          </a:prstGeom>
+        </p:spPr>
+      </p:pic>
+      <p:sp>
+        <p:nvSpPr>
+          <p:cNvPr id="9" name="TextBox 8"/>
           <p:cNvSpPr txBox="1"/>
           <p:nvPr/>
         </p:nvSpPr>
         <p:spPr>
           <a:xfrm>
-            <a:off x="548640" y="6473952"/>
-            <a:ext cx="7315200" cy="292608"/>
+            <a:off x="5120640" y="6062471"/>
+            <a:ext cx="6492240" cy="365760"/>
           </a:xfrm>
           <a:prstGeom prst="rect">
             <a:avLst/>
@@ -10969,34 +13602,34 @@
           </a:bodyPr>
           <a:lstStyle/>
           <a:p>
-            <a:pPr algn="l">
+            <a:pPr algn="ctr">
               <a:spcAft>
                 <a:spcPts val="600"/>
               </a:spcAft>
               <a:buNone/>
             </a:pPr>
             <a:r>
-              <a:rPr sz="900" b="0">
-                <a:solidFill>
-                  <a:srgbClr val="B9D0FA"/>
-                </a:solidFill>
-                <a:latin typeface="Arial"/>
-              </a:rPr>
-              <a:t>M2 Session 3 - Model Selection and Evaluation</a:t>
-            </a:r>
-          </a:p>
-        </p:txBody>
-      </p:sp>
-      <p:sp>
-        <p:nvSpPr>
-          <p:cNvPr id="7" name="TextBox 6"/>
+              <a:rPr sz="1100" b="0">
+                <a:solidFill>
+                  <a:srgbClr val="5B6774"/>
+                </a:solidFill>
+                <a:latin typeface="Arial"/>
+              </a:rPr>
+              <a:t>Schematic - our six models placed as a teaching judgment. Device from ISLR fig. 2.7.</a:t>
+            </a:r>
+          </a:p>
+        </p:txBody>
+      </p:sp>
+      <p:sp>
+        <p:nvSpPr>
+          <p:cNvPr id="10" name="TextBox 9"/>
           <p:cNvSpPr txBox="1"/>
           <p:nvPr/>
         </p:nvSpPr>
         <p:spPr>
           <a:xfrm>
-            <a:off x="11292840" y="6473952"/>
-            <a:ext cx="548640" cy="292608"/>
+            <a:off x="548640" y="6473952"/>
+            <a:ext cx="7315200" cy="292608"/>
           </a:xfrm>
           <a:prstGeom prst="rect">
             <a:avLst/>
@@ -11009,6 +13642,46 @@
           </a:bodyPr>
           <a:lstStyle/>
           <a:p>
+            <a:pPr algn="l">
+              <a:spcAft>
+                <a:spcPts val="600"/>
+              </a:spcAft>
+              <a:buNone/>
+            </a:pPr>
+            <a:r>
+              <a:rPr sz="900" b="0">
+                <a:solidFill>
+                  <a:srgbClr val="5B6774"/>
+                </a:solidFill>
+                <a:latin typeface="Arial"/>
+              </a:rPr>
+              <a:t>M2 Session 3 - Model Selection and Evaluation</a:t>
+            </a:r>
+          </a:p>
+        </p:txBody>
+      </p:sp>
+      <p:sp>
+        <p:nvSpPr>
+          <p:cNvPr id="11" name="TextBox 10"/>
+          <p:cNvSpPr txBox="1"/>
+          <p:nvPr/>
+        </p:nvSpPr>
+        <p:spPr>
+          <a:xfrm>
+            <a:off x="11292840" y="6473952"/>
+            <a:ext cx="548640" cy="292608"/>
+          </a:xfrm>
+          <a:prstGeom prst="rect">
+            <a:avLst/>
+          </a:prstGeom>
+          <a:noFill/>
+        </p:spPr>
+        <p:txBody>
+          <a:bodyPr wrap="square">
+            <a:spAutoFit/>
+          </a:bodyPr>
+          <a:lstStyle/>
+          <a:p>
             <a:pPr algn="r">
               <a:spcAft>
                 <a:spcPts val="600"/>
@@ -11018,7 +13691,7 @@
             <a:r>
               <a:rPr sz="900" b="0">
                 <a:solidFill>
-                  <a:srgbClr val="B9D0FA"/>
+                  <a:srgbClr val="5B6774"/>
                 </a:solidFill>
                 <a:latin typeface="Arial"/>
               </a:rPr>

--- a/presentations/m2-session-3-model-selection-and-evaluation.pptx
+++ b/presentations/m2-session-3-model-selection-and-evaluation.pptx
@@ -7,25 +7,25 @@
   <p:sldIdLst>
     <p:sldId id="256" r:id="rId7"/>
     <p:sldId id="257" r:id="rId8"/>
-    <p:sldId id="258" r:id="rId9"/>
-    <p:sldId id="259" r:id="rId10"/>
-    <p:sldId id="260" r:id="rId11"/>
-    <p:sldId id="261" r:id="rId12"/>
-    <p:sldId id="262" r:id="rId13"/>
-    <p:sldId id="263" r:id="rId14"/>
-    <p:sldId id="264" r:id="rId15"/>
-    <p:sldId id="265" r:id="rId16"/>
-    <p:sldId id="266" r:id="rId17"/>
-    <p:sldId id="267" r:id="rId18"/>
-    <p:sldId id="268" r:id="rId19"/>
-    <p:sldId id="269" r:id="rId20"/>
-    <p:sldId id="270" r:id="rId21"/>
-    <p:sldId id="271" r:id="rId22"/>
-    <p:sldId id="272" r:id="rId23"/>
-    <p:sldId id="273" r:id="rId24"/>
-    <p:sldId id="274" r:id="rId25"/>
-    <p:sldId id="275" r:id="rId26"/>
-    <p:sldId id="276" r:id="rId27"/>
+    <p:sldId id="258" r:id="rId10"/>
+    <p:sldId id="259" r:id="rId11"/>
+    <p:sldId id="260" r:id="rId12"/>
+    <p:sldId id="261" r:id="rId13"/>
+    <p:sldId id="262" r:id="rId14"/>
+    <p:sldId id="263" r:id="rId15"/>
+    <p:sldId id="264" r:id="rId16"/>
+    <p:sldId id="265" r:id="rId17"/>
+    <p:sldId id="266" r:id="rId18"/>
+    <p:sldId id="267" r:id="rId19"/>
+    <p:sldId id="268" r:id="rId20"/>
+    <p:sldId id="269" r:id="rId21"/>
+    <p:sldId id="270" r:id="rId22"/>
+    <p:sldId id="271" r:id="rId23"/>
+    <p:sldId id="272" r:id="rId24"/>
+    <p:sldId id="273" r:id="rId25"/>
+    <p:sldId id="274" r:id="rId26"/>
+    <p:sldId id="275" r:id="rId27"/>
+    <p:sldId id="276" r:id="rId28"/>
   </p:sldIdLst>
   <p:sldSz cx="12191695" cy="6858000" type="screen4x3"/>
   <p:notesSz cx="6858000" cy="9144000"/>
@@ -125,6 +125,1266 @@
     </a:lvl9pPr>
   </p:defaultTextStyle>
 </p:presentation>
+</file>
+
+<file path=ppt/notesMasters/notesMaster1.xml><?xml version="1.0" encoding="utf-8"?>
+<p:notesMaster xmlns:a="http://schemas.openxmlformats.org/drawingml/2006/main" xmlns:p="http://schemas.openxmlformats.org/presentationml/2006/main" xmlns:r="http://schemas.openxmlformats.org/officeDocument/2006/relationships">
+  <p:cSld>
+    <p:bg>
+      <p:bgRef idx="1001">
+        <a:schemeClr val="bg1"/>
+      </p:bgRef>
+    </p:bg>
+    <p:spTree>
+      <p:nvGrpSpPr>
+        <p:cNvPr id="1" name=""/>
+        <p:cNvGrpSpPr/>
+        <p:nvPr/>
+      </p:nvGrpSpPr>
+      <p:grpSpPr>
+        <a:xfrm>
+          <a:off x="0" y="0"/>
+          <a:ext cx="0" cy="0"/>
+          <a:chOff x="0" y="0"/>
+          <a:chExt cx="0" cy="0"/>
+        </a:xfrm>
+      </p:grpSpPr>
+      <p:sp>
+        <p:nvSpPr>
+          <p:cNvPr id="2" name="Header Placeholder 1"/>
+          <p:cNvSpPr>
+            <a:spLocks noGrp="1"/>
+          </p:cNvSpPr>
+          <p:nvPr>
+            <p:ph type="hdr" sz="quarter"/>
+          </p:nvPr>
+        </p:nvSpPr>
+        <p:spPr>
+          <a:xfrm>
+            <a:off x="0" y="0"/>
+            <a:ext cx="2971800" cy="457200"/>
+          </a:xfrm>
+          <a:prstGeom prst="rect">
+            <a:avLst/>
+          </a:prstGeom>
+        </p:spPr>
+        <p:txBody>
+          <a:bodyPr vert="horz" lIns="91440" tIns="45720" rIns="91440" bIns="45720" rtlCol="0"/>
+          <a:lstStyle>
+            <a:lvl1pPr algn="l">
+              <a:defRPr sz="1200"/>
+            </a:lvl1pPr>
+          </a:lstStyle>
+          <a:p>
+            <a:endParaRPr lang="en-US"/>
+          </a:p>
+        </p:txBody>
+      </p:sp>
+      <p:sp>
+        <p:nvSpPr>
+          <p:cNvPr id="3" name="Date Placeholder 2"/>
+          <p:cNvSpPr>
+            <a:spLocks noGrp="1"/>
+          </p:cNvSpPr>
+          <p:nvPr>
+            <p:ph type="dt" idx="1"/>
+          </p:nvPr>
+        </p:nvSpPr>
+        <p:spPr>
+          <a:xfrm>
+            <a:off x="3884613" y="0"/>
+            <a:ext cx="2971800" cy="457200"/>
+          </a:xfrm>
+          <a:prstGeom prst="rect">
+            <a:avLst/>
+          </a:prstGeom>
+        </p:spPr>
+        <p:txBody>
+          <a:bodyPr vert="horz" lIns="91440" tIns="45720" rIns="91440" bIns="45720" rtlCol="0"/>
+          <a:lstStyle>
+            <a:lvl1pPr algn="r">
+              <a:defRPr sz="1200"/>
+            </a:lvl1pPr>
+          </a:lstStyle>
+          <a:p>
+            <a:fld id="{0F89C1C7-3DCD-1040-A9CF-14679D8B5DDD}" type="datetimeFigureOut">
+              <a:rPr lang="en-US" smtClean="0"/>
+              <a:t>10/17/16</a:t>
+            </a:fld>
+            <a:endParaRPr lang="en-US"/>
+          </a:p>
+        </p:txBody>
+      </p:sp>
+      <p:sp>
+        <p:nvSpPr>
+          <p:cNvPr id="4" name="Slide Image Placeholder 3"/>
+          <p:cNvSpPr>
+            <a:spLocks noGrp="1" noRot="1" noChangeAspect="1"/>
+          </p:cNvSpPr>
+          <p:nvPr>
+            <p:ph type="sldImg" idx="2"/>
+          </p:nvPr>
+        </p:nvSpPr>
+        <p:spPr>
+          <a:xfrm>
+            <a:off x="1143000" y="685800"/>
+            <a:ext cx="4572000" cy="3429000"/>
+          </a:xfrm>
+          <a:prstGeom prst="rect">
+            <a:avLst/>
+          </a:prstGeom>
+          <a:noFill/>
+          <a:ln w="12700">
+            <a:solidFill>
+              <a:prstClr val="black"/>
+            </a:solidFill>
+          </a:ln>
+        </p:spPr>
+        <p:txBody>
+          <a:bodyPr vert="horz" lIns="91440" tIns="45720" rIns="91440" bIns="45720" rtlCol="0" anchor="ctr"/>
+          <a:lstStyle/>
+          <a:p>
+            <a:endParaRPr lang="en-US"/>
+          </a:p>
+        </p:txBody>
+      </p:sp>
+      <p:sp>
+        <p:nvSpPr>
+          <p:cNvPr id="5" name="Notes Placeholder 4"/>
+          <p:cNvSpPr>
+            <a:spLocks noGrp="1"/>
+          </p:cNvSpPr>
+          <p:nvPr>
+            <p:ph type="body" sz="quarter" idx="3"/>
+          </p:nvPr>
+        </p:nvSpPr>
+        <p:spPr>
+          <a:xfrm>
+            <a:off x="685800" y="4343400"/>
+            <a:ext cx="5486400" cy="4114800"/>
+          </a:xfrm>
+          <a:prstGeom prst="rect">
+            <a:avLst/>
+          </a:prstGeom>
+        </p:spPr>
+        <p:txBody>
+          <a:bodyPr vert="horz" lIns="91440" tIns="45720" rIns="91440" bIns="45720" rtlCol="0"/>
+          <a:lstStyle/>
+          <a:p>
+            <a:pPr lvl="0"/>
+            <a:r>
+              <a:rPr lang="en-US" smtClean="0"/>
+              <a:t>Click to edit Master text styles</a:t>
+            </a:r>
+          </a:p>
+          <a:p>
+            <a:pPr lvl="1"/>
+            <a:r>
+              <a:rPr lang="en-US" smtClean="0"/>
+              <a:t>Second level</a:t>
+            </a:r>
+          </a:p>
+          <a:p>
+            <a:pPr lvl="2"/>
+            <a:r>
+              <a:rPr lang="en-US" smtClean="0"/>
+              <a:t>Third level</a:t>
+            </a:r>
+          </a:p>
+          <a:p>
+            <a:pPr lvl="3"/>
+            <a:r>
+              <a:rPr lang="en-US" smtClean="0"/>
+              <a:t>Fourth level</a:t>
+            </a:r>
+          </a:p>
+          <a:p>
+            <a:pPr lvl="4"/>
+            <a:r>
+              <a:rPr lang="en-US" smtClean="0"/>
+              <a:t>Fifth level</a:t>
+            </a:r>
+            <a:endParaRPr lang="en-US"/>
+          </a:p>
+        </p:txBody>
+      </p:sp>
+      <p:sp>
+        <p:nvSpPr>
+          <p:cNvPr id="6" name="Footer Placeholder 5"/>
+          <p:cNvSpPr>
+            <a:spLocks noGrp="1"/>
+          </p:cNvSpPr>
+          <p:nvPr>
+            <p:ph type="ftr" sz="quarter" idx="4"/>
+          </p:nvPr>
+        </p:nvSpPr>
+        <p:spPr>
+          <a:xfrm>
+            <a:off x="0" y="8685213"/>
+            <a:ext cx="2971800" cy="457200"/>
+          </a:xfrm>
+          <a:prstGeom prst="rect">
+            <a:avLst/>
+          </a:prstGeom>
+        </p:spPr>
+        <p:txBody>
+          <a:bodyPr vert="horz" lIns="91440" tIns="45720" rIns="91440" bIns="45720" rtlCol="0" anchor="b"/>
+          <a:lstStyle>
+            <a:lvl1pPr algn="l">
+              <a:defRPr sz="1200"/>
+            </a:lvl1pPr>
+          </a:lstStyle>
+          <a:p>
+            <a:endParaRPr lang="en-US"/>
+          </a:p>
+        </p:txBody>
+      </p:sp>
+      <p:sp>
+        <p:nvSpPr>
+          <p:cNvPr id="7" name="Slide Number Placeholder 6"/>
+          <p:cNvSpPr>
+            <a:spLocks noGrp="1"/>
+          </p:cNvSpPr>
+          <p:nvPr>
+            <p:ph type="sldNum" sz="quarter" idx="5"/>
+          </p:nvPr>
+        </p:nvSpPr>
+        <p:spPr>
+          <a:xfrm>
+            <a:off x="3884613" y="8685213"/>
+            <a:ext cx="2971800" cy="457200"/>
+          </a:xfrm>
+          <a:prstGeom prst="rect">
+            <a:avLst/>
+          </a:prstGeom>
+        </p:spPr>
+        <p:txBody>
+          <a:bodyPr vert="horz" lIns="91440" tIns="45720" rIns="91440" bIns="45720" rtlCol="0" anchor="b"/>
+          <a:lstStyle>
+            <a:lvl1pPr algn="r">
+              <a:defRPr sz="1200"/>
+            </a:lvl1pPr>
+          </a:lstStyle>
+          <a:p>
+            <a:fld id="{BB5E49A5-4136-284D-997B-48E1D791AD67}" type="slidenum">
+              <a:rPr lang="en-US" smtClean="0"/>
+              <a:t>‹#›</a:t>
+            </a:fld>
+            <a:endParaRPr lang="en-US"/>
+          </a:p>
+        </p:txBody>
+      </p:sp>
+    </p:spTree>
+    <p:extLst>
+      <p:ext uri="{BB962C8B-B14F-4D97-AF65-F5344CB8AC3E}">
+        <p14:creationId xmlns:p14="http://schemas.microsoft.com/office/powerpoint/2010/main" val="2623252185"/>
+      </p:ext>
+    </p:extLst>
+  </p:cSld>
+  <p:clrMap bg1="lt1" tx1="dk1" bg2="lt2" tx2="dk2" accent1="accent1" accent2="accent2" accent3="accent3" accent4="accent4" accent5="accent5" accent6="accent6" hlink="hlink" folHlink="folHlink"/>
+  <p:notesStyle>
+    <a:lvl1pPr marL="0" algn="l" defTabSz="457200" rtl="0" eaLnBrk="1" latinLnBrk="0" hangingPunct="1">
+      <a:defRPr sz="1200" kern="1200">
+        <a:solidFill>
+          <a:schemeClr val="tx1"/>
+        </a:solidFill>
+        <a:latin typeface="+mn-lt"/>
+        <a:ea typeface="+mn-ea"/>
+        <a:cs typeface="+mn-cs"/>
+      </a:defRPr>
+    </a:lvl1pPr>
+    <a:lvl2pPr marL="457200" algn="l" defTabSz="457200" rtl="0" eaLnBrk="1" latinLnBrk="0" hangingPunct="1">
+      <a:defRPr sz="1200" kern="1200">
+        <a:solidFill>
+          <a:schemeClr val="tx1"/>
+        </a:solidFill>
+        <a:latin typeface="+mn-lt"/>
+        <a:ea typeface="+mn-ea"/>
+        <a:cs typeface="+mn-cs"/>
+      </a:defRPr>
+    </a:lvl2pPr>
+    <a:lvl3pPr marL="914400" algn="l" defTabSz="457200" rtl="0" eaLnBrk="1" latinLnBrk="0" hangingPunct="1">
+      <a:defRPr sz="1200" kern="1200">
+        <a:solidFill>
+          <a:schemeClr val="tx1"/>
+        </a:solidFill>
+        <a:latin typeface="+mn-lt"/>
+        <a:ea typeface="+mn-ea"/>
+        <a:cs typeface="+mn-cs"/>
+      </a:defRPr>
+    </a:lvl3pPr>
+    <a:lvl4pPr marL="1371600" algn="l" defTabSz="457200" rtl="0" eaLnBrk="1" latinLnBrk="0" hangingPunct="1">
+      <a:defRPr sz="1200" kern="1200">
+        <a:solidFill>
+          <a:schemeClr val="tx1"/>
+        </a:solidFill>
+        <a:latin typeface="+mn-lt"/>
+        <a:ea typeface="+mn-ea"/>
+        <a:cs typeface="+mn-cs"/>
+      </a:defRPr>
+    </a:lvl4pPr>
+    <a:lvl5pPr marL="1828800" algn="l" defTabSz="457200" rtl="0" eaLnBrk="1" latinLnBrk="0" hangingPunct="1">
+      <a:defRPr sz="1200" kern="1200">
+        <a:solidFill>
+          <a:schemeClr val="tx1"/>
+        </a:solidFill>
+        <a:latin typeface="+mn-lt"/>
+        <a:ea typeface="+mn-ea"/>
+        <a:cs typeface="+mn-cs"/>
+      </a:defRPr>
+    </a:lvl5pPr>
+    <a:lvl6pPr marL="2286000" algn="l" defTabSz="457200" rtl="0" eaLnBrk="1" latinLnBrk="0" hangingPunct="1">
+      <a:defRPr sz="1200" kern="1200">
+        <a:solidFill>
+          <a:schemeClr val="tx1"/>
+        </a:solidFill>
+        <a:latin typeface="+mn-lt"/>
+        <a:ea typeface="+mn-ea"/>
+        <a:cs typeface="+mn-cs"/>
+      </a:defRPr>
+    </a:lvl6pPr>
+    <a:lvl7pPr marL="2743200" algn="l" defTabSz="457200" rtl="0" eaLnBrk="1" latinLnBrk="0" hangingPunct="1">
+      <a:defRPr sz="1200" kern="1200">
+        <a:solidFill>
+          <a:schemeClr val="tx1"/>
+        </a:solidFill>
+        <a:latin typeface="+mn-lt"/>
+        <a:ea typeface="+mn-ea"/>
+        <a:cs typeface="+mn-cs"/>
+      </a:defRPr>
+    </a:lvl7pPr>
+    <a:lvl8pPr marL="3200400" algn="l" defTabSz="457200" rtl="0" eaLnBrk="1" latinLnBrk="0" hangingPunct="1">
+      <a:defRPr sz="1200" kern="1200">
+        <a:solidFill>
+          <a:schemeClr val="tx1"/>
+        </a:solidFill>
+        <a:latin typeface="+mn-lt"/>
+        <a:ea typeface="+mn-ea"/>
+        <a:cs typeface="+mn-cs"/>
+      </a:defRPr>
+    </a:lvl8pPr>
+    <a:lvl9pPr marL="3657600" algn="l" defTabSz="457200" rtl="0" eaLnBrk="1" latinLnBrk="0" hangingPunct="1">
+      <a:defRPr sz="1200" kern="1200">
+        <a:solidFill>
+          <a:schemeClr val="tx1"/>
+        </a:solidFill>
+        <a:latin typeface="+mn-lt"/>
+        <a:ea typeface="+mn-ea"/>
+        <a:cs typeface="+mn-cs"/>
+      </a:defRPr>
+    </a:lvl9pPr>
+  </p:notesStyle>
+</p:notesMaster>
+</file>
+
+<file path=ppt/notesSlides/notesSlide1.xml><?xml version="1.0" encoding="utf-8"?>
+<p:notes xmlns:a="http://schemas.openxmlformats.org/drawingml/2006/main" xmlns:p="http://schemas.openxmlformats.org/presentationml/2006/main" xmlns:r="http://schemas.openxmlformats.org/officeDocument/2006/relationships">
+  <p:cSld>
+    <p:spTree>
+      <p:nvGrpSpPr>
+        <p:cNvPr id="1" name=""/>
+        <p:cNvGrpSpPr/>
+        <p:nvPr/>
+      </p:nvGrpSpPr>
+      <p:grpSpPr>
+        <a:xfrm>
+          <a:off x="0" y="0"/>
+          <a:ext cx="0" cy="0"/>
+          <a:chOff x="0" y="0"/>
+          <a:chExt cx="0" cy="0"/>
+        </a:xfrm>
+      </p:grpSpPr>
+      <p:sp>
+        <p:nvSpPr>
+          <p:cNvPr id="2" name="Slide Image Placeholder 1"/>
+          <p:cNvSpPr>
+            <a:spLocks noGrp="1"/>
+          </p:cNvSpPr>
+          <p:nvPr>
+            <p:ph type="sldImg" idx="2"/>
+          </p:nvPr>
+        </p:nvSpPr>
+        <p:spPr/>
+      </p:sp>
+      <p:sp>
+        <p:nvSpPr>
+          <p:cNvPr id="3" name="Notes Placeholder 2"/>
+          <p:cNvSpPr>
+            <a:spLocks noGrp="1"/>
+          </p:cNvSpPr>
+          <p:nvPr>
+            <p:ph type="body" idx="3" sz="quarter"/>
+          </p:nvPr>
+        </p:nvSpPr>
+        <p:spPr/>
+        <p:txBody>
+          <a:bodyPr/>
+          <a:lstStyle/>
+          <a:p>
+            <a:r>
+              <a:t>Re-say the exam metaphor before the theory: practice tests choose your strategy - you can take as many as you like; the final exam grades it - and you sit it once. Selection is the practice-test job, assessment is the final. Ask the class: what would go wrong if you picked your strategy based on the final's questions?</a:t>
+            </a:r>
+          </a:p>
+        </p:txBody>
+      </p:sp>
+      <p:sp>
+        <p:nvSpPr>
+          <p:cNvPr id="4" name="Slide Number Placeholder 3"/>
+          <p:cNvSpPr>
+            <a:spLocks noGrp="1"/>
+          </p:cNvSpPr>
+          <p:nvPr>
+            <p:ph type="sldNum" idx="5" sz="quarter"/>
+          </p:nvPr>
+        </p:nvSpPr>
+        <p:spPr/>
+      </p:sp>
+    </p:spTree>
+  </p:cSld>
+  <p:clrMapOvr>
+    <a:masterClrMapping/>
+  </p:clrMapOvr>
+</p:notes>
+</file>
+
+<file path=ppt/notesSlides/notesSlide10.xml><?xml version="1.0" encoding="utf-8"?>
+<p:notes xmlns:a="http://schemas.openxmlformats.org/drawingml/2006/main" xmlns:p="http://schemas.openxmlformats.org/presentationml/2006/main" xmlns:r="http://schemas.openxmlformats.org/officeDocument/2006/relationships">
+  <p:cSld>
+    <p:spTree>
+      <p:nvGrpSpPr>
+        <p:cNvPr id="1" name=""/>
+        <p:cNvGrpSpPr/>
+        <p:nvPr/>
+      </p:nvGrpSpPr>
+      <p:grpSpPr>
+        <a:xfrm>
+          <a:off x="0" y="0"/>
+          <a:ext cx="0" cy="0"/>
+          <a:chOff x="0" y="0"/>
+          <a:chExt cx="0" cy="0"/>
+        </a:xfrm>
+      </p:grpSpPr>
+      <p:sp>
+        <p:nvSpPr>
+          <p:cNvPr id="2" name="Slide Image Placeholder 1"/>
+          <p:cNvSpPr>
+            <a:spLocks noGrp="1"/>
+          </p:cNvSpPr>
+          <p:nvPr>
+            <p:ph type="sldImg" idx="2"/>
+          </p:nvPr>
+        </p:nvSpPr>
+        <p:spPr/>
+      </p:sp>
+      <p:sp>
+        <p:nvSpPr>
+          <p:cNvPr id="3" name="Notes Placeholder 2"/>
+          <p:cNvSpPr>
+            <a:spLocks noGrp="1"/>
+          </p:cNvSpPr>
+          <p:nvPr>
+            <p:ph type="body" idx="3" sz="quarter"/>
+          </p:nvPr>
+        </p:nvSpPr>
+        <p:spPr/>
+        <p:txBody>
+          <a:bodyPr/>
+          <a:lstStyle/>
+          <a:p>
+            <a:r>
+              <a:t>Open with the 99% trap: a disease hits 1 in 100, so 'always say no disease' is 99% accurate and completely useless. The confusion matrix fixes that by splitting one number into four honest counts: right two ways, wrong two ways. Every metric they will ever meet is arithmetic on these four cells. Ask the class: which of our two mistake cells - 11 false alarms or 18 missed survivors - would matter more if this were a rescue list?</a:t>
+            </a:r>
+          </a:p>
+        </p:txBody>
+      </p:sp>
+      <p:sp>
+        <p:nvSpPr>
+          <p:cNvPr id="4" name="Slide Number Placeholder 3"/>
+          <p:cNvSpPr>
+            <a:spLocks noGrp="1"/>
+          </p:cNvSpPr>
+          <p:nvPr>
+            <p:ph type="sldNum" idx="5" sz="quarter"/>
+          </p:nvPr>
+        </p:nvSpPr>
+        <p:spPr/>
+      </p:sp>
+    </p:spTree>
+  </p:cSld>
+  <p:clrMapOvr>
+    <a:masterClrMapping/>
+  </p:clrMapOvr>
+</p:notes>
+</file>
+
+<file path=ppt/notesSlides/notesSlide11.xml><?xml version="1.0" encoding="utf-8"?>
+<p:notes xmlns:a="http://schemas.openxmlformats.org/drawingml/2006/main" xmlns:p="http://schemas.openxmlformats.org/presentationml/2006/main" xmlns:r="http://schemas.openxmlformats.org/officeDocument/2006/relationships">
+  <p:cSld>
+    <p:spTree>
+      <p:nvGrpSpPr>
+        <p:cNvPr id="1" name=""/>
+        <p:cNvGrpSpPr/>
+        <p:nvPr/>
+      </p:nvGrpSpPr>
+      <p:grpSpPr>
+        <a:xfrm>
+          <a:off x="0" y="0"/>
+          <a:ext cx="0" cy="0"/>
+          <a:chOff x="0" y="0"/>
+          <a:chExt cx="0" cy="0"/>
+        </a:xfrm>
+      </p:grpSpPr>
+      <p:sp>
+        <p:nvSpPr>
+          <p:cNvPr id="2" name="Slide Image Placeholder 1"/>
+          <p:cNvSpPr>
+            <a:spLocks noGrp="1"/>
+          </p:cNvSpPr>
+          <p:nvPr>
+            <p:ph type="sldImg" idx="2"/>
+          </p:nvPr>
+        </p:nvSpPr>
+        <p:spPr/>
+      </p:sp>
+      <p:sp>
+        <p:nvSpPr>
+          <p:cNvPr id="3" name="Notes Placeholder 2"/>
+          <p:cNvSpPr>
+            <a:spLocks noGrp="1"/>
+          </p:cNvSpPr>
+          <p:nvPr>
+            <p:ph type="body" idx="3" sz="quarter"/>
+          </p:nvPr>
+        </p:nvSpPr>
+        <p:spPr/>
+        <p:txBody>
+          <a:bodyPr/>
+          <a:lstStyle/>
+          <a:p>
+            <a:r>
+              <a:t>Two questions, not one: precision asks 'when we raise an alarm, how often is it real?'; recall asks 'of the real cases, how many did we catch?'. The problem picks the metric - spam filters fear false alarms, cancer screening fears missed cases. F1 is a strict average of the two that a useless side drags down. Ask the class: for airport security screening, precision first or recall first?</a:t>
+            </a:r>
+          </a:p>
+        </p:txBody>
+      </p:sp>
+      <p:sp>
+        <p:nvSpPr>
+          <p:cNvPr id="4" name="Slide Number Placeholder 3"/>
+          <p:cNvSpPr>
+            <a:spLocks noGrp="1"/>
+          </p:cNvSpPr>
+          <p:nvPr>
+            <p:ph type="sldNum" idx="5" sz="quarter"/>
+          </p:nvPr>
+        </p:nvSpPr>
+        <p:spPr/>
+      </p:sp>
+    </p:spTree>
+  </p:cSld>
+  <p:clrMapOvr>
+    <a:masterClrMapping/>
+  </p:clrMapOvr>
+</p:notes>
+</file>
+
+<file path=ppt/notesSlides/notesSlide12.xml><?xml version="1.0" encoding="utf-8"?>
+<p:notes xmlns:a="http://schemas.openxmlformats.org/drawingml/2006/main" xmlns:p="http://schemas.openxmlformats.org/presentationml/2006/main" xmlns:r="http://schemas.openxmlformats.org/officeDocument/2006/relationships">
+  <p:cSld>
+    <p:spTree>
+      <p:nvGrpSpPr>
+        <p:cNvPr id="1" name=""/>
+        <p:cNvGrpSpPr/>
+        <p:nvPr/>
+      </p:nvGrpSpPr>
+      <p:grpSpPr>
+        <a:xfrm>
+          <a:off x="0" y="0"/>
+          <a:ext cx="0" cy="0"/>
+          <a:chOff x="0" y="0"/>
+          <a:chExt cx="0" cy="0"/>
+        </a:xfrm>
+      </p:grpSpPr>
+      <p:sp>
+        <p:nvSpPr>
+          <p:cNvPr id="2" name="Slide Image Placeholder 1"/>
+          <p:cNvSpPr>
+            <a:spLocks noGrp="1"/>
+          </p:cNvSpPr>
+          <p:nvPr>
+            <p:ph type="sldImg" idx="2"/>
+          </p:nvPr>
+        </p:nvSpPr>
+        <p:spPr/>
+      </p:sp>
+      <p:sp>
+        <p:nvSpPr>
+          <p:cNvPr id="3" name="Notes Placeholder 2"/>
+          <p:cNvSpPr>
+            <a:spLocks noGrp="1"/>
+          </p:cNvSpPr>
+          <p:nvPr>
+            <p:ph type="body" idx="3" sz="quarter"/>
+          </p:nvPr>
+        </p:nvSpPr>
+        <p:spPr/>
+        <p:txBody>
+          <a:bodyPr/>
+          <a:lstStyle/>
+          <a:p>
+            <a:r>
+              <a:t>This is the theory chapter drawn by real data. Depth is the aisle-size dial: too shallow and the family cannot hold a good rule (wrong aisle); past depth 3 the tree starts memorizing the 712 training rows (right aisle, wrong shoe). The grey line only climbs because memorizing always improves the score on the questions you studied. Ask the class: the honest peak is 0.815, not 1.00 - what did Session 1 call the part no model can ever predict?</a:t>
+            </a:r>
+          </a:p>
+        </p:txBody>
+      </p:sp>
+      <p:sp>
+        <p:nvSpPr>
+          <p:cNvPr id="4" name="Slide Number Placeholder 3"/>
+          <p:cNvSpPr>
+            <a:spLocks noGrp="1"/>
+          </p:cNvSpPr>
+          <p:nvPr>
+            <p:ph type="sldNum" idx="5" sz="quarter"/>
+          </p:nvPr>
+        </p:nvSpPr>
+        <p:spPr/>
+      </p:sp>
+    </p:spTree>
+  </p:cSld>
+  <p:clrMapOvr>
+    <a:masterClrMapping/>
+  </p:clrMapOvr>
+</p:notes>
+</file>
+
+<file path=ppt/notesSlides/notesSlide13.xml><?xml version="1.0" encoding="utf-8"?>
+<p:notes xmlns:a="http://schemas.openxmlformats.org/drawingml/2006/main" xmlns:p="http://schemas.openxmlformats.org/presentationml/2006/main" xmlns:r="http://schemas.openxmlformats.org/officeDocument/2006/relationships">
+  <p:cSld>
+    <p:spTree>
+      <p:nvGrpSpPr>
+        <p:cNvPr id="1" name=""/>
+        <p:cNvGrpSpPr/>
+        <p:nvPr/>
+      </p:nvGrpSpPr>
+      <p:grpSpPr>
+        <a:xfrm>
+          <a:off x="0" y="0"/>
+          <a:ext cx="0" cy="0"/>
+          <a:chOff x="0" y="0"/>
+          <a:chExt cx="0" cy="0"/>
+        </a:xfrm>
+      </p:grpSpPr>
+      <p:sp>
+        <p:nvSpPr>
+          <p:cNvPr id="2" name="Slide Image Placeholder 1"/>
+          <p:cNvSpPr>
+            <a:spLocks noGrp="1"/>
+          </p:cNvSpPr>
+          <p:nvPr>
+            <p:ph type="sldImg" idx="2"/>
+          </p:nvPr>
+        </p:nvSpPr>
+        <p:spPr/>
+      </p:sp>
+      <p:sp>
+        <p:nvSpPr>
+          <p:cNvPr id="3" name="Notes Placeholder 2"/>
+          <p:cNvSpPr>
+            <a:spLocks noGrp="1"/>
+          </p:cNvSpPr>
+          <p:nvPr>
+            <p:ph type="body" idx="3" sz="quarter"/>
+          </p:nvPr>
+        </p:nvSpPr>
+        <p:spPr/>
+        <p:txBody>
+          <a:bodyPr/>
+          <a:lstStyle/>
+          <a:p>
+            <a:r>
+              <a:t>The learning curve answers one question managers always ask: would more data help? Read the shape - if the honest score has flattened and sits close to the training score, more rows buy almost nothing; if a wide gap remains, more data plausibly helps. Ours is flat and close, so the lever is better features or settings - which is Session 4. Ask the class: your boss offers 10,000 more passenger records - based on this chart, do you take the deal?</a:t>
+            </a:r>
+          </a:p>
+        </p:txBody>
+      </p:sp>
+      <p:sp>
+        <p:nvSpPr>
+          <p:cNvPr id="4" name="Slide Number Placeholder 3"/>
+          <p:cNvSpPr>
+            <a:spLocks noGrp="1"/>
+          </p:cNvSpPr>
+          <p:nvPr>
+            <p:ph type="sldNum" idx="5" sz="quarter"/>
+          </p:nvPr>
+        </p:nvSpPr>
+        <p:spPr/>
+      </p:sp>
+    </p:spTree>
+  </p:cSld>
+  <p:clrMapOvr>
+    <a:masterClrMapping/>
+  </p:clrMapOvr>
+</p:notes>
+</file>
+
+<file path=ppt/notesSlides/notesSlide2.xml><?xml version="1.0" encoding="utf-8"?>
+<p:notes xmlns:a="http://schemas.openxmlformats.org/drawingml/2006/main" xmlns:p="http://schemas.openxmlformats.org/presentationml/2006/main" xmlns:r="http://schemas.openxmlformats.org/officeDocument/2006/relationships">
+  <p:cSld>
+    <p:spTree>
+      <p:nvGrpSpPr>
+        <p:cNvPr id="1" name=""/>
+        <p:cNvGrpSpPr/>
+        <p:nvPr/>
+      </p:nvGrpSpPr>
+      <p:grpSpPr>
+        <a:xfrm>
+          <a:off x="0" y="0"/>
+          <a:ext cx="0" cy="0"/>
+          <a:chOff x="0" y="0"/>
+          <a:chExt cx="0" cy="0"/>
+        </a:xfrm>
+      </p:grpSpPr>
+      <p:sp>
+        <p:nvSpPr>
+          <p:cNvPr id="2" name="Slide Image Placeholder 1"/>
+          <p:cNvSpPr>
+            <a:spLocks noGrp="1"/>
+          </p:cNvSpPr>
+          <p:nvPr>
+            <p:ph type="sldImg" idx="2"/>
+          </p:nvPr>
+        </p:nvSpPr>
+        <p:spPr/>
+      </p:sp>
+      <p:sp>
+        <p:nvSpPr>
+          <p:cNvPr id="3" name="Notes Placeholder 2"/>
+          <p:cNvSpPr>
+            <a:spLocks noGrp="1"/>
+          </p:cNvSpPr>
+          <p:nvPr>
+            <p:ph type="body" idx="3" sz="quarter"/>
+          </p:nvPr>
+        </p:nvSpPr>
+        <p:spPr/>
+        <p:txBody>
+          <a:bodyPr/>
+          <a:lstStyle/>
+          <a:p>
+            <a:r>
+              <a:t>Strip the Latin off the term: empirical risk minimization is studying from past exams - pick whatever strategy made the fewest mistakes on the old exams. The catch sits in the table: Rule D scores a perfect zero because it memorized the answer sheet, and it says nothing about tomorrow. Ask the class: which classmate is Rule D - and how do they do on a fresh exam?</a:t>
+            </a:r>
+          </a:p>
+        </p:txBody>
+      </p:sp>
+      <p:sp>
+        <p:nvSpPr>
+          <p:cNvPr id="4" name="Slide Number Placeholder 3"/>
+          <p:cNvSpPr>
+            <a:spLocks noGrp="1"/>
+          </p:cNvSpPr>
+          <p:nvPr>
+            <p:ph type="sldNum" idx="5" sz="quarter"/>
+          </p:nvPr>
+        </p:nvSpPr>
+        <p:spPr/>
+      </p:sp>
+    </p:spTree>
+  </p:cSld>
+  <p:clrMapOvr>
+    <a:masterClrMapping/>
+  </p:clrMapOvr>
+</p:notes>
+</file>
+
+<file path=ppt/notesSlides/notesSlide3.xml><?xml version="1.0" encoding="utf-8"?>
+<p:notes xmlns:a="http://schemas.openxmlformats.org/drawingml/2006/main" xmlns:p="http://schemas.openxmlformats.org/presentationml/2006/main" xmlns:r="http://schemas.openxmlformats.org/officeDocument/2006/relationships">
+  <p:cSld>
+    <p:spTree>
+      <p:nvGrpSpPr>
+        <p:cNvPr id="1" name=""/>
+        <p:cNvGrpSpPr/>
+        <p:nvPr/>
+      </p:nvGrpSpPr>
+      <p:grpSpPr>
+        <a:xfrm>
+          <a:off x="0" y="0"/>
+          <a:ext cx="0" cy="0"/>
+          <a:chOff x="0" y="0"/>
+          <a:chExt cx="0" cy="0"/>
+        </a:xfrm>
+      </p:grpSpPr>
+      <p:sp>
+        <p:nvSpPr>
+          <p:cNvPr id="2" name="Slide Image Placeholder 1"/>
+          <p:cNvSpPr>
+            <a:spLocks noGrp="1"/>
+          </p:cNvSpPr>
+          <p:nvPr>
+            <p:ph type="sldImg" idx="2"/>
+          </p:nvPr>
+        </p:nvSpPr>
+        <p:spPr/>
+      </p:sp>
+      <p:sp>
+        <p:nvSpPr>
+          <p:cNvPr id="3" name="Notes Placeholder 2"/>
+          <p:cNvSpPr>
+            <a:spLocks noGrp="1"/>
+          </p:cNvSpPr>
+          <p:nvPr>
+            <p:ph type="body" idx="3" sz="quarter"/>
+          </p:nvPr>
+        </p:nvSpPr>
+        <p:spPr/>
+        <p:txBody>
+          <a:bodyPr/>
+          <a:lstStyle/>
+          <a:p>
+            <a:r>
+              <a:t>Two numbers, one diagnosis: how wrong on the material it studied (bias), and how much worse on the practice test (variance). Note for the class that 'dev set' is Ng's word for the validation set. Walk the two example cards into their grid cells before naming the cures. Ask the class: train 2%, validation 3% - which box, and do you change anything?</a:t>
+            </a:r>
+          </a:p>
+        </p:txBody>
+      </p:sp>
+      <p:sp>
+        <p:nvSpPr>
+          <p:cNvPr id="4" name="Slide Number Placeholder 3"/>
+          <p:cNvSpPr>
+            <a:spLocks noGrp="1"/>
+          </p:cNvSpPr>
+          <p:nvPr>
+            <p:ph type="sldNum" idx="5" sz="quarter"/>
+          </p:nvPr>
+        </p:nvSpPr>
+        <p:spPr/>
+      </p:sp>
+    </p:spTree>
+  </p:cSld>
+  <p:clrMapOvr>
+    <a:masterClrMapping/>
+  </p:clrMapOvr>
+</p:notes>
+</file>
+
+<file path=ppt/notesSlides/notesSlide4.xml><?xml version="1.0" encoding="utf-8"?>
+<p:notes xmlns:a="http://schemas.openxmlformats.org/drawingml/2006/main" xmlns:p="http://schemas.openxmlformats.org/presentationml/2006/main" xmlns:r="http://schemas.openxmlformats.org/officeDocument/2006/relationships">
+  <p:cSld>
+    <p:spTree>
+      <p:nvGrpSpPr>
+        <p:cNvPr id="1" name=""/>
+        <p:cNvGrpSpPr/>
+        <p:nvPr/>
+      </p:nvGrpSpPr>
+      <p:grpSpPr>
+        <a:xfrm>
+          <a:off x="0" y="0"/>
+          <a:ext cx="0" cy="0"/>
+          <a:chOff x="0" y="0"/>
+          <a:chExt cx="0" cy="0"/>
+        </a:xfrm>
+      </p:grpSpPr>
+      <p:sp>
+        <p:nvSpPr>
+          <p:cNvPr id="2" name="Slide Image Placeholder 1"/>
+          <p:cNvSpPr>
+            <a:spLocks noGrp="1"/>
+          </p:cNvSpPr>
+          <p:nvPr>
+            <p:ph type="sldImg" idx="2"/>
+          </p:nvPr>
+        </p:nvSpPr>
+        <p:spPr/>
+      </p:sp>
+      <p:sp>
+        <p:nvSpPr>
+          <p:cNvPr id="3" name="Notes Placeholder 2"/>
+          <p:cNvSpPr>
+            <a:spLocks noGrp="1"/>
+          </p:cNvSpPr>
+          <p:nvPr>
+            <p:ph type="body" idx="3" sz="quarter"/>
+          </p:nvPr>
+        </p:nvSpPr>
+        <p:spPr/>
+        <p:txBody>
+          <a:bodyPr/>
+          <a:lstStyle/>
+          <a:p>
+            <a:r>
+              <a:t>Give them the two plain words before the picture: bias means it misses the same way every time; variance means it gives a different answer every time you retrain it. Then let the panels do the work - tight bundle versus spaghetti, same hidden dashed rule behind both. Ask the class: which panel would you rather ship, and what would change your mind?</a:t>
+            </a:r>
+          </a:p>
+        </p:txBody>
+      </p:sp>
+      <p:sp>
+        <p:nvSpPr>
+          <p:cNvPr id="4" name="Slide Number Placeholder 3"/>
+          <p:cNvSpPr>
+            <a:spLocks noGrp="1"/>
+          </p:cNvSpPr>
+          <p:nvPr>
+            <p:ph type="sldNum" idx="5" sz="quarter"/>
+          </p:nvPr>
+        </p:nvSpPr>
+        <p:spPr/>
+      </p:sp>
+    </p:spTree>
+  </p:cSld>
+  <p:clrMapOvr>
+    <a:masterClrMapping/>
+  </p:clrMapOvr>
+</p:notes>
+</file>
+
+<file path=ppt/notesSlides/notesSlide5.xml><?xml version="1.0" encoding="utf-8"?>
+<p:notes xmlns:a="http://schemas.openxmlformats.org/drawingml/2006/main" xmlns:p="http://schemas.openxmlformats.org/presentationml/2006/main" xmlns:r="http://schemas.openxmlformats.org/officeDocument/2006/relationships">
+  <p:cSld>
+    <p:spTree>
+      <p:nvGrpSpPr>
+        <p:cNvPr id="1" name=""/>
+        <p:cNvGrpSpPr/>
+        <p:nvPr/>
+      </p:nvGrpSpPr>
+      <p:grpSpPr>
+        <a:xfrm>
+          <a:off x="0" y="0"/>
+          <a:ext cx="0" cy="0"/>
+          <a:chOff x="0" y="0"/>
+          <a:chExt cx="0" cy="0"/>
+        </a:xfrm>
+      </p:grpSpPr>
+      <p:sp>
+        <p:nvSpPr>
+          <p:cNvPr id="2" name="Slide Image Placeholder 1"/>
+          <p:cNvSpPr>
+            <a:spLocks noGrp="1"/>
+          </p:cNvSpPr>
+          <p:nvPr>
+            <p:ph type="sldImg" idx="2"/>
+          </p:nvPr>
+        </p:nvSpPr>
+        <p:spPr/>
+      </p:sp>
+      <p:sp>
+        <p:nvSpPr>
+          <p:cNvPr id="3" name="Notes Placeholder 2"/>
+          <p:cNvSpPr>
+            <a:spLocks noGrp="1"/>
+          </p:cNvSpPr>
+          <p:nvPr>
+            <p:ph type="body" idx="3" sz="quarter"/>
+          </p:nvPr>
+        </p:nvSpPr>
+        <p:spPr/>
+        <p:txBody>
+          <a:bodyPr/>
+          <a:lstStyle/>
+          <a:p>
+            <a:r>
+              <a:t>Use the shoe shop: structural error is shopping in the wrong aisle - no shoe there fits, no matter how carefully you search. Estimation error is the right aisle but too little time to try pairs - you grab the wrong shoe. Bigger aisle helps the first problem and worsens the second; that tension is the U. Ask the class: which error does more data fix - the aisle or the time?</a:t>
+            </a:r>
+          </a:p>
+        </p:txBody>
+      </p:sp>
+      <p:sp>
+        <p:nvSpPr>
+          <p:cNvPr id="4" name="Slide Number Placeholder 3"/>
+          <p:cNvSpPr>
+            <a:spLocks noGrp="1"/>
+          </p:cNvSpPr>
+          <p:nvPr>
+            <p:ph type="sldNum" idx="5" sz="quarter"/>
+          </p:nvPr>
+        </p:nvSpPr>
+        <p:spPr/>
+      </p:sp>
+    </p:spTree>
+  </p:cSld>
+  <p:clrMapOvr>
+    <a:masterClrMapping/>
+  </p:clrMapOvr>
+</p:notes>
+</file>
+
+<file path=ppt/notesSlides/notesSlide6.xml><?xml version="1.0" encoding="utf-8"?>
+<p:notes xmlns:a="http://schemas.openxmlformats.org/drawingml/2006/main" xmlns:p="http://schemas.openxmlformats.org/presentationml/2006/main" xmlns:r="http://schemas.openxmlformats.org/officeDocument/2006/relationships">
+  <p:cSld>
+    <p:spTree>
+      <p:nvGrpSpPr>
+        <p:cNvPr id="1" name=""/>
+        <p:cNvGrpSpPr/>
+        <p:nvPr/>
+      </p:nvGrpSpPr>
+      <p:grpSpPr>
+        <a:xfrm>
+          <a:off x="0" y="0"/>
+          <a:ext cx="0" cy="0"/>
+          <a:chOff x="0" y="0"/>
+          <a:chExt cx="0" cy="0"/>
+        </a:xfrm>
+      </p:grpSpPr>
+      <p:sp>
+        <p:nvSpPr>
+          <p:cNvPr id="2" name="Slide Image Placeholder 1"/>
+          <p:cNvSpPr>
+            <a:spLocks noGrp="1"/>
+          </p:cNvSpPr>
+          <p:nvPr>
+            <p:ph type="sldImg" idx="2"/>
+          </p:nvPr>
+        </p:nvSpPr>
+        <p:spPr/>
+      </p:sp>
+      <p:sp>
+        <p:nvSpPr>
+          <p:cNvPr id="3" name="Notes Placeholder 2"/>
+          <p:cNvSpPr>
+            <a:spLocks noGrp="1"/>
+          </p:cNvSpPr>
+          <p:nvPr>
+            <p:ph type="body" idx="3" sz="quarter"/>
+          </p:nvPr>
+        </p:nvSpPr>
+        <p:spPr/>
+        <p:txBody>
+          <a:bodyPr/>
+          <a:lstStyle/>
+          <a:p>
+            <a:r>
+              <a:t>One sentence carries the slide: every extra wiggle costs points. The model may still buy wiggles - it just has to be worth the price, and lambda sets the price. Walk the three panels: free wiggles chase every point, fair-priced wiggles follow the trend, unaffordable wiggles ignore the data. Ask the class: which panel is the memorizing classmate from the ERM slide?</a:t>
+            </a:r>
+          </a:p>
+        </p:txBody>
+      </p:sp>
+      <p:sp>
+        <p:nvSpPr>
+          <p:cNvPr id="4" name="Slide Number Placeholder 3"/>
+          <p:cNvSpPr>
+            <a:spLocks noGrp="1"/>
+          </p:cNvSpPr>
+          <p:nvPr>
+            <p:ph type="sldNum" idx="5" sz="quarter"/>
+          </p:nvPr>
+        </p:nvSpPr>
+        <p:spPr/>
+      </p:sp>
+    </p:spTree>
+  </p:cSld>
+  <p:clrMapOvr>
+    <a:masterClrMapping/>
+  </p:clrMapOvr>
+</p:notes>
+</file>
+
+<file path=ppt/notesSlides/notesSlide7.xml><?xml version="1.0" encoding="utf-8"?>
+<p:notes xmlns:a="http://schemas.openxmlformats.org/drawingml/2006/main" xmlns:p="http://schemas.openxmlformats.org/presentationml/2006/main" xmlns:r="http://schemas.openxmlformats.org/officeDocument/2006/relationships">
+  <p:cSld>
+    <p:spTree>
+      <p:nvGrpSpPr>
+        <p:cNvPr id="1" name=""/>
+        <p:cNvGrpSpPr/>
+        <p:nvPr/>
+      </p:nvGrpSpPr>
+      <p:grpSpPr>
+        <a:xfrm>
+          <a:off x="0" y="0"/>
+          <a:ext cx="0" cy="0"/>
+          <a:chOff x="0" y="0"/>
+          <a:chExt cx="0" cy="0"/>
+        </a:xfrm>
+      </p:grpSpPr>
+      <p:sp>
+        <p:nvSpPr>
+          <p:cNvPr id="2" name="Slide Image Placeholder 1"/>
+          <p:cNvSpPr>
+            <a:spLocks noGrp="1"/>
+          </p:cNvSpPr>
+          <p:nvPr>
+            <p:ph type="sldImg" idx="2"/>
+          </p:nvPr>
+        </p:nvSpPr>
+        <p:spPr/>
+      </p:sp>
+      <p:sp>
+        <p:nvSpPr>
+          <p:cNvPr id="3" name="Notes Placeholder 2"/>
+          <p:cNvSpPr>
+            <a:spLocks noGrp="1"/>
+          </p:cNvSpPr>
+          <p:nvPr>
+            <p:ph type="body" idx="3" sz="quarter"/>
+          </p:nvPr>
+        </p:nvSpPr>
+        <p:spPr/>
+        <p:txBody>
+          <a:bodyPr/>
+          <a:lstStyle/>
+          <a:p>
+            <a:r>
+              <a:t>The axis trade: moving right buys shapes, moving down loses readability - you cannot have both ends. Make it concrete: a scorecard's weights can be read to a customer; a committee of 500 trees cannot. Ask the class: your loan is rejected by a model nobody can read - what do you want the bank to be able to tell you?</a:t>
+            </a:r>
+          </a:p>
+        </p:txBody>
+      </p:sp>
+      <p:sp>
+        <p:nvSpPr>
+          <p:cNvPr id="4" name="Slide Number Placeholder 3"/>
+          <p:cNvSpPr>
+            <a:spLocks noGrp="1"/>
+          </p:cNvSpPr>
+          <p:nvPr>
+            <p:ph type="sldNum" idx="5" sz="quarter"/>
+          </p:nvPr>
+        </p:nvSpPr>
+        <p:spPr/>
+      </p:sp>
+    </p:spTree>
+  </p:cSld>
+  <p:clrMapOvr>
+    <a:masterClrMapping/>
+  </p:clrMapOvr>
+</p:notes>
+</file>
+
+<file path=ppt/notesSlides/notesSlide8.xml><?xml version="1.0" encoding="utf-8"?>
+<p:notes xmlns:a="http://schemas.openxmlformats.org/drawingml/2006/main" xmlns:p="http://schemas.openxmlformats.org/presentationml/2006/main" xmlns:r="http://schemas.openxmlformats.org/officeDocument/2006/relationships">
+  <p:cSld>
+    <p:spTree>
+      <p:nvGrpSpPr>
+        <p:cNvPr id="1" name=""/>
+        <p:cNvGrpSpPr/>
+        <p:nvPr/>
+      </p:nvGrpSpPr>
+      <p:grpSpPr>
+        <a:xfrm>
+          <a:off x="0" y="0"/>
+          <a:ext cx="0" cy="0"/>
+          <a:chOff x="0" y="0"/>
+          <a:chExt cx="0" cy="0"/>
+        </a:xfrm>
+      </p:grpSpPr>
+      <p:sp>
+        <p:nvSpPr>
+          <p:cNvPr id="2" name="Slide Image Placeholder 1"/>
+          <p:cNvSpPr>
+            <a:spLocks noGrp="1"/>
+          </p:cNvSpPr>
+          <p:nvPr>
+            <p:ph type="sldImg" idx="2"/>
+          </p:nvPr>
+        </p:nvSpPr>
+        <p:spPr/>
+      </p:sp>
+      <p:sp>
+        <p:nvSpPr>
+          <p:cNvPr id="3" name="Notes Placeholder 2"/>
+          <p:cNvSpPr>
+            <a:spLocks noGrp="1"/>
+          </p:cNvSpPr>
+          <p:nvPr>
+            <p:ph type="body" idx="3" sz="quarter"/>
+          </p:nvPr>
+        </p:nvSpPr>
+        <p:spPr/>
+        <p:txBody>
+          <a:bodyPr/>
+          <a:lstStyle/>
+          <a:p>
+            <a:r>
+              <a:t>Exam family again: cross-validation is five practice tests instead of one, and every row gets one turn as the judge. Then MIT's line students always miss: CV scores the recipe, not the cake - it rates the way of building models, not one finished model. Ask the class: why is an average of five practice tests harder to fool than the best of five?</a:t>
+            </a:r>
+          </a:p>
+        </p:txBody>
+      </p:sp>
+      <p:sp>
+        <p:nvSpPr>
+          <p:cNvPr id="4" name="Slide Number Placeholder 3"/>
+          <p:cNvSpPr>
+            <a:spLocks noGrp="1"/>
+          </p:cNvSpPr>
+          <p:nvPr>
+            <p:ph type="sldNum" idx="5" sz="quarter"/>
+          </p:nvPr>
+        </p:nvSpPr>
+        <p:spPr/>
+      </p:sp>
+    </p:spTree>
+  </p:cSld>
+  <p:clrMapOvr>
+    <a:masterClrMapping/>
+  </p:clrMapOvr>
+</p:notes>
+</file>
+
+<file path=ppt/notesSlides/notesSlide9.xml><?xml version="1.0" encoding="utf-8"?>
+<p:notes xmlns:a="http://schemas.openxmlformats.org/drawingml/2006/main" xmlns:p="http://schemas.openxmlformats.org/presentationml/2006/main" xmlns:r="http://schemas.openxmlformats.org/officeDocument/2006/relationships">
+  <p:cSld>
+    <p:spTree>
+      <p:nvGrpSpPr>
+        <p:cNvPr id="1" name=""/>
+        <p:cNvGrpSpPr/>
+        <p:nvPr/>
+      </p:nvGrpSpPr>
+      <p:grpSpPr>
+        <a:xfrm>
+          <a:off x="0" y="0"/>
+          <a:ext cx="0" cy="0"/>
+          <a:chOff x="0" y="0"/>
+          <a:chExt cx="0" cy="0"/>
+        </a:xfrm>
+      </p:grpSpPr>
+      <p:sp>
+        <p:nvSpPr>
+          <p:cNvPr id="2" name="Slide Image Placeholder 1"/>
+          <p:cNvSpPr>
+            <a:spLocks noGrp="1"/>
+          </p:cNvSpPr>
+          <p:nvPr>
+            <p:ph type="sldImg" idx="2"/>
+          </p:nvPr>
+        </p:nvSpPr>
+        <p:spPr/>
+      </p:sp>
+      <p:sp>
+        <p:nvSpPr>
+          <p:cNvPr id="3" name="Notes Placeholder 2"/>
+          <p:cNvSpPr>
+            <a:spLocks noGrp="1"/>
+          </p:cNvSpPr>
+          <p:nvPr>
+            <p:ph type="body" idx="3" sz="quarter"/>
+          </p:nvPr>
+        </p:nvSpPr>
+        <p:spPr/>
+        <p:txBody>
+          <a:bodyPr/>
+          <a:lstStyle/>
+          <a:p>
+            <a:r>
+              <a:t>Part 1's warning caught on camera: grade the tree on the exact questions it studied and it scores 0.985; grade it on practice tests it never saw and it drops to 0.751. The 0.233 gap is memorization, not learning - the student who copied the answer sheet. Ask the class: which of the two bars would you show your boss, and why is the other one a lie?</a:t>
+            </a:r>
+          </a:p>
+        </p:txBody>
+      </p:sp>
+      <p:sp>
+        <p:nvSpPr>
+          <p:cNvPr id="4" name="Slide Number Placeholder 3"/>
+          <p:cNvSpPr>
+            <a:spLocks noGrp="1"/>
+          </p:cNvSpPr>
+          <p:nvPr>
+            <p:ph type="sldNum" idx="5" sz="quarter"/>
+          </p:nvPr>
+        </p:nvSpPr>
+        <p:spPr/>
+      </p:sp>
+    </p:spTree>
+  </p:cSld>
+  <p:clrMapOvr>
+    <a:masterClrMapping/>
+  </p:clrMapOvr>
+</p:notes>
 </file>
 
 <file path=ppt/slideLayouts/slideLayout1.xml><?xml version="1.0" encoding="utf-8"?>
@@ -3624,7 +4884,7 @@
                 </a:solidFill>
                 <a:latin typeface="Arial"/>
               </a:rPr>
-              <a:t>Training error flatters, so hold data out and measure there. One split can be lucky or unlucky - so rotate it: 5 folds, 5 rounds, each fold sits out once as the judge.</a:t>
+              <a:t>Cross-validation - in plain words: five practice tests instead of one - each fifth of the data sits out once as judge.</a:t>
             </a:r>
           </a:p>
           <a:p>
@@ -3644,7 +4904,7 @@
                 </a:solidFill>
                 <a:latin typeface="Arial"/>
               </a:rPr>
-              <a:t>Five honest scores instead of one: we see the mean AND the wobble (std). One lucky split can flatter a model; five cannot.</a:t>
+              <a:t>Why rotate? One practice test can be lucky or unlucky; the average of five is hard to fool.</a:t>
             </a:r>
           </a:p>
           <a:p>
@@ -3664,7 +4924,7 @@
                 </a:solidFill>
                 <a:latin typeface="Arial"/>
               </a:rPr>
-              <a:t>Subtle but crucial: CV evaluates the recipe (algorithm + settings), not one fitted model - CV scores the recipe, not the cake.</a:t>
+              <a:t>Five honest scores show the mean AND the wobble (the spread, std) - stability becomes visible.</a:t>
             </a:r>
           </a:p>
           <a:p>
@@ -3684,7 +4944,27 @@
                 </a:solidFill>
                 <a:latin typeface="Arial"/>
               </a:rPr>
-              <a:t>Why 5 folds? Fewer folds starve training; leave-one-out folds are nearly identical and their average gets noisy - 5 or 10 is the empirical sweet spot.</a:t>
+              <a:t>Subtle but crucial: CV scores the recipe (algorithm + settings), not one baked cake.</a:t>
+            </a:r>
+          </a:p>
+          <a:p>
+            <a:pPr algn="l" indent="-228600" marL="228600">
+              <a:spcAft>
+                <a:spcPts val="800"/>
+              </a:spcAft>
+              <a:buClr>
+                <a:srgbClr val="1E5EF3"/>
+              </a:buClr>
+              <a:buChar char="—"/>
+            </a:pPr>
+            <a:r>
+              <a:rPr sz="1450" b="0">
+                <a:solidFill>
+                  <a:srgbClr val="202B38"/>
+                </a:solidFill>
+                <a:latin typeface="Arial"/>
+              </a:rPr>
+              <a:t>Why 5 folds? Fewer starve training; leave-one-out is noisy - 5 or 10 is the empirical sweet spot.</a:t>
             </a:r>
           </a:p>
           <a:p>
@@ -7891,7 +9171,7 @@
                 </a:solidFill>
                 <a:latin typeface="Arial"/>
               </a:rPr>
-              <a:t>F1 = harmonic mean of both = 0.779, high only when both are decent. Metric pairing after Andrew Ng's Machine Learning Specialization (C2, W3).</a:t>
+              <a:t>F1 = harmonic mean of both = 0.779 - a strict average that stays high only when both are decent. Metric pairing after Andrew Ng's Machine Learning Specialization (C2, W3).</a:t>
             </a:r>
           </a:p>
         </p:txBody>
@@ -9238,7 +10518,7 @@
                 </a:solidFill>
                 <a:latin typeface="Arial"/>
               </a:rPr>
-              <a:t>Model SELECTION = choosing among models and settings. Done many times, in the CHOOSE band, by cross-validation.</a:t>
+              <a:t>Selection vs assessment - in plain words: practice tests choose your strategy; the final exam grades it.</a:t>
             </a:r>
           </a:p>
           <a:p>
@@ -9258,7 +10538,27 @@
                 </a:solidFill>
                 <a:latin typeface="Arial"/>
               </a:rPr>
-              <a:t>Model ASSESSMENT = grading the final choice. Done once, in the REPORT band. Select on the test set and its score stops being a forecast.</a:t>
+              <a:t>Model SELECTION: choose among models and settings - done many times, in the CHOOSE band, by cross-validation.</a:t>
+            </a:r>
+          </a:p>
+          <a:p>
+            <a:pPr algn="l" indent="-228600" marL="228600">
+              <a:spcAft>
+                <a:spcPts val="800"/>
+              </a:spcAft>
+              <a:buClr>
+                <a:srgbClr val="1E5EF3"/>
+              </a:buClr>
+              <a:buChar char="—"/>
+            </a:pPr>
+            <a:r>
+              <a:rPr sz="1450" b="0">
+                <a:solidFill>
+                  <a:srgbClr val="202B38"/>
+                </a:solidFill>
+                <a:latin typeface="Arial"/>
+              </a:rPr>
+              <a:t>Model ASSESSMENT: grade the final choice - done once, in the REPORT band. You only sit the final once.</a:t>
             </a:r>
           </a:p>
           <a:p>
@@ -11066,7 +12366,7 @@
                 </a:solidFill>
                 <a:latin typeface="Arial"/>
               </a:rPr>
-              <a:t>Almost every learning algorithm does the same thing: among all candidate rules in its family, return the one with the lowest average loss on the training rows.</a:t>
+              <a:t>Empirical risk minimization - in plain words: studying from past exams: pick the strategy with the fewest mistakes on old exams.</a:t>
             </a:r>
           </a:p>
           <a:p>
@@ -11086,7 +12386,7 @@
                 </a:solidFill>
                 <a:latin typeface="Arial"/>
               </a:rPr>
-              <a:t>That average is the empirical risk - measured on the sample you have, not on the future you care about. Training loss is only a stand-in for real-world error.</a:t>
+              <a:t>That is what almost every learner does: scan its family of rules, keep the lowest average loss on the training rows.</a:t>
             </a:r>
           </a:p>
           <a:p>
@@ -11106,7 +12406,7 @@
                 </a:solidFill>
                 <a:latin typeface="Arial"/>
               </a:rPr>
-              <a:t>The catch: make the family flexible enough and some rule always scores perfectly on the past - it simply memorizes every row.</a:t>
+              <a:t>'Empirical risk' just means: the average miss on the sample you HAVE - a stand-in for the future you care about.</a:t>
             </a:r>
           </a:p>
           <a:p>
@@ -11126,7 +12426,27 @@
                 </a:solidFill>
                 <a:latin typeface="Arial"/>
               </a:rPr>
-              <a:t>So a perfect training score proves nothing about tomorrow. The rest of Part 1 is about closing that gap honestly.</a:t>
+              <a:t>The catch: a flexible enough strategy just memorizes the answer sheet - some rule always aces the past.</a:t>
+            </a:r>
+          </a:p>
+          <a:p>
+            <a:pPr algn="l" indent="-228600" marL="228600">
+              <a:spcAft>
+                <a:spcPts val="800"/>
+              </a:spcAft>
+              <a:buClr>
+                <a:srgbClr val="1E5EF3"/>
+              </a:buClr>
+              <a:buChar char="—"/>
+            </a:pPr>
+            <a:r>
+              <a:rPr sz="1450" b="0">
+                <a:solidFill>
+                  <a:srgbClr val="202B38"/>
+                </a:solidFill>
+                <a:latin typeface="Arial"/>
+              </a:rPr>
+              <a:t>So a perfect training score proves nothing about tomorrow. The rest of Part 1 closes that gap honestly.</a:t>
             </a:r>
           </a:p>
         </p:txBody>
@@ -11543,7 +12863,7 @@
                 </a:solidFill>
                 <a:latin typeface="Arial"/>
               </a:rPr>
-              <a:t>Generalization = doing well on rows the model has never seen. Only that is the report card: training error can always be driven down by memorizing.</a:t>
+              <a:t>Generalization - in plain words: doing well on rows the model has never seen. Only that is the report card.</a:t>
             </a:r>
           </a:p>
           <a:p>
@@ -11563,7 +12883,7 @@
                 </a:solidFill>
                 <a:latin typeface="Arial"/>
               </a:rPr>
-              <a:t>Ng's diagnostic: read TWO numbers. The training error itself is the bias signal - too high means the model is too simple even for the past.</a:t>
+              <a:t>Ng's diagnostic: read TWO numbers - the training error, and the gap to the validation (practice-test) error.</a:t>
             </a:r>
           </a:p>
           <a:p>
@@ -11583,7 +12903,7 @@
                 </a:solidFill>
                 <a:latin typeface="Arial"/>
               </a:rPr>
-              <a:t>The gap between training and validation error is the variance signal - too wide means it memorized quirks that do not travel.</a:t>
+              <a:t>Training error too high = bias: the model is too simple even for the past it studied.</a:t>
             </a:r>
           </a:p>
           <a:p>
@@ -11603,7 +12923,27 @@
                 </a:solidFill>
                 <a:latin typeface="Arial"/>
               </a:rPr>
-              <a:t>Ng's labeled teaching examples: train 1% / dev 11% = variance problem; train 15% / dev 16% = bias problem.</a:t>
+              <a:t>Gap too wide = variance: it memorized quirks that do not travel to new rows.</a:t>
+            </a:r>
+          </a:p>
+          <a:p>
+            <a:pPr algn="l" indent="-228600" marL="228600">
+              <a:spcAft>
+                <a:spcPts val="800"/>
+              </a:spcAft>
+              <a:buClr>
+                <a:srgbClr val="1E5EF3"/>
+              </a:buClr>
+              <a:buChar char="—"/>
+            </a:pPr>
+            <a:r>
+              <a:rPr sz="1450" b="0">
+                <a:solidFill>
+                  <a:srgbClr val="202B38"/>
+                </a:solidFill>
+                <a:latin typeface="Arial"/>
+              </a:rPr>
+              <a:t>Ng's teaching examples: train 1% / dev 11% = variance problem; train 15% / dev 16% = bias problem.</a:t>
             </a:r>
           </a:p>
           <a:p>
@@ -12040,7 +13380,7 @@
                 </a:solidFill>
                 <a:latin typeface="Arial"/>
               </a:rPr>
-              <a:t>Thought experiment: refit the same model on many different samples from the same population - parallel universes - and watch the fits scatter.</a:t>
+              <a:t>Bias - in plain words: the same miss every time. Variance: a different answer every time.</a:t>
             </a:r>
           </a:p>
           <a:p>
@@ -12060,7 +13400,7 @@
                 </a:solidFill>
                 <a:latin typeface="Arial"/>
               </a:rPr>
-              <a:t>Simple families form a tight bundle: they miss the same way every time. That systematic miss is bias.</a:t>
+              <a:t>Thought experiment: refit the same model on many fresh samples - parallel universes - and watch the fits.</a:t>
             </a:r>
           </a:p>
           <a:p>
@@ -12080,7 +13420,7 @@
                 </a:solidFill>
                 <a:latin typeface="Arial"/>
               </a:rPr>
-              <a:t>Flexible families form spaghetti: right on average, but every sample yields a wildly different fit. That instability is variance.</a:t>
+              <a:t>Simple families form a tight bundle: they all miss the curve the same way. That shared miss is bias.</a:t>
             </a:r>
           </a:p>
           <a:p>
@@ -12100,7 +13440,27 @@
                 </a:solidFill>
                 <a:latin typeface="Arial"/>
               </a:rPr>
-              <a:t>Total error = bias² + variance + noise. The noise floor ε is irreducible - your work lives in the other two terms.</a:t>
+              <a:t>Flexible families form spaghetti: right on average, wildly different every sample. That instability is variance.</a:t>
+            </a:r>
+          </a:p>
+          <a:p>
+            <a:pPr algn="l" indent="-228600" marL="228600">
+              <a:spcAft>
+                <a:spcPts val="800"/>
+              </a:spcAft>
+              <a:buClr>
+                <a:srgbClr val="1E5EF3"/>
+              </a:buClr>
+              <a:buChar char="—"/>
+            </a:pPr>
+            <a:r>
+              <a:rPr sz="1450" b="0">
+                <a:solidFill>
+                  <a:srgbClr val="202B38"/>
+                </a:solidFill>
+                <a:latin typeface="Arial"/>
+              </a:rPr>
+              <a:t>Total error = bias² + variance + noise; the noise floor ε never moves - your work lives in the other two.</a:t>
             </a:r>
           </a:p>
           <a:p>
@@ -12537,7 +13897,7 @@
                 </a:solidFill>
                 <a:latin typeface="Arial"/>
               </a:rPr>
-              <a:t>Structural error: the family is too rigid - the true rule is not in your space, so even its best member misses. Underfitting has a surname.</a:t>
+              <a:t>Structural error - in plain words: shopping in the wrong aisle - no shoe there fits you, however long you look.</a:t>
             </a:r>
           </a:p>
           <a:p>
@@ -12557,7 +13917,7 @@
                 </a:solidFill>
                 <a:latin typeface="Arial"/>
               </a:rPr>
-              <a:t>Estimation error: the family is so flexible that limited data cannot reliably point at its best member - the search lands on a memorizer. That is overfitting.</a:t>
+              <a:t>That is underfitting by its formal name: the true rule is not in your family, so even its best member misses.</a:t>
             </a:r>
           </a:p>
           <a:p>
@@ -12577,7 +13937,7 @@
                 </a:solidFill>
                 <a:latin typeface="Arial"/>
               </a:rPr>
-              <a:t>Grow flexibility and the two trade places: structural error falls, estimation error rises - their sum is U-shaped.</a:t>
+              <a:t>Estimation error: the right aisle, but too little time to try pairs - you walk out with the wrong shoe.</a:t>
             </a:r>
           </a:p>
           <a:p>
@@ -12597,7 +13957,47 @@
                 </a:solidFill>
                 <a:latin typeface="Arial"/>
               </a:rPr>
-              <a:t>This is the grammar of the U-curve. In Part 2 you will watch a real one, drawn by a decision tree growing one level at a time.</a:t>
+              <a:t>That is overfitting: a family so flexible that limited data cannot point at its best member - the search lands on a memorizer.</a:t>
+            </a:r>
+          </a:p>
+          <a:p>
+            <a:pPr algn="l" indent="-228600" marL="228600">
+              <a:spcAft>
+                <a:spcPts val="800"/>
+              </a:spcAft>
+              <a:buClr>
+                <a:srgbClr val="1E5EF3"/>
+              </a:buClr>
+              <a:buChar char="—"/>
+            </a:pPr>
+            <a:r>
+              <a:rPr sz="1450" b="0">
+                <a:solidFill>
+                  <a:srgbClr val="202B38"/>
+                </a:solidFill>
+                <a:latin typeface="Arial"/>
+              </a:rPr>
+              <a:t>Grow flexibility and the two trade places: structural falls, estimation rises - their sum is U-shaped.</a:t>
+            </a:r>
+          </a:p>
+          <a:p>
+            <a:pPr algn="l" indent="-228600" marL="228600">
+              <a:spcAft>
+                <a:spcPts val="800"/>
+              </a:spcAft>
+              <a:buClr>
+                <a:srgbClr val="1E5EF3"/>
+              </a:buClr>
+              <a:buChar char="—"/>
+            </a:pPr>
+            <a:r>
+              <a:rPr sz="1450" b="0">
+                <a:solidFill>
+                  <a:srgbClr val="202B38"/>
+                </a:solidFill>
+                <a:latin typeface="Arial"/>
+              </a:rPr>
+              <a:t>This is the grammar of the U-curve. In Part 2 a real decision tree draws one, growing one level at a time.</a:t>
             </a:r>
           </a:p>
         </p:txBody>
@@ -13014,7 +14414,7 @@
                 </a:solidFill>
                 <a:latin typeface="Arial"/>
               </a:rPr>
-              <a:t>Regularization adds a price tag to the training objective: minimize (average loss + λ × complexity). One dial trades fit against simplicity.</a:t>
+              <a:t>Regularization - in plain words: every extra wiggle costs points - flexibility on a budget.</a:t>
             </a:r>
           </a:p>
           <a:p>
@@ -13034,7 +14434,7 @@
                 </a:solidFill>
                 <a:latin typeface="Arial"/>
               </a:rPr>
-              <a:t>λ near zero trusts the data completely - memorizing is allowed. Huge λ ignores the data. The right λ follows the trend and lets the noise go.</a:t>
+              <a:t>The training goal becomes: minimize (average loss + λ × complexity); λ (lambda) is the price per wiggle.</a:t>
             </a:r>
           </a:p>
           <a:p>
@@ -13054,7 +14454,7 @@
                 </a:solidFill>
                 <a:latin typeface="Arial"/>
               </a:rPr>
-              <a:t>Ridge regression is exactly this idea for linear models: a penalty on large weights that buys a little bias to remove a lot of variance.</a:t>
+              <a:t>λ near zero: wiggles are free - memorizing allowed. Huge λ: wiggles unaffordable - the data is ignored.</a:t>
             </a:r>
           </a:p>
           <a:p>
@@ -13074,7 +14474,47 @@
                 </a:solidFill>
                 <a:latin typeface="Arial"/>
               </a:rPr>
-              <a:t>Foreshadow: Session 4 tunes max_depth and min_samples_leaf on a tree - those knobs ARE this dial. A shallow tree is a short leash.</a:t>
+              <a:t>The right λ follows the trend and lets the noise go - the middle panel.</a:t>
+            </a:r>
+          </a:p>
+          <a:p>
+            <a:pPr algn="l" indent="-228600" marL="228600">
+              <a:spcAft>
+                <a:spcPts val="800"/>
+              </a:spcAft>
+              <a:buClr>
+                <a:srgbClr val="1E5EF3"/>
+              </a:buClr>
+              <a:buChar char="—"/>
+            </a:pPr>
+            <a:r>
+              <a:rPr sz="1450" b="0">
+                <a:solidFill>
+                  <a:srgbClr val="202B38"/>
+                </a:solidFill>
+                <a:latin typeface="Arial"/>
+              </a:rPr>
+              <a:t>Ridge regression is this idea for linear models: a penalty on big weights - a little bias buys away a lot of variance.</a:t>
+            </a:r>
+          </a:p>
+          <a:p>
+            <a:pPr algn="l" indent="-228600" marL="228600">
+              <a:spcAft>
+                <a:spcPts val="800"/>
+              </a:spcAft>
+              <a:buClr>
+                <a:srgbClr val="1E5EF3"/>
+              </a:buClr>
+              <a:buChar char="—"/>
+            </a:pPr>
+            <a:r>
+              <a:rPr sz="1450" b="0">
+                <a:solidFill>
+                  <a:srgbClr val="202B38"/>
+                </a:solidFill>
+                <a:latin typeface="Arial"/>
+              </a:rPr>
+              <a:t>Foreshadow: Session 4's max_depth and min_samples_leaf knobs ARE this dial. A shallow tree is a short leash.</a:t>
             </a:r>
           </a:p>
         </p:txBody>
@@ -13491,7 +14931,7 @@
                 </a:solidFill>
                 <a:latin typeface="Arial"/>
               </a:rPr>
-              <a:t>Model families live on a spectrum: as the range of shapes they can fit grows, the ease of reading the fitted rule falls.</a:t>
+              <a:t>The trade-off - in plain words: the more shapes a family can fit, the harder its fitted rule is to read.</a:t>
             </a:r>
           </a:p>
           <a:p>
@@ -13531,7 +14971,7 @@
                 </a:solidFill>
                 <a:latin typeface="Arial"/>
               </a:rPr>
-              <a:t>Flexible is not automatically better: flexible families need more data and overfit more easily - the estimation-error trap from two slides ago.</a:t>
+              <a:t>Flexible is not automatically better: flexible families need more data and overfit more easily - the wrong-shoe trap from two slides ago.</a:t>
             </a:r>
           </a:p>
           <a:p>
@@ -13551,7 +14991,7 @@
                 </a:solidFill>
                 <a:latin typeface="Arial"/>
               </a:rPr>
-              <a:t>When a bank must explain a rejected loan, or a hospital must justify a triage call, the explainable point wins - even at some cost in raw accuracy.</a:t>
+              <a:t>When a bank must explain a rejected loan, or a hospital a triage call, the explainable point wins - even at some cost in raw accuracy.</a:t>
             </a:r>
           </a:p>
         </p:txBody>
@@ -14026,4 +15466,324 @@
   </a:objectDefaults>
   <a:extraClrSchemeLst/>
 </a:theme>
+</file>
+
+<file path=ppt/theme/theme2.xml><?xml version="1.0" encoding="utf-8"?>
+<a:theme xmlns:a="http://schemas.openxmlformats.org/drawingml/2006/main" name="Office Theme">
+  <a:themeElements>
+    <a:clrScheme name="Office">
+      <a:dk1>
+        <a:sysClr val="windowText" lastClr="000000"/>
+      </a:dk1>
+      <a:lt1>
+        <a:sysClr val="window" lastClr="FFFFFF"/>
+      </a:lt1>
+      <a:dk2>
+        <a:srgbClr val="1F497D"/>
+      </a:dk2>
+      <a:lt2>
+        <a:srgbClr val="EEECE1"/>
+      </a:lt2>
+      <a:accent1>
+        <a:srgbClr val="4F81BD"/>
+      </a:accent1>
+      <a:accent2>
+        <a:srgbClr val="C0504D"/>
+      </a:accent2>
+      <a:accent3>
+        <a:srgbClr val="9BBB59"/>
+      </a:accent3>
+      <a:accent4>
+        <a:srgbClr val="8064A2"/>
+      </a:accent4>
+      <a:accent5>
+        <a:srgbClr val="4BACC6"/>
+      </a:accent5>
+      <a:accent6>
+        <a:srgbClr val="F79646"/>
+      </a:accent6>
+      <a:hlink>
+        <a:srgbClr val="0000FF"/>
+      </a:hlink>
+      <a:folHlink>
+        <a:srgbClr val="800080"/>
+      </a:folHlink>
+    </a:clrScheme>
+    <a:fontScheme name="Office">
+      <a:majorFont>
+        <a:latin typeface="Calibri"/>
+        <a:ea typeface=""/>
+        <a:cs typeface=""/>
+        <a:font script="Jpan" typeface="ＭＳ Ｐゴシック"/>
+        <a:font script="Hang" typeface="맑은 고딕"/>
+        <a:font script="Hans" typeface="宋体"/>
+        <a:font script="Hant" typeface="新細明體"/>
+        <a:font script="Arab" typeface="Times New Roman"/>
+        <a:font script="Hebr" typeface="Times New Roman"/>
+        <a:font script="Thai" typeface="Angsana New"/>
+        <a:font script="Ethi" typeface="Nyala"/>
+        <a:font script="Beng" typeface="Vrinda"/>
+        <a:font script="Gujr" typeface="Shruti"/>
+        <a:font script="Khmr" typeface="MoolBoran"/>
+        <a:font script="Knda" typeface="Tunga"/>
+        <a:font script="Guru" typeface="Raavi"/>
+        <a:font script="Cans" typeface="Euphemia"/>
+        <a:font script="Cher" typeface="Plantagenet Cherokee"/>
+        <a:font script="Yiii" typeface="Microsoft Yi Baiti"/>
+        <a:font script="Tibt" typeface="Microsoft Himalaya"/>
+        <a:font script="Thaa" typeface="MV Boli"/>
+        <a:font script="Deva" typeface="Mangal"/>
+        <a:font script="Telu" typeface="Gautami"/>
+        <a:font script="Taml" typeface="Latha"/>
+        <a:font script="Syrc" typeface="Estrangelo Edessa"/>
+        <a:font script="Orya" typeface="Kalinga"/>
+        <a:font script="Mlym" typeface="Kartika"/>
+        <a:font script="Laoo" typeface="DokChampa"/>
+        <a:font script="Sinh" typeface="Iskoola Pota"/>
+        <a:font script="Mong" typeface="Mongolian Baiti"/>
+        <a:font script="Viet" typeface="Times New Roman"/>
+        <a:font script="Uigh" typeface="Microsoft Uighur"/>
+        <a:font script="Geor" typeface="Sylfaen"/>
+      </a:majorFont>
+      <a:minorFont>
+        <a:latin typeface="Calibri"/>
+        <a:ea typeface=""/>
+        <a:cs typeface=""/>
+        <a:font script="Jpan" typeface="ＭＳ Ｐゴシック"/>
+        <a:font script="Hang" typeface="맑은 고딕"/>
+        <a:font script="Hans" typeface="宋体"/>
+        <a:font script="Hant" typeface="新細明體"/>
+        <a:font script="Arab" typeface="Arial"/>
+        <a:font script="Hebr" typeface="Arial"/>
+        <a:font script="Thai" typeface="Cordia New"/>
+        <a:font script="Ethi" typeface="Nyala"/>
+        <a:font script="Beng" typeface="Vrinda"/>
+        <a:font script="Gujr" typeface="Shruti"/>
+        <a:font script="Khmr" typeface="DaunPenh"/>
+        <a:font script="Knda" typeface="Tunga"/>
+        <a:font script="Guru" typeface="Raavi"/>
+        <a:font script="Cans" typeface="Euphemia"/>
+        <a:font script="Cher" typeface="Plantagenet Cherokee"/>
+        <a:font script="Yiii" typeface="Microsoft Yi Baiti"/>
+        <a:font script="Tibt" typeface="Microsoft Himalaya"/>
+        <a:font script="Thaa" typeface="MV Boli"/>
+        <a:font script="Deva" typeface="Mangal"/>
+        <a:font script="Telu" typeface="Gautami"/>
+        <a:font script="Taml" typeface="Latha"/>
+        <a:font script="Syrc" typeface="Estrangelo Edessa"/>
+        <a:font script="Orya" typeface="Kalinga"/>
+        <a:font script="Mlym" typeface="Kartika"/>
+        <a:font script="Laoo" typeface="DokChampa"/>
+        <a:font script="Sinh" typeface="Iskoola Pota"/>
+        <a:font script="Mong" typeface="Mongolian Baiti"/>
+        <a:font script="Viet" typeface="Arial"/>
+        <a:font script="Uigh" typeface="Microsoft Uighur"/>
+        <a:font script="Geor" typeface="Sylfaen"/>
+      </a:minorFont>
+    </a:fontScheme>
+    <a:fmtScheme name="Office">
+      <a:fillStyleLst>
+        <a:solidFill>
+          <a:schemeClr val="phClr"/>
+        </a:solidFill>
+        <a:gradFill rotWithShape="1">
+          <a:gsLst>
+            <a:gs pos="0">
+              <a:schemeClr val="phClr">
+                <a:tint val="50000"/>
+                <a:satMod val="300000"/>
+              </a:schemeClr>
+            </a:gs>
+            <a:gs pos="35000">
+              <a:schemeClr val="phClr">
+                <a:tint val="37000"/>
+                <a:satMod val="300000"/>
+              </a:schemeClr>
+            </a:gs>
+            <a:gs pos="100000">
+              <a:schemeClr val="phClr">
+                <a:tint val="15000"/>
+                <a:satMod val="350000"/>
+              </a:schemeClr>
+            </a:gs>
+          </a:gsLst>
+          <a:lin ang="16200000" scaled="1"/>
+        </a:gradFill>
+        <a:gradFill rotWithShape="1">
+          <a:gsLst>
+            <a:gs pos="0">
+              <a:schemeClr val="phClr">
+                <a:tint val="100000"/>
+                <a:shade val="100000"/>
+                <a:satMod val="130000"/>
+              </a:schemeClr>
+            </a:gs>
+            <a:gs pos="100000">
+              <a:schemeClr val="phClr">
+                <a:tint val="50000"/>
+                <a:shade val="100000"/>
+                <a:satMod val="350000"/>
+              </a:schemeClr>
+            </a:gs>
+          </a:gsLst>
+          <a:lin ang="16200000" scaled="0"/>
+        </a:gradFill>
+      </a:fillStyleLst>
+      <a:lnStyleLst>
+        <a:ln w="9525" cap="flat" cmpd="sng" algn="ctr">
+          <a:solidFill>
+            <a:schemeClr val="phClr">
+              <a:shade val="95000"/>
+              <a:satMod val="105000"/>
+            </a:schemeClr>
+          </a:solidFill>
+          <a:prstDash val="solid"/>
+        </a:ln>
+        <a:ln w="25400" cap="flat" cmpd="sng" algn="ctr">
+          <a:solidFill>
+            <a:schemeClr val="phClr"/>
+          </a:solidFill>
+          <a:prstDash val="solid"/>
+        </a:ln>
+        <a:ln w="38100" cap="flat" cmpd="sng" algn="ctr">
+          <a:solidFill>
+            <a:schemeClr val="phClr"/>
+          </a:solidFill>
+          <a:prstDash val="solid"/>
+        </a:ln>
+      </a:lnStyleLst>
+      <a:effectStyleLst>
+        <a:effectStyle>
+          <a:effectLst>
+            <a:outerShdw blurRad="40000" dist="20000" dir="5400000" rotWithShape="0">
+              <a:srgbClr val="000000">
+                <a:alpha val="38000"/>
+              </a:srgbClr>
+            </a:outerShdw>
+          </a:effectLst>
+        </a:effectStyle>
+        <a:effectStyle>
+          <a:effectLst>
+            <a:outerShdw blurRad="40000" dist="23000" dir="5400000" rotWithShape="0">
+              <a:srgbClr val="000000">
+                <a:alpha val="35000"/>
+              </a:srgbClr>
+            </a:outerShdw>
+          </a:effectLst>
+        </a:effectStyle>
+        <a:effectStyle>
+          <a:effectLst>
+            <a:outerShdw blurRad="40000" dist="23000" dir="5400000" rotWithShape="0">
+              <a:srgbClr val="000000">
+                <a:alpha val="35000"/>
+              </a:srgbClr>
+            </a:outerShdw>
+          </a:effectLst>
+          <a:scene3d>
+            <a:camera prst="orthographicFront">
+              <a:rot lat="0" lon="0" rev="0"/>
+            </a:camera>
+            <a:lightRig rig="threePt" dir="t">
+              <a:rot lat="0" lon="0" rev="1200000"/>
+            </a:lightRig>
+          </a:scene3d>
+          <a:sp3d>
+            <a:bevelT w="63500" h="25400"/>
+          </a:sp3d>
+        </a:effectStyle>
+      </a:effectStyleLst>
+      <a:bgFillStyleLst>
+        <a:solidFill>
+          <a:schemeClr val="phClr"/>
+        </a:solidFill>
+        <a:gradFill rotWithShape="1">
+          <a:gsLst>
+            <a:gs pos="0">
+              <a:schemeClr val="phClr">
+                <a:tint val="40000"/>
+                <a:satMod val="350000"/>
+              </a:schemeClr>
+            </a:gs>
+            <a:gs pos="40000">
+              <a:schemeClr val="phClr">
+                <a:tint val="45000"/>
+                <a:shade val="99000"/>
+                <a:satMod val="350000"/>
+              </a:schemeClr>
+            </a:gs>
+            <a:gs pos="100000">
+              <a:schemeClr val="phClr">
+                <a:shade val="20000"/>
+                <a:satMod val="255000"/>
+              </a:schemeClr>
+            </a:gs>
+          </a:gsLst>
+          <a:path path="circle">
+            <a:fillToRect l="50000" t="-80000" r="50000" b="180000"/>
+          </a:path>
+        </a:gradFill>
+        <a:gradFill rotWithShape="1">
+          <a:gsLst>
+            <a:gs pos="0">
+              <a:schemeClr val="phClr">
+                <a:tint val="80000"/>
+                <a:satMod val="300000"/>
+              </a:schemeClr>
+            </a:gs>
+            <a:gs pos="100000">
+              <a:schemeClr val="phClr">
+                <a:shade val="30000"/>
+                <a:satMod val="200000"/>
+              </a:schemeClr>
+            </a:gs>
+          </a:gsLst>
+          <a:path path="circle">
+            <a:fillToRect l="50000" t="50000" r="50000" b="50000"/>
+          </a:path>
+        </a:gradFill>
+      </a:bgFillStyleLst>
+    </a:fmtScheme>
+  </a:themeElements>
+  <a:objectDefaults>
+    <a:spDef>
+      <a:spPr/>
+      <a:bodyPr/>
+      <a:lstStyle/>
+      <a:style>
+        <a:lnRef idx="1">
+          <a:schemeClr val="accent1"/>
+        </a:lnRef>
+        <a:fillRef idx="3">
+          <a:schemeClr val="accent1"/>
+        </a:fillRef>
+        <a:effectRef idx="2">
+          <a:schemeClr val="accent1"/>
+        </a:effectRef>
+        <a:fontRef idx="minor">
+          <a:schemeClr val="lt1"/>
+        </a:fontRef>
+      </a:style>
+    </a:spDef>
+    <a:lnDef>
+      <a:spPr/>
+      <a:bodyPr/>
+      <a:lstStyle/>
+      <a:style>
+        <a:lnRef idx="2">
+          <a:schemeClr val="accent1"/>
+        </a:lnRef>
+        <a:fillRef idx="0">
+          <a:schemeClr val="accent1"/>
+        </a:fillRef>
+        <a:effectRef idx="1">
+          <a:schemeClr val="accent1"/>
+        </a:effectRef>
+        <a:fontRef idx="minor">
+          <a:schemeClr val="tx1"/>
+        </a:fontRef>
+      </a:style>
+    </a:lnDef>
+  </a:objectDefaults>
+  <a:extraClrSchemeLst/>
+</a:theme>
 </file>
--- a/presentations/m2-session-3-model-selection-and-evaluation.pptx
+++ b/presentations/m2-session-3-model-selection-and-evaluation.pptx
@@ -732,7 +732,7 @@
           <a:lstStyle/>
           <a:p>
             <a:r>
-              <a:t>This is the theory chapter drawn by real data. Depth is the aisle-size dial: too shallow and the family cannot hold a good rule (wrong aisle); past depth 3 the tree starts memorizing the 712 training rows (right aisle, wrong shoe). The grey line only climbs because memorizing always improves the score on the questions you studied. Ask the class: the honest peak is 0.815, not 1.00 - what did Session 1 call the part no model can ever predict?</a:t>
+              <a:t>This is the theory chapter drawn by real data. Depth is the aisle-size dial: too shallow and the family cannot hold a good rule (wrong aisle); past depth 3 the tree starts memorizing the 712 training rows (right aisle, wrong shoe). The grey line only climbs because memorizing always improves the score on the questions you studied. Ask the class: the honest peak is 0.815, not 1.00 - which part of the outcome can no model ever predict? (The noise term ε on the slide.)</a:t>
             </a:r>
           </a:p>
         </p:txBody>
@@ -942,7 +942,7 @@
           <a:lstStyle/>
           <a:p>
             <a:r>
-              <a:t>Two numbers, one diagnosis: how wrong on the material it studied (bias), and how much worse on the practice test (variance). Note for the class that 'dev set' is Ng's word for the validation set. Walk the two example cards into their grid cells before naming the cures. Ask the class: train 2%, validation 3% - which box, and do you change anything?</a:t>
+              <a:t>Two numbers, one diagnosis: how wrong on the material it studied (bias), and how much worse on the practice test (variance). If students read Ng later: he calls the validation set the 'dev set' - same thing. Walk the two example cards into their grid cells before naming the cures. Ask the class: train 2%, validation 3% - which box, and do you change anything?</a:t>
             </a:r>
           </a:p>
         </p:txBody>
@@ -4571,7 +4571,7 @@
                 </a:solidFill>
                 <a:latin typeface="Arial"/>
               </a:rPr>
-              <a:t>Six ways to guess who lives on the manifest, one fair referee to keep them honest - and a floor every contestant must beat.</a:t>
+              <a:t>Six models compete to predict who survived the Titanic, one fair referee keeps them honest - and there is a floor every contestant must beat.</a:t>
             </a:r>
           </a:p>
         </p:txBody>
@@ -4884,7 +4884,7 @@
                 </a:solidFill>
                 <a:latin typeface="Arial"/>
               </a:rPr>
-              <a:t>Cross-validation - in plain words: five practice tests instead of one - each fifth of the data sits out once as judge.</a:t>
+              <a:t>Cross-validation - in plain words: five practice tests instead of one.</a:t>
             </a:r>
           </a:p>
           <a:p>
@@ -4904,7 +4904,7 @@
                 </a:solidFill>
                 <a:latin typeface="Arial"/>
               </a:rPr>
-              <a:t>Why rotate? One practice test can be lucky or unlucky; the average of five is hard to fool.</a:t>
+              <a:t>How to read it: each row is one round; each block one fold, ~142 of the 712 training rows.</a:t>
             </a:r>
           </a:p>
           <a:p>
@@ -4924,7 +4924,7 @@
                 </a:solidFill>
                 <a:latin typeface="Arial"/>
               </a:rPr>
-              <a:t>Five honest scores show the mean AND the wobble (the spread, std) - stability becomes visible.</a:t>
+              <a:t>The blue block sits out as that round's judge - every row judges exactly once.</a:t>
             </a:r>
           </a:p>
           <a:p>
@@ -4944,7 +4944,7 @@
                 </a:solidFill>
                 <a:latin typeface="Arial"/>
               </a:rPr>
-              <a:t>Subtle but crucial: CV scores the recipe (algorithm + settings), not one baked cake.</a:t>
+              <a:t>Five honest scores give a mean AND a wobble (the spread) - stability becomes visible.</a:t>
             </a:r>
           </a:p>
           <a:p>
@@ -4964,7 +4964,7 @@
                 </a:solidFill>
                 <a:latin typeface="Arial"/>
               </a:rPr>
-              <a:t>Why 5 folds? Fewer starve training; leave-one-out is noisy - 5 or 10 is the empirical sweet spot.</a:t>
+              <a:t>Subtle but crucial: CV scores the recipe (algorithm + settings), not one baked cake.</a:t>
             </a:r>
           </a:p>
           <a:p>
@@ -4984,7 +4984,27 @@
                 </a:solidFill>
                 <a:latin typeface="Arial"/>
               </a:rPr>
-              <a:t>The real test set is never touched - CV lives entirely inside the CHOOSE band.</a:t>
+              <a:t>Why 5 folds? Fewer starve training; leave-one-out is noisy - 5 or 10 is the sweet spot.</a:t>
+            </a:r>
+          </a:p>
+          <a:p>
+            <a:pPr algn="l" indent="-228600" marL="228600">
+              <a:spcAft>
+                <a:spcPts val="800"/>
+              </a:spcAft>
+              <a:buClr>
+                <a:srgbClr val="1E5EF3"/>
+              </a:buClr>
+              <a:buChar char="—"/>
+            </a:pPr>
+            <a:r>
+              <a:rPr sz="1450" b="0">
+                <a:solidFill>
+                  <a:srgbClr val="202B38"/>
+                </a:solidFill>
+                <a:latin typeface="Arial"/>
+              </a:rPr>
+              <a:t>The real 179 test rows are never touched - CV lives entirely inside the CHOOSE band.</a:t>
             </a:r>
           </a:p>
         </p:txBody>
@@ -5006,7 +5026,7 @@
         <p:spPr>
           <a:xfrm>
             <a:off x="5120640" y="1874519"/>
-            <a:ext cx="6492240" cy="3654159"/>
+            <a:ext cx="6492240" cy="3413646"/>
           </a:xfrm>
           <a:prstGeom prst="rect">
             <a:avLst/>
@@ -6038,7 +6058,7 @@
                           </a:solidFill>
                           <a:latin typeface="Arial"/>
                         </a:rPr>
-                        <a:t>Ask the 5 passengers most similar to Frankie</a:t>
+                        <a:t>Ask the 5 most similar passengers, then let them vote</a:t>
                       </a:r>
                     </a:p>
                   </a:txBody>
@@ -6486,7 +6506,7 @@
                 </a:solidFill>
                 <a:latin typeface="Arial"/>
               </a:rPr>
-              <a:t>A model is a function with adjustable knobs ("parameters"); training turns the knobs until predictions match the examples.</a:t>
+              <a:t>A model = a function with adjustable knobs ("parameters"). "Needs scaling" = wants all features on one ruler first: Fare runs 0-512, Age 0-80 - Fare would shout, Age whisper.</a:t>
             </a:r>
           </a:p>
         </p:txBody>
@@ -6526,7 +6546,7 @@
                 </a:solidFill>
                 <a:latin typeface="Arial"/>
               </a:rPr>
-              <a:t>Session 1's recipe, refilled six times: each contestant is a different filling of the MODEL slot - the loss and the referee stay the same for everyone. (MIT 6.390, Appendix C)</a:t>
+              <a:t>One recipe, six fillings: only the MODEL changes - the data prep, the loss (mistake counter) and the referee stay identical for all six. (MIT 6.390, Appendix C)</a:t>
             </a:r>
           </a:p>
         </p:txBody>
@@ -6879,7 +6899,7 @@
                 </a:solidFill>
                 <a:latin typeface="Arial"/>
               </a:rPr>
-              <a:t>Let a decision tree grow without limits, then grade it on its own training data: 0.985. Grade it honestly with cross-validation: 0.751.</a:t>
+              <a:t>Let a decision tree grow with no depth limit, then grade it twice.</a:t>
             </a:r>
           </a:p>
           <a:p>
@@ -6899,7 +6919,7 @@
                 </a:solidFill>
                 <a:latin typeface="Arial"/>
               </a:rPr>
-              <a:t>It memorized the answers instead of learning the subject - like grading students on the exact questions they practiced at home.</a:t>
+              <a:t>Graded on its own training data: 0.985. Graded on five honest practice tests: 0.751.</a:t>
             </a:r>
           </a:p>
           <a:p>
@@ -6919,7 +6939,7 @@
                 </a:solidFill>
                 <a:latin typeface="Arial"/>
               </a:rPr>
-              <a:t>This is Rule D from the ERM slide, caught in the act: the flexible candidate aces the past and stumbles on fresh rows.</a:t>
+              <a:t>It memorized the answers - like grading students on the exact questions they practiced at home.</a:t>
             </a:r>
           </a:p>
           <a:p>
@@ -6939,7 +6959,27 @@
                 </a:solidFill>
                 <a:latin typeface="Arial"/>
               </a:rPr>
-              <a:t>Read it with the two-number grid: training error low, gap 0.233 wide - the high-variance box.</a:t>
+              <a:t>This is Rule D from the ERM table, caught in the act.</a:t>
+            </a:r>
+          </a:p>
+          <a:p>
+            <a:pPr algn="l" indent="-228600" marL="228600">
+              <a:spcAft>
+                <a:spcPts val="800"/>
+              </a:spcAft>
+              <a:buClr>
+                <a:srgbClr val="1E5EF3"/>
+              </a:buClr>
+              <a:buChar char="—"/>
+            </a:pPr>
+            <a:r>
+              <a:rPr sz="1450" b="0">
+                <a:solidFill>
+                  <a:srgbClr val="202B38"/>
+                </a:solidFill>
+                <a:latin typeface="Arial"/>
+              </a:rPr>
+              <a:t>On Ng's grid: training error low, gap 0.233 wide - the high-variance box.</a:t>
             </a:r>
           </a:p>
           <a:p>
@@ -7413,7 +7453,7 @@
                 </a:solidFill>
                 <a:latin typeface="Arial"/>
               </a:rPr>
-              <a:t>Dummy baseline, 5-fold CV accuracy (+/- 0.003). It ignores the data and always predicts "died".</a:t>
+              <a:t>Dummy baseline, 5-fold CV accuracy (+/- 0.003). It always predicts "died" - and 61.7% of training passengers did die, so it is right 61.7% of the time.</a:t>
             </a:r>
           </a:p>
         </p:txBody>
@@ -7806,7 +7846,7 @@
                 </a:solidFill>
                 <a:latin typeface="Arial"/>
               </a:rPr>
-              <a:t>Same referee for all six: 5-fold CV, preprocessing re-fit inside every fold - no leaks.</a:t>
+              <a:t>How to read it: each bar = one model's average score over the 5 practice tests.</a:t>
             </a:r>
           </a:p>
           <a:p>
@@ -7826,7 +7866,7 @@
                 </a:solidFill>
                 <a:latin typeface="Arial"/>
               </a:rPr>
-              <a:t>Logistic Regression leads at 0.819. Gradient Boosting is a close second at 0.816.</a:t>
+              <a:t>The whisker = the wobble across those 5 tests. Dashed line = the Dummy floor.</a:t>
             </a:r>
           </a:p>
           <a:p>
@@ -7846,7 +7886,7 @@
                 </a:solidFill>
                 <a:latin typeface="Arial"/>
               </a:rPr>
-              <a:t>Those error bars are Part 1's spaghetti, measured: the 5 folds are 5 mini-universes, and Random Forest wobbles most (+/- 0.054) while the scorecard barely moves (+/- 0.020).</a:t>
+              <a:t>Fair referee: preprocessing re-fit inside every fold, so no fold can leak.</a:t>
             </a:r>
           </a:p>
           <a:p>
@@ -7866,7 +7906,7 @@
                 </a:solidFill>
                 <a:latin typeface="Arial"/>
               </a:rPr>
-              <a:t>Every real model clears the floor. The Dummy's F1 is 0.000 - it never predicts "survived".</a:t>
+              <a:t>Logistic Regression leads at 0.819; Gradient Boosting is a close second at 0.816.</a:t>
             </a:r>
           </a:p>
           <a:p>
@@ -7886,7 +7926,47 @@
                 </a:solidFill>
                 <a:latin typeface="Arial"/>
               </a:rPr>
-              <a:t>The surprise: fancy does not automatically mean better.</a:t>
+              <a:t>Whiskers are Part 1's spaghetti, measured: Random Forest wobbles most (+/- 0.054), the scorecard least (+/- 0.020).</a:t>
+            </a:r>
+          </a:p>
+          <a:p>
+            <a:pPr algn="l" indent="-228600" marL="228600">
+              <a:spcAft>
+                <a:spcPts val="800"/>
+              </a:spcAft>
+              <a:buClr>
+                <a:srgbClr val="1E5EF3"/>
+              </a:buClr>
+              <a:buChar char="—"/>
+            </a:pPr>
+            <a:r>
+              <a:rPr sz="1450" b="0">
+                <a:solidFill>
+                  <a:srgbClr val="202B38"/>
+                </a:solidFill>
+                <a:latin typeface="Arial"/>
+              </a:rPr>
+              <a:t>All five real models clear the floor. The Dummy's F1 (a stricter metric, two slides on) is 0.000: it never says "survived".</a:t>
+            </a:r>
+          </a:p>
+          <a:p>
+            <a:pPr algn="l" indent="-228600" marL="228600">
+              <a:spcAft>
+                <a:spcPts val="800"/>
+              </a:spcAft>
+              <a:buClr>
+                <a:srgbClr val="1E5EF3"/>
+              </a:buClr>
+              <a:buChar char="—"/>
+            </a:pPr>
+            <a:r>
+              <a:rPr sz="1450" b="0">
+                <a:solidFill>
+                  <a:srgbClr val="202B38"/>
+                </a:solidFill>
+                <a:latin typeface="Arial"/>
+              </a:rPr>
+              <a:t>The surprise: the humble scorecard wins - fancy does not automatically mean better.</a:t>
             </a:r>
           </a:p>
         </p:txBody>
@@ -7950,7 +8030,7 @@
                 </a:solidFill>
                 <a:latin typeface="Arial"/>
               </a:rPr>
-              <a:t>Mean 5-fold CV accuracy, +/- 1 std. Module 2, notebook 2.</a:t>
+              <a:t>Mean 5-fold CV accuracy, +/- 1 std; axis starts at 0.55 to magnify the differences. Module 2, notebook 2.</a:t>
             </a:r>
           </a:p>
         </p:txBody>
@@ -8303,7 +8383,7 @@
                 </a:solidFill>
                 <a:latin typeface="Arial"/>
               </a:rPr>
-              <a:t>A disease hits 1 in 100 people. A model that always says "no disease" is 99% accurate - and worthless.</a:t>
+              <a:t>The trap: a disease hits 1 in 100. "Always say no disease" is 99% accurate - and worthless.</a:t>
             </a:r>
           </a:p>
           <a:p>
@@ -8323,7 +8403,7 @@
                 </a:solidFill>
                 <a:latin typeface="Arial"/>
               </a:rPr>
-              <a:t>Confusion matrix = a count of the four ways a prediction can go right or wrong - and every metric you will ever meet is just arithmetic on these four counts.</a:t>
+              <a:t>Confusion matrix = the four ways a prediction can go right or wrong, counted.</a:t>
             </a:r>
           </a:p>
           <a:p>
@@ -8343,7 +8423,7 @@
                 </a:solidFill>
                 <a:latin typeface="Arial"/>
               </a:rPr>
-              <a:t>Our champion on the 179 test passengers: 99 correct "died" (TN), 51 correct "survived" (TP).</a:t>
+              <a:t>How to read it: rows = what really happened, columns = the model's call. Dark cells = correct.</a:t>
             </a:r>
           </a:p>
           <a:p>
@@ -8363,7 +8443,7 @@
                 </a:solidFill>
                 <a:latin typeface="Arial"/>
               </a:rPr>
-              <a:t>11 false alarms (predicted survived, did not) and 18 missed survivors.</a:t>
+              <a:t>Champion on the 179 test passengers: 99 correct "died" (TN), 51 correct "survived" (TP).</a:t>
             </a:r>
           </a:p>
           <a:p>
@@ -8383,7 +8463,27 @@
                 </a:solidFill>
                 <a:latin typeface="Arial"/>
               </a:rPr>
-              <a:t>One number became four. Now we can ask sharper questions.</a:t>
+              <a:t>The mistakes: 11 false alarms (said survived, died) and 18 missed survivors (said died, survived).</a:t>
+            </a:r>
+          </a:p>
+          <a:p>
+            <a:pPr algn="l" indent="-228600" marL="228600">
+              <a:spcAft>
+                <a:spcPts val="800"/>
+              </a:spcAft>
+              <a:buClr>
+                <a:srgbClr val="1E5EF3"/>
+              </a:buClr>
+              <a:buChar char="—"/>
+            </a:pPr>
+            <a:r>
+              <a:rPr sz="1450" b="0">
+                <a:solidFill>
+                  <a:srgbClr val="202B38"/>
+                </a:solidFill>
+                <a:latin typeface="Arial"/>
+              </a:rPr>
+              <a:t>One number became four. Every metric you will ever meet is arithmetic on these four counts.</a:t>
             </a:r>
           </a:p>
         </p:txBody>
@@ -9171,7 +9271,7 @@
                 </a:solidFill>
                 <a:latin typeface="Arial"/>
               </a:rPr>
-              <a:t>F1 = harmonic mean of both = 0.779 - a strict average that stays high only when both are decent. Metric pairing after Andrew Ng's Machine Learning Specialization (C2, W3).</a:t>
+              <a:t>TP, FP, FN are the confusion-matrix cells from the last slide. F1 = a strict average (harmonic mean) of precision and recall = 0.779 - high only when both are decent. Metric pairing after Ng's ML Specialization (C2, W3).</a:t>
             </a:r>
           </a:p>
         </p:txBody>
@@ -9524,7 +9624,7 @@
                 </a:solidFill>
                 <a:latin typeface="Arial"/>
               </a:rPr>
-              <a:t>Grow the tree one level at a time. Training accuracy climbs to 0.985 and never looks back.</a:t>
+              <a:t>How to read it: x = tree depth (deeper = more flexible); y = accuracy, so HIGHER is better.</a:t>
             </a:r>
           </a:p>
           <a:p>
@@ -9544,7 +9644,7 @@
                 </a:solidFill>
                 <a:latin typeface="Arial"/>
               </a:rPr>
-              <a:t>The honest CV score peaks at 0.815 at depth 3, then slides. At depth 20 the gap is 0.236 - memorizing, not learning.</a:t>
+              <a:t>Grey = score on its own training data: climbs to 0.985 and never looks back.</a:t>
             </a:r>
           </a:p>
           <a:p>
@@ -9564,7 +9664,7 @@
                 </a:solidFill>
                 <a:latin typeface="Arial"/>
               </a:rPr>
-              <a:t>This is Part 1's two-zone diagram drawn by real data: left of the peak, structural error dominates (family too rigid); right of it, estimation error takes over. Every dial Session 4 turns moves along this axis.</a:t>
+              <a:t>Blue = the honest CV score: peaks at 0.815 at depth 3, then slides.</a:t>
             </a:r>
           </a:p>
           <a:p>
@@ -9584,7 +9684,67 @@
                 </a:solidFill>
                 <a:latin typeface="Arial"/>
               </a:rPr>
-              <a:t>Why does the honest curve peak at 0.815, not 1.00? The irreducible floor: the outcome is a hidden rule plus noise, Y = f(X) + ε, and nothing can predict the ε.</a:t>
+              <a:t>The gap between the curves is memorization. At depth 20 it is 0.236.</a:t>
+            </a:r>
+          </a:p>
+          <a:p>
+            <a:pPr algn="l" indent="-228600" marL="228600">
+              <a:spcAft>
+                <a:spcPts val="800"/>
+              </a:spcAft>
+              <a:buClr>
+                <a:srgbClr val="1E5EF3"/>
+              </a:buClr>
+              <a:buChar char="—"/>
+            </a:pPr>
+            <a:r>
+              <a:rPr sz="1450" b="0">
+                <a:solidFill>
+                  <a:srgbClr val="202B38"/>
+                </a:solidFill>
+                <a:latin typeface="Arial"/>
+              </a:rPr>
+              <a:t>This is Part 1's U on real data, flipped: y is accuracy, so the sweet spot is a PEAK.</a:t>
+            </a:r>
+          </a:p>
+          <a:p>
+            <a:pPr algn="l" indent="-228600" marL="228600">
+              <a:spcAft>
+                <a:spcPts val="800"/>
+              </a:spcAft>
+              <a:buClr>
+                <a:srgbClr val="1E5EF3"/>
+              </a:buClr>
+              <a:buChar char="—"/>
+            </a:pPr>
+            <a:r>
+              <a:rPr sz="1450" b="0">
+                <a:solidFill>
+                  <a:srgbClr val="202B38"/>
+                </a:solidFill>
+                <a:latin typeface="Arial"/>
+              </a:rPr>
+              <a:t>Left of depth 3: too rigid (structural error). Right of it: memorizing (estimation error).</a:t>
+            </a:r>
+          </a:p>
+          <a:p>
+            <a:pPr algn="l" indent="-228600" marL="228600">
+              <a:spcAft>
+                <a:spcPts val="800"/>
+              </a:spcAft>
+              <a:buClr>
+                <a:srgbClr val="1E5EF3"/>
+              </a:buClr>
+              <a:buChar char="—"/>
+            </a:pPr>
+            <a:r>
+              <a:rPr sz="1450" b="0">
+                <a:solidFill>
+                  <a:srgbClr val="202B38"/>
+                </a:solidFill>
+                <a:latin typeface="Arial"/>
+              </a:rPr>
+              <a:t>Why peak at 0.815, not 1.00? The outcome is rule plus noise, Y = f(X) + ε - and nothing can predict ε.</a:t>
             </a:r>
           </a:p>
         </p:txBody>
@@ -9606,7 +9766,7 @@
         <p:spPr>
           <a:xfrm>
             <a:off x="5120640" y="1874519"/>
-            <a:ext cx="6492240" cy="3951584"/>
+            <a:ext cx="6492240" cy="3559401"/>
           </a:xfrm>
           <a:prstGeom prst="rect">
             <a:avLst/>
@@ -10001,7 +10161,7 @@
                 </a:solidFill>
                 <a:latin typeface="Arial"/>
               </a:rPr>
-              <a:t>Plot the honest score against training-set size: our CV accuracy climbs from 0.758 at 56 rows to 0.819 at 569 rows - then flattens.</a:t>
+              <a:t>How to read it: x = how many rows we trained on; y = accuracy; shaded band = wobble across folds.</a:t>
             </a:r>
           </a:p>
           <a:p>
@@ -10021,7 +10181,7 @@
                 </a:solidFill>
                 <a:latin typeface="Arial"/>
               </a:rPr>
-              <a:t>Regime 1, high bias: train and CV converge close together but below the score you need. The curve has flattened - more rows cannot get you there; change the model or features, not the dataset.</a:t>
+              <a:t>Grey = score on its own training data; blue = the honest CV score.</a:t>
             </a:r>
           </a:p>
           <a:p>
@@ -10041,7 +10201,7 @@
                 </a:solidFill>
                 <a:latin typeface="Arial"/>
               </a:rPr>
-              <a:t>Regime 2, high variance: training score is fine but a wide gap separates it from CV - the curves haven't converged; more data plausibly helps.</a:t>
+              <a:t>Ours climbs from 0.758 (56 rows) to 0.819 (569 rows) - then goes flat.</a:t>
             </a:r>
           </a:p>
           <a:p>
@@ -10061,7 +10221,47 @@
                 </a:solidFill>
                 <a:latin typeface="Arial"/>
               </a:rPr>
-              <a:t>Read ours: flat and close - more passengers would buy little. Better features or settings are the lever. That is exactly Session 4's job.</a:t>
+              <a:t>Insets, high bias: the two curves meet BELOW the score you need - more rows cannot fix that.</a:t>
+            </a:r>
+          </a:p>
+          <a:p>
+            <a:pPr algn="l" indent="-228600" marL="228600">
+              <a:spcAft>
+                <a:spcPts val="800"/>
+              </a:spcAft>
+              <a:buClr>
+                <a:srgbClr val="1E5EF3"/>
+              </a:buClr>
+              <a:buChar char="—"/>
+            </a:pPr>
+            <a:r>
+              <a:rPr sz="1450" b="0">
+                <a:solidFill>
+                  <a:srgbClr val="202B38"/>
+                </a:solidFill>
+                <a:latin typeface="Arial"/>
+              </a:rPr>
+              <a:t>Insets, high variance: a wide gap still separates the curves - more data plausibly helps.</a:t>
+            </a:r>
+          </a:p>
+          <a:p>
+            <a:pPr algn="l" indent="-228600" marL="228600">
+              <a:spcAft>
+                <a:spcPts val="800"/>
+              </a:spcAft>
+              <a:buClr>
+                <a:srgbClr val="1E5EF3"/>
+              </a:buClr>
+              <a:buChar char="—"/>
+            </a:pPr>
+            <a:r>
+              <a:rPr sz="1450" b="0">
+                <a:solidFill>
+                  <a:srgbClr val="202B38"/>
+                </a:solidFill>
+                <a:latin typeface="Arial"/>
+              </a:rPr>
+              <a:t>Our verdict: flat and close, so more passengers buy little. Better settings are the lever - Session 4's job.</a:t>
             </a:r>
           </a:p>
         </p:txBody>
@@ -10478,7 +10678,7 @@
                 </a:solidFill>
                 <a:latin typeface="Arial"/>
               </a:rPr>
-              <a:t>Session 2 left a model-ready table: 712 training rows, 179 test rows, 18 features.</a:t>
+              <a:t>Where we stand: a model-ready Titanic table - 712 training rows, 179 test rows, 18 features.</a:t>
             </a:r>
           </a:p>
           <a:p>
@@ -10498,7 +10698,7 @@
                 </a:solidFill>
                 <a:latin typeface="Arial"/>
               </a:rPr>
-              <a:t>Six algorithms could predict who survived - picking by name or fashion is guessing.</a:t>
+              <a:t>Six algorithms could predict who survived. Picking by name or fashion is guessing.</a:t>
             </a:r>
           </a:p>
           <a:p>
@@ -10518,7 +10718,7 @@
                 </a:solidFill>
                 <a:latin typeface="Arial"/>
               </a:rPr>
-              <a:t>Selection vs assessment - in plain words: practice tests choose your strategy; the final exam grades it.</a:t>
+              <a:t>How to read the bar: all 891 passengers, split once. Light left = 712 training rows; dark right = 179 test rows, sealed.</a:t>
             </a:r>
           </a:p>
           <a:p>
@@ -10538,7 +10738,7 @@
                 </a:solidFill>
                 <a:latin typeface="Arial"/>
               </a:rPr>
-              <a:t>Model SELECTION: choose among models and settings - done many times, in the CHOOSE band, by cross-validation.</a:t>
+              <a:t>Model SELECTION = practice tests: try many models, always inside the training rows (the CHOOSE band).</a:t>
             </a:r>
           </a:p>
           <a:p>
@@ -10558,7 +10758,7 @@
                 </a:solidFill>
                 <a:latin typeface="Arial"/>
               </a:rPr>
-              <a:t>Model ASSESSMENT: grade the final choice - done once, in the REPORT band. You only sit the final once.</a:t>
+              <a:t>Model ASSESSMENT = the final exam: grade the winner once, on the sealed test rows (REPORT).</a:t>
             </a:r>
           </a:p>
           <a:p>
@@ -10578,7 +10778,7 @@
                 </a:solidFill>
                 <a:latin typeface="Arial"/>
               </a:rPr>
-              <a:t>Today in two parts: Part 1 is theory - how to judge a learner honestly. Part 2 is practice - the tournament that puts every idea to work.</a:t>
+              <a:t>Today: Part 1, the theory of judging honestly; Part 2, the tournament that puts it to work.</a:t>
             </a:r>
           </a:p>
         </p:txBody>
@@ -10642,7 +10842,7 @@
                 </a:solidFill>
                 <a:latin typeface="Arial"/>
               </a:rPr>
-              <a:t>One bar rules the module, re-shown from Session 2. Harvard CS109A / ISLR ch. 5 (model selection vs model assessment).</a:t>
+              <a:t>The one bar that rules Module 2 (it returns in every session). Harvard CS109A / ISLR ch. 5 (model selection vs model assessment).</a:t>
             </a:r>
           </a:p>
         </p:txBody>
@@ -11611,7 +11811,7 @@
                 </a:solidFill>
                 <a:latin typeface="Arial"/>
               </a:rPr>
-              <a:t>Part 1, the theory: training only minimizes loss on the past (ERM) - so read two numbers, and let the gap name your problem: bias or variance.</a:t>
+              <a:t>Part 1: training only minimizes loss on the past (ERM) - never trust the training score alone.</a:t>
             </a:r>
           </a:p>
           <a:p>
@@ -11631,7 +11831,7 @@
                 </a:solidFill>
                 <a:latin typeface="Arial"/>
               </a:rPr>
-              <a:t>Structural vs estimation error is the U-curve's grammar; regularization is the leash, cross-validation the honest referee - and readability is a feature, not a bonus.</a:t>
+              <a:t>Read two numbers: high training error = bias; a wide gap to the honest score = variance.</a:t>
             </a:r>
           </a:p>
           <a:p>
@@ -11651,7 +11851,7 @@
                 </a:solidFill>
                 <a:latin typeface="Arial"/>
               </a:rPr>
-              <a:t>Part 2, the practice: the floor was 0.617, the humble scorecard won at 0.819, and the locked test set was opened once: 0.838.</a:t>
+              <a:t>Too rigid (structural error) vs too flexible (estimation error) trade off - that is the U-curve.</a:t>
             </a:r>
           </a:p>
           <a:p>
@@ -11671,7 +11871,47 @@
                 </a:solidFill>
                 <a:latin typeface="Arial"/>
               </a:rPr>
-              <a:t>The real U-curve peaked at depth 3; the learning curve said more rows won't save us - better settings might (Session 4).</a:t>
+              <a:t>Regularization is the leash, cross-validation the honest referee - and readability is a feature, not a bonus.</a:t>
+            </a:r>
+          </a:p>
+          <a:p>
+            <a:pPr algn="l" indent="-228600" marL="228600">
+              <a:spcAft>
+                <a:spcPts val="1000"/>
+              </a:spcAft>
+              <a:buClr>
+                <a:srgbClr val="1E5EF3"/>
+              </a:buClr>
+              <a:buChar char="—"/>
+            </a:pPr>
+            <a:r>
+              <a:rPr sz="1600" b="0">
+                <a:solidFill>
+                  <a:srgbClr val="B9D0FA"/>
+                </a:solidFill>
+                <a:latin typeface="Arial"/>
+              </a:rPr>
+              <a:t>Part 2: the floor was 0.617, the humble scorecard won at 0.819, the sealed test set was opened once: 0.838.</a:t>
+            </a:r>
+          </a:p>
+          <a:p>
+            <a:pPr algn="l" indent="-228600" marL="228600">
+              <a:spcAft>
+                <a:spcPts val="1000"/>
+              </a:spcAft>
+              <a:buClr>
+                <a:srgbClr val="1E5EF3"/>
+              </a:buClr>
+              <a:buChar char="—"/>
+            </a:pPr>
+            <a:r>
+              <a:rPr sz="1600" b="0">
+                <a:solidFill>
+                  <a:srgbClr val="B9D0FA"/>
+                </a:solidFill>
+                <a:latin typeface="Arial"/>
+              </a:rPr>
+              <a:t>The real U peaked at depth 3; the learning curve said more rows won't save us - better settings might (Session 4).</a:t>
             </a:r>
           </a:p>
           <a:p>
@@ -12366,7 +12606,7 @@
                 </a:solidFill>
                 <a:latin typeface="Arial"/>
               </a:rPr>
-              <a:t>Empirical risk minimization - in plain words: studying from past exams: pick the strategy with the fewest mistakes on old exams.</a:t>
+              <a:t>Empirical risk minimization - in plain words: pick the rule with the fewest mistakes on past exams.</a:t>
             </a:r>
           </a:p>
           <a:p>
@@ -12386,7 +12626,7 @@
                 </a:solidFill>
                 <a:latin typeface="Arial"/>
               </a:rPr>
-              <a:t>That is what almost every learner does: scan its family of rules, keep the lowest average loss on the training rows.</a:t>
+              <a:t>Loss = how wrong a prediction is. 'Empirical' = measured on the rows we already HAVE.</a:t>
             </a:r>
           </a:p>
           <a:p>
@@ -12406,7 +12646,7 @@
                 </a:solidFill>
                 <a:latin typeface="Arial"/>
               </a:rPr>
-              <a:t>'Empirical risk' just means: the average miss on the sample you HAVE - a stand-in for the future you care about.</a:t>
+              <a:t>That is all training does: scan a family of candidate rules, keep the lowest average loss.</a:t>
             </a:r>
           </a:p>
           <a:p>
@@ -12426,7 +12666,7 @@
                 </a:solidFill>
                 <a:latin typeface="Arial"/>
               </a:rPr>
-              <a:t>The catch: a flexible enough strategy just memorizes the answer sheet - some rule always aces the past.</a:t>
+              <a:t>How to read the table: four candidate rules, ranked by train loss - their mistakes on the past.</a:t>
             </a:r>
           </a:p>
           <a:p>
@@ -12446,7 +12686,27 @@
                 </a:solidFill>
                 <a:latin typeface="Arial"/>
               </a:rPr>
-              <a:t>So a perfect training score proves nothing about tomorrow. The rest of Part 1 closes that gap honestly.</a:t>
+              <a:t>The catch: a flexible enough rule memorizes the answer sheet. Rule D scores a perfect 0.00.</a:t>
+            </a:r>
+          </a:p>
+          <a:p>
+            <a:pPr algn="l" indent="-228600" marL="228600">
+              <a:spcAft>
+                <a:spcPts val="800"/>
+              </a:spcAft>
+              <a:buClr>
+                <a:srgbClr val="1E5EF3"/>
+              </a:buClr>
+              <a:buChar char="—"/>
+            </a:pPr>
+            <a:r>
+              <a:rPr sz="1450" b="0">
+                <a:solidFill>
+                  <a:srgbClr val="202B38"/>
+                </a:solidFill>
+                <a:latin typeface="Arial"/>
+              </a:rPr>
+              <a:t>A perfect training score proves nothing about tomorrow. The rest of Part 1 closes that gap.</a:t>
             </a:r>
           </a:p>
         </p:txBody>
@@ -12468,7 +12728,7 @@
         <p:spPr>
           <a:xfrm>
             <a:off x="5120640" y="1874519"/>
-            <a:ext cx="6492240" cy="3437936"/>
+            <a:ext cx="6492240" cy="3378916"/>
           </a:xfrm>
           <a:prstGeom prst="rect">
             <a:avLst/>
@@ -12863,7 +13123,7 @@
                 </a:solidFill>
                 <a:latin typeface="Arial"/>
               </a:rPr>
-              <a:t>Generalization - in plain words: doing well on rows the model has never seen. Only that is the report card.</a:t>
+              <a:t>Generalization - in plain words: doing well on rows the model has never seen. Only that counts.</a:t>
             </a:r>
           </a:p>
           <a:p>
@@ -12883,7 +13143,7 @@
                 </a:solidFill>
                 <a:latin typeface="Arial"/>
               </a:rPr>
-              <a:t>Ng's diagnostic: read TWO numbers - the training error, and the gap to the validation (practice-test) error.</a:t>
+              <a:t>Validation score = a practice test: held-back rows the model did not train on.</a:t>
             </a:r>
           </a:p>
           <a:p>
@@ -12903,7 +13163,7 @@
                 </a:solidFill>
                 <a:latin typeface="Arial"/>
               </a:rPr>
-              <a:t>Training error too high = bias: the model is too simple even for the past it studied.</a:t>
+              <a:t>Ng's diagnostic: read TWO numbers - the training error, and the gap to the validation error.</a:t>
             </a:r>
           </a:p>
           <a:p>
@@ -12923,7 +13183,7 @@
                 </a:solidFill>
                 <a:latin typeface="Arial"/>
               </a:rPr>
-              <a:t>Gap too wide = variance: it memorized quirks that do not travel to new rows.</a:t>
+              <a:t>Training error too high = bias: too simple even for the past it studied.</a:t>
             </a:r>
           </a:p>
           <a:p>
@@ -12943,7 +13203,7 @@
                 </a:solidFill>
                 <a:latin typeface="Arial"/>
               </a:rPr>
-              <a:t>Ng's teaching examples: train 1% / dev 11% = variance problem; train 15% / dev 16% = bias problem.</a:t>
+              <a:t>Gap too wide = variance: it memorized quirks that do not travel to new rows.</a:t>
             </a:r>
           </a:p>
           <a:p>
@@ -12963,7 +13223,27 @@
                 </a:solidFill>
                 <a:latin typeface="Arial"/>
               </a:rPr>
-              <a:t>Diagnose first - the cures are different and often opposite.</a:t>
+              <a:t>How to read the grid: your two numbers pick one box - each box has a different cure. Bottom-right is worst.</a:t>
+            </a:r>
+          </a:p>
+          <a:p>
+            <a:pPr algn="l" indent="-228600" marL="228600">
+              <a:spcAft>
+                <a:spcPts val="800"/>
+              </a:spcAft>
+              <a:buClr>
+                <a:srgbClr val="1E5EF3"/>
+              </a:buClr>
+              <a:buChar char="—"/>
+            </a:pPr>
+            <a:r>
+              <a:rPr sz="1450" b="0">
+                <a:solidFill>
+                  <a:srgbClr val="202B38"/>
+                </a:solidFill>
+                <a:latin typeface="Arial"/>
+              </a:rPr>
+              <a:t>Ng's examples: train 1% / validation 11% = variance; train 15% / validation 16% = bias.</a:t>
             </a:r>
           </a:p>
         </p:txBody>
@@ -13400,7 +13680,7 @@
                 </a:solidFill>
                 <a:latin typeface="Arial"/>
               </a:rPr>
-              <a:t>Thought experiment: refit the same model on many fresh samples - parallel universes - and watch the fits.</a:t>
+              <a:t>Thought experiment: refit the same model on many fresh samples - parallel universes - and watch.</a:t>
             </a:r>
           </a:p>
           <a:p>
@@ -13420,7 +13700,7 @@
                 </a:solidFill>
                 <a:latin typeface="Arial"/>
               </a:rPr>
-              <a:t>Simple families form a tight bundle: they all miss the curve the same way. That shared miss is bias.</a:t>
+              <a:t>How to read it: one faint line = one model, fit on one fresh sample. Dashed = the true pattern.</a:t>
             </a:r>
           </a:p>
           <a:p>
@@ -13440,7 +13720,7 @@
                 </a:solidFill>
                 <a:latin typeface="Arial"/>
               </a:rPr>
-              <a:t>Flexible families form spaghetti: right on average, wildly different every sample. That instability is variance.</a:t>
+              <a:t>Left, the simple family: a tight bundle - all miss the curve the same way. That shared miss is bias.</a:t>
             </a:r>
           </a:p>
           <a:p>
@@ -13460,7 +13740,7 @@
                 </a:solidFill>
                 <a:latin typeface="Arial"/>
               </a:rPr>
-              <a:t>Total error = bias² + variance + noise; the noise floor ε never moves - your work lives in the other two.</a:t>
+              <a:t>Right, the flexible family: spaghetti - a new fit for every sample. That instability is variance.</a:t>
             </a:r>
           </a:p>
           <a:p>
@@ -13480,7 +13760,27 @@
                 </a:solidFill>
                 <a:latin typeface="Arial"/>
               </a:rPr>
-              <a:t>Hold this image: in Part 2, five cross-validation folds act as five mini-universes and make the wobble measurable.</a:t>
+              <a:t>Total error = bias² + variance + noise. The noise floor ε never shrinks - your work lives in the other two.</a:t>
+            </a:r>
+          </a:p>
+          <a:p>
+            <a:pPr algn="l" indent="-228600" marL="228600">
+              <a:spcAft>
+                <a:spcPts val="800"/>
+              </a:spcAft>
+              <a:buClr>
+                <a:srgbClr val="1E5EF3"/>
+              </a:buClr>
+              <a:buChar char="—"/>
+            </a:pPr>
+            <a:r>
+              <a:rPr sz="1450" b="0">
+                <a:solidFill>
+                  <a:srgbClr val="202B38"/>
+                </a:solidFill>
+                <a:latin typeface="Arial"/>
+              </a:rPr>
+              <a:t>Hold this image: later, five cross-validation folds act as five mini-universes.</a:t>
             </a:r>
           </a:p>
         </p:txBody>
@@ -13501,8 +13801,8 @@
         </p:blipFill>
         <p:spPr>
           <a:xfrm>
-            <a:off x="5120640" y="1874519"/>
-            <a:ext cx="6492240" cy="3982591"/>
+            <a:off x="5350988" y="1874519"/>
+            <a:ext cx="6031543" cy="4114800"/>
           </a:xfrm>
           <a:prstGeom prst="rect">
             <a:avLst/>
@@ -13897,7 +14197,7 @@
                 </a:solidFill>
                 <a:latin typeface="Arial"/>
               </a:rPr>
-              <a:t>Structural error - in plain words: shopping in the wrong aisle - no shoe there fits you, however long you look.</a:t>
+              <a:t>Structural error - in plain words: shopping in the wrong shoe aisle. No shoe there fits, however long you look.</a:t>
             </a:r>
           </a:p>
           <a:p>
@@ -13917,7 +14217,7 @@
                 </a:solidFill>
                 <a:latin typeface="Arial"/>
               </a:rPr>
-              <a:t>That is underfitting by its formal name: the true rule is not in your family, so even its best member misses.</a:t>
+              <a:t>That is underfitting: the true rule is not in your family of shapes, so even its best member misses.</a:t>
             </a:r>
           </a:p>
           <a:p>
@@ -13937,7 +14237,7 @@
                 </a:solidFill>
                 <a:latin typeface="Arial"/>
               </a:rPr>
-              <a:t>Estimation error: the right aisle, but too little time to try pairs - you walk out with the wrong shoe.</a:t>
+              <a:t>Estimation error: the right aisle, too little time to try pairs - you walk out with the wrong shoe.</a:t>
             </a:r>
           </a:p>
           <a:p>
@@ -13957,7 +14257,7 @@
                 </a:solidFill>
                 <a:latin typeface="Arial"/>
               </a:rPr>
-              <a:t>That is overfitting: a family so flexible that limited data cannot point at its best member - the search lands on a memorizer.</a:t>
+              <a:t>That is overfitting: the family is so flexible that 712 rows cannot point at its best member.</a:t>
             </a:r>
           </a:p>
           <a:p>
@@ -13977,7 +14277,7 @@
                 </a:solidFill>
                 <a:latin typeface="Arial"/>
               </a:rPr>
-              <a:t>Grow flexibility and the two trade places: structural falls, estimation rises - their sum is U-shaped.</a:t>
+              <a:t>How to read it: x = flexibility; y = ERROR, so LOWER is better. Grey falls, blue rises.</a:t>
             </a:r>
           </a:p>
           <a:p>
@@ -13997,7 +14297,7 @@
                 </a:solidFill>
                 <a:latin typeface="Arial"/>
               </a:rPr>
-              <a:t>This is the grammar of the U-curve. In Part 2 a real decision tree draws one, growing one level at a time.</a:t>
+              <a:t>Their dashed sum is a U - the sweet spot is its LOW point. In Part 2 a real tree draws this U.</a:t>
             </a:r>
           </a:p>
         </p:txBody>
@@ -14414,7 +14714,7 @@
                 </a:solidFill>
                 <a:latin typeface="Arial"/>
               </a:rPr>
-              <a:t>Regularization - in plain words: every extra wiggle costs points - flexibility on a budget.</a:t>
+              <a:t>Regularization - in plain words: every extra wiggle costs points. Flexibility on a budget.</a:t>
             </a:r>
           </a:p>
           <a:p>
@@ -14434,7 +14734,7 @@
                 </a:solidFill>
                 <a:latin typeface="Arial"/>
               </a:rPr>
-              <a:t>The training goal becomes: minimize (average loss + λ × complexity); λ (lambda) is the price per wiggle.</a:t>
+              <a:t>How to read it: same 22 dots in all three panels. Only the penalty λ changes; the blue curve is the fit.</a:t>
             </a:r>
           </a:p>
           <a:p>
@@ -14454,7 +14754,7 @@
                 </a:solidFill>
                 <a:latin typeface="Arial"/>
               </a:rPr>
-              <a:t>λ near zero: wiggles are free - memorizing allowed. Huge λ: wiggles unaffordable - the data is ignored.</a:t>
+              <a:t>The new training goal: minimize (average loss + λ × complexity). λ (lambda) = the price per wiggle.</a:t>
             </a:r>
           </a:p>
           <a:p>
@@ -14474,7 +14774,7 @@
                 </a:solidFill>
                 <a:latin typeface="Arial"/>
               </a:rPr>
-              <a:t>The right λ follows the trend and lets the noise go - the middle panel.</a:t>
+              <a:t>λ near zero: wiggles free - memorizing allowed. λ huge: wiggles unaffordable - the data is ignored.</a:t>
             </a:r>
           </a:p>
           <a:p>
@@ -14494,7 +14794,7 @@
                 </a:solidFill>
                 <a:latin typeface="Arial"/>
               </a:rPr>
-              <a:t>Ridge regression is this idea for linear models: a penalty on big weights - a little bias buys away a lot of variance.</a:t>
+              <a:t>The right λ (middle panel) follows the trend and lets the noise go.</a:t>
             </a:r>
           </a:p>
           <a:p>
@@ -14514,7 +14814,27 @@
                 </a:solidFill>
                 <a:latin typeface="Arial"/>
               </a:rPr>
-              <a:t>Foreshadow: Session 4's max_depth and min_samples_leaf knobs ARE this dial. A shallow tree is a short leash.</a:t>
+              <a:t>Ridge regression is this idea for scorecard models: a penalty on big weights.</a:t>
+            </a:r>
+          </a:p>
+          <a:p>
+            <a:pPr algn="l" indent="-228600" marL="228600">
+              <a:spcAft>
+                <a:spcPts val="800"/>
+              </a:spcAft>
+              <a:buClr>
+                <a:srgbClr val="1E5EF3"/>
+              </a:buClr>
+              <a:buChar char="—"/>
+            </a:pPr>
+            <a:r>
+              <a:rPr sz="1450" b="0">
+                <a:solidFill>
+                  <a:srgbClr val="202B38"/>
+                </a:solidFill>
+                <a:latin typeface="Arial"/>
+              </a:rPr>
+              <a:t>Foreshadow: Session 4's tree knobs (like max_depth) ARE this dial. A shallow tree is a short leash.</a:t>
             </a:r>
           </a:p>
         </p:txBody>
@@ -14536,7 +14856,7 @@
         <p:spPr>
           <a:xfrm>
             <a:off x="5120640" y="1874519"/>
-            <a:ext cx="6492240" cy="3313248"/>
+            <a:ext cx="6492240" cy="3724000"/>
           </a:xfrm>
           <a:prstGeom prst="rect">
             <a:avLst/>
@@ -14951,7 +15271,7 @@
                 </a:solidFill>
                 <a:latin typeface="Arial"/>
               </a:rPr>
-              <a:t>Our six contestants sit along that diagonal: the scorecard and the single tree are readable; committees of hundreds of trees are not.</a:t>
+              <a:t>How to read it: each dot = one of today's six contestants. Right = more flexible; up = easier to read.</a:t>
             </a:r>
           </a:p>
           <a:p>
@@ -14971,7 +15291,7 @@
                 </a:solidFill>
                 <a:latin typeface="Arial"/>
               </a:rPr>
-              <a:t>Flexible is not automatically better: flexible families need more data and overfit more easily - the wrong-shoe trap from two slides ago.</a:t>
+              <a:t>Everyone wants the top-right corner - flexible AND readable. No model lives there; you must trade.</a:t>
             </a:r>
           </a:p>
           <a:p>
@@ -14991,7 +15311,27 @@
                 </a:solidFill>
                 <a:latin typeface="Arial"/>
               </a:rPr>
-              <a:t>When a bank must explain a rejected loan, or a hospital a triage call, the explainable point wins - even at some cost in raw accuracy.</a:t>
+              <a:t>Flexible is not automatically better: it needs more data and overfits more easily - the wrong-shoe trap.</a:t>
+            </a:r>
+          </a:p>
+          <a:p>
+            <a:pPr algn="l" indent="-228600" marL="228600">
+              <a:spcAft>
+                <a:spcPts val="800"/>
+              </a:spcAft>
+              <a:buClr>
+                <a:srgbClr val="1E5EF3"/>
+              </a:buClr>
+              <a:buChar char="—"/>
+            </a:pPr>
+            <a:r>
+              <a:rPr sz="1450" b="0">
+                <a:solidFill>
+                  <a:srgbClr val="202B38"/>
+                </a:solidFill>
+                <a:latin typeface="Arial"/>
+              </a:rPr>
+              <a:t>A bank explaining a rejected loan, a hospital a triage call: the explainable point wins, even at some accuracy cost.</a:t>
             </a:r>
           </a:p>
         </p:txBody>
